--- a/Session 02 - Python Fundamentals/Session 02 - Python Fundamentals.pptx
+++ b/Session 02 - Python Fundamentals/Session 02 - Python Fundamentals.pptx
@@ -5,10 +5,10 @@
     <p:sldMasterId id="2147483660" r:id="rId1"/>
   </p:sldMasterIdLst>
   <p:notesMasterIdLst>
-    <p:notesMasterId r:id="rId37"/>
+    <p:notesMasterId r:id="rId38"/>
   </p:notesMasterIdLst>
   <p:handoutMasterIdLst>
-    <p:handoutMasterId r:id="rId38"/>
+    <p:handoutMasterId r:id="rId39"/>
   </p:handoutMasterIdLst>
   <p:sldIdLst>
     <p:sldId id="1220" r:id="rId2"/>
@@ -38,14 +38,15 @@
     <p:sldId id="1299" r:id="rId26"/>
     <p:sldId id="1291" r:id="rId27"/>
     <p:sldId id="1284" r:id="rId28"/>
-    <p:sldId id="1281" r:id="rId29"/>
-    <p:sldId id="412" r:id="rId30"/>
-    <p:sldId id="1348" r:id="rId31"/>
-    <p:sldId id="983" r:id="rId32"/>
-    <p:sldId id="1362" r:id="rId33"/>
-    <p:sldId id="415" r:id="rId34"/>
-    <p:sldId id="416" r:id="rId35"/>
-    <p:sldId id="995" r:id="rId36"/>
+    <p:sldId id="1364" r:id="rId29"/>
+    <p:sldId id="1281" r:id="rId30"/>
+    <p:sldId id="412" r:id="rId31"/>
+    <p:sldId id="1348" r:id="rId32"/>
+    <p:sldId id="983" r:id="rId33"/>
+    <p:sldId id="1362" r:id="rId34"/>
+    <p:sldId id="415" r:id="rId35"/>
+    <p:sldId id="416" r:id="rId36"/>
+    <p:sldId id="995" r:id="rId37"/>
   </p:sldIdLst>
   <p:sldSz cx="9144000" cy="6858000" type="screen4x3"/>
   <p:notesSz cx="7077075" cy="9363075"/>
@@ -293,7 +294,7 @@
           <a:p>
             <a:fld id="{A241AC98-512A-4A35-865E-757B6C1F07A2}" type="datetimeFigureOut">
               <a:rPr lang="en-US" smtClean="0"/>
-              <a:t>11/14/2025</a:t>
+              <a:t>11/18/2025</a:t>
             </a:fld>
             <a:endParaRPr lang="en-US"/>
           </a:p>
@@ -459,7 +460,7 @@
           <a:p>
             <a:fld id="{3854CEE7-15DE-41D9-8CA2-D1E137B1D850}" type="datetimeFigureOut">
               <a:rPr lang="en-US" smtClean="0"/>
-              <a:t>11/14/2025</a:t>
+              <a:t>11/18/2025</a:t>
             </a:fld>
             <a:endParaRPr lang="en-US"/>
           </a:p>
@@ -1026,7 +1027,7 @@
           <a:p>
             <a:fld id="{5555EB2C-244D-4423-AD97-018ED6478B87}" type="datetime1">
               <a:rPr lang="en-US" smtClean="0"/>
-              <a:t>11/14/2025</a:t>
+              <a:t>11/18/2025</a:t>
             </a:fld>
             <a:endParaRPr lang="en-US"/>
           </a:p>
@@ -1205,7 +1206,7 @@
           <a:p>
             <a:fld id="{A2B41D1F-7576-4C60-B4EB-5115BC56CF40}" type="datetime1">
               <a:rPr lang="en-US" smtClean="0"/>
-              <a:t>11/14/2025</a:t>
+              <a:t>11/18/2025</a:t>
             </a:fld>
             <a:endParaRPr lang="en-US"/>
           </a:p>
@@ -1397,7 +1398,7 @@
           <a:p>
             <a:fld id="{E79D1398-4D56-44F9-BA35-34ACF3159A64}" type="datetime1">
               <a:rPr lang="en-US" smtClean="0"/>
-              <a:t>11/14/2025</a:t>
+              <a:t>11/18/2025</a:t>
             </a:fld>
             <a:endParaRPr lang="en-US"/>
           </a:p>
@@ -1579,7 +1580,7 @@
           <a:p>
             <a:fld id="{A3CF632E-48CB-4EEB-A6B6-DEC7AD7CC976}" type="datetime1">
               <a:rPr lang="en-US" smtClean="0"/>
-              <a:t>11/14/2025</a:t>
+              <a:t>11/18/2025</a:t>
             </a:fld>
             <a:endParaRPr lang="en-US"/>
           </a:p>
@@ -1832,7 +1833,7 @@
           <a:p>
             <a:fld id="{BAEEE52C-3A57-458E-95F6-96B2FA9D1DD4}" type="datetime1">
               <a:rPr lang="en-US" smtClean="0"/>
-              <a:t>11/14/2025</a:t>
+              <a:t>11/18/2025</a:t>
             </a:fld>
             <a:endParaRPr lang="en-US"/>
           </a:p>
@@ -2076,7 +2077,7 @@
           <a:p>
             <a:fld id="{766FC747-A48A-4FF2-8EE4-3E95ECD1C2A8}" type="datetime1">
               <a:rPr lang="en-US" smtClean="0"/>
-              <a:t>11/14/2025</a:t>
+              <a:t>11/18/2025</a:t>
             </a:fld>
             <a:endParaRPr lang="en-US"/>
           </a:p>
@@ -2455,7 +2456,7 @@
           <a:p>
             <a:fld id="{C9BF5758-AB7F-463D-B638-E1729B95E126}" type="datetime1">
               <a:rPr lang="en-US" smtClean="0"/>
-              <a:t>11/14/2025</a:t>
+              <a:t>11/18/2025</a:t>
             </a:fld>
             <a:endParaRPr lang="en-US"/>
           </a:p>
@@ -2585,7 +2586,7 @@
           <a:p>
             <a:fld id="{F3718C77-7DD0-4738-BF52-D0EC9F78A76E}" type="datetime1">
               <a:rPr lang="en-US" smtClean="0"/>
-              <a:t>11/14/2025</a:t>
+              <a:t>11/18/2025</a:t>
             </a:fld>
             <a:endParaRPr lang="en-US"/>
           </a:p>
@@ -2692,7 +2693,7 @@
           <a:p>
             <a:fld id="{948970CF-13D9-4E1D-A74F-2CFE4953FCDB}" type="datetime1">
               <a:rPr lang="en-US" smtClean="0"/>
-              <a:t>11/14/2025</a:t>
+              <a:t>11/18/2025</a:t>
             </a:fld>
             <a:endParaRPr lang="en-US"/>
           </a:p>
@@ -2981,7 +2982,7 @@
           <a:p>
             <a:fld id="{F68C49B9-4E1C-4967-B9CF-0BF9FECBE837}" type="datetime1">
               <a:rPr lang="en-US" smtClean="0"/>
-              <a:t>11/14/2025</a:t>
+              <a:t>11/18/2025</a:t>
             </a:fld>
             <a:endParaRPr lang="en-US"/>
           </a:p>
@@ -3249,7 +3250,7 @@
           <a:p>
             <a:fld id="{7E338CBB-1F06-4333-9BBF-66628B15E581}" type="datetime1">
               <a:rPr lang="en-US" smtClean="0"/>
-              <a:t>11/14/2025</a:t>
+              <a:t>11/18/2025</a:t>
             </a:fld>
             <a:endParaRPr lang="en-US"/>
           </a:p>
@@ -3474,7 +3475,7 @@
           <a:p>
             <a:fld id="{705EC883-F03C-4CA3-AF62-BEF30EEA4F65}" type="datetime1">
               <a:rPr lang="en-US" smtClean="0"/>
-              <a:t>11/14/2025</a:t>
+              <a:t>11/18/2025</a:t>
             </a:fld>
             <a:endParaRPr lang="en-US"/>
           </a:p>
@@ -7110,6 +7111,46 @@
           </p:txBody>
         </p:sp>
       </p:grpSp>
+      <p:sp>
+        <p:nvSpPr>
+          <p:cNvPr id="4" name="TextBox 3">
+            <a:extLst>
+              <a:ext uri="{FF2B5EF4-FFF2-40B4-BE49-F238E27FC236}">
+                <a16:creationId xmlns:a16="http://schemas.microsoft.com/office/drawing/2014/main" id="{1664F2FC-3957-893F-7323-6B77A3DABBA3}"/>
+              </a:ext>
+            </a:extLst>
+          </p:cNvPr>
+          <p:cNvSpPr txBox="1"/>
+          <p:nvPr/>
+        </p:nvSpPr>
+        <p:spPr>
+          <a:xfrm>
+            <a:off x="7210925" y="365126"/>
+            <a:ext cx="1548064" cy="646331"/>
+          </a:xfrm>
+          <a:prstGeom prst="rect">
+            <a:avLst/>
+          </a:prstGeom>
+          <a:noFill/>
+        </p:spPr>
+        <p:txBody>
+          <a:bodyPr wrap="square" rtlCol="0">
+            <a:spAutoFit/>
+          </a:bodyPr>
+          <a:lstStyle/>
+          <a:p>
+            <a:pPr algn="ctr"/>
+            <a:r>
+              <a:rPr lang="en-US" b="1" dirty="0">
+                <a:solidFill>
+                  <a:srgbClr val="7030A0"/>
+                </a:solidFill>
+              </a:rPr>
+              <a:t>You must type in this code</a:t>
+            </a:r>
+          </a:p>
+        </p:txBody>
+      </p:sp>
     </p:spTree>
     <p:extLst>
       <p:ext uri="{BB962C8B-B14F-4D97-AF65-F5344CB8AC3E}">
@@ -7144,7 +7185,7 @@
                             </p:stCondLst>
                             <p:childTnLst>
                               <p:par>
-                                <p:cTn id="5" presetID="22" presetClass="entr" presetSubtype="2" fill="hold" nodeType="afterEffect">
+                                <p:cTn id="5" presetID="2" presetClass="entr" presetSubtype="2" fill="hold" grpId="0" nodeType="afterEffect">
                                   <p:stCondLst>
                                     <p:cond delay="0"/>
                                   </p:stCondLst>
@@ -7157,7 +7198,7 @@
                                           </p:stCondLst>
                                         </p:cTn>
                                         <p:tgtEl>
-                                          <p:spTgt spid="8"/>
+                                          <p:spTgt spid="4"/>
                                         </p:tgtEl>
                                         <p:attrNameLst>
                                           <p:attrName>style.visibility</p:attrName>
@@ -7167,37 +7208,66 @@
                                         <p:strVal val="visible"/>
                                       </p:to>
                                     </p:set>
-                                    <p:animEffect transition="in" filter="wipe(right)">
-                                      <p:cBhvr>
-                                        <p:cTn id="7" dur="500"/>
-                                        <p:tgtEl>
-                                          <p:spTgt spid="8"/>
-                                        </p:tgtEl>
-                                      </p:cBhvr>
-                                    </p:animEffect>
+                                    <p:anim calcmode="lin" valueType="num">
+                                      <p:cBhvr additive="base">
+                                        <p:cTn id="7" dur="500" fill="hold"/>
+                                        <p:tgtEl>
+                                          <p:spTgt spid="4"/>
+                                        </p:tgtEl>
+                                        <p:attrNameLst>
+                                          <p:attrName>ppt_x</p:attrName>
+                                        </p:attrNameLst>
+                                      </p:cBhvr>
+                                      <p:tavLst>
+                                        <p:tav tm="0">
+                                          <p:val>
+                                            <p:strVal val="1+#ppt_w/2"/>
+                                          </p:val>
+                                        </p:tav>
+                                        <p:tav tm="100000">
+                                          <p:val>
+                                            <p:strVal val="#ppt_x"/>
+                                          </p:val>
+                                        </p:tav>
+                                      </p:tavLst>
+                                    </p:anim>
+                                    <p:anim calcmode="lin" valueType="num">
+                                      <p:cBhvr additive="base">
+                                        <p:cTn id="8" dur="500" fill="hold"/>
+                                        <p:tgtEl>
+                                          <p:spTgt spid="4"/>
+                                        </p:tgtEl>
+                                        <p:attrNameLst>
+                                          <p:attrName>ppt_y</p:attrName>
+                                        </p:attrNameLst>
+                                      </p:cBhvr>
+                                      <p:tavLst>
+                                        <p:tav tm="0">
+                                          <p:val>
+                                            <p:strVal val="#ppt_y"/>
+                                          </p:val>
+                                        </p:tav>
+                                        <p:tav tm="100000">
+                                          <p:val>
+                                            <p:strVal val="#ppt_y"/>
+                                          </p:val>
+                                        </p:tav>
+                                      </p:tavLst>
+                                    </p:anim>
                                   </p:childTnLst>
                                 </p:cTn>
                               </p:par>
                             </p:childTnLst>
                           </p:cTn>
                         </p:par>
-                      </p:childTnLst>
-                    </p:cTn>
-                  </p:par>
-                  <p:par>
-                    <p:cTn id="8" fill="hold">
-                      <p:stCondLst>
-                        <p:cond delay="indefinite"/>
-                      </p:stCondLst>
-                      <p:childTnLst>
                         <p:par>
                           <p:cTn id="9" fill="hold">
                             <p:stCondLst>
-                              <p:cond delay="0"/>
+                              <p:cond delay="500"/>
                             </p:stCondLst>
                             <p:childTnLst>
                               <p:par>
-                                <p:cTn id="10" presetID="22" presetClass="entr" presetSubtype="2" fill="hold" nodeType="clickEffect">
+                                <p:cTn id="10" presetID="22" presetClass="entr" presetSubtype="2" fill="hold" nodeType="afterEffect">
                                   <p:stCondLst>
                                     <p:cond delay="0"/>
                                   </p:stCondLst>
@@ -7210,7 +7280,7 @@
                                           </p:stCondLst>
                                         </p:cTn>
                                         <p:tgtEl>
-                                          <p:spTgt spid="17"/>
+                                          <p:spTgt spid="8"/>
                                         </p:tgtEl>
                                         <p:attrNameLst>
                                           <p:attrName>style.visibility</p:attrName>
@@ -7224,7 +7294,7 @@
                                       <p:cBhvr>
                                         <p:cTn id="12" dur="500"/>
                                         <p:tgtEl>
-                                          <p:spTgt spid="17"/>
+                                          <p:spTgt spid="8"/>
                                         </p:tgtEl>
                                       </p:cBhvr>
                                     </p:animEffect>
@@ -7250,7 +7320,7 @@
                             </p:stCondLst>
                             <p:childTnLst>
                               <p:par>
-                                <p:cTn id="15" presetID="22" presetClass="entr" presetSubtype="1" fill="hold" nodeType="clickEffect">
+                                <p:cTn id="15" presetID="22" presetClass="entr" presetSubtype="2" fill="hold" nodeType="clickEffect">
                                   <p:stCondLst>
                                     <p:cond delay="0"/>
                                   </p:stCondLst>
@@ -7263,6 +7333,59 @@
                                           </p:stCondLst>
                                         </p:cTn>
                                         <p:tgtEl>
+                                          <p:spTgt spid="17"/>
+                                        </p:tgtEl>
+                                        <p:attrNameLst>
+                                          <p:attrName>style.visibility</p:attrName>
+                                        </p:attrNameLst>
+                                      </p:cBhvr>
+                                      <p:to>
+                                        <p:strVal val="visible"/>
+                                      </p:to>
+                                    </p:set>
+                                    <p:animEffect transition="in" filter="wipe(right)">
+                                      <p:cBhvr>
+                                        <p:cTn id="17" dur="500"/>
+                                        <p:tgtEl>
+                                          <p:spTgt spid="17"/>
+                                        </p:tgtEl>
+                                      </p:cBhvr>
+                                    </p:animEffect>
+                                  </p:childTnLst>
+                                </p:cTn>
+                              </p:par>
+                            </p:childTnLst>
+                          </p:cTn>
+                        </p:par>
+                      </p:childTnLst>
+                    </p:cTn>
+                  </p:par>
+                  <p:par>
+                    <p:cTn id="18" fill="hold">
+                      <p:stCondLst>
+                        <p:cond delay="indefinite"/>
+                      </p:stCondLst>
+                      <p:childTnLst>
+                        <p:par>
+                          <p:cTn id="19" fill="hold">
+                            <p:stCondLst>
+                              <p:cond delay="0"/>
+                            </p:stCondLst>
+                            <p:childTnLst>
+                              <p:par>
+                                <p:cTn id="20" presetID="22" presetClass="entr" presetSubtype="1" fill="hold" nodeType="clickEffect">
+                                  <p:stCondLst>
+                                    <p:cond delay="0"/>
+                                  </p:stCondLst>
+                                  <p:childTnLst>
+                                    <p:set>
+                                      <p:cBhvr>
+                                        <p:cTn id="21" dur="1" fill="hold">
+                                          <p:stCondLst>
+                                            <p:cond delay="0"/>
+                                          </p:stCondLst>
+                                        </p:cTn>
+                                        <p:tgtEl>
                                           <p:spTgt spid="9"/>
                                         </p:tgtEl>
                                         <p:attrNameLst>
@@ -7275,7 +7398,7 @@
                                     </p:set>
                                     <p:animEffect transition="in" filter="wipe(up)">
                                       <p:cBhvr>
-                                        <p:cTn id="17" dur="500"/>
+                                        <p:cTn id="22" dur="500"/>
                                         <p:tgtEl>
                                           <p:spTgt spid="9"/>
                                         </p:tgtEl>
@@ -7288,20 +7411,20 @@
                           </p:cTn>
                         </p:par>
                         <p:par>
-                          <p:cTn id="18" fill="hold">
+                          <p:cTn id="23" fill="hold">
                             <p:stCondLst>
                               <p:cond delay="500"/>
                             </p:stCondLst>
                             <p:childTnLst>
                               <p:par>
-                                <p:cTn id="19" presetID="22" presetClass="entr" presetSubtype="2" fill="hold" nodeType="afterEffect">
+                                <p:cTn id="24" presetID="22" presetClass="entr" presetSubtype="2" fill="hold" nodeType="afterEffect">
                                   <p:stCondLst>
                                     <p:cond delay="0"/>
                                   </p:stCondLst>
                                   <p:childTnLst>
                                     <p:set>
                                       <p:cBhvr>
-                                        <p:cTn id="20" dur="1" fill="hold">
+                                        <p:cTn id="25" dur="1" fill="hold">
                                           <p:stCondLst>
                                             <p:cond delay="0"/>
                                           </p:stCondLst>
@@ -7319,7 +7442,7 @@
                                     </p:set>
                                     <p:animEffect transition="in" filter="wipe(right)">
                                       <p:cBhvr>
-                                        <p:cTn id="21" dur="500"/>
+                                        <p:cTn id="26" dur="500"/>
                                         <p:tgtEl>
                                           <p:spTgt spid="20"/>
                                         </p:tgtEl>
@@ -7355,6 +7478,9 @@
         </p:cTn>
       </p:par>
     </p:tnLst>
+    <p:bldLst>
+      <p:bldP spid="4" grpId="0"/>
+    </p:bldLst>
   </p:timing>
 </p:sld>
 </file>
@@ -7966,6 +8092,46 @@
           </a:p>
         </p:txBody>
       </p:sp>
+      <p:sp>
+        <p:nvSpPr>
+          <p:cNvPr id="4" name="TextBox 3">
+            <a:extLst>
+              <a:ext uri="{FF2B5EF4-FFF2-40B4-BE49-F238E27FC236}">
+                <a16:creationId xmlns:a16="http://schemas.microsoft.com/office/drawing/2014/main" id="{349FCD76-E178-DE10-E7B9-4AFE75BC4D14}"/>
+              </a:ext>
+            </a:extLst>
+          </p:cNvPr>
+          <p:cNvSpPr txBox="1"/>
+          <p:nvPr/>
+        </p:nvSpPr>
+        <p:spPr>
+          <a:xfrm>
+            <a:off x="7210925" y="365126"/>
+            <a:ext cx="1548064" cy="646331"/>
+          </a:xfrm>
+          <a:prstGeom prst="rect">
+            <a:avLst/>
+          </a:prstGeom>
+          <a:noFill/>
+        </p:spPr>
+        <p:txBody>
+          <a:bodyPr wrap="square" rtlCol="0">
+            <a:spAutoFit/>
+          </a:bodyPr>
+          <a:lstStyle/>
+          <a:p>
+            <a:pPr algn="ctr"/>
+            <a:r>
+              <a:rPr lang="en-US" b="1" dirty="0">
+                <a:solidFill>
+                  <a:srgbClr val="7030A0"/>
+                </a:solidFill>
+              </a:rPr>
+              <a:t>You must type in this code</a:t>
+            </a:r>
+          </a:p>
+        </p:txBody>
+      </p:sp>
     </p:spTree>
     <p:extLst>
       <p:ext uri="{BB962C8B-B14F-4D97-AF65-F5344CB8AC3E}">
@@ -8000,7 +8166,7 @@
                             </p:stCondLst>
                             <p:childTnLst>
                               <p:par>
-                                <p:cTn id="5" presetID="22" presetClass="entr" presetSubtype="2" fill="hold" nodeType="afterEffect">
+                                <p:cTn id="5" presetID="2" presetClass="entr" presetSubtype="2" fill="hold" grpId="0" nodeType="afterEffect">
                                   <p:stCondLst>
                                     <p:cond delay="0"/>
                                   </p:stCondLst>
@@ -8013,7 +8179,7 @@
                                           </p:stCondLst>
                                         </p:cTn>
                                         <p:tgtEl>
-                                          <p:spTgt spid="8"/>
+                                          <p:spTgt spid="4"/>
                                         </p:tgtEl>
                                         <p:attrNameLst>
                                           <p:attrName>style.visibility</p:attrName>
@@ -8023,37 +8189,66 @@
                                         <p:strVal val="visible"/>
                                       </p:to>
                                     </p:set>
-                                    <p:animEffect transition="in" filter="wipe(right)">
-                                      <p:cBhvr>
-                                        <p:cTn id="7" dur="500"/>
-                                        <p:tgtEl>
-                                          <p:spTgt spid="8"/>
-                                        </p:tgtEl>
-                                      </p:cBhvr>
-                                    </p:animEffect>
+                                    <p:anim calcmode="lin" valueType="num">
+                                      <p:cBhvr additive="base">
+                                        <p:cTn id="7" dur="500" fill="hold"/>
+                                        <p:tgtEl>
+                                          <p:spTgt spid="4"/>
+                                        </p:tgtEl>
+                                        <p:attrNameLst>
+                                          <p:attrName>ppt_x</p:attrName>
+                                        </p:attrNameLst>
+                                      </p:cBhvr>
+                                      <p:tavLst>
+                                        <p:tav tm="0">
+                                          <p:val>
+                                            <p:strVal val="1+#ppt_w/2"/>
+                                          </p:val>
+                                        </p:tav>
+                                        <p:tav tm="100000">
+                                          <p:val>
+                                            <p:strVal val="#ppt_x"/>
+                                          </p:val>
+                                        </p:tav>
+                                      </p:tavLst>
+                                    </p:anim>
+                                    <p:anim calcmode="lin" valueType="num">
+                                      <p:cBhvr additive="base">
+                                        <p:cTn id="8" dur="500" fill="hold"/>
+                                        <p:tgtEl>
+                                          <p:spTgt spid="4"/>
+                                        </p:tgtEl>
+                                        <p:attrNameLst>
+                                          <p:attrName>ppt_y</p:attrName>
+                                        </p:attrNameLst>
+                                      </p:cBhvr>
+                                      <p:tavLst>
+                                        <p:tav tm="0">
+                                          <p:val>
+                                            <p:strVal val="#ppt_y"/>
+                                          </p:val>
+                                        </p:tav>
+                                        <p:tav tm="100000">
+                                          <p:val>
+                                            <p:strVal val="#ppt_y"/>
+                                          </p:val>
+                                        </p:tav>
+                                      </p:tavLst>
+                                    </p:anim>
                                   </p:childTnLst>
                                 </p:cTn>
                               </p:par>
                             </p:childTnLst>
                           </p:cTn>
                         </p:par>
-                      </p:childTnLst>
-                    </p:cTn>
-                  </p:par>
-                  <p:par>
-                    <p:cTn id="8" fill="hold">
-                      <p:stCondLst>
-                        <p:cond delay="indefinite"/>
-                      </p:stCondLst>
-                      <p:childTnLst>
                         <p:par>
                           <p:cTn id="9" fill="hold">
                             <p:stCondLst>
-                              <p:cond delay="0"/>
+                              <p:cond delay="500"/>
                             </p:stCondLst>
                             <p:childTnLst>
                               <p:par>
-                                <p:cTn id="10" presetID="22" presetClass="entr" presetSubtype="2" fill="hold" nodeType="clickEffect">
+                                <p:cTn id="10" presetID="22" presetClass="entr" presetSubtype="2" fill="hold" nodeType="afterEffect">
                                   <p:stCondLst>
                                     <p:cond delay="0"/>
                                   </p:stCondLst>
@@ -8066,7 +8261,7 @@
                                           </p:stCondLst>
                                         </p:cTn>
                                         <p:tgtEl>
-                                          <p:spTgt spid="17"/>
+                                          <p:spTgt spid="8"/>
                                         </p:tgtEl>
                                         <p:attrNameLst>
                                           <p:attrName>style.visibility</p:attrName>
@@ -8080,7 +8275,7 @@
                                       <p:cBhvr>
                                         <p:cTn id="12" dur="500"/>
                                         <p:tgtEl>
-                                          <p:spTgt spid="17"/>
+                                          <p:spTgt spid="8"/>
                                         </p:tgtEl>
                                       </p:cBhvr>
                                     </p:animEffect>
@@ -8106,7 +8301,7 @@
                             </p:stCondLst>
                             <p:childTnLst>
                               <p:par>
-                                <p:cTn id="15" presetID="22" presetClass="entr" presetSubtype="1" fill="hold" nodeType="clickEffect">
+                                <p:cTn id="15" presetID="22" presetClass="entr" presetSubtype="2" fill="hold" nodeType="clickEffect">
                                   <p:stCondLst>
                                     <p:cond delay="0"/>
                                   </p:stCondLst>
@@ -8119,6 +8314,59 @@
                                           </p:stCondLst>
                                         </p:cTn>
                                         <p:tgtEl>
+                                          <p:spTgt spid="17"/>
+                                        </p:tgtEl>
+                                        <p:attrNameLst>
+                                          <p:attrName>style.visibility</p:attrName>
+                                        </p:attrNameLst>
+                                      </p:cBhvr>
+                                      <p:to>
+                                        <p:strVal val="visible"/>
+                                      </p:to>
+                                    </p:set>
+                                    <p:animEffect transition="in" filter="wipe(right)">
+                                      <p:cBhvr>
+                                        <p:cTn id="17" dur="500"/>
+                                        <p:tgtEl>
+                                          <p:spTgt spid="17"/>
+                                        </p:tgtEl>
+                                      </p:cBhvr>
+                                    </p:animEffect>
+                                  </p:childTnLst>
+                                </p:cTn>
+                              </p:par>
+                            </p:childTnLst>
+                          </p:cTn>
+                        </p:par>
+                      </p:childTnLst>
+                    </p:cTn>
+                  </p:par>
+                  <p:par>
+                    <p:cTn id="18" fill="hold">
+                      <p:stCondLst>
+                        <p:cond delay="indefinite"/>
+                      </p:stCondLst>
+                      <p:childTnLst>
+                        <p:par>
+                          <p:cTn id="19" fill="hold">
+                            <p:stCondLst>
+                              <p:cond delay="0"/>
+                            </p:stCondLst>
+                            <p:childTnLst>
+                              <p:par>
+                                <p:cTn id="20" presetID="22" presetClass="entr" presetSubtype="1" fill="hold" nodeType="clickEffect">
+                                  <p:stCondLst>
+                                    <p:cond delay="0"/>
+                                  </p:stCondLst>
+                                  <p:childTnLst>
+                                    <p:set>
+                                      <p:cBhvr>
+                                        <p:cTn id="21" dur="1" fill="hold">
+                                          <p:stCondLst>
+                                            <p:cond delay="0"/>
+                                          </p:stCondLst>
+                                        </p:cTn>
+                                        <p:tgtEl>
                                           <p:spTgt spid="11"/>
                                         </p:tgtEl>
                                         <p:attrNameLst>
@@ -8131,7 +8379,7 @@
                                     </p:set>
                                     <p:animEffect transition="in" filter="wipe(up)">
                                       <p:cBhvr>
-                                        <p:cTn id="17" dur="500"/>
+                                        <p:cTn id="22" dur="500"/>
                                         <p:tgtEl>
                                           <p:spTgt spid="11"/>
                                         </p:tgtEl>
@@ -8144,20 +8392,20 @@
                           </p:cTn>
                         </p:par>
                         <p:par>
-                          <p:cTn id="18" fill="hold">
+                          <p:cTn id="23" fill="hold">
                             <p:stCondLst>
                               <p:cond delay="500"/>
                             </p:stCondLst>
                             <p:childTnLst>
                               <p:par>
-                                <p:cTn id="19" presetID="22" presetClass="entr" presetSubtype="2" fill="hold" nodeType="afterEffect">
+                                <p:cTn id="24" presetID="22" presetClass="entr" presetSubtype="2" fill="hold" nodeType="afterEffect">
                                   <p:stCondLst>
                                     <p:cond delay="0"/>
                                   </p:stCondLst>
                                   <p:childTnLst>
                                     <p:set>
                                       <p:cBhvr>
-                                        <p:cTn id="20" dur="1" fill="hold">
+                                        <p:cTn id="25" dur="1" fill="hold">
                                           <p:stCondLst>
                                             <p:cond delay="0"/>
                                           </p:stCondLst>
@@ -8175,7 +8423,7 @@
                                     </p:set>
                                     <p:animEffect transition="in" filter="wipe(right)">
                                       <p:cBhvr>
-                                        <p:cTn id="21" dur="500"/>
+                                        <p:cTn id="26" dur="500"/>
                                         <p:tgtEl>
                                           <p:spTgt spid="20"/>
                                         </p:tgtEl>
@@ -8188,20 +8436,20 @@
                           </p:cTn>
                         </p:par>
                         <p:par>
-                          <p:cTn id="22" fill="hold">
+                          <p:cTn id="27" fill="hold">
                             <p:stCondLst>
                               <p:cond delay="1000"/>
                             </p:stCondLst>
                             <p:childTnLst>
                               <p:par>
-                                <p:cTn id="23" presetID="22" presetClass="entr" presetSubtype="1" fill="hold" grpId="0" nodeType="afterEffect">
+                                <p:cTn id="28" presetID="22" presetClass="entr" presetSubtype="1" fill="hold" grpId="0" nodeType="afterEffect">
                                   <p:stCondLst>
                                     <p:cond delay="0"/>
                                   </p:stCondLst>
                                   <p:childTnLst>
                                     <p:set>
                                       <p:cBhvr>
-                                        <p:cTn id="24" dur="1" fill="hold">
+                                        <p:cTn id="29" dur="1" fill="hold">
                                           <p:stCondLst>
                                             <p:cond delay="0"/>
                                           </p:stCondLst>
@@ -8219,7 +8467,7 @@
                                     </p:set>
                                     <p:animEffect transition="in" filter="wipe(up)">
                                       <p:cBhvr>
-                                        <p:cTn id="25" dur="500"/>
+                                        <p:cTn id="30" dur="500"/>
                                         <p:tgtEl>
                                           <p:spTgt spid="6"/>
                                         </p:tgtEl>
@@ -8232,20 +8480,20 @@
                           </p:cTn>
                         </p:par>
                         <p:par>
-                          <p:cTn id="26" fill="hold">
+                          <p:cTn id="31" fill="hold">
                             <p:stCondLst>
                               <p:cond delay="1500"/>
                             </p:stCondLst>
                             <p:childTnLst>
                               <p:par>
-                                <p:cTn id="27" presetID="22" presetClass="entr" presetSubtype="8" fill="hold" grpId="0" nodeType="afterEffect">
+                                <p:cTn id="32" presetID="22" presetClass="entr" presetSubtype="8" fill="hold" grpId="0" nodeType="afterEffect">
                                   <p:stCondLst>
                                     <p:cond delay="0"/>
                                   </p:stCondLst>
                                   <p:childTnLst>
                                     <p:set>
                                       <p:cBhvr>
-                                        <p:cTn id="28" dur="1" fill="hold">
+                                        <p:cTn id="33" dur="1" fill="hold">
                                           <p:stCondLst>
                                             <p:cond delay="0"/>
                                           </p:stCondLst>
@@ -8263,7 +8511,7 @@
                                     </p:set>
                                     <p:animEffect transition="in" filter="wipe(left)">
                                       <p:cBhvr>
-                                        <p:cTn id="29" dur="500"/>
+                                        <p:cTn id="34" dur="500"/>
                                         <p:tgtEl>
                                           <p:spTgt spid="9"/>
                                         </p:tgtEl>
@@ -8302,6 +8550,7 @@
     <p:bldLst>
       <p:bldP spid="6" grpId="0"/>
       <p:bldP spid="9" grpId="0"/>
+      <p:bldP spid="4" grpId="0"/>
     </p:bldLst>
   </p:timing>
 </p:sld>
@@ -9047,8 +9296,8 @@
           </p:style>
         </p:cxnSp>
       </p:grpSp>
-      <mc:AlternateContent xmlns:mc="http://schemas.openxmlformats.org/markup-compatibility/2006">
-        <mc:Choice xmlns:a14="http://schemas.microsoft.com/office/drawing/2010/main" Requires="a14">
+      <mc:AlternateContent xmlns:mc="http://schemas.openxmlformats.org/markup-compatibility/2006" xmlns:a14="http://schemas.microsoft.com/office/drawing/2010/main">
+        <mc:Choice Requires="a14">
           <p:sp>
             <p:nvSpPr>
               <p:cNvPr id="25" name="TextBox 24">
@@ -9077,6 +9326,7 @@
               </a:bodyPr>
               <a:lstStyle/>
               <a:p>
+                <a:pPr/>
                 <a14:m>
                   <m:oMathPara xmlns:m="http://schemas.openxmlformats.org/officeDocument/2006/math">
                     <m:oMathParaPr>
@@ -9103,7 +9353,7 @@
             </p:txBody>
           </p:sp>
         </mc:Choice>
-        <mc:Fallback>
+        <mc:Fallback xmlns="">
           <p:sp>
             <p:nvSpPr>
               <p:cNvPr id="25" name="TextBox 24">
@@ -9148,8 +9398,8 @@
           </p:sp>
         </mc:Fallback>
       </mc:AlternateContent>
-      <mc:AlternateContent xmlns:mc="http://schemas.openxmlformats.org/markup-compatibility/2006">
-        <mc:Choice xmlns:a14="http://schemas.microsoft.com/office/drawing/2010/main" Requires="a14">
+      <mc:AlternateContent xmlns:mc="http://schemas.openxmlformats.org/markup-compatibility/2006" xmlns:a14="http://schemas.microsoft.com/office/drawing/2010/main">
+        <mc:Choice Requires="a14">
           <p:sp>
             <p:nvSpPr>
               <p:cNvPr id="26" name="TextBox 25">
@@ -9178,6 +9428,7 @@
               </a:bodyPr>
               <a:lstStyle/>
               <a:p>
+                <a:pPr/>
                 <a14:m>
                   <m:oMathPara xmlns:m="http://schemas.openxmlformats.org/officeDocument/2006/math">
                     <m:oMathParaPr>
@@ -9204,7 +9455,7 @@
             </p:txBody>
           </p:sp>
         </mc:Choice>
-        <mc:Fallback>
+        <mc:Fallback xmlns="">
           <p:sp>
             <p:nvSpPr>
               <p:cNvPr id="26" name="TextBox 25">
@@ -9249,6 +9500,46 @@
           </p:sp>
         </mc:Fallback>
       </mc:AlternateContent>
+      <p:sp>
+        <p:nvSpPr>
+          <p:cNvPr id="4" name="TextBox 3">
+            <a:extLst>
+              <a:ext uri="{FF2B5EF4-FFF2-40B4-BE49-F238E27FC236}">
+                <a16:creationId xmlns:a16="http://schemas.microsoft.com/office/drawing/2014/main" id="{C730D474-3091-19D5-B83C-9095E69C583D}"/>
+              </a:ext>
+            </a:extLst>
+          </p:cNvPr>
+          <p:cNvSpPr txBox="1"/>
+          <p:nvPr/>
+        </p:nvSpPr>
+        <p:spPr>
+          <a:xfrm>
+            <a:off x="7210925" y="365126"/>
+            <a:ext cx="1548064" cy="646331"/>
+          </a:xfrm>
+          <a:prstGeom prst="rect">
+            <a:avLst/>
+          </a:prstGeom>
+          <a:noFill/>
+        </p:spPr>
+        <p:txBody>
+          <a:bodyPr wrap="square" rtlCol="0">
+            <a:spAutoFit/>
+          </a:bodyPr>
+          <a:lstStyle/>
+          <a:p>
+            <a:pPr algn="ctr"/>
+            <a:r>
+              <a:rPr lang="en-US" b="1" dirty="0">
+                <a:solidFill>
+                  <a:srgbClr val="7030A0"/>
+                </a:solidFill>
+              </a:rPr>
+              <a:t>You must type in this code</a:t>
+            </a:r>
+          </a:p>
+        </p:txBody>
+      </p:sp>
     </p:spTree>
     <p:extLst>
       <p:ext uri="{BB962C8B-B14F-4D97-AF65-F5344CB8AC3E}">
@@ -9283,7 +9574,7 @@
                             </p:stCondLst>
                             <p:childTnLst>
                               <p:par>
-                                <p:cTn id="5" presetID="22" presetClass="entr" presetSubtype="2" fill="hold" nodeType="afterEffect">
+                                <p:cTn id="5" presetID="2" presetClass="entr" presetSubtype="2" fill="hold" grpId="0" nodeType="afterEffect">
                                   <p:stCondLst>
                                     <p:cond delay="0"/>
                                   </p:stCondLst>
@@ -9296,6 +9587,88 @@
                                           </p:stCondLst>
                                         </p:cTn>
                                         <p:tgtEl>
+                                          <p:spTgt spid="4"/>
+                                        </p:tgtEl>
+                                        <p:attrNameLst>
+                                          <p:attrName>style.visibility</p:attrName>
+                                        </p:attrNameLst>
+                                      </p:cBhvr>
+                                      <p:to>
+                                        <p:strVal val="visible"/>
+                                      </p:to>
+                                    </p:set>
+                                    <p:anim calcmode="lin" valueType="num">
+                                      <p:cBhvr additive="base">
+                                        <p:cTn id="7" dur="500" fill="hold"/>
+                                        <p:tgtEl>
+                                          <p:spTgt spid="4"/>
+                                        </p:tgtEl>
+                                        <p:attrNameLst>
+                                          <p:attrName>ppt_x</p:attrName>
+                                        </p:attrNameLst>
+                                      </p:cBhvr>
+                                      <p:tavLst>
+                                        <p:tav tm="0">
+                                          <p:val>
+                                            <p:strVal val="1+#ppt_w/2"/>
+                                          </p:val>
+                                        </p:tav>
+                                        <p:tav tm="100000">
+                                          <p:val>
+                                            <p:strVal val="#ppt_x"/>
+                                          </p:val>
+                                        </p:tav>
+                                      </p:tavLst>
+                                    </p:anim>
+                                    <p:anim calcmode="lin" valueType="num">
+                                      <p:cBhvr additive="base">
+                                        <p:cTn id="8" dur="500" fill="hold"/>
+                                        <p:tgtEl>
+                                          <p:spTgt spid="4"/>
+                                        </p:tgtEl>
+                                        <p:attrNameLst>
+                                          <p:attrName>ppt_y</p:attrName>
+                                        </p:attrNameLst>
+                                      </p:cBhvr>
+                                      <p:tavLst>
+                                        <p:tav tm="0">
+                                          <p:val>
+                                            <p:strVal val="#ppt_y"/>
+                                          </p:val>
+                                        </p:tav>
+                                        <p:tav tm="100000">
+                                          <p:val>
+                                            <p:strVal val="#ppt_y"/>
+                                          </p:val>
+                                        </p:tav>
+                                      </p:tavLst>
+                                    </p:anim>
+                                  </p:childTnLst>
+                                </p:cTn>
+                              </p:par>
+                            </p:childTnLst>
+                          </p:cTn>
+                        </p:par>
+                        <p:par>
+                          <p:cTn id="9" fill="hold">
+                            <p:stCondLst>
+                              <p:cond delay="500"/>
+                            </p:stCondLst>
+                            <p:childTnLst>
+                              <p:par>
+                                <p:cTn id="10" presetID="22" presetClass="entr" presetSubtype="2" fill="hold" nodeType="afterEffect">
+                                  <p:stCondLst>
+                                    <p:cond delay="0"/>
+                                  </p:stCondLst>
+                                  <p:childTnLst>
+                                    <p:set>
+                                      <p:cBhvr>
+                                        <p:cTn id="11" dur="1" fill="hold">
+                                          <p:stCondLst>
+                                            <p:cond delay="0"/>
+                                          </p:stCondLst>
+                                        </p:cTn>
+                                        <p:tgtEl>
                                           <p:spTgt spid="8"/>
                                         </p:tgtEl>
                                         <p:attrNameLst>
@@ -9308,7 +9681,7 @@
                                     </p:set>
                                     <p:animEffect transition="in" filter="wipe(right)">
                                       <p:cBhvr>
-                                        <p:cTn id="7" dur="500"/>
+                                        <p:cTn id="12" dur="500"/>
                                         <p:tgtEl>
                                           <p:spTgt spid="8"/>
                                         </p:tgtEl>
@@ -9324,26 +9697,26 @@
                     </p:cTn>
                   </p:par>
                   <p:par>
-                    <p:cTn id="8" fill="hold">
+                    <p:cTn id="13" fill="hold">
                       <p:stCondLst>
                         <p:cond delay="indefinite"/>
                       </p:stCondLst>
                       <p:childTnLst>
                         <p:par>
-                          <p:cTn id="9" fill="hold">
+                          <p:cTn id="14" fill="hold">
                             <p:stCondLst>
                               <p:cond delay="0"/>
                             </p:stCondLst>
                             <p:childTnLst>
                               <p:par>
-                                <p:cTn id="10" presetID="22" presetClass="entr" presetSubtype="1" fill="hold" nodeType="clickEffect">
+                                <p:cTn id="15" presetID="22" presetClass="entr" presetSubtype="1" fill="hold" nodeType="clickEffect">
                                   <p:stCondLst>
                                     <p:cond delay="0"/>
                                   </p:stCondLst>
                                   <p:childTnLst>
                                     <p:set>
                                       <p:cBhvr>
-                                        <p:cTn id="11" dur="1" fill="hold">
+                                        <p:cTn id="16" dur="1" fill="hold">
                                           <p:stCondLst>
                                             <p:cond delay="0"/>
                                           </p:stCondLst>
@@ -9361,7 +9734,7 @@
                                     </p:set>
                                     <p:animEffect transition="in" filter="wipe(up)">
                                       <p:cBhvr>
-                                        <p:cTn id="12" dur="500"/>
+                                        <p:cTn id="17" dur="500"/>
                                         <p:tgtEl>
                                           <p:spTgt spid="24"/>
                                         </p:tgtEl>
@@ -9374,20 +9747,20 @@
                           </p:cTn>
                         </p:par>
                         <p:par>
-                          <p:cTn id="13" fill="hold">
+                          <p:cTn id="18" fill="hold">
                             <p:stCondLst>
                               <p:cond delay="500"/>
                             </p:stCondLst>
                             <p:childTnLst>
                               <p:par>
-                                <p:cTn id="14" presetID="22" presetClass="entr" presetSubtype="2" fill="hold" nodeType="afterEffect">
+                                <p:cTn id="19" presetID="22" presetClass="entr" presetSubtype="2" fill="hold" nodeType="afterEffect">
                                   <p:stCondLst>
                                     <p:cond delay="0"/>
                                   </p:stCondLst>
                                   <p:childTnLst>
                                     <p:set>
                                       <p:cBhvr>
-                                        <p:cTn id="15" dur="1" fill="hold">
+                                        <p:cTn id="20" dur="1" fill="hold">
                                           <p:stCondLst>
                                             <p:cond delay="0"/>
                                           </p:stCondLst>
@@ -9405,7 +9778,7 @@
                                     </p:set>
                                     <p:animEffect transition="in" filter="wipe(right)">
                                       <p:cBhvr>
-                                        <p:cTn id="16" dur="500"/>
+                                        <p:cTn id="21" dur="500"/>
                                         <p:tgtEl>
                                           <p:spTgt spid="17"/>
                                         </p:tgtEl>
@@ -9418,66 +9791,13 @@
                           </p:cTn>
                         </p:par>
                         <p:par>
-                          <p:cTn id="17" fill="hold">
+                          <p:cTn id="22" fill="hold">
                             <p:stCondLst>
                               <p:cond delay="1000"/>
                             </p:stCondLst>
                             <p:childTnLst>
                               <p:par>
-                                <p:cTn id="18" presetID="22" presetClass="entr" presetSubtype="1" fill="hold" grpId="0" nodeType="afterEffect">
-                                  <p:stCondLst>
-                                    <p:cond delay="0"/>
-                                  </p:stCondLst>
-                                  <p:childTnLst>
-                                    <p:set>
-                                      <p:cBhvr>
-                                        <p:cTn id="19" dur="1" fill="hold">
-                                          <p:stCondLst>
-                                            <p:cond delay="0"/>
-                                          </p:stCondLst>
-                                        </p:cTn>
-                                        <p:tgtEl>
-                                          <p:spTgt spid="6"/>
-                                        </p:tgtEl>
-                                        <p:attrNameLst>
-                                          <p:attrName>style.visibility</p:attrName>
-                                        </p:attrNameLst>
-                                      </p:cBhvr>
-                                      <p:to>
-                                        <p:strVal val="visible"/>
-                                      </p:to>
-                                    </p:set>
-                                    <p:animEffect transition="in" filter="wipe(up)">
-                                      <p:cBhvr>
-                                        <p:cTn id="20" dur="500"/>
-                                        <p:tgtEl>
-                                          <p:spTgt spid="6"/>
-                                        </p:tgtEl>
-                                      </p:cBhvr>
-                                    </p:animEffect>
-                                  </p:childTnLst>
-                                </p:cTn>
-                              </p:par>
-                            </p:childTnLst>
-                          </p:cTn>
-                        </p:par>
-                      </p:childTnLst>
-                    </p:cTn>
-                  </p:par>
-                  <p:par>
-                    <p:cTn id="21" fill="hold">
-                      <p:stCondLst>
-                        <p:cond delay="indefinite"/>
-                      </p:stCondLst>
-                      <p:childTnLst>
-                        <p:par>
-                          <p:cTn id="22" fill="hold">
-                            <p:stCondLst>
-                              <p:cond delay="0"/>
-                            </p:stCondLst>
-                            <p:childTnLst>
-                              <p:par>
-                                <p:cTn id="23" presetID="22" presetClass="entr" presetSubtype="2" fill="hold" nodeType="clickEffect">
+                                <p:cTn id="23" presetID="22" presetClass="entr" presetSubtype="1" fill="hold" grpId="0" nodeType="afterEffect">
                                   <p:stCondLst>
                                     <p:cond delay="0"/>
                                   </p:stCondLst>
@@ -9490,7 +9810,7 @@
                                           </p:stCondLst>
                                         </p:cTn>
                                         <p:tgtEl>
-                                          <p:spTgt spid="20"/>
+                                          <p:spTgt spid="6"/>
                                         </p:tgtEl>
                                         <p:attrNameLst>
                                           <p:attrName>style.visibility</p:attrName>
@@ -9500,11 +9820,11 @@
                                         <p:strVal val="visible"/>
                                       </p:to>
                                     </p:set>
-                                    <p:animEffect transition="in" filter="wipe(right)">
+                                    <p:animEffect transition="in" filter="wipe(up)">
                                       <p:cBhvr>
                                         <p:cTn id="25" dur="500"/>
                                         <p:tgtEl>
-                                          <p:spTgt spid="20"/>
+                                          <p:spTgt spid="6"/>
                                         </p:tgtEl>
                                       </p:cBhvr>
                                     </p:animEffect>
@@ -9543,7 +9863,7 @@
                                           </p:stCondLst>
                                         </p:cTn>
                                         <p:tgtEl>
-                                          <p:spTgt spid="10"/>
+                                          <p:spTgt spid="20"/>
                                         </p:tgtEl>
                                         <p:attrNameLst>
                                           <p:attrName>style.visibility</p:attrName>
@@ -9556,6 +9876,59 @@
                                     <p:animEffect transition="in" filter="wipe(right)">
                                       <p:cBhvr>
                                         <p:cTn id="30" dur="500"/>
+                                        <p:tgtEl>
+                                          <p:spTgt spid="20"/>
+                                        </p:tgtEl>
+                                      </p:cBhvr>
+                                    </p:animEffect>
+                                  </p:childTnLst>
+                                </p:cTn>
+                              </p:par>
+                            </p:childTnLst>
+                          </p:cTn>
+                        </p:par>
+                      </p:childTnLst>
+                    </p:cTn>
+                  </p:par>
+                  <p:par>
+                    <p:cTn id="31" fill="hold">
+                      <p:stCondLst>
+                        <p:cond delay="indefinite"/>
+                      </p:stCondLst>
+                      <p:childTnLst>
+                        <p:par>
+                          <p:cTn id="32" fill="hold">
+                            <p:stCondLst>
+                              <p:cond delay="0"/>
+                            </p:stCondLst>
+                            <p:childTnLst>
+                              <p:par>
+                                <p:cTn id="33" presetID="22" presetClass="entr" presetSubtype="2" fill="hold" nodeType="clickEffect">
+                                  <p:stCondLst>
+                                    <p:cond delay="0"/>
+                                  </p:stCondLst>
+                                  <p:childTnLst>
+                                    <p:set>
+                                      <p:cBhvr>
+                                        <p:cTn id="34" dur="1" fill="hold">
+                                          <p:stCondLst>
+                                            <p:cond delay="0"/>
+                                          </p:stCondLst>
+                                        </p:cTn>
+                                        <p:tgtEl>
+                                          <p:spTgt spid="10"/>
+                                        </p:tgtEl>
+                                        <p:attrNameLst>
+                                          <p:attrName>style.visibility</p:attrName>
+                                        </p:attrNameLst>
+                                      </p:cBhvr>
+                                      <p:to>
+                                        <p:strVal val="visible"/>
+                                      </p:to>
+                                    </p:set>
+                                    <p:animEffect transition="in" filter="wipe(right)">
+                                      <p:cBhvr>
+                                        <p:cTn id="35" dur="500"/>
                                         <p:tgtEl>
                                           <p:spTgt spid="10"/>
                                         </p:tgtEl>
@@ -9568,20 +9941,20 @@
                           </p:cTn>
                         </p:par>
                         <p:par>
-                          <p:cTn id="31" fill="hold">
+                          <p:cTn id="36" fill="hold">
                             <p:stCondLst>
                               <p:cond delay="500"/>
                             </p:stCondLst>
                             <p:childTnLst>
                               <p:par>
-                                <p:cTn id="32" presetID="22" presetClass="entr" presetSubtype="8" fill="hold" grpId="0" nodeType="afterEffect">
+                                <p:cTn id="37" presetID="22" presetClass="entr" presetSubtype="8" fill="hold" grpId="0" nodeType="afterEffect">
                                   <p:stCondLst>
                                     <p:cond delay="0"/>
                                   </p:stCondLst>
                                   <p:childTnLst>
                                     <p:set>
                                       <p:cBhvr>
-                                        <p:cTn id="33" dur="1" fill="hold">
+                                        <p:cTn id="38" dur="1" fill="hold">
                                           <p:stCondLst>
                                             <p:cond delay="0"/>
                                           </p:stCondLst>
@@ -9599,7 +9972,7 @@
                                     </p:set>
                                     <p:animEffect transition="in" filter="wipe(left)">
                                       <p:cBhvr>
-                                        <p:cTn id="34" dur="500"/>
+                                        <p:cTn id="39" dur="500"/>
                                         <p:tgtEl>
                                           <p:spTgt spid="9"/>
                                         </p:tgtEl>
@@ -9638,6 +10011,7 @@
     <p:bldLst>
       <p:bldP spid="6" grpId="0"/>
       <p:bldP spid="9" grpId="0"/>
+      <p:bldP spid="4" grpId="0"/>
     </p:bldLst>
   </p:timing>
 </p:sld>
@@ -10391,8 +10765,8 @@
           </p:style>
         </p:cxnSp>
       </p:grpSp>
-      <mc:AlternateContent xmlns:mc="http://schemas.openxmlformats.org/markup-compatibility/2006">
-        <mc:Choice xmlns:a14="http://schemas.microsoft.com/office/drawing/2010/main" Requires="a14">
+      <mc:AlternateContent xmlns:mc="http://schemas.openxmlformats.org/markup-compatibility/2006" xmlns:a14="http://schemas.microsoft.com/office/drawing/2010/main">
+        <mc:Choice Requires="a14">
           <p:sp>
             <p:nvSpPr>
               <p:cNvPr id="25" name="TextBox 24">
@@ -10421,6 +10795,7 @@
               </a:bodyPr>
               <a:lstStyle/>
               <a:p>
+                <a:pPr/>
                 <a14:m>
                   <m:oMathPara xmlns:m="http://schemas.openxmlformats.org/officeDocument/2006/math">
                     <m:oMathParaPr>
@@ -10447,7 +10822,7 @@
             </p:txBody>
           </p:sp>
         </mc:Choice>
-        <mc:Fallback>
+        <mc:Fallback xmlns="">
           <p:sp>
             <p:nvSpPr>
               <p:cNvPr id="25" name="TextBox 24">
@@ -10492,8 +10867,8 @@
           </p:sp>
         </mc:Fallback>
       </mc:AlternateContent>
-      <mc:AlternateContent xmlns:mc="http://schemas.openxmlformats.org/markup-compatibility/2006">
-        <mc:Choice xmlns:a14="http://schemas.microsoft.com/office/drawing/2010/main" Requires="a14">
+      <mc:AlternateContent xmlns:mc="http://schemas.openxmlformats.org/markup-compatibility/2006" xmlns:a14="http://schemas.microsoft.com/office/drawing/2010/main">
+        <mc:Choice Requires="a14">
           <p:sp>
             <p:nvSpPr>
               <p:cNvPr id="26" name="TextBox 25">
@@ -10522,6 +10897,7 @@
               </a:bodyPr>
               <a:lstStyle/>
               <a:p>
+                <a:pPr/>
                 <a14:m>
                   <m:oMathPara xmlns:m="http://schemas.openxmlformats.org/officeDocument/2006/math">
                     <m:oMathParaPr>
@@ -10548,7 +10924,7 @@
             </p:txBody>
           </p:sp>
         </mc:Choice>
-        <mc:Fallback>
+        <mc:Fallback xmlns="">
           <p:sp>
             <p:nvSpPr>
               <p:cNvPr id="26" name="TextBox 25">
@@ -10593,6 +10969,46 @@
           </p:sp>
         </mc:Fallback>
       </mc:AlternateContent>
+      <p:sp>
+        <p:nvSpPr>
+          <p:cNvPr id="4" name="TextBox 3">
+            <a:extLst>
+              <a:ext uri="{FF2B5EF4-FFF2-40B4-BE49-F238E27FC236}">
+                <a16:creationId xmlns:a16="http://schemas.microsoft.com/office/drawing/2014/main" id="{DDF7EEC1-2E03-CCE4-8EDE-6998D9A90B5A}"/>
+              </a:ext>
+            </a:extLst>
+          </p:cNvPr>
+          <p:cNvSpPr txBox="1"/>
+          <p:nvPr/>
+        </p:nvSpPr>
+        <p:spPr>
+          <a:xfrm>
+            <a:off x="7210925" y="365126"/>
+            <a:ext cx="1548064" cy="646331"/>
+          </a:xfrm>
+          <a:prstGeom prst="rect">
+            <a:avLst/>
+          </a:prstGeom>
+          <a:noFill/>
+        </p:spPr>
+        <p:txBody>
+          <a:bodyPr wrap="square" rtlCol="0">
+            <a:spAutoFit/>
+          </a:bodyPr>
+          <a:lstStyle/>
+          <a:p>
+            <a:pPr algn="ctr"/>
+            <a:r>
+              <a:rPr lang="en-US" b="1" dirty="0">
+                <a:solidFill>
+                  <a:srgbClr val="7030A0"/>
+                </a:solidFill>
+              </a:rPr>
+              <a:t>You must type in this code</a:t>
+            </a:r>
+          </a:p>
+        </p:txBody>
+      </p:sp>
     </p:spTree>
     <p:extLst>
       <p:ext uri="{BB962C8B-B14F-4D97-AF65-F5344CB8AC3E}">
@@ -10627,7 +11043,7 @@
                             </p:stCondLst>
                             <p:childTnLst>
                               <p:par>
-                                <p:cTn id="5" presetID="22" presetClass="entr" presetSubtype="2" fill="hold" nodeType="afterEffect">
+                                <p:cTn id="5" presetID="2" presetClass="entr" presetSubtype="2" fill="hold" grpId="0" nodeType="afterEffect">
                                   <p:stCondLst>
                                     <p:cond delay="0"/>
                                   </p:stCondLst>
@@ -10640,6 +11056,88 @@
                                           </p:stCondLst>
                                         </p:cTn>
                                         <p:tgtEl>
+                                          <p:spTgt spid="4"/>
+                                        </p:tgtEl>
+                                        <p:attrNameLst>
+                                          <p:attrName>style.visibility</p:attrName>
+                                        </p:attrNameLst>
+                                      </p:cBhvr>
+                                      <p:to>
+                                        <p:strVal val="visible"/>
+                                      </p:to>
+                                    </p:set>
+                                    <p:anim calcmode="lin" valueType="num">
+                                      <p:cBhvr additive="base">
+                                        <p:cTn id="7" dur="500" fill="hold"/>
+                                        <p:tgtEl>
+                                          <p:spTgt spid="4"/>
+                                        </p:tgtEl>
+                                        <p:attrNameLst>
+                                          <p:attrName>ppt_x</p:attrName>
+                                        </p:attrNameLst>
+                                      </p:cBhvr>
+                                      <p:tavLst>
+                                        <p:tav tm="0">
+                                          <p:val>
+                                            <p:strVal val="1+#ppt_w/2"/>
+                                          </p:val>
+                                        </p:tav>
+                                        <p:tav tm="100000">
+                                          <p:val>
+                                            <p:strVal val="#ppt_x"/>
+                                          </p:val>
+                                        </p:tav>
+                                      </p:tavLst>
+                                    </p:anim>
+                                    <p:anim calcmode="lin" valueType="num">
+                                      <p:cBhvr additive="base">
+                                        <p:cTn id="8" dur="500" fill="hold"/>
+                                        <p:tgtEl>
+                                          <p:spTgt spid="4"/>
+                                        </p:tgtEl>
+                                        <p:attrNameLst>
+                                          <p:attrName>ppt_y</p:attrName>
+                                        </p:attrNameLst>
+                                      </p:cBhvr>
+                                      <p:tavLst>
+                                        <p:tav tm="0">
+                                          <p:val>
+                                            <p:strVal val="#ppt_y"/>
+                                          </p:val>
+                                        </p:tav>
+                                        <p:tav tm="100000">
+                                          <p:val>
+                                            <p:strVal val="#ppt_y"/>
+                                          </p:val>
+                                        </p:tav>
+                                      </p:tavLst>
+                                    </p:anim>
+                                  </p:childTnLst>
+                                </p:cTn>
+                              </p:par>
+                            </p:childTnLst>
+                          </p:cTn>
+                        </p:par>
+                        <p:par>
+                          <p:cTn id="9" fill="hold">
+                            <p:stCondLst>
+                              <p:cond delay="500"/>
+                            </p:stCondLst>
+                            <p:childTnLst>
+                              <p:par>
+                                <p:cTn id="10" presetID="22" presetClass="entr" presetSubtype="2" fill="hold" nodeType="afterEffect">
+                                  <p:stCondLst>
+                                    <p:cond delay="0"/>
+                                  </p:stCondLst>
+                                  <p:childTnLst>
+                                    <p:set>
+                                      <p:cBhvr>
+                                        <p:cTn id="11" dur="1" fill="hold">
+                                          <p:stCondLst>
+                                            <p:cond delay="0"/>
+                                          </p:stCondLst>
+                                        </p:cTn>
+                                        <p:tgtEl>
                                           <p:spTgt spid="8"/>
                                         </p:tgtEl>
                                         <p:attrNameLst>
@@ -10652,7 +11150,7 @@
                                     </p:set>
                                     <p:animEffect transition="in" filter="wipe(right)">
                                       <p:cBhvr>
-                                        <p:cTn id="7" dur="500"/>
+                                        <p:cTn id="12" dur="500"/>
                                         <p:tgtEl>
                                           <p:spTgt spid="8"/>
                                         </p:tgtEl>
@@ -10668,26 +11166,26 @@
                     </p:cTn>
                   </p:par>
                   <p:par>
-                    <p:cTn id="8" fill="hold">
+                    <p:cTn id="13" fill="hold">
                       <p:stCondLst>
                         <p:cond delay="indefinite"/>
                       </p:stCondLst>
                       <p:childTnLst>
                         <p:par>
-                          <p:cTn id="9" fill="hold">
+                          <p:cTn id="14" fill="hold">
                             <p:stCondLst>
                               <p:cond delay="0"/>
                             </p:stCondLst>
                             <p:childTnLst>
                               <p:par>
-                                <p:cTn id="10" presetID="22" presetClass="entr" presetSubtype="1" fill="hold" nodeType="clickEffect">
+                                <p:cTn id="15" presetID="22" presetClass="entr" presetSubtype="1" fill="hold" nodeType="clickEffect">
                                   <p:stCondLst>
                                     <p:cond delay="0"/>
                                   </p:stCondLst>
                                   <p:childTnLst>
                                     <p:set>
                                       <p:cBhvr>
-                                        <p:cTn id="11" dur="1" fill="hold">
+                                        <p:cTn id="16" dur="1" fill="hold">
                                           <p:stCondLst>
                                             <p:cond delay="0"/>
                                           </p:stCondLst>
@@ -10705,7 +11203,7 @@
                                     </p:set>
                                     <p:animEffect transition="in" filter="wipe(up)">
                                       <p:cBhvr>
-                                        <p:cTn id="12" dur="500"/>
+                                        <p:cTn id="17" dur="500"/>
                                         <p:tgtEl>
                                           <p:spTgt spid="23"/>
                                         </p:tgtEl>
@@ -10718,20 +11216,20 @@
                           </p:cTn>
                         </p:par>
                         <p:par>
-                          <p:cTn id="13" fill="hold">
+                          <p:cTn id="18" fill="hold">
                             <p:stCondLst>
                               <p:cond delay="500"/>
                             </p:stCondLst>
                             <p:childTnLst>
                               <p:par>
-                                <p:cTn id="14" presetID="22" presetClass="entr" presetSubtype="2" fill="hold" nodeType="afterEffect">
+                                <p:cTn id="19" presetID="22" presetClass="entr" presetSubtype="2" fill="hold" nodeType="afterEffect">
                                   <p:stCondLst>
                                     <p:cond delay="0"/>
                                   </p:stCondLst>
                                   <p:childTnLst>
                                     <p:set>
                                       <p:cBhvr>
-                                        <p:cTn id="15" dur="1" fill="hold">
+                                        <p:cTn id="20" dur="1" fill="hold">
                                           <p:stCondLst>
                                             <p:cond delay="0"/>
                                           </p:stCondLst>
@@ -10749,7 +11247,7 @@
                                     </p:set>
                                     <p:animEffect transition="in" filter="wipe(right)">
                                       <p:cBhvr>
-                                        <p:cTn id="16" dur="500"/>
+                                        <p:cTn id="21" dur="500"/>
                                         <p:tgtEl>
                                           <p:spTgt spid="17"/>
                                         </p:tgtEl>
@@ -10762,66 +11260,13 @@
                           </p:cTn>
                         </p:par>
                         <p:par>
-                          <p:cTn id="17" fill="hold">
+                          <p:cTn id="22" fill="hold">
                             <p:stCondLst>
                               <p:cond delay="1000"/>
                             </p:stCondLst>
                             <p:childTnLst>
                               <p:par>
-                                <p:cTn id="18" presetID="22" presetClass="entr" presetSubtype="1" fill="hold" grpId="0" nodeType="afterEffect">
-                                  <p:stCondLst>
-                                    <p:cond delay="0"/>
-                                  </p:stCondLst>
-                                  <p:childTnLst>
-                                    <p:set>
-                                      <p:cBhvr>
-                                        <p:cTn id="19" dur="1" fill="hold">
-                                          <p:stCondLst>
-                                            <p:cond delay="0"/>
-                                          </p:stCondLst>
-                                        </p:cTn>
-                                        <p:tgtEl>
-                                          <p:spTgt spid="6"/>
-                                        </p:tgtEl>
-                                        <p:attrNameLst>
-                                          <p:attrName>style.visibility</p:attrName>
-                                        </p:attrNameLst>
-                                      </p:cBhvr>
-                                      <p:to>
-                                        <p:strVal val="visible"/>
-                                      </p:to>
-                                    </p:set>
-                                    <p:animEffect transition="in" filter="wipe(up)">
-                                      <p:cBhvr>
-                                        <p:cTn id="20" dur="500"/>
-                                        <p:tgtEl>
-                                          <p:spTgt spid="6"/>
-                                        </p:tgtEl>
-                                      </p:cBhvr>
-                                    </p:animEffect>
-                                  </p:childTnLst>
-                                </p:cTn>
-                              </p:par>
-                            </p:childTnLst>
-                          </p:cTn>
-                        </p:par>
-                      </p:childTnLst>
-                    </p:cTn>
-                  </p:par>
-                  <p:par>
-                    <p:cTn id="21" fill="hold">
-                      <p:stCondLst>
-                        <p:cond delay="indefinite"/>
-                      </p:stCondLst>
-                      <p:childTnLst>
-                        <p:par>
-                          <p:cTn id="22" fill="hold">
-                            <p:stCondLst>
-                              <p:cond delay="0"/>
-                            </p:stCondLst>
-                            <p:childTnLst>
-                              <p:par>
-                                <p:cTn id="23" presetID="22" presetClass="entr" presetSubtype="2" fill="hold" nodeType="clickEffect">
+                                <p:cTn id="23" presetID="22" presetClass="entr" presetSubtype="1" fill="hold" grpId="0" nodeType="afterEffect">
                                   <p:stCondLst>
                                     <p:cond delay="0"/>
                                   </p:stCondLst>
@@ -10834,7 +11279,7 @@
                                           </p:stCondLst>
                                         </p:cTn>
                                         <p:tgtEl>
-                                          <p:spTgt spid="20"/>
+                                          <p:spTgt spid="6"/>
                                         </p:tgtEl>
                                         <p:attrNameLst>
                                           <p:attrName>style.visibility</p:attrName>
@@ -10844,11 +11289,11 @@
                                         <p:strVal val="visible"/>
                                       </p:to>
                                     </p:set>
-                                    <p:animEffect transition="in" filter="wipe(right)">
+                                    <p:animEffect transition="in" filter="wipe(up)">
                                       <p:cBhvr>
                                         <p:cTn id="25" dur="500"/>
                                         <p:tgtEl>
-                                          <p:spTgt spid="20"/>
+                                          <p:spTgt spid="6"/>
                                         </p:tgtEl>
                                       </p:cBhvr>
                                     </p:animEffect>
@@ -10887,7 +11332,7 @@
                                           </p:stCondLst>
                                         </p:cTn>
                                         <p:tgtEl>
-                                          <p:spTgt spid="10"/>
+                                          <p:spTgt spid="20"/>
                                         </p:tgtEl>
                                         <p:attrNameLst>
                                           <p:attrName>style.visibility</p:attrName>
@@ -10900,6 +11345,59 @@
                                     <p:animEffect transition="in" filter="wipe(right)">
                                       <p:cBhvr>
                                         <p:cTn id="30" dur="500"/>
+                                        <p:tgtEl>
+                                          <p:spTgt spid="20"/>
+                                        </p:tgtEl>
+                                      </p:cBhvr>
+                                    </p:animEffect>
+                                  </p:childTnLst>
+                                </p:cTn>
+                              </p:par>
+                            </p:childTnLst>
+                          </p:cTn>
+                        </p:par>
+                      </p:childTnLst>
+                    </p:cTn>
+                  </p:par>
+                  <p:par>
+                    <p:cTn id="31" fill="hold">
+                      <p:stCondLst>
+                        <p:cond delay="indefinite"/>
+                      </p:stCondLst>
+                      <p:childTnLst>
+                        <p:par>
+                          <p:cTn id="32" fill="hold">
+                            <p:stCondLst>
+                              <p:cond delay="0"/>
+                            </p:stCondLst>
+                            <p:childTnLst>
+                              <p:par>
+                                <p:cTn id="33" presetID="22" presetClass="entr" presetSubtype="2" fill="hold" nodeType="clickEffect">
+                                  <p:stCondLst>
+                                    <p:cond delay="0"/>
+                                  </p:stCondLst>
+                                  <p:childTnLst>
+                                    <p:set>
+                                      <p:cBhvr>
+                                        <p:cTn id="34" dur="1" fill="hold">
+                                          <p:stCondLst>
+                                            <p:cond delay="0"/>
+                                          </p:stCondLst>
+                                        </p:cTn>
+                                        <p:tgtEl>
+                                          <p:spTgt spid="10"/>
+                                        </p:tgtEl>
+                                        <p:attrNameLst>
+                                          <p:attrName>style.visibility</p:attrName>
+                                        </p:attrNameLst>
+                                      </p:cBhvr>
+                                      <p:to>
+                                        <p:strVal val="visible"/>
+                                      </p:to>
+                                    </p:set>
+                                    <p:animEffect transition="in" filter="wipe(right)">
+                                      <p:cBhvr>
+                                        <p:cTn id="35" dur="500"/>
                                         <p:tgtEl>
                                           <p:spTgt spid="10"/>
                                         </p:tgtEl>
@@ -10912,20 +11410,20 @@
                           </p:cTn>
                         </p:par>
                         <p:par>
-                          <p:cTn id="31" fill="hold">
+                          <p:cTn id="36" fill="hold">
                             <p:stCondLst>
                               <p:cond delay="500"/>
                             </p:stCondLst>
                             <p:childTnLst>
                               <p:par>
-                                <p:cTn id="32" presetID="22" presetClass="entr" presetSubtype="8" fill="hold" grpId="0" nodeType="afterEffect">
+                                <p:cTn id="37" presetID="22" presetClass="entr" presetSubtype="8" fill="hold" grpId="0" nodeType="afterEffect">
                                   <p:stCondLst>
                                     <p:cond delay="0"/>
                                   </p:stCondLst>
                                   <p:childTnLst>
                                     <p:set>
                                       <p:cBhvr>
-                                        <p:cTn id="33" dur="1" fill="hold">
+                                        <p:cTn id="38" dur="1" fill="hold">
                                           <p:stCondLst>
                                             <p:cond delay="0"/>
                                           </p:stCondLst>
@@ -10943,7 +11441,7 @@
                                     </p:set>
                                     <p:animEffect transition="in" filter="wipe(left)">
                                       <p:cBhvr>
-                                        <p:cTn id="34" dur="500"/>
+                                        <p:cTn id="39" dur="500"/>
                                         <p:tgtEl>
                                           <p:spTgt spid="9"/>
                                         </p:tgtEl>
@@ -10982,6 +11480,7 @@
     <p:bldLst>
       <p:bldP spid="6" grpId="0"/>
       <p:bldP spid="9" grpId="0"/>
+      <p:bldP spid="4" grpId="0"/>
     </p:bldLst>
   </p:timing>
 </p:sld>
@@ -11559,8 +12058,8 @@
           </a:p>
         </p:txBody>
       </p:sp>
-      <mc:AlternateContent xmlns:mc="http://schemas.openxmlformats.org/markup-compatibility/2006">
-        <mc:Choice xmlns:a14="http://schemas.microsoft.com/office/drawing/2010/main" Requires="a14">
+      <mc:AlternateContent xmlns:mc="http://schemas.openxmlformats.org/markup-compatibility/2006" xmlns:a14="http://schemas.microsoft.com/office/drawing/2010/main">
+        <mc:Choice Requires="a14">
           <p:sp>
             <p:nvSpPr>
               <p:cNvPr id="11" name="TextBox 10">
@@ -11589,6 +12088,7 @@
               </a:bodyPr>
               <a:lstStyle/>
               <a:p>
+                <a:pPr/>
                 <a14:m>
                   <m:oMathPara xmlns:m="http://schemas.openxmlformats.org/officeDocument/2006/math">
                     <m:oMathParaPr>
@@ -11615,7 +12115,7 @@
             </p:txBody>
           </p:sp>
         </mc:Choice>
-        <mc:Fallback>
+        <mc:Fallback xmlns="">
           <p:sp>
             <p:nvSpPr>
               <p:cNvPr id="11" name="TextBox 10">
@@ -11660,8 +12160,8 @@
           </p:sp>
         </mc:Fallback>
       </mc:AlternateContent>
-      <mc:AlternateContent xmlns:mc="http://schemas.openxmlformats.org/markup-compatibility/2006">
-        <mc:Choice xmlns:a14="http://schemas.microsoft.com/office/drawing/2010/main" Requires="a14">
+      <mc:AlternateContent xmlns:mc="http://schemas.openxmlformats.org/markup-compatibility/2006" xmlns:a14="http://schemas.microsoft.com/office/drawing/2010/main">
+        <mc:Choice Requires="a14">
           <p:sp>
             <p:nvSpPr>
               <p:cNvPr id="14" name="TextBox 13">
@@ -11690,6 +12190,7 @@
               </a:bodyPr>
               <a:lstStyle/>
               <a:p>
+                <a:pPr/>
                 <a14:m>
                   <m:oMathPara xmlns:m="http://schemas.openxmlformats.org/officeDocument/2006/math">
                     <m:oMathParaPr>
@@ -11716,7 +12217,7 @@
             </p:txBody>
           </p:sp>
         </mc:Choice>
-        <mc:Fallback>
+        <mc:Fallback xmlns="">
           <p:sp>
             <p:nvSpPr>
               <p:cNvPr id="14" name="TextBox 13">
@@ -11761,6 +12262,46 @@
           </p:sp>
         </mc:Fallback>
       </mc:AlternateContent>
+      <p:sp>
+        <p:nvSpPr>
+          <p:cNvPr id="4" name="TextBox 3">
+            <a:extLst>
+              <a:ext uri="{FF2B5EF4-FFF2-40B4-BE49-F238E27FC236}">
+                <a16:creationId xmlns:a16="http://schemas.microsoft.com/office/drawing/2014/main" id="{D5FAF4FF-1395-CCF4-4A46-0691F92423CE}"/>
+              </a:ext>
+            </a:extLst>
+          </p:cNvPr>
+          <p:cNvSpPr txBox="1"/>
+          <p:nvPr/>
+        </p:nvSpPr>
+        <p:spPr>
+          <a:xfrm>
+            <a:off x="7210925" y="365126"/>
+            <a:ext cx="1548064" cy="646331"/>
+          </a:xfrm>
+          <a:prstGeom prst="rect">
+            <a:avLst/>
+          </a:prstGeom>
+          <a:noFill/>
+        </p:spPr>
+        <p:txBody>
+          <a:bodyPr wrap="square" rtlCol="0">
+            <a:spAutoFit/>
+          </a:bodyPr>
+          <a:lstStyle/>
+          <a:p>
+            <a:pPr algn="ctr"/>
+            <a:r>
+              <a:rPr lang="en-US" b="1" dirty="0">
+                <a:solidFill>
+                  <a:srgbClr val="7030A0"/>
+                </a:solidFill>
+              </a:rPr>
+              <a:t>You must type in this code</a:t>
+            </a:r>
+          </a:p>
+        </p:txBody>
+      </p:sp>
     </p:spTree>
     <p:extLst>
       <p:ext uri="{BB962C8B-B14F-4D97-AF65-F5344CB8AC3E}">
@@ -11795,7 +12336,7 @@
                             </p:stCondLst>
                             <p:childTnLst>
                               <p:par>
-                                <p:cTn id="5" presetID="22" presetClass="entr" presetSubtype="2" fill="hold" nodeType="afterEffect">
+                                <p:cTn id="5" presetID="2" presetClass="entr" presetSubtype="2" fill="hold" grpId="0" nodeType="afterEffect">
                                   <p:stCondLst>
                                     <p:cond delay="0"/>
                                   </p:stCondLst>
@@ -11808,7 +12349,7 @@
                                           </p:stCondLst>
                                         </p:cTn>
                                         <p:tgtEl>
-                                          <p:spTgt spid="8"/>
+                                          <p:spTgt spid="4"/>
                                         </p:tgtEl>
                                         <p:attrNameLst>
                                           <p:attrName>style.visibility</p:attrName>
@@ -11818,37 +12359,66 @@
                                         <p:strVal val="visible"/>
                                       </p:to>
                                     </p:set>
-                                    <p:animEffect transition="in" filter="wipe(right)">
-                                      <p:cBhvr>
-                                        <p:cTn id="7" dur="500"/>
-                                        <p:tgtEl>
-                                          <p:spTgt spid="8"/>
-                                        </p:tgtEl>
-                                      </p:cBhvr>
-                                    </p:animEffect>
+                                    <p:anim calcmode="lin" valueType="num">
+                                      <p:cBhvr additive="base">
+                                        <p:cTn id="7" dur="500" fill="hold"/>
+                                        <p:tgtEl>
+                                          <p:spTgt spid="4"/>
+                                        </p:tgtEl>
+                                        <p:attrNameLst>
+                                          <p:attrName>ppt_x</p:attrName>
+                                        </p:attrNameLst>
+                                      </p:cBhvr>
+                                      <p:tavLst>
+                                        <p:tav tm="0">
+                                          <p:val>
+                                            <p:strVal val="1+#ppt_w/2"/>
+                                          </p:val>
+                                        </p:tav>
+                                        <p:tav tm="100000">
+                                          <p:val>
+                                            <p:strVal val="#ppt_x"/>
+                                          </p:val>
+                                        </p:tav>
+                                      </p:tavLst>
+                                    </p:anim>
+                                    <p:anim calcmode="lin" valueType="num">
+                                      <p:cBhvr additive="base">
+                                        <p:cTn id="8" dur="500" fill="hold"/>
+                                        <p:tgtEl>
+                                          <p:spTgt spid="4"/>
+                                        </p:tgtEl>
+                                        <p:attrNameLst>
+                                          <p:attrName>ppt_y</p:attrName>
+                                        </p:attrNameLst>
+                                      </p:cBhvr>
+                                      <p:tavLst>
+                                        <p:tav tm="0">
+                                          <p:val>
+                                            <p:strVal val="#ppt_y"/>
+                                          </p:val>
+                                        </p:tav>
+                                        <p:tav tm="100000">
+                                          <p:val>
+                                            <p:strVal val="#ppt_y"/>
+                                          </p:val>
+                                        </p:tav>
+                                      </p:tavLst>
+                                    </p:anim>
                                   </p:childTnLst>
                                 </p:cTn>
                               </p:par>
                             </p:childTnLst>
                           </p:cTn>
                         </p:par>
-                      </p:childTnLst>
-                    </p:cTn>
-                  </p:par>
-                  <p:par>
-                    <p:cTn id="8" fill="hold">
-                      <p:stCondLst>
-                        <p:cond delay="indefinite"/>
-                      </p:stCondLst>
-                      <p:childTnLst>
                         <p:par>
                           <p:cTn id="9" fill="hold">
                             <p:stCondLst>
-                              <p:cond delay="0"/>
+                              <p:cond delay="500"/>
                             </p:stCondLst>
                             <p:childTnLst>
                               <p:par>
-                                <p:cTn id="10" presetID="22" presetClass="entr" presetSubtype="2" fill="hold" nodeType="clickEffect">
+                                <p:cTn id="10" presetID="22" presetClass="entr" presetSubtype="2" fill="hold" nodeType="afterEffect">
                                   <p:stCondLst>
                                     <p:cond delay="0"/>
                                   </p:stCondLst>
@@ -11861,7 +12431,7 @@
                                           </p:stCondLst>
                                         </p:cTn>
                                         <p:tgtEl>
-                                          <p:spTgt spid="17"/>
+                                          <p:spTgt spid="8"/>
                                         </p:tgtEl>
                                         <p:attrNameLst>
                                           <p:attrName>style.visibility</p:attrName>
@@ -11875,7 +12445,7 @@
                                       <p:cBhvr>
                                         <p:cTn id="12" dur="500"/>
                                         <p:tgtEl>
-                                          <p:spTgt spid="17"/>
+                                          <p:spTgt spid="8"/>
                                         </p:tgtEl>
                                       </p:cBhvr>
                                     </p:animEffect>
@@ -11901,7 +12471,7 @@
                             </p:stCondLst>
                             <p:childTnLst>
                               <p:par>
-                                <p:cTn id="15" presetID="22" presetClass="entr" presetSubtype="1" fill="hold" nodeType="clickEffect">
+                                <p:cTn id="15" presetID="22" presetClass="entr" presetSubtype="2" fill="hold" nodeType="clickEffect">
                                   <p:stCondLst>
                                     <p:cond delay="0"/>
                                   </p:stCondLst>
@@ -11914,6 +12484,59 @@
                                           </p:stCondLst>
                                         </p:cTn>
                                         <p:tgtEl>
+                                          <p:spTgt spid="17"/>
+                                        </p:tgtEl>
+                                        <p:attrNameLst>
+                                          <p:attrName>style.visibility</p:attrName>
+                                        </p:attrNameLst>
+                                      </p:cBhvr>
+                                      <p:to>
+                                        <p:strVal val="visible"/>
+                                      </p:to>
+                                    </p:set>
+                                    <p:animEffect transition="in" filter="wipe(right)">
+                                      <p:cBhvr>
+                                        <p:cTn id="17" dur="500"/>
+                                        <p:tgtEl>
+                                          <p:spTgt spid="17"/>
+                                        </p:tgtEl>
+                                      </p:cBhvr>
+                                    </p:animEffect>
+                                  </p:childTnLst>
+                                </p:cTn>
+                              </p:par>
+                            </p:childTnLst>
+                          </p:cTn>
+                        </p:par>
+                      </p:childTnLst>
+                    </p:cTn>
+                  </p:par>
+                  <p:par>
+                    <p:cTn id="18" fill="hold">
+                      <p:stCondLst>
+                        <p:cond delay="indefinite"/>
+                      </p:stCondLst>
+                      <p:childTnLst>
+                        <p:par>
+                          <p:cTn id="19" fill="hold">
+                            <p:stCondLst>
+                              <p:cond delay="0"/>
+                            </p:stCondLst>
+                            <p:childTnLst>
+                              <p:par>
+                                <p:cTn id="20" presetID="22" presetClass="entr" presetSubtype="1" fill="hold" nodeType="clickEffect">
+                                  <p:stCondLst>
+                                    <p:cond delay="0"/>
+                                  </p:stCondLst>
+                                  <p:childTnLst>
+                                    <p:set>
+                                      <p:cBhvr>
+                                        <p:cTn id="21" dur="1" fill="hold">
+                                          <p:stCondLst>
+                                            <p:cond delay="0"/>
+                                          </p:stCondLst>
+                                        </p:cTn>
+                                        <p:tgtEl>
                                           <p:spTgt spid="10"/>
                                         </p:tgtEl>
                                         <p:attrNameLst>
@@ -11926,7 +12549,7 @@
                                     </p:set>
                                     <p:animEffect transition="in" filter="wipe(up)">
                                       <p:cBhvr>
-                                        <p:cTn id="17" dur="500"/>
+                                        <p:cTn id="22" dur="500"/>
                                         <p:tgtEl>
                                           <p:spTgt spid="10"/>
                                         </p:tgtEl>
@@ -11939,20 +12562,20 @@
                           </p:cTn>
                         </p:par>
                         <p:par>
-                          <p:cTn id="18" fill="hold">
+                          <p:cTn id="23" fill="hold">
                             <p:stCondLst>
                               <p:cond delay="500"/>
                             </p:stCondLst>
                             <p:childTnLst>
                               <p:par>
-                                <p:cTn id="19" presetID="22" presetClass="entr" presetSubtype="2" fill="hold" nodeType="afterEffect">
+                                <p:cTn id="24" presetID="22" presetClass="entr" presetSubtype="2" fill="hold" nodeType="afterEffect">
                                   <p:stCondLst>
                                     <p:cond delay="0"/>
                                   </p:stCondLst>
                                   <p:childTnLst>
                                     <p:set>
                                       <p:cBhvr>
-                                        <p:cTn id="20" dur="1" fill="hold">
+                                        <p:cTn id="25" dur="1" fill="hold">
                                           <p:stCondLst>
                                             <p:cond delay="0"/>
                                           </p:stCondLst>
@@ -11970,7 +12593,7 @@
                                     </p:set>
                                     <p:animEffect transition="in" filter="wipe(right)">
                                       <p:cBhvr>
-                                        <p:cTn id="21" dur="500"/>
+                                        <p:cTn id="26" dur="500"/>
                                         <p:tgtEl>
                                           <p:spTgt spid="20"/>
                                         </p:tgtEl>
@@ -11983,20 +12606,20 @@
                           </p:cTn>
                         </p:par>
                         <p:par>
-                          <p:cTn id="22" fill="hold">
+                          <p:cTn id="27" fill="hold">
                             <p:stCondLst>
                               <p:cond delay="1000"/>
                             </p:stCondLst>
                             <p:childTnLst>
                               <p:par>
-                                <p:cTn id="23" presetID="22" presetClass="entr" presetSubtype="1" fill="hold" grpId="0" nodeType="afterEffect">
+                                <p:cTn id="28" presetID="22" presetClass="entr" presetSubtype="1" fill="hold" grpId="0" nodeType="afterEffect">
                                   <p:stCondLst>
                                     <p:cond delay="0"/>
                                   </p:stCondLst>
                                   <p:childTnLst>
                                     <p:set>
                                       <p:cBhvr>
-                                        <p:cTn id="24" dur="1" fill="hold">
+                                        <p:cTn id="29" dur="1" fill="hold">
                                           <p:stCondLst>
                                             <p:cond delay="0"/>
                                           </p:stCondLst>
@@ -12014,7 +12637,7 @@
                                     </p:set>
                                     <p:animEffect transition="in" filter="wipe(up)">
                                       <p:cBhvr>
-                                        <p:cTn id="25" dur="500"/>
+                                        <p:cTn id="30" dur="500"/>
                                         <p:tgtEl>
                                           <p:spTgt spid="6"/>
                                         </p:tgtEl>
@@ -12052,6 +12675,7 @@
     </p:tnLst>
     <p:bldLst>
       <p:bldP spid="6" grpId="0"/>
+      <p:bldP spid="4" grpId="0"/>
     </p:bldLst>
   </p:timing>
 </p:sld>
@@ -12613,8 +13237,8 @@
           </a:p>
         </p:txBody>
       </p:sp>
-      <mc:AlternateContent xmlns:mc="http://schemas.openxmlformats.org/markup-compatibility/2006">
-        <mc:Choice xmlns:a14="http://schemas.microsoft.com/office/drawing/2010/main" Requires="a14">
+      <mc:AlternateContent xmlns:mc="http://schemas.openxmlformats.org/markup-compatibility/2006" xmlns:a14="http://schemas.microsoft.com/office/drawing/2010/main">
+        <mc:Choice Requires="a14">
           <p:sp>
             <p:nvSpPr>
               <p:cNvPr id="11" name="TextBox 10">
@@ -12643,6 +13267,7 @@
               </a:bodyPr>
               <a:lstStyle/>
               <a:p>
+                <a:pPr/>
                 <a14:m>
                   <m:oMathPara xmlns:m="http://schemas.openxmlformats.org/officeDocument/2006/math">
                     <m:oMathParaPr>
@@ -12669,7 +13294,7 @@
             </p:txBody>
           </p:sp>
         </mc:Choice>
-        <mc:Fallback>
+        <mc:Fallback xmlns="">
           <p:sp>
             <p:nvSpPr>
               <p:cNvPr id="11" name="TextBox 10">
@@ -12714,8 +13339,8 @@
           </p:sp>
         </mc:Fallback>
       </mc:AlternateContent>
-      <mc:AlternateContent xmlns:mc="http://schemas.openxmlformats.org/markup-compatibility/2006">
-        <mc:Choice xmlns:a14="http://schemas.microsoft.com/office/drawing/2010/main" Requires="a14">
+      <mc:AlternateContent xmlns:mc="http://schemas.openxmlformats.org/markup-compatibility/2006" xmlns:a14="http://schemas.microsoft.com/office/drawing/2010/main">
+        <mc:Choice Requires="a14">
           <p:sp>
             <p:nvSpPr>
               <p:cNvPr id="14" name="TextBox 13">
@@ -12744,6 +13369,7 @@
               </a:bodyPr>
               <a:lstStyle/>
               <a:p>
+                <a:pPr/>
                 <a14:m>
                   <m:oMathPara xmlns:m="http://schemas.openxmlformats.org/officeDocument/2006/math">
                     <m:oMathParaPr>
@@ -12770,7 +13396,7 @@
             </p:txBody>
           </p:sp>
         </mc:Choice>
-        <mc:Fallback>
+        <mc:Fallback xmlns="">
           <p:sp>
             <p:nvSpPr>
               <p:cNvPr id="14" name="TextBox 13">
@@ -12815,6 +13441,46 @@
           </p:sp>
         </mc:Fallback>
       </mc:AlternateContent>
+      <p:sp>
+        <p:nvSpPr>
+          <p:cNvPr id="4" name="TextBox 3">
+            <a:extLst>
+              <a:ext uri="{FF2B5EF4-FFF2-40B4-BE49-F238E27FC236}">
+                <a16:creationId xmlns:a16="http://schemas.microsoft.com/office/drawing/2014/main" id="{32594809-E05F-F8BA-DBA7-CEFE34C77E5F}"/>
+              </a:ext>
+            </a:extLst>
+          </p:cNvPr>
+          <p:cNvSpPr txBox="1"/>
+          <p:nvPr/>
+        </p:nvSpPr>
+        <p:spPr>
+          <a:xfrm>
+            <a:off x="7210925" y="365126"/>
+            <a:ext cx="1548064" cy="646331"/>
+          </a:xfrm>
+          <a:prstGeom prst="rect">
+            <a:avLst/>
+          </a:prstGeom>
+          <a:noFill/>
+        </p:spPr>
+        <p:txBody>
+          <a:bodyPr wrap="square" rtlCol="0">
+            <a:spAutoFit/>
+          </a:bodyPr>
+          <a:lstStyle/>
+          <a:p>
+            <a:pPr algn="ctr"/>
+            <a:r>
+              <a:rPr lang="en-US" b="1" dirty="0">
+                <a:solidFill>
+                  <a:srgbClr val="7030A0"/>
+                </a:solidFill>
+              </a:rPr>
+              <a:t>You must type in this code</a:t>
+            </a:r>
+          </a:p>
+        </p:txBody>
+      </p:sp>
     </p:spTree>
     <p:extLst>
       <p:ext uri="{BB962C8B-B14F-4D97-AF65-F5344CB8AC3E}">
@@ -12849,7 +13515,7 @@
                             </p:stCondLst>
                             <p:childTnLst>
                               <p:par>
-                                <p:cTn id="5" presetID="22" presetClass="entr" presetSubtype="2" fill="hold" nodeType="afterEffect">
+                                <p:cTn id="5" presetID="2" presetClass="entr" presetSubtype="2" fill="hold" grpId="0" nodeType="afterEffect">
                                   <p:stCondLst>
                                     <p:cond delay="0"/>
                                   </p:stCondLst>
@@ -12862,7 +13528,7 @@
                                           </p:stCondLst>
                                         </p:cTn>
                                         <p:tgtEl>
-                                          <p:spTgt spid="8"/>
+                                          <p:spTgt spid="4"/>
                                         </p:tgtEl>
                                         <p:attrNameLst>
                                           <p:attrName>style.visibility</p:attrName>
@@ -12872,37 +13538,66 @@
                                         <p:strVal val="visible"/>
                                       </p:to>
                                     </p:set>
-                                    <p:animEffect transition="in" filter="wipe(right)">
-                                      <p:cBhvr>
-                                        <p:cTn id="7" dur="500"/>
-                                        <p:tgtEl>
-                                          <p:spTgt spid="8"/>
-                                        </p:tgtEl>
-                                      </p:cBhvr>
-                                    </p:animEffect>
+                                    <p:anim calcmode="lin" valueType="num">
+                                      <p:cBhvr additive="base">
+                                        <p:cTn id="7" dur="500" fill="hold"/>
+                                        <p:tgtEl>
+                                          <p:spTgt spid="4"/>
+                                        </p:tgtEl>
+                                        <p:attrNameLst>
+                                          <p:attrName>ppt_x</p:attrName>
+                                        </p:attrNameLst>
+                                      </p:cBhvr>
+                                      <p:tavLst>
+                                        <p:tav tm="0">
+                                          <p:val>
+                                            <p:strVal val="1+#ppt_w/2"/>
+                                          </p:val>
+                                        </p:tav>
+                                        <p:tav tm="100000">
+                                          <p:val>
+                                            <p:strVal val="#ppt_x"/>
+                                          </p:val>
+                                        </p:tav>
+                                      </p:tavLst>
+                                    </p:anim>
+                                    <p:anim calcmode="lin" valueType="num">
+                                      <p:cBhvr additive="base">
+                                        <p:cTn id="8" dur="500" fill="hold"/>
+                                        <p:tgtEl>
+                                          <p:spTgt spid="4"/>
+                                        </p:tgtEl>
+                                        <p:attrNameLst>
+                                          <p:attrName>ppt_y</p:attrName>
+                                        </p:attrNameLst>
+                                      </p:cBhvr>
+                                      <p:tavLst>
+                                        <p:tav tm="0">
+                                          <p:val>
+                                            <p:strVal val="#ppt_y"/>
+                                          </p:val>
+                                        </p:tav>
+                                        <p:tav tm="100000">
+                                          <p:val>
+                                            <p:strVal val="#ppt_y"/>
+                                          </p:val>
+                                        </p:tav>
+                                      </p:tavLst>
+                                    </p:anim>
                                   </p:childTnLst>
                                 </p:cTn>
                               </p:par>
                             </p:childTnLst>
                           </p:cTn>
                         </p:par>
-                      </p:childTnLst>
-                    </p:cTn>
-                  </p:par>
-                  <p:par>
-                    <p:cTn id="8" fill="hold">
-                      <p:stCondLst>
-                        <p:cond delay="indefinite"/>
-                      </p:stCondLst>
-                      <p:childTnLst>
                         <p:par>
                           <p:cTn id="9" fill="hold">
                             <p:stCondLst>
-                              <p:cond delay="0"/>
+                              <p:cond delay="500"/>
                             </p:stCondLst>
                             <p:childTnLst>
                               <p:par>
-                                <p:cTn id="10" presetID="22" presetClass="entr" presetSubtype="2" fill="hold" nodeType="clickEffect">
+                                <p:cTn id="10" presetID="22" presetClass="entr" presetSubtype="2" fill="hold" nodeType="afterEffect">
                                   <p:stCondLst>
                                     <p:cond delay="0"/>
                                   </p:stCondLst>
@@ -12915,7 +13610,7 @@
                                           </p:stCondLst>
                                         </p:cTn>
                                         <p:tgtEl>
-                                          <p:spTgt spid="17"/>
+                                          <p:spTgt spid="8"/>
                                         </p:tgtEl>
                                         <p:attrNameLst>
                                           <p:attrName>style.visibility</p:attrName>
@@ -12929,7 +13624,7 @@
                                       <p:cBhvr>
                                         <p:cTn id="12" dur="500"/>
                                         <p:tgtEl>
-                                          <p:spTgt spid="17"/>
+                                          <p:spTgt spid="8"/>
                                         </p:tgtEl>
                                       </p:cBhvr>
                                     </p:animEffect>
@@ -12955,7 +13650,7 @@
                             </p:stCondLst>
                             <p:childTnLst>
                               <p:par>
-                                <p:cTn id="15" presetID="22" presetClass="entr" presetSubtype="1" fill="hold" nodeType="clickEffect">
+                                <p:cTn id="15" presetID="22" presetClass="entr" presetSubtype="2" fill="hold" nodeType="clickEffect">
                                   <p:stCondLst>
                                     <p:cond delay="0"/>
                                   </p:stCondLst>
@@ -12968,6 +13663,59 @@
                                           </p:stCondLst>
                                         </p:cTn>
                                         <p:tgtEl>
+                                          <p:spTgt spid="17"/>
+                                        </p:tgtEl>
+                                        <p:attrNameLst>
+                                          <p:attrName>style.visibility</p:attrName>
+                                        </p:attrNameLst>
+                                      </p:cBhvr>
+                                      <p:to>
+                                        <p:strVal val="visible"/>
+                                      </p:to>
+                                    </p:set>
+                                    <p:animEffect transition="in" filter="wipe(right)">
+                                      <p:cBhvr>
+                                        <p:cTn id="17" dur="500"/>
+                                        <p:tgtEl>
+                                          <p:spTgt spid="17"/>
+                                        </p:tgtEl>
+                                      </p:cBhvr>
+                                    </p:animEffect>
+                                  </p:childTnLst>
+                                </p:cTn>
+                              </p:par>
+                            </p:childTnLst>
+                          </p:cTn>
+                        </p:par>
+                      </p:childTnLst>
+                    </p:cTn>
+                  </p:par>
+                  <p:par>
+                    <p:cTn id="18" fill="hold">
+                      <p:stCondLst>
+                        <p:cond delay="indefinite"/>
+                      </p:stCondLst>
+                      <p:childTnLst>
+                        <p:par>
+                          <p:cTn id="19" fill="hold">
+                            <p:stCondLst>
+                              <p:cond delay="0"/>
+                            </p:stCondLst>
+                            <p:childTnLst>
+                              <p:par>
+                                <p:cTn id="20" presetID="22" presetClass="entr" presetSubtype="1" fill="hold" nodeType="clickEffect">
+                                  <p:stCondLst>
+                                    <p:cond delay="0"/>
+                                  </p:stCondLst>
+                                  <p:childTnLst>
+                                    <p:set>
+                                      <p:cBhvr>
+                                        <p:cTn id="21" dur="1" fill="hold">
+                                          <p:stCondLst>
+                                            <p:cond delay="0"/>
+                                          </p:stCondLst>
+                                        </p:cTn>
+                                        <p:tgtEl>
                                           <p:spTgt spid="10"/>
                                         </p:tgtEl>
                                         <p:attrNameLst>
@@ -12980,7 +13728,7 @@
                                     </p:set>
                                     <p:animEffect transition="in" filter="wipe(up)">
                                       <p:cBhvr>
-                                        <p:cTn id="17" dur="500"/>
+                                        <p:cTn id="22" dur="500"/>
                                         <p:tgtEl>
                                           <p:spTgt spid="10"/>
                                         </p:tgtEl>
@@ -12993,20 +13741,20 @@
                           </p:cTn>
                         </p:par>
                         <p:par>
-                          <p:cTn id="18" fill="hold">
+                          <p:cTn id="23" fill="hold">
                             <p:stCondLst>
                               <p:cond delay="500"/>
                             </p:stCondLst>
                             <p:childTnLst>
                               <p:par>
-                                <p:cTn id="19" presetID="22" presetClass="entr" presetSubtype="2" fill="hold" nodeType="afterEffect">
+                                <p:cTn id="24" presetID="22" presetClass="entr" presetSubtype="2" fill="hold" nodeType="afterEffect">
                                   <p:stCondLst>
                                     <p:cond delay="0"/>
                                   </p:stCondLst>
                                   <p:childTnLst>
                                     <p:set>
                                       <p:cBhvr>
-                                        <p:cTn id="20" dur="1" fill="hold">
+                                        <p:cTn id="25" dur="1" fill="hold">
                                           <p:stCondLst>
                                             <p:cond delay="0"/>
                                           </p:stCondLst>
@@ -13024,7 +13772,7 @@
                                     </p:set>
                                     <p:animEffect transition="in" filter="wipe(right)">
                                       <p:cBhvr>
-                                        <p:cTn id="21" dur="500"/>
+                                        <p:cTn id="26" dur="500"/>
                                         <p:tgtEl>
                                           <p:spTgt spid="20"/>
                                         </p:tgtEl>
@@ -13037,20 +13785,20 @@
                           </p:cTn>
                         </p:par>
                         <p:par>
-                          <p:cTn id="22" fill="hold">
+                          <p:cTn id="27" fill="hold">
                             <p:stCondLst>
                               <p:cond delay="1000"/>
                             </p:stCondLst>
                             <p:childTnLst>
                               <p:par>
-                                <p:cTn id="23" presetID="22" presetClass="entr" presetSubtype="8" fill="hold" grpId="0" nodeType="afterEffect">
+                                <p:cTn id="28" presetID="22" presetClass="entr" presetSubtype="8" fill="hold" grpId="0" nodeType="afterEffect">
                                   <p:stCondLst>
                                     <p:cond delay="0"/>
                                   </p:stCondLst>
                                   <p:childTnLst>
                                     <p:set>
                                       <p:cBhvr>
-                                        <p:cTn id="24" dur="1" fill="hold">
+                                        <p:cTn id="29" dur="1" fill="hold">
                                           <p:stCondLst>
                                             <p:cond delay="0"/>
                                           </p:stCondLst>
@@ -13068,7 +13816,7 @@
                                     </p:set>
                                     <p:animEffect transition="in" filter="wipe(left)">
                                       <p:cBhvr>
-                                        <p:cTn id="25" dur="500"/>
+                                        <p:cTn id="30" dur="500"/>
                                         <p:tgtEl>
                                           <p:spTgt spid="6"/>
                                         </p:tgtEl>
@@ -13106,6 +13854,7 @@
     </p:tnLst>
     <p:bldLst>
       <p:bldP spid="6" grpId="0"/>
+      <p:bldP spid="4" grpId="0"/>
     </p:bldLst>
   </p:timing>
 </p:sld>
@@ -15860,6 +16609,46 @@
           </a:p>
         </p:txBody>
       </p:sp>
+      <p:sp>
+        <p:nvSpPr>
+          <p:cNvPr id="4" name="TextBox 3">
+            <a:extLst>
+              <a:ext uri="{FF2B5EF4-FFF2-40B4-BE49-F238E27FC236}">
+                <a16:creationId xmlns:a16="http://schemas.microsoft.com/office/drawing/2014/main" id="{D87A21C0-15B7-6787-245F-EB146322FA9C}"/>
+              </a:ext>
+            </a:extLst>
+          </p:cNvPr>
+          <p:cNvSpPr txBox="1"/>
+          <p:nvPr/>
+        </p:nvSpPr>
+        <p:spPr>
+          <a:xfrm>
+            <a:off x="7210925" y="365126"/>
+            <a:ext cx="1548064" cy="646331"/>
+          </a:xfrm>
+          <a:prstGeom prst="rect">
+            <a:avLst/>
+          </a:prstGeom>
+          <a:noFill/>
+        </p:spPr>
+        <p:txBody>
+          <a:bodyPr wrap="square" rtlCol="0">
+            <a:spAutoFit/>
+          </a:bodyPr>
+          <a:lstStyle/>
+          <a:p>
+            <a:pPr algn="ctr"/>
+            <a:r>
+              <a:rPr lang="en-US" b="1" dirty="0">
+                <a:solidFill>
+                  <a:srgbClr val="7030A0"/>
+                </a:solidFill>
+              </a:rPr>
+              <a:t>You must type in this code</a:t>
+            </a:r>
+          </a:p>
+        </p:txBody>
+      </p:sp>
     </p:spTree>
     <p:extLst>
       <p:ext uri="{BB962C8B-B14F-4D97-AF65-F5344CB8AC3E}">
@@ -15894,7 +16683,7 @@
                             </p:stCondLst>
                             <p:childTnLst>
                               <p:par>
-                                <p:cTn id="5" presetID="22" presetClass="entr" presetSubtype="2" fill="hold" nodeType="afterEffect">
+                                <p:cTn id="5" presetID="2" presetClass="entr" presetSubtype="2" fill="hold" grpId="0" nodeType="afterEffect">
                                   <p:stCondLst>
                                     <p:cond delay="0"/>
                                   </p:stCondLst>
@@ -15907,6 +16696,88 @@
                                           </p:stCondLst>
                                         </p:cTn>
                                         <p:tgtEl>
+                                          <p:spTgt spid="4"/>
+                                        </p:tgtEl>
+                                        <p:attrNameLst>
+                                          <p:attrName>style.visibility</p:attrName>
+                                        </p:attrNameLst>
+                                      </p:cBhvr>
+                                      <p:to>
+                                        <p:strVal val="visible"/>
+                                      </p:to>
+                                    </p:set>
+                                    <p:anim calcmode="lin" valueType="num">
+                                      <p:cBhvr additive="base">
+                                        <p:cTn id="7" dur="500" fill="hold"/>
+                                        <p:tgtEl>
+                                          <p:spTgt spid="4"/>
+                                        </p:tgtEl>
+                                        <p:attrNameLst>
+                                          <p:attrName>ppt_x</p:attrName>
+                                        </p:attrNameLst>
+                                      </p:cBhvr>
+                                      <p:tavLst>
+                                        <p:tav tm="0">
+                                          <p:val>
+                                            <p:strVal val="1+#ppt_w/2"/>
+                                          </p:val>
+                                        </p:tav>
+                                        <p:tav tm="100000">
+                                          <p:val>
+                                            <p:strVal val="#ppt_x"/>
+                                          </p:val>
+                                        </p:tav>
+                                      </p:tavLst>
+                                    </p:anim>
+                                    <p:anim calcmode="lin" valueType="num">
+                                      <p:cBhvr additive="base">
+                                        <p:cTn id="8" dur="500" fill="hold"/>
+                                        <p:tgtEl>
+                                          <p:spTgt spid="4"/>
+                                        </p:tgtEl>
+                                        <p:attrNameLst>
+                                          <p:attrName>ppt_y</p:attrName>
+                                        </p:attrNameLst>
+                                      </p:cBhvr>
+                                      <p:tavLst>
+                                        <p:tav tm="0">
+                                          <p:val>
+                                            <p:strVal val="#ppt_y"/>
+                                          </p:val>
+                                        </p:tav>
+                                        <p:tav tm="100000">
+                                          <p:val>
+                                            <p:strVal val="#ppt_y"/>
+                                          </p:val>
+                                        </p:tav>
+                                      </p:tavLst>
+                                    </p:anim>
+                                  </p:childTnLst>
+                                </p:cTn>
+                              </p:par>
+                            </p:childTnLst>
+                          </p:cTn>
+                        </p:par>
+                        <p:par>
+                          <p:cTn id="9" fill="hold">
+                            <p:stCondLst>
+                              <p:cond delay="500"/>
+                            </p:stCondLst>
+                            <p:childTnLst>
+                              <p:par>
+                                <p:cTn id="10" presetID="22" presetClass="entr" presetSubtype="2" fill="hold" nodeType="afterEffect">
+                                  <p:stCondLst>
+                                    <p:cond delay="0"/>
+                                  </p:stCondLst>
+                                  <p:childTnLst>
+                                    <p:set>
+                                      <p:cBhvr>
+                                        <p:cTn id="11" dur="1" fill="hold">
+                                          <p:stCondLst>
+                                            <p:cond delay="0"/>
+                                          </p:stCondLst>
+                                        </p:cTn>
+                                        <p:tgtEl>
                                           <p:spTgt spid="8"/>
                                         </p:tgtEl>
                                         <p:attrNameLst>
@@ -15919,7 +16790,7 @@
                                     </p:set>
                                     <p:animEffect transition="in" filter="wipe(right)">
                                       <p:cBhvr>
-                                        <p:cTn id="7" dur="500"/>
+                                        <p:cTn id="12" dur="500"/>
                                         <p:tgtEl>
                                           <p:spTgt spid="8"/>
                                         </p:tgtEl>
@@ -15932,20 +16803,20 @@
                           </p:cTn>
                         </p:par>
                         <p:par>
-                          <p:cTn id="8" fill="hold">
+                          <p:cTn id="13" fill="hold">
                             <p:stCondLst>
-                              <p:cond delay="500"/>
+                              <p:cond delay="1000"/>
                             </p:stCondLst>
                             <p:childTnLst>
                               <p:par>
-                                <p:cTn id="9" presetID="22" presetClass="entr" presetSubtype="8" fill="hold" grpId="0" nodeType="afterEffect">
+                                <p:cTn id="14" presetID="22" presetClass="entr" presetSubtype="8" fill="hold" grpId="0" nodeType="afterEffect">
                                   <p:stCondLst>
                                     <p:cond delay="0"/>
                                   </p:stCondLst>
                                   <p:childTnLst>
                                     <p:set>
                                       <p:cBhvr>
-                                        <p:cTn id="10" dur="1" fill="hold">
+                                        <p:cTn id="15" dur="1" fill="hold">
                                           <p:stCondLst>
                                             <p:cond delay="0"/>
                                           </p:stCondLst>
@@ -15963,7 +16834,7 @@
                                     </p:set>
                                     <p:animEffect transition="in" filter="wipe(left)">
                                       <p:cBhvr>
-                                        <p:cTn id="11" dur="500"/>
+                                        <p:cTn id="16" dur="500"/>
                                         <p:tgtEl>
                                           <p:spTgt spid="15"/>
                                         </p:tgtEl>
@@ -15979,26 +16850,26 @@
                     </p:cTn>
                   </p:par>
                   <p:par>
-                    <p:cTn id="12" fill="hold">
+                    <p:cTn id="17" fill="hold">
                       <p:stCondLst>
                         <p:cond delay="indefinite"/>
                       </p:stCondLst>
                       <p:childTnLst>
                         <p:par>
-                          <p:cTn id="13" fill="hold">
+                          <p:cTn id="18" fill="hold">
                             <p:stCondLst>
                               <p:cond delay="0"/>
                             </p:stCondLst>
                             <p:childTnLst>
                               <p:par>
-                                <p:cTn id="14" presetID="22" presetClass="entr" presetSubtype="1" fill="hold" nodeType="clickEffect">
+                                <p:cTn id="19" presetID="22" presetClass="entr" presetSubtype="1" fill="hold" nodeType="clickEffect">
                                   <p:stCondLst>
                                     <p:cond delay="0"/>
                                   </p:stCondLst>
                                   <p:childTnLst>
                                     <p:set>
                                       <p:cBhvr>
-                                        <p:cTn id="15" dur="1" fill="hold">
+                                        <p:cTn id="20" dur="1" fill="hold">
                                           <p:stCondLst>
                                             <p:cond delay="0"/>
                                           </p:stCondLst>
@@ -16016,7 +16887,7 @@
                                     </p:set>
                                     <p:animEffect transition="in" filter="wipe(up)">
                                       <p:cBhvr>
-                                        <p:cTn id="16" dur="500"/>
+                                        <p:cTn id="21" dur="500"/>
                                         <p:tgtEl>
                                           <p:spTgt spid="26"/>
                                         </p:tgtEl>
@@ -16029,20 +16900,20 @@
                           </p:cTn>
                         </p:par>
                         <p:par>
-                          <p:cTn id="17" fill="hold">
+                          <p:cTn id="22" fill="hold">
                             <p:stCondLst>
                               <p:cond delay="500"/>
                             </p:stCondLst>
                             <p:childTnLst>
                               <p:par>
-                                <p:cTn id="18" presetID="22" presetClass="entr" presetSubtype="2" fill="hold" nodeType="afterEffect">
+                                <p:cTn id="23" presetID="22" presetClass="entr" presetSubtype="2" fill="hold" nodeType="afterEffect">
                                   <p:stCondLst>
                                     <p:cond delay="0"/>
                                   </p:stCondLst>
                                   <p:childTnLst>
                                     <p:set>
                                       <p:cBhvr>
-                                        <p:cTn id="19" dur="1" fill="hold">
+                                        <p:cTn id="24" dur="1" fill="hold">
                                           <p:stCondLst>
                                             <p:cond delay="0"/>
                                           </p:stCondLst>
@@ -16060,7 +16931,7 @@
                                     </p:set>
                                     <p:animEffect transition="in" filter="wipe(right)">
                                       <p:cBhvr>
-                                        <p:cTn id="20" dur="500"/>
+                                        <p:cTn id="25" dur="500"/>
                                         <p:tgtEl>
                                           <p:spTgt spid="17"/>
                                         </p:tgtEl>
@@ -16076,26 +16947,26 @@
                     </p:cTn>
                   </p:par>
                   <p:par>
-                    <p:cTn id="21" fill="hold">
+                    <p:cTn id="26" fill="hold">
                       <p:stCondLst>
                         <p:cond delay="indefinite"/>
                       </p:stCondLst>
                       <p:childTnLst>
                         <p:par>
-                          <p:cTn id="22" fill="hold">
+                          <p:cTn id="27" fill="hold">
                             <p:stCondLst>
                               <p:cond delay="0"/>
                             </p:stCondLst>
                             <p:childTnLst>
                               <p:par>
-                                <p:cTn id="23" presetID="22" presetClass="entr" presetSubtype="2" fill="hold" nodeType="clickEffect">
+                                <p:cTn id="28" presetID="22" presetClass="entr" presetSubtype="2" fill="hold" nodeType="clickEffect">
                                   <p:stCondLst>
                                     <p:cond delay="0"/>
                                   </p:stCondLst>
                                   <p:childTnLst>
                                     <p:set>
                                       <p:cBhvr>
-                                        <p:cTn id="24" dur="1" fill="hold">
+                                        <p:cTn id="29" dur="1" fill="hold">
                                           <p:stCondLst>
                                             <p:cond delay="0"/>
                                           </p:stCondLst>
@@ -16113,7 +16984,7 @@
                                     </p:set>
                                     <p:animEffect transition="in" filter="wipe(right)">
                                       <p:cBhvr>
-                                        <p:cTn id="25" dur="500"/>
+                                        <p:cTn id="30" dur="500"/>
                                         <p:tgtEl>
                                           <p:spTgt spid="20"/>
                                         </p:tgtEl>
@@ -16126,20 +16997,20 @@
                           </p:cTn>
                         </p:par>
                         <p:par>
-                          <p:cTn id="26" fill="hold">
+                          <p:cTn id="31" fill="hold">
                             <p:stCondLst>
                               <p:cond delay="500"/>
                             </p:stCondLst>
                             <p:childTnLst>
                               <p:par>
-                                <p:cTn id="27" presetID="22" presetClass="entr" presetSubtype="8" fill="hold" grpId="0" nodeType="afterEffect">
+                                <p:cTn id="32" presetID="22" presetClass="entr" presetSubtype="8" fill="hold" grpId="0" nodeType="afterEffect">
                                   <p:stCondLst>
                                     <p:cond delay="0"/>
                                   </p:stCondLst>
                                   <p:childTnLst>
                                     <p:set>
                                       <p:cBhvr>
-                                        <p:cTn id="28" dur="1" fill="hold">
+                                        <p:cTn id="33" dur="1" fill="hold">
                                           <p:stCondLst>
                                             <p:cond delay="0"/>
                                           </p:stCondLst>
@@ -16157,7 +17028,7 @@
                                     </p:set>
                                     <p:animEffect transition="in" filter="wipe(left)">
                                       <p:cBhvr>
-                                        <p:cTn id="29" dur="500"/>
+                                        <p:cTn id="34" dur="500"/>
                                         <p:tgtEl>
                                           <p:spTgt spid="6"/>
                                         </p:tgtEl>
@@ -16173,26 +17044,26 @@
                     </p:cTn>
                   </p:par>
                   <p:par>
-                    <p:cTn id="30" fill="hold">
+                    <p:cTn id="35" fill="hold">
                       <p:stCondLst>
                         <p:cond delay="indefinite"/>
                       </p:stCondLst>
                       <p:childTnLst>
                         <p:par>
-                          <p:cTn id="31" fill="hold">
+                          <p:cTn id="36" fill="hold">
                             <p:stCondLst>
                               <p:cond delay="0"/>
                             </p:stCondLst>
                             <p:childTnLst>
                               <p:par>
-                                <p:cTn id="32" presetID="22" presetClass="entr" presetSubtype="2" fill="hold" nodeType="clickEffect">
+                                <p:cTn id="37" presetID="22" presetClass="entr" presetSubtype="2" fill="hold" nodeType="clickEffect">
                                   <p:stCondLst>
                                     <p:cond delay="0"/>
                                   </p:stCondLst>
                                   <p:childTnLst>
                                     <p:set>
                                       <p:cBhvr>
-                                        <p:cTn id="33" dur="1" fill="hold">
+                                        <p:cTn id="38" dur="1" fill="hold">
                                           <p:stCondLst>
                                             <p:cond delay="0"/>
                                           </p:stCondLst>
@@ -16210,7 +17081,7 @@
                                     </p:set>
                                     <p:animEffect transition="in" filter="wipe(right)">
                                       <p:cBhvr>
-                                        <p:cTn id="34" dur="500"/>
+                                        <p:cTn id="39" dur="500"/>
                                         <p:tgtEl>
                                           <p:spTgt spid="9"/>
                                         </p:tgtEl>
@@ -16249,6 +17120,7 @@
     <p:bldLst>
       <p:bldP spid="6" grpId="0"/>
       <p:bldP spid="15" grpId="0"/>
+      <p:bldP spid="4" grpId="0"/>
     </p:bldLst>
   </p:timing>
 </p:sld>
@@ -17270,6 +18142,46 @@
           </a:prstGeom>
         </p:spPr>
       </p:pic>
+      <p:sp>
+        <p:nvSpPr>
+          <p:cNvPr id="4" name="TextBox 3">
+            <a:extLst>
+              <a:ext uri="{FF2B5EF4-FFF2-40B4-BE49-F238E27FC236}">
+                <a16:creationId xmlns:a16="http://schemas.microsoft.com/office/drawing/2014/main" id="{A11E796A-F04A-667B-70AE-D73F81FFBD8B}"/>
+              </a:ext>
+            </a:extLst>
+          </p:cNvPr>
+          <p:cNvSpPr txBox="1"/>
+          <p:nvPr/>
+        </p:nvSpPr>
+        <p:spPr>
+          <a:xfrm>
+            <a:off x="7210925" y="365126"/>
+            <a:ext cx="1548064" cy="646331"/>
+          </a:xfrm>
+          <a:prstGeom prst="rect">
+            <a:avLst/>
+          </a:prstGeom>
+          <a:noFill/>
+        </p:spPr>
+        <p:txBody>
+          <a:bodyPr wrap="square" rtlCol="0">
+            <a:spAutoFit/>
+          </a:bodyPr>
+          <a:lstStyle/>
+          <a:p>
+            <a:pPr algn="ctr"/>
+            <a:r>
+              <a:rPr lang="en-US" b="1" dirty="0">
+                <a:solidFill>
+                  <a:srgbClr val="7030A0"/>
+                </a:solidFill>
+              </a:rPr>
+              <a:t>You must type in this code</a:t>
+            </a:r>
+          </a:p>
+        </p:txBody>
+      </p:sp>
     </p:spTree>
     <p:extLst>
       <p:ext uri="{BB962C8B-B14F-4D97-AF65-F5344CB8AC3E}">
@@ -17304,7 +18216,7 @@
                             </p:stCondLst>
                             <p:childTnLst>
                               <p:par>
-                                <p:cTn id="5" presetID="22" presetClass="entr" presetSubtype="2" fill="hold" nodeType="afterEffect">
+                                <p:cTn id="5" presetID="2" presetClass="entr" presetSubtype="2" fill="hold" grpId="0" nodeType="afterEffect">
                                   <p:stCondLst>
                                     <p:cond delay="0"/>
                                   </p:stCondLst>
@@ -17317,6 +18229,88 @@
                                           </p:stCondLst>
                                         </p:cTn>
                                         <p:tgtEl>
+                                          <p:spTgt spid="4"/>
+                                        </p:tgtEl>
+                                        <p:attrNameLst>
+                                          <p:attrName>style.visibility</p:attrName>
+                                        </p:attrNameLst>
+                                      </p:cBhvr>
+                                      <p:to>
+                                        <p:strVal val="visible"/>
+                                      </p:to>
+                                    </p:set>
+                                    <p:anim calcmode="lin" valueType="num">
+                                      <p:cBhvr additive="base">
+                                        <p:cTn id="7" dur="500" fill="hold"/>
+                                        <p:tgtEl>
+                                          <p:spTgt spid="4"/>
+                                        </p:tgtEl>
+                                        <p:attrNameLst>
+                                          <p:attrName>ppt_x</p:attrName>
+                                        </p:attrNameLst>
+                                      </p:cBhvr>
+                                      <p:tavLst>
+                                        <p:tav tm="0">
+                                          <p:val>
+                                            <p:strVal val="1+#ppt_w/2"/>
+                                          </p:val>
+                                        </p:tav>
+                                        <p:tav tm="100000">
+                                          <p:val>
+                                            <p:strVal val="#ppt_x"/>
+                                          </p:val>
+                                        </p:tav>
+                                      </p:tavLst>
+                                    </p:anim>
+                                    <p:anim calcmode="lin" valueType="num">
+                                      <p:cBhvr additive="base">
+                                        <p:cTn id="8" dur="500" fill="hold"/>
+                                        <p:tgtEl>
+                                          <p:spTgt spid="4"/>
+                                        </p:tgtEl>
+                                        <p:attrNameLst>
+                                          <p:attrName>ppt_y</p:attrName>
+                                        </p:attrNameLst>
+                                      </p:cBhvr>
+                                      <p:tavLst>
+                                        <p:tav tm="0">
+                                          <p:val>
+                                            <p:strVal val="#ppt_y"/>
+                                          </p:val>
+                                        </p:tav>
+                                        <p:tav tm="100000">
+                                          <p:val>
+                                            <p:strVal val="#ppt_y"/>
+                                          </p:val>
+                                        </p:tav>
+                                      </p:tavLst>
+                                    </p:anim>
+                                  </p:childTnLst>
+                                </p:cTn>
+                              </p:par>
+                            </p:childTnLst>
+                          </p:cTn>
+                        </p:par>
+                        <p:par>
+                          <p:cTn id="9" fill="hold">
+                            <p:stCondLst>
+                              <p:cond delay="500"/>
+                            </p:stCondLst>
+                            <p:childTnLst>
+                              <p:par>
+                                <p:cTn id="10" presetID="22" presetClass="entr" presetSubtype="2" fill="hold" nodeType="afterEffect">
+                                  <p:stCondLst>
+                                    <p:cond delay="0"/>
+                                  </p:stCondLst>
+                                  <p:childTnLst>
+                                    <p:set>
+                                      <p:cBhvr>
+                                        <p:cTn id="11" dur="1" fill="hold">
+                                          <p:stCondLst>
+                                            <p:cond delay="0"/>
+                                          </p:stCondLst>
+                                        </p:cTn>
+                                        <p:tgtEl>
                                           <p:spTgt spid="11"/>
                                         </p:tgtEl>
                                         <p:attrNameLst>
@@ -17329,7 +18323,7 @@
                                     </p:set>
                                     <p:animEffect transition="in" filter="wipe(right)">
                                       <p:cBhvr>
-                                        <p:cTn id="7" dur="500"/>
+                                        <p:cTn id="12" dur="500"/>
                                         <p:tgtEl>
                                           <p:spTgt spid="11"/>
                                         </p:tgtEl>
@@ -17342,20 +18336,20 @@
                           </p:cTn>
                         </p:par>
                         <p:par>
-                          <p:cTn id="8" fill="hold">
+                          <p:cTn id="13" fill="hold">
                             <p:stCondLst>
-                              <p:cond delay="500"/>
+                              <p:cond delay="1000"/>
                             </p:stCondLst>
                             <p:childTnLst>
                               <p:par>
-                                <p:cTn id="9" presetID="22" presetClass="entr" presetSubtype="1" fill="hold" grpId="0" nodeType="afterEffect">
+                                <p:cTn id="14" presetID="22" presetClass="entr" presetSubtype="1" fill="hold" grpId="0" nodeType="afterEffect">
                                   <p:stCondLst>
                                     <p:cond delay="0"/>
                                   </p:stCondLst>
                                   <p:childTnLst>
                                     <p:set>
                                       <p:cBhvr>
-                                        <p:cTn id="10" dur="1" fill="hold">
+                                        <p:cTn id="15" dur="1" fill="hold">
                                           <p:stCondLst>
                                             <p:cond delay="0"/>
                                           </p:stCondLst>
@@ -17373,7 +18367,7 @@
                                     </p:set>
                                     <p:animEffect transition="in" filter="wipe(up)">
                                       <p:cBhvr>
-                                        <p:cTn id="11" dur="500"/>
+                                        <p:cTn id="16" dur="500"/>
                                         <p:tgtEl>
                                           <p:spTgt spid="27"/>
                                         </p:tgtEl>
@@ -17389,26 +18383,26 @@
                     </p:cTn>
                   </p:par>
                   <p:par>
-                    <p:cTn id="12" fill="hold">
+                    <p:cTn id="17" fill="hold">
                       <p:stCondLst>
                         <p:cond delay="indefinite"/>
                       </p:stCondLst>
                       <p:childTnLst>
                         <p:par>
-                          <p:cTn id="13" fill="hold">
+                          <p:cTn id="18" fill="hold">
                             <p:stCondLst>
                               <p:cond delay="0"/>
                             </p:stCondLst>
                             <p:childTnLst>
                               <p:par>
-                                <p:cTn id="14" presetID="22" presetClass="entr" presetSubtype="2" fill="hold" nodeType="clickEffect">
+                                <p:cTn id="19" presetID="22" presetClass="entr" presetSubtype="2" fill="hold" nodeType="clickEffect">
                                   <p:stCondLst>
                                     <p:cond delay="0"/>
                                   </p:stCondLst>
                                   <p:childTnLst>
                                     <p:set>
                                       <p:cBhvr>
-                                        <p:cTn id="15" dur="1" fill="hold">
+                                        <p:cTn id="20" dur="1" fill="hold">
                                           <p:stCondLst>
                                             <p:cond delay="0"/>
                                           </p:stCondLst>
@@ -17426,7 +18420,7 @@
                                     </p:set>
                                     <p:animEffect transition="in" filter="wipe(right)">
                                       <p:cBhvr>
-                                        <p:cTn id="16" dur="500"/>
+                                        <p:cTn id="21" dur="500"/>
                                         <p:tgtEl>
                                           <p:spTgt spid="14"/>
                                         </p:tgtEl>
@@ -17439,20 +18433,20 @@
                           </p:cTn>
                         </p:par>
                         <p:par>
-                          <p:cTn id="17" fill="hold">
+                          <p:cTn id="22" fill="hold">
                             <p:stCondLst>
                               <p:cond delay="500"/>
                             </p:stCondLst>
                             <p:childTnLst>
                               <p:par>
-                                <p:cTn id="18" presetID="22" presetClass="entr" presetSubtype="1" fill="hold" grpId="0" nodeType="afterEffect">
+                                <p:cTn id="23" presetID="22" presetClass="entr" presetSubtype="1" fill="hold" grpId="0" nodeType="afterEffect">
                                   <p:stCondLst>
                                     <p:cond delay="0"/>
                                   </p:stCondLst>
                                   <p:childTnLst>
                                     <p:set>
                                       <p:cBhvr>
-                                        <p:cTn id="19" dur="1" fill="hold">
+                                        <p:cTn id="24" dur="1" fill="hold">
                                           <p:stCondLst>
                                             <p:cond delay="0"/>
                                           </p:stCondLst>
@@ -17470,7 +18464,7 @@
                                     </p:set>
                                     <p:animEffect transition="in" filter="wipe(up)">
                                       <p:cBhvr>
-                                        <p:cTn id="20" dur="500"/>
+                                        <p:cTn id="25" dur="500"/>
                                         <p:tgtEl>
                                           <p:spTgt spid="28"/>
                                         </p:tgtEl>
@@ -17486,26 +18480,26 @@
                     </p:cTn>
                   </p:par>
                   <p:par>
-                    <p:cTn id="21" fill="hold">
+                    <p:cTn id="26" fill="hold">
                       <p:stCondLst>
                         <p:cond delay="indefinite"/>
                       </p:stCondLst>
                       <p:childTnLst>
                         <p:par>
-                          <p:cTn id="22" fill="hold">
+                          <p:cTn id="27" fill="hold">
                             <p:stCondLst>
                               <p:cond delay="0"/>
                             </p:stCondLst>
                             <p:childTnLst>
                               <p:par>
-                                <p:cTn id="23" presetID="22" presetClass="entr" presetSubtype="2" fill="hold" nodeType="clickEffect">
+                                <p:cTn id="28" presetID="22" presetClass="entr" presetSubtype="2" fill="hold" nodeType="clickEffect">
                                   <p:stCondLst>
                                     <p:cond delay="0"/>
                                   </p:stCondLst>
                                   <p:childTnLst>
                                     <p:set>
                                       <p:cBhvr>
-                                        <p:cTn id="24" dur="1" fill="hold">
+                                        <p:cTn id="29" dur="1" fill="hold">
                                           <p:stCondLst>
                                             <p:cond delay="0"/>
                                           </p:stCondLst>
@@ -17523,7 +18517,7 @@
                                     </p:set>
                                     <p:animEffect transition="in" filter="wipe(right)">
                                       <p:cBhvr>
-                                        <p:cTn id="25" dur="500"/>
+                                        <p:cTn id="30" dur="500"/>
                                         <p:tgtEl>
                                           <p:spTgt spid="17"/>
                                         </p:tgtEl>
@@ -17536,20 +18530,20 @@
                           </p:cTn>
                         </p:par>
                         <p:par>
-                          <p:cTn id="26" fill="hold">
+                          <p:cTn id="31" fill="hold">
                             <p:stCondLst>
                               <p:cond delay="500"/>
                             </p:stCondLst>
                             <p:childTnLst>
                               <p:par>
-                                <p:cTn id="27" presetID="22" presetClass="entr" presetSubtype="1" fill="hold" grpId="0" nodeType="afterEffect">
+                                <p:cTn id="32" presetID="22" presetClass="entr" presetSubtype="1" fill="hold" grpId="0" nodeType="afterEffect">
                                   <p:stCondLst>
                                     <p:cond delay="0"/>
                                   </p:stCondLst>
                                   <p:childTnLst>
                                     <p:set>
                                       <p:cBhvr>
-                                        <p:cTn id="28" dur="1" fill="hold">
+                                        <p:cTn id="33" dur="1" fill="hold">
                                           <p:stCondLst>
                                             <p:cond delay="0"/>
                                           </p:stCondLst>
@@ -17567,7 +18561,7 @@
                                     </p:set>
                                     <p:animEffect transition="in" filter="wipe(up)">
                                       <p:cBhvr>
-                                        <p:cTn id="29" dur="500"/>
+                                        <p:cTn id="34" dur="500"/>
                                         <p:tgtEl>
                                           <p:spTgt spid="29"/>
                                         </p:tgtEl>
@@ -17583,26 +18577,26 @@
                     </p:cTn>
                   </p:par>
                   <p:par>
-                    <p:cTn id="30" fill="hold">
+                    <p:cTn id="35" fill="hold">
                       <p:stCondLst>
                         <p:cond delay="indefinite"/>
                       </p:stCondLst>
                       <p:childTnLst>
                         <p:par>
-                          <p:cTn id="31" fill="hold">
+                          <p:cTn id="36" fill="hold">
                             <p:stCondLst>
                               <p:cond delay="0"/>
                             </p:stCondLst>
                             <p:childTnLst>
                               <p:par>
-                                <p:cTn id="32" presetID="22" presetClass="entr" presetSubtype="2" fill="hold" nodeType="clickEffect">
+                                <p:cTn id="37" presetID="22" presetClass="entr" presetSubtype="2" fill="hold" nodeType="clickEffect">
                                   <p:stCondLst>
                                     <p:cond delay="0"/>
                                   </p:stCondLst>
                                   <p:childTnLst>
                                     <p:set>
                                       <p:cBhvr>
-                                        <p:cTn id="33" dur="1" fill="hold">
+                                        <p:cTn id="38" dur="1" fill="hold">
                                           <p:stCondLst>
                                             <p:cond delay="0"/>
                                           </p:stCondLst>
@@ -17620,7 +18614,7 @@
                                     </p:set>
                                     <p:animEffect transition="in" filter="wipe(right)">
                                       <p:cBhvr>
-                                        <p:cTn id="34" dur="500"/>
+                                        <p:cTn id="39" dur="500"/>
                                         <p:tgtEl>
                                           <p:spTgt spid="20"/>
                                         </p:tgtEl>
@@ -17633,20 +18627,20 @@
                           </p:cTn>
                         </p:par>
                         <p:par>
-                          <p:cTn id="35" fill="hold">
+                          <p:cTn id="40" fill="hold">
                             <p:stCondLst>
                               <p:cond delay="500"/>
                             </p:stCondLst>
                             <p:childTnLst>
                               <p:par>
-                                <p:cTn id="36" presetID="22" presetClass="entr" presetSubtype="1" fill="hold" grpId="0" nodeType="afterEffect">
+                                <p:cTn id="41" presetID="22" presetClass="entr" presetSubtype="1" fill="hold" grpId="0" nodeType="afterEffect">
                                   <p:stCondLst>
                                     <p:cond delay="0"/>
                                   </p:stCondLst>
                                   <p:childTnLst>
                                     <p:set>
                                       <p:cBhvr>
-                                        <p:cTn id="37" dur="1" fill="hold">
+                                        <p:cTn id="42" dur="1" fill="hold">
                                           <p:stCondLst>
                                             <p:cond delay="0"/>
                                           </p:stCondLst>
@@ -17664,7 +18658,7 @@
                                     </p:set>
                                     <p:animEffect transition="in" filter="wipe(up)">
                                       <p:cBhvr>
-                                        <p:cTn id="38" dur="500"/>
+                                        <p:cTn id="43" dur="500"/>
                                         <p:tgtEl>
                                           <p:spTgt spid="30"/>
                                         </p:tgtEl>
@@ -17680,26 +18674,26 @@
                     </p:cTn>
                   </p:par>
                   <p:par>
-                    <p:cTn id="39" fill="hold">
+                    <p:cTn id="44" fill="hold">
                       <p:stCondLst>
                         <p:cond delay="indefinite"/>
                       </p:stCondLst>
                       <p:childTnLst>
                         <p:par>
-                          <p:cTn id="40" fill="hold">
+                          <p:cTn id="45" fill="hold">
                             <p:stCondLst>
                               <p:cond delay="0"/>
                             </p:stCondLst>
                             <p:childTnLst>
                               <p:par>
-                                <p:cTn id="41" presetID="22" presetClass="entr" presetSubtype="8" fill="hold" nodeType="clickEffect">
+                                <p:cTn id="46" presetID="22" presetClass="entr" presetSubtype="8" fill="hold" nodeType="clickEffect">
                                   <p:stCondLst>
                                     <p:cond delay="0"/>
                                   </p:stCondLst>
                                   <p:childTnLst>
                                     <p:set>
                                       <p:cBhvr>
-                                        <p:cTn id="42" dur="1" fill="hold">
+                                        <p:cTn id="47" dur="1" fill="hold">
                                           <p:stCondLst>
                                             <p:cond delay="0"/>
                                           </p:stCondLst>
@@ -17717,7 +18711,7 @@
                                     </p:set>
                                     <p:animEffect transition="in" filter="wipe(left)">
                                       <p:cBhvr>
-                                        <p:cTn id="43" dur="500"/>
+                                        <p:cTn id="48" dur="500"/>
                                         <p:tgtEl>
                                           <p:spTgt spid="31"/>
                                         </p:tgtEl>
@@ -17730,20 +18724,20 @@
                           </p:cTn>
                         </p:par>
                         <p:par>
-                          <p:cTn id="44" fill="hold">
+                          <p:cTn id="49" fill="hold">
                             <p:stCondLst>
                               <p:cond delay="500"/>
                             </p:stCondLst>
                             <p:childTnLst>
                               <p:par>
-                                <p:cTn id="45" presetID="22" presetClass="entr" presetSubtype="2" fill="hold" nodeType="afterEffect">
+                                <p:cTn id="50" presetID="22" presetClass="entr" presetSubtype="2" fill="hold" nodeType="afterEffect">
                                   <p:stCondLst>
                                     <p:cond delay="0"/>
                                   </p:stCondLst>
                                   <p:childTnLst>
                                     <p:set>
                                       <p:cBhvr>
-                                        <p:cTn id="46" dur="1" fill="hold">
+                                        <p:cTn id="51" dur="1" fill="hold">
                                           <p:stCondLst>
                                             <p:cond delay="0"/>
                                           </p:stCondLst>
@@ -17761,7 +18755,7 @@
                                     </p:set>
                                     <p:animEffect transition="in" filter="wipe(right)">
                                       <p:cBhvr>
-                                        <p:cTn id="47" dur="500"/>
+                                        <p:cTn id="52" dur="500"/>
                                         <p:tgtEl>
                                           <p:spTgt spid="23"/>
                                         </p:tgtEl>
@@ -17802,6 +18796,7 @@
       <p:bldP spid="28" grpId="0"/>
       <p:bldP spid="29" grpId="0"/>
       <p:bldP spid="30" grpId="0"/>
+      <p:bldP spid="4" grpId="0"/>
     </p:bldLst>
   </p:timing>
 </p:sld>
@@ -19851,6 +20846,148 @@
   <p:cSld>
     <p:spTree>
       <p:nvGrpSpPr>
+        <p:cNvPr id="1" name="">
+          <a:extLst>
+            <a:ext uri="{FF2B5EF4-FFF2-40B4-BE49-F238E27FC236}">
+              <a16:creationId xmlns:a16="http://schemas.microsoft.com/office/drawing/2014/main" id="{14B73195-25D6-581B-02F0-E5B483A0B4D4}"/>
+            </a:ext>
+          </a:extLst>
+        </p:cNvPr>
+        <p:cNvGrpSpPr/>
+        <p:nvPr/>
+      </p:nvGrpSpPr>
+      <p:grpSpPr>
+        <a:xfrm>
+          <a:off x="0" y="0"/>
+          <a:ext cx="0" cy="0"/>
+          <a:chOff x="0" y="0"/>
+          <a:chExt cx="0" cy="0"/>
+        </a:xfrm>
+      </p:grpSpPr>
+      <p:sp>
+        <p:nvSpPr>
+          <p:cNvPr id="2" name="Title 1">
+            <a:extLst>
+              <a:ext uri="{FF2B5EF4-FFF2-40B4-BE49-F238E27FC236}">
+                <a16:creationId xmlns:a16="http://schemas.microsoft.com/office/drawing/2014/main" id="{E3AC9D3C-CF6A-B81C-2BD6-7E1EB3EBB1BC}"/>
+              </a:ext>
+            </a:extLst>
+          </p:cNvPr>
+          <p:cNvSpPr>
+            <a:spLocks noGrp="1"/>
+          </p:cNvSpPr>
+          <p:nvPr>
+            <p:ph type="title"/>
+          </p:nvPr>
+        </p:nvSpPr>
+        <p:spPr>
+          <a:xfrm>
+            <a:off x="628650" y="365126"/>
+            <a:ext cx="7886700" cy="1103455"/>
+          </a:xfrm>
+        </p:spPr>
+        <p:txBody>
+          <a:bodyPr>
+            <a:noAutofit/>
+          </a:bodyPr>
+          <a:lstStyle/>
+          <a:p>
+            <a:pPr algn="ctr"/>
+            <a:r>
+              <a:rPr lang="en-US" sz="3200" b="1" dirty="0">
+                <a:solidFill>
+                  <a:srgbClr val="7030A0"/>
+                </a:solidFill>
+                <a:latin typeface="+mn-lt"/>
+              </a:rPr>
+              <a:t>for</a:t>
+            </a:r>
+            <a:r>
+              <a:rPr lang="en-US" sz="3200" dirty="0">
+                <a:latin typeface="+mn-lt"/>
+              </a:rPr>
+              <a:t> loops</a:t>
+            </a:r>
+          </a:p>
+        </p:txBody>
+      </p:sp>
+      <p:sp>
+        <p:nvSpPr>
+          <p:cNvPr id="7" name="Slide Number Placeholder 6">
+            <a:extLst>
+              <a:ext uri="{FF2B5EF4-FFF2-40B4-BE49-F238E27FC236}">
+                <a16:creationId xmlns:a16="http://schemas.microsoft.com/office/drawing/2014/main" id="{F2CCBF58-9D0F-97F5-6A8B-C19376C82B54}"/>
+              </a:ext>
+            </a:extLst>
+          </p:cNvPr>
+          <p:cNvSpPr>
+            <a:spLocks noGrp="1"/>
+          </p:cNvSpPr>
+          <p:nvPr>
+            <p:ph type="sldNum" sz="quarter" idx="12"/>
+          </p:nvPr>
+        </p:nvSpPr>
+        <p:spPr/>
+        <p:txBody>
+          <a:bodyPr/>
+          <a:lstStyle/>
+          <a:p>
+            <a:fld id="{650AD656-6FF9-465D-B7B0-1CD0DD39CD23}" type="slidenum">
+              <a:rPr lang="en-US" smtClean="0"/>
+              <a:t>28</a:t>
+            </a:fld>
+            <a:endParaRPr lang="en-US" dirty="0"/>
+          </a:p>
+        </p:txBody>
+      </p:sp>
+      <p:pic>
+        <p:nvPicPr>
+          <p:cNvPr id="3" name="Picture 2">
+            <a:extLst>
+              <a:ext uri="{FF2B5EF4-FFF2-40B4-BE49-F238E27FC236}">
+                <a16:creationId xmlns:a16="http://schemas.microsoft.com/office/drawing/2014/main" id="{A29D8BC3-F02D-BB62-0367-AA78ED34F4B0}"/>
+              </a:ext>
+            </a:extLst>
+          </p:cNvPr>
+          <p:cNvPicPr>
+            <a:picLocks noChangeAspect="1"/>
+          </p:cNvPicPr>
+          <p:nvPr/>
+        </p:nvPicPr>
+        <p:blipFill>
+          <a:blip r:embed="rId2"/>
+          <a:stretch>
+            <a:fillRect/>
+          </a:stretch>
+        </p:blipFill>
+        <p:spPr>
+          <a:xfrm>
+            <a:off x="573505" y="1382373"/>
+            <a:ext cx="7996989" cy="4703746"/>
+          </a:xfrm>
+          <a:prstGeom prst="rect">
+            <a:avLst/>
+          </a:prstGeom>
+        </p:spPr>
+      </p:pic>
+    </p:spTree>
+    <p:extLst>
+      <p:ext uri="{BB962C8B-B14F-4D97-AF65-F5344CB8AC3E}">
+        <p14:creationId xmlns:p14="http://schemas.microsoft.com/office/powerpoint/2010/main" val="476521684"/>
+      </p:ext>
+    </p:extLst>
+  </p:cSld>
+  <p:clrMapOvr>
+    <a:masterClrMapping/>
+  </p:clrMapOvr>
+</p:sld>
+</file>
+
+<file path=ppt/slides/slide29.xml><?xml version="1.0" encoding="utf-8"?>
+<p:sld xmlns:a="http://schemas.openxmlformats.org/drawingml/2006/main" xmlns:r="http://schemas.openxmlformats.org/officeDocument/2006/relationships" xmlns:p="http://schemas.openxmlformats.org/presentationml/2006/main">
+  <p:cSld>
+    <p:spTree>
+      <p:nvGrpSpPr>
         <p:cNvPr id="1" name=""/>
         <p:cNvGrpSpPr/>
         <p:nvPr/>
@@ -19880,7 +21017,7 @@
           <a:p>
             <a:fld id="{650AD656-6FF9-465D-B7B0-1CD0DD39CD23}" type="slidenum">
               <a:rPr lang="en-US" smtClean="0"/>
-              <a:t>28</a:t>
+              <a:t>29</a:t>
             </a:fld>
             <a:endParaRPr lang="en-US" dirty="0"/>
           </a:p>
@@ -20114,676 +21251,6 @@
 </p:sld>
 </file>
 
-<file path=ppt/slides/slide29.xml><?xml version="1.0" encoding="utf-8"?>
-<p:sld xmlns:a="http://schemas.openxmlformats.org/drawingml/2006/main" xmlns:r="http://schemas.openxmlformats.org/officeDocument/2006/relationships" xmlns:p="http://schemas.openxmlformats.org/presentationml/2006/main">
-  <p:cSld>
-    <p:spTree>
-      <p:nvGrpSpPr>
-        <p:cNvPr id="1" name=""/>
-        <p:cNvGrpSpPr/>
-        <p:nvPr/>
-      </p:nvGrpSpPr>
-      <p:grpSpPr>
-        <a:xfrm>
-          <a:off x="0" y="0"/>
-          <a:ext cx="0" cy="0"/>
-          <a:chOff x="0" y="0"/>
-          <a:chExt cx="0" cy="0"/>
-        </a:xfrm>
-      </p:grpSpPr>
-      <p:sp>
-        <p:nvSpPr>
-          <p:cNvPr id="2" name="Title 1"/>
-          <p:cNvSpPr>
-            <a:spLocks noGrp="1"/>
-          </p:cNvSpPr>
-          <p:nvPr>
-            <p:ph type="title"/>
-          </p:nvPr>
-        </p:nvSpPr>
-        <p:spPr>
-          <a:xfrm>
-            <a:off x="628650" y="365126"/>
-            <a:ext cx="7886700" cy="1103455"/>
-          </a:xfrm>
-        </p:spPr>
-        <p:txBody>
-          <a:bodyPr>
-            <a:noAutofit/>
-          </a:bodyPr>
-          <a:lstStyle/>
-          <a:p>
-            <a:pPr algn="ctr"/>
-            <a:r>
-              <a:rPr lang="en-US" sz="3200" dirty="0">
-                <a:latin typeface="+mn-lt"/>
-              </a:rPr>
-              <a:t>Temperature Conversion</a:t>
-            </a:r>
-          </a:p>
-        </p:txBody>
-      </p:sp>
-      <p:sp>
-        <p:nvSpPr>
-          <p:cNvPr id="3" name="Content Placeholder 2"/>
-          <p:cNvSpPr>
-            <a:spLocks noGrp="1"/>
-          </p:cNvSpPr>
-          <p:nvPr>
-            <p:ph idx="1"/>
-          </p:nvPr>
-        </p:nvSpPr>
-        <p:spPr>
-          <a:xfrm>
-            <a:off x="628650" y="1825624"/>
-            <a:ext cx="7886700" cy="4589689"/>
-          </a:xfrm>
-        </p:spPr>
-        <p:txBody>
-          <a:bodyPr>
-            <a:noAutofit/>
-          </a:bodyPr>
-          <a:lstStyle/>
-          <a:p>
-            <a:pPr>
-              <a:spcBef>
-                <a:spcPts val="0"/>
-              </a:spcBef>
-              <a:spcAft>
-                <a:spcPts val="1200"/>
-              </a:spcAft>
-            </a:pPr>
-            <a:r>
-              <a:rPr lang="en-US" sz="2400" dirty="0"/>
-              <a:t>Your scientist needs a program to calculate the correct Celsius temperature for a given Fahrenheit temperature</a:t>
-            </a:r>
-          </a:p>
-          <a:p>
-            <a:pPr>
-              <a:spcBef>
-                <a:spcPts val="0"/>
-              </a:spcBef>
-              <a:spcAft>
-                <a:spcPts val="1200"/>
-              </a:spcAft>
-            </a:pPr>
-            <a:r>
-              <a:rPr lang="en-US" sz="2400" dirty="0"/>
-              <a:t>Display values between </a:t>
-            </a:r>
-            <a:r>
-              <a:rPr lang="en-US" sz="2400" b="1" dirty="0"/>
-              <a:t>-44°F </a:t>
-            </a:r>
-            <a:r>
-              <a:rPr lang="en-US" sz="2400" dirty="0"/>
-              <a:t>and </a:t>
-            </a:r>
-            <a:r>
-              <a:rPr lang="en-US" sz="2400" b="1" dirty="0"/>
-              <a:t>216°F</a:t>
-            </a:r>
-            <a:r>
-              <a:rPr lang="en-US" sz="2400" dirty="0"/>
-              <a:t> </a:t>
-            </a:r>
-            <a:r>
-              <a:rPr lang="en-US" sz="2400" b="1" i="1" dirty="0">
-                <a:solidFill>
-                  <a:srgbClr val="FF0000"/>
-                </a:solidFill>
-              </a:rPr>
-              <a:t>inclusive</a:t>
-            </a:r>
-          </a:p>
-          <a:p>
-            <a:pPr>
-              <a:spcBef>
-                <a:spcPts val="0"/>
-              </a:spcBef>
-              <a:spcAft>
-                <a:spcPts val="1200"/>
-              </a:spcAft>
-            </a:pPr>
-            <a:r>
-              <a:rPr lang="en-US" sz="2400" dirty="0"/>
-              <a:t>Your code should increment the temperature in steps of </a:t>
-            </a:r>
-            <a:r>
-              <a:rPr lang="en-US" sz="2400" b="1" dirty="0">
-                <a:solidFill>
-                  <a:srgbClr val="0070C0"/>
-                </a:solidFill>
-              </a:rPr>
-              <a:t>4°F</a:t>
-            </a:r>
-          </a:p>
-          <a:p>
-            <a:pPr>
-              <a:spcBef>
-                <a:spcPts val="0"/>
-              </a:spcBef>
-              <a:spcAft>
-                <a:spcPts val="1200"/>
-              </a:spcAft>
-            </a:pPr>
-            <a:r>
-              <a:rPr lang="en-US" sz="2400" dirty="0"/>
-              <a:t>Make the output look nice: display both the Fahrenheit and Celsius temperatures in right-justified columns, with </a:t>
-            </a:r>
-            <a:r>
-              <a:rPr lang="en-US" sz="2400" b="1" dirty="0"/>
-              <a:t>two</a:t>
-            </a:r>
-            <a:r>
-              <a:rPr lang="en-US" sz="2400" dirty="0"/>
-              <a:t> digits to the right of the decimal in each column</a:t>
-            </a:r>
-          </a:p>
-          <a:p>
-            <a:pPr>
-              <a:spcBef>
-                <a:spcPts val="0"/>
-              </a:spcBef>
-              <a:spcAft>
-                <a:spcPts val="1200"/>
-              </a:spcAft>
-            </a:pPr>
-            <a:r>
-              <a:rPr lang="en-US" sz="2400" dirty="0"/>
-              <a:t>The research problem your scientist wants you to solve:</a:t>
-            </a:r>
-          </a:p>
-          <a:p>
-            <a:pPr marL="0" indent="0" algn="ctr">
-              <a:lnSpc>
-                <a:spcPct val="100000"/>
-              </a:lnSpc>
-              <a:spcBef>
-                <a:spcPts val="0"/>
-              </a:spcBef>
-              <a:buNone/>
-            </a:pPr>
-            <a:r>
-              <a:rPr lang="en-US" sz="2400" dirty="0"/>
-              <a:t>What is the </a:t>
-            </a:r>
-            <a:r>
-              <a:rPr lang="en-US" sz="2400" b="1" dirty="0">
-                <a:solidFill>
-                  <a:srgbClr val="00B050"/>
-                </a:solidFill>
-              </a:rPr>
-              <a:t>one temperature that is the </a:t>
-            </a:r>
-            <a:r>
-              <a:rPr lang="en-US" sz="2400" b="1" u="sng" dirty="0">
-                <a:solidFill>
-                  <a:srgbClr val="00B050"/>
-                </a:solidFill>
-              </a:rPr>
-              <a:t>same</a:t>
-            </a:r>
-          </a:p>
-          <a:p>
-            <a:pPr marL="0" indent="0" algn="ctr">
-              <a:lnSpc>
-                <a:spcPct val="100000"/>
-              </a:lnSpc>
-              <a:spcBef>
-                <a:spcPts val="0"/>
-              </a:spcBef>
-              <a:buNone/>
-            </a:pPr>
-            <a:r>
-              <a:rPr lang="en-US" sz="2400" dirty="0"/>
-              <a:t>in both Fahrenheit and Celsius?</a:t>
-            </a:r>
-          </a:p>
-        </p:txBody>
-      </p:sp>
-      <p:sp>
-        <p:nvSpPr>
-          <p:cNvPr id="4" name="Slide Number Placeholder 3"/>
-          <p:cNvSpPr>
-            <a:spLocks noGrp="1"/>
-          </p:cNvSpPr>
-          <p:nvPr>
-            <p:ph type="sldNum" sz="quarter" idx="12"/>
-          </p:nvPr>
-        </p:nvSpPr>
-        <p:spPr/>
-        <p:txBody>
-          <a:bodyPr/>
-          <a:lstStyle/>
-          <a:p>
-            <a:fld id="{650AD656-6FF9-465D-B7B0-1CD0DD39CD23}" type="slidenum">
-              <a:rPr lang="en-US" smtClean="0"/>
-              <a:t>29</a:t>
-            </a:fld>
-            <a:endParaRPr lang="en-US" dirty="0"/>
-          </a:p>
-        </p:txBody>
-      </p:sp>
-      <p:sp>
-        <p:nvSpPr>
-          <p:cNvPr id="5" name="Rectangle 4">
-            <a:extLst>
-              <a:ext uri="{FF2B5EF4-FFF2-40B4-BE49-F238E27FC236}">
-                <a16:creationId xmlns:a16="http://schemas.microsoft.com/office/drawing/2014/main" id="{75964841-4769-4BC4-9480-124B722FD71B}"/>
-              </a:ext>
-            </a:extLst>
-          </p:cNvPr>
-          <p:cNvSpPr/>
-          <p:nvPr/>
-        </p:nvSpPr>
-        <p:spPr>
-          <a:xfrm>
-            <a:off x="1607574" y="5231652"/>
-            <a:ext cx="5928852" cy="840658"/>
-          </a:xfrm>
-          <a:prstGeom prst="rect">
-            <a:avLst/>
-          </a:prstGeom>
-          <a:noFill/>
-          <a:ln w="28575">
-            <a:solidFill>
-              <a:schemeClr val="tx1"/>
-            </a:solidFill>
-            <a:prstDash val="dash"/>
-          </a:ln>
-        </p:spPr>
-        <p:style>
-          <a:lnRef idx="2">
-            <a:schemeClr val="accent1">
-              <a:shade val="50000"/>
-            </a:schemeClr>
-          </a:lnRef>
-          <a:fillRef idx="1">
-            <a:schemeClr val="accent1"/>
-          </a:fillRef>
-          <a:effectRef idx="0">
-            <a:schemeClr val="accent1"/>
-          </a:effectRef>
-          <a:fontRef idx="minor">
-            <a:schemeClr val="lt1"/>
-          </a:fontRef>
-        </p:style>
-        <p:txBody>
-          <a:bodyPr rtlCol="0" anchor="ctr"/>
-          <a:lstStyle/>
-          <a:p>
-            <a:pPr algn="ctr"/>
-            <a:endParaRPr lang="en-US"/>
-          </a:p>
-        </p:txBody>
-      </p:sp>
-    </p:spTree>
-    <p:extLst>
-      <p:ext uri="{BB962C8B-B14F-4D97-AF65-F5344CB8AC3E}">
-        <p14:creationId xmlns:p14="http://schemas.microsoft.com/office/powerpoint/2010/main" val="1442285161"/>
-      </p:ext>
-    </p:extLst>
-  </p:cSld>
-  <p:clrMapOvr>
-    <a:masterClrMapping/>
-  </p:clrMapOvr>
-  <p:timing>
-    <p:tnLst>
-      <p:par>
-        <p:cTn id="1" dur="indefinite" restart="never" nodeType="tmRoot">
-          <p:childTnLst>
-            <p:seq concurrent="1" nextAc="seek">
-              <p:cTn id="2" dur="indefinite" nodeType="mainSeq">
-                <p:childTnLst>
-                  <p:par>
-                    <p:cTn id="3" fill="hold">
-                      <p:stCondLst>
-                        <p:cond delay="indefinite"/>
-                      </p:stCondLst>
-                      <p:childTnLst>
-                        <p:par>
-                          <p:cTn id="4" fill="hold">
-                            <p:stCondLst>
-                              <p:cond delay="0"/>
-                            </p:stCondLst>
-                            <p:childTnLst>
-                              <p:par>
-                                <p:cTn id="5" presetID="1" presetClass="entr" presetSubtype="0" fill="hold" nodeType="clickEffect">
-                                  <p:stCondLst>
-                                    <p:cond delay="0"/>
-                                  </p:stCondLst>
-                                  <p:childTnLst>
-                                    <p:set>
-                                      <p:cBhvr>
-                                        <p:cTn id="6" dur="1" fill="hold">
-                                          <p:stCondLst>
-                                            <p:cond delay="0"/>
-                                          </p:stCondLst>
-                                        </p:cTn>
-                                        <p:tgtEl>
-                                          <p:spTgt spid="3">
-                                            <p:txEl>
-                                              <p:pRg st="1" end="1"/>
-                                            </p:txEl>
-                                          </p:spTgt>
-                                        </p:tgtEl>
-                                        <p:attrNameLst>
-                                          <p:attrName>style.visibility</p:attrName>
-                                        </p:attrNameLst>
-                                      </p:cBhvr>
-                                      <p:to>
-                                        <p:strVal val="visible"/>
-                                      </p:to>
-                                    </p:set>
-                                  </p:childTnLst>
-                                </p:cTn>
-                              </p:par>
-                            </p:childTnLst>
-                          </p:cTn>
-                        </p:par>
-                      </p:childTnLst>
-                    </p:cTn>
-                  </p:par>
-                  <p:par>
-                    <p:cTn id="7" fill="hold">
-                      <p:stCondLst>
-                        <p:cond delay="indefinite"/>
-                      </p:stCondLst>
-                      <p:childTnLst>
-                        <p:par>
-                          <p:cTn id="8" fill="hold">
-                            <p:stCondLst>
-                              <p:cond delay="0"/>
-                            </p:stCondLst>
-                            <p:childTnLst>
-                              <p:par>
-                                <p:cTn id="9" presetID="1" presetClass="entr" presetSubtype="0" fill="hold" nodeType="clickEffect">
-                                  <p:stCondLst>
-                                    <p:cond delay="0"/>
-                                  </p:stCondLst>
-                                  <p:childTnLst>
-                                    <p:set>
-                                      <p:cBhvr>
-                                        <p:cTn id="10" dur="1" fill="hold">
-                                          <p:stCondLst>
-                                            <p:cond delay="0"/>
-                                          </p:stCondLst>
-                                        </p:cTn>
-                                        <p:tgtEl>
-                                          <p:spTgt spid="3">
-                                            <p:txEl>
-                                              <p:pRg st="2" end="2"/>
-                                            </p:txEl>
-                                          </p:spTgt>
-                                        </p:tgtEl>
-                                        <p:attrNameLst>
-                                          <p:attrName>style.visibility</p:attrName>
-                                        </p:attrNameLst>
-                                      </p:cBhvr>
-                                      <p:to>
-                                        <p:strVal val="visible"/>
-                                      </p:to>
-                                    </p:set>
-                                  </p:childTnLst>
-                                </p:cTn>
-                              </p:par>
-                            </p:childTnLst>
-                          </p:cTn>
-                        </p:par>
-                      </p:childTnLst>
-                    </p:cTn>
-                  </p:par>
-                  <p:par>
-                    <p:cTn id="11" fill="hold">
-                      <p:stCondLst>
-                        <p:cond delay="indefinite"/>
-                      </p:stCondLst>
-                      <p:childTnLst>
-                        <p:par>
-                          <p:cTn id="12" fill="hold">
-                            <p:stCondLst>
-                              <p:cond delay="0"/>
-                            </p:stCondLst>
-                            <p:childTnLst>
-                              <p:par>
-                                <p:cTn id="13" presetID="1" presetClass="entr" presetSubtype="0" fill="hold" nodeType="clickEffect">
-                                  <p:stCondLst>
-                                    <p:cond delay="0"/>
-                                  </p:stCondLst>
-                                  <p:childTnLst>
-                                    <p:set>
-                                      <p:cBhvr>
-                                        <p:cTn id="14" dur="1" fill="hold">
-                                          <p:stCondLst>
-                                            <p:cond delay="0"/>
-                                          </p:stCondLst>
-                                        </p:cTn>
-                                        <p:tgtEl>
-                                          <p:spTgt spid="3">
-                                            <p:txEl>
-                                              <p:pRg st="3" end="3"/>
-                                            </p:txEl>
-                                          </p:spTgt>
-                                        </p:tgtEl>
-                                        <p:attrNameLst>
-                                          <p:attrName>style.visibility</p:attrName>
-                                        </p:attrNameLst>
-                                      </p:cBhvr>
-                                      <p:to>
-                                        <p:strVal val="visible"/>
-                                      </p:to>
-                                    </p:set>
-                                  </p:childTnLst>
-                                </p:cTn>
-                              </p:par>
-                            </p:childTnLst>
-                          </p:cTn>
-                        </p:par>
-                      </p:childTnLst>
-                    </p:cTn>
-                  </p:par>
-                  <p:par>
-                    <p:cTn id="15" fill="hold">
-                      <p:stCondLst>
-                        <p:cond delay="indefinite"/>
-                      </p:stCondLst>
-                      <p:childTnLst>
-                        <p:par>
-                          <p:cTn id="16" fill="hold">
-                            <p:stCondLst>
-                              <p:cond delay="0"/>
-                            </p:stCondLst>
-                            <p:childTnLst>
-                              <p:par>
-                                <p:cTn id="17" presetID="1" presetClass="entr" presetSubtype="0" fill="hold" nodeType="clickEffect">
-                                  <p:stCondLst>
-                                    <p:cond delay="0"/>
-                                  </p:stCondLst>
-                                  <p:childTnLst>
-                                    <p:set>
-                                      <p:cBhvr>
-                                        <p:cTn id="18" dur="1" fill="hold">
-                                          <p:stCondLst>
-                                            <p:cond delay="0"/>
-                                          </p:stCondLst>
-                                        </p:cTn>
-                                        <p:tgtEl>
-                                          <p:spTgt spid="3">
-                                            <p:txEl>
-                                              <p:pRg st="4" end="4"/>
-                                            </p:txEl>
-                                          </p:spTgt>
-                                        </p:tgtEl>
-                                        <p:attrNameLst>
-                                          <p:attrName>style.visibility</p:attrName>
-                                        </p:attrNameLst>
-                                      </p:cBhvr>
-                                      <p:to>
-                                        <p:strVal val="visible"/>
-                                      </p:to>
-                                    </p:set>
-                                  </p:childTnLst>
-                                </p:cTn>
-                              </p:par>
-                            </p:childTnLst>
-                          </p:cTn>
-                        </p:par>
-                      </p:childTnLst>
-                    </p:cTn>
-                  </p:par>
-                  <p:par>
-                    <p:cTn id="19" fill="hold">
-                      <p:stCondLst>
-                        <p:cond delay="indefinite"/>
-                      </p:stCondLst>
-                      <p:childTnLst>
-                        <p:par>
-                          <p:cTn id="20" fill="hold">
-                            <p:stCondLst>
-                              <p:cond delay="0"/>
-                            </p:stCondLst>
-                            <p:childTnLst>
-                              <p:par>
-                                <p:cTn id="21" presetID="1" presetClass="entr" presetSubtype="0" fill="hold" nodeType="clickEffect">
-                                  <p:stCondLst>
-                                    <p:cond delay="0"/>
-                                  </p:stCondLst>
-                                  <p:childTnLst>
-                                    <p:set>
-                                      <p:cBhvr>
-                                        <p:cTn id="22" dur="1" fill="hold">
-                                          <p:stCondLst>
-                                            <p:cond delay="0"/>
-                                          </p:stCondLst>
-                                        </p:cTn>
-                                        <p:tgtEl>
-                                          <p:spTgt spid="3">
-                                            <p:txEl>
-                                              <p:pRg st="5" end="5"/>
-                                            </p:txEl>
-                                          </p:spTgt>
-                                        </p:tgtEl>
-                                        <p:attrNameLst>
-                                          <p:attrName>style.visibility</p:attrName>
-                                        </p:attrNameLst>
-                                      </p:cBhvr>
-                                      <p:to>
-                                        <p:strVal val="visible"/>
-                                      </p:to>
-                                    </p:set>
-                                  </p:childTnLst>
-                                </p:cTn>
-                              </p:par>
-                              <p:par>
-                                <p:cTn id="23" presetID="1" presetClass="entr" presetSubtype="0" fill="hold" nodeType="withEffect">
-                                  <p:stCondLst>
-                                    <p:cond delay="0"/>
-                                  </p:stCondLst>
-                                  <p:childTnLst>
-                                    <p:set>
-                                      <p:cBhvr>
-                                        <p:cTn id="24" dur="1" fill="hold">
-                                          <p:stCondLst>
-                                            <p:cond delay="0"/>
-                                          </p:stCondLst>
-                                        </p:cTn>
-                                        <p:tgtEl>
-                                          <p:spTgt spid="3">
-                                            <p:txEl>
-                                              <p:pRg st="6" end="6"/>
-                                            </p:txEl>
-                                          </p:spTgt>
-                                        </p:tgtEl>
-                                        <p:attrNameLst>
-                                          <p:attrName>style.visibility</p:attrName>
-                                        </p:attrNameLst>
-                                      </p:cBhvr>
-                                      <p:to>
-                                        <p:strVal val="visible"/>
-                                      </p:to>
-                                    </p:set>
-                                  </p:childTnLst>
-                                </p:cTn>
-                              </p:par>
-                            </p:childTnLst>
-                          </p:cTn>
-                        </p:par>
-                        <p:par>
-                          <p:cTn id="25" fill="hold">
-                            <p:stCondLst>
-                              <p:cond delay="0"/>
-                            </p:stCondLst>
-                            <p:childTnLst>
-                              <p:par>
-                                <p:cTn id="26" presetID="16" presetClass="entr" presetSubtype="21" fill="hold" grpId="0" nodeType="afterEffect">
-                                  <p:stCondLst>
-                                    <p:cond delay="0"/>
-                                  </p:stCondLst>
-                                  <p:childTnLst>
-                                    <p:set>
-                                      <p:cBhvr>
-                                        <p:cTn id="27" dur="1" fill="hold">
-                                          <p:stCondLst>
-                                            <p:cond delay="0"/>
-                                          </p:stCondLst>
-                                        </p:cTn>
-                                        <p:tgtEl>
-                                          <p:spTgt spid="5"/>
-                                        </p:tgtEl>
-                                        <p:attrNameLst>
-                                          <p:attrName>style.visibility</p:attrName>
-                                        </p:attrNameLst>
-                                      </p:cBhvr>
-                                      <p:to>
-                                        <p:strVal val="visible"/>
-                                      </p:to>
-                                    </p:set>
-                                    <p:animEffect transition="in" filter="barn(inVertical)">
-                                      <p:cBhvr>
-                                        <p:cTn id="28" dur="500"/>
-                                        <p:tgtEl>
-                                          <p:spTgt spid="5"/>
-                                        </p:tgtEl>
-                                      </p:cBhvr>
-                                    </p:animEffect>
-                                  </p:childTnLst>
-                                </p:cTn>
-                              </p:par>
-                            </p:childTnLst>
-                          </p:cTn>
-                        </p:par>
-                      </p:childTnLst>
-                    </p:cTn>
-                  </p:par>
-                </p:childTnLst>
-              </p:cTn>
-              <p:prevCondLst>
-                <p:cond evt="onPrev" delay="0">
-                  <p:tgtEl>
-                    <p:sldTgt/>
-                  </p:tgtEl>
-                </p:cond>
-              </p:prevCondLst>
-              <p:nextCondLst>
-                <p:cond evt="onNext" delay="0">
-                  <p:tgtEl>
-                    <p:sldTgt/>
-                  </p:tgtEl>
-                </p:cond>
-              </p:nextCondLst>
-            </p:seq>
-          </p:childTnLst>
-        </p:cTn>
-      </p:par>
-    </p:tnLst>
-    <p:bldLst>
-      <p:bldP spid="5" grpId="0" animBg="1"/>
-    </p:bldLst>
-  </p:timing>
-</p:sld>
-</file>
-
 <file path=ppt/slides/slide3.xml><?xml version="1.0" encoding="utf-8"?>
 <p:sld xmlns:a="http://schemas.openxmlformats.org/drawingml/2006/main" xmlns:r="http://schemas.openxmlformats.org/officeDocument/2006/relationships" xmlns:p="http://schemas.openxmlformats.org/presentationml/2006/main">
   <p:cSld>
@@ -20952,6 +21419,676 @@
 </file>
 
 <file path=ppt/slides/slide30.xml><?xml version="1.0" encoding="utf-8"?>
+<p:sld xmlns:a="http://schemas.openxmlformats.org/drawingml/2006/main" xmlns:r="http://schemas.openxmlformats.org/officeDocument/2006/relationships" xmlns:p="http://schemas.openxmlformats.org/presentationml/2006/main">
+  <p:cSld>
+    <p:spTree>
+      <p:nvGrpSpPr>
+        <p:cNvPr id="1" name=""/>
+        <p:cNvGrpSpPr/>
+        <p:nvPr/>
+      </p:nvGrpSpPr>
+      <p:grpSpPr>
+        <a:xfrm>
+          <a:off x="0" y="0"/>
+          <a:ext cx="0" cy="0"/>
+          <a:chOff x="0" y="0"/>
+          <a:chExt cx="0" cy="0"/>
+        </a:xfrm>
+      </p:grpSpPr>
+      <p:sp>
+        <p:nvSpPr>
+          <p:cNvPr id="2" name="Title 1"/>
+          <p:cNvSpPr>
+            <a:spLocks noGrp="1"/>
+          </p:cNvSpPr>
+          <p:nvPr>
+            <p:ph type="title"/>
+          </p:nvPr>
+        </p:nvSpPr>
+        <p:spPr>
+          <a:xfrm>
+            <a:off x="628650" y="365126"/>
+            <a:ext cx="7886700" cy="1103455"/>
+          </a:xfrm>
+        </p:spPr>
+        <p:txBody>
+          <a:bodyPr>
+            <a:noAutofit/>
+          </a:bodyPr>
+          <a:lstStyle/>
+          <a:p>
+            <a:pPr algn="ctr"/>
+            <a:r>
+              <a:rPr lang="en-US" sz="3200" dirty="0">
+                <a:latin typeface="+mn-lt"/>
+              </a:rPr>
+              <a:t>Temperature Conversion</a:t>
+            </a:r>
+          </a:p>
+        </p:txBody>
+      </p:sp>
+      <p:sp>
+        <p:nvSpPr>
+          <p:cNvPr id="3" name="Content Placeholder 2"/>
+          <p:cNvSpPr>
+            <a:spLocks noGrp="1"/>
+          </p:cNvSpPr>
+          <p:nvPr>
+            <p:ph idx="1"/>
+          </p:nvPr>
+        </p:nvSpPr>
+        <p:spPr>
+          <a:xfrm>
+            <a:off x="628650" y="1825624"/>
+            <a:ext cx="7886700" cy="4589689"/>
+          </a:xfrm>
+        </p:spPr>
+        <p:txBody>
+          <a:bodyPr>
+            <a:noAutofit/>
+          </a:bodyPr>
+          <a:lstStyle/>
+          <a:p>
+            <a:pPr>
+              <a:spcBef>
+                <a:spcPts val="0"/>
+              </a:spcBef>
+              <a:spcAft>
+                <a:spcPts val="1200"/>
+              </a:spcAft>
+            </a:pPr>
+            <a:r>
+              <a:rPr lang="en-US" sz="2400" dirty="0"/>
+              <a:t>Your scientist needs a program to calculate the correct Celsius temperature for a given Fahrenheit temperature</a:t>
+            </a:r>
+          </a:p>
+          <a:p>
+            <a:pPr>
+              <a:spcBef>
+                <a:spcPts val="0"/>
+              </a:spcBef>
+              <a:spcAft>
+                <a:spcPts val="1200"/>
+              </a:spcAft>
+            </a:pPr>
+            <a:r>
+              <a:rPr lang="en-US" sz="2400" dirty="0"/>
+              <a:t>Display values between </a:t>
+            </a:r>
+            <a:r>
+              <a:rPr lang="en-US" sz="2400" b="1" dirty="0"/>
+              <a:t>-44°F </a:t>
+            </a:r>
+            <a:r>
+              <a:rPr lang="en-US" sz="2400" dirty="0"/>
+              <a:t>and </a:t>
+            </a:r>
+            <a:r>
+              <a:rPr lang="en-US" sz="2400" b="1" dirty="0"/>
+              <a:t>216°F</a:t>
+            </a:r>
+            <a:r>
+              <a:rPr lang="en-US" sz="2400" dirty="0"/>
+              <a:t> </a:t>
+            </a:r>
+            <a:r>
+              <a:rPr lang="en-US" sz="2400" b="1" i="1" dirty="0">
+                <a:solidFill>
+                  <a:srgbClr val="FF0000"/>
+                </a:solidFill>
+              </a:rPr>
+              <a:t>inclusive</a:t>
+            </a:r>
+          </a:p>
+          <a:p>
+            <a:pPr>
+              <a:spcBef>
+                <a:spcPts val="0"/>
+              </a:spcBef>
+              <a:spcAft>
+                <a:spcPts val="1200"/>
+              </a:spcAft>
+            </a:pPr>
+            <a:r>
+              <a:rPr lang="en-US" sz="2400" dirty="0"/>
+              <a:t>Your code should increment the temperature in steps of </a:t>
+            </a:r>
+            <a:r>
+              <a:rPr lang="en-US" sz="2400" b="1" dirty="0">
+                <a:solidFill>
+                  <a:srgbClr val="0070C0"/>
+                </a:solidFill>
+              </a:rPr>
+              <a:t>4°F</a:t>
+            </a:r>
+          </a:p>
+          <a:p>
+            <a:pPr>
+              <a:spcBef>
+                <a:spcPts val="0"/>
+              </a:spcBef>
+              <a:spcAft>
+                <a:spcPts val="1200"/>
+              </a:spcAft>
+            </a:pPr>
+            <a:r>
+              <a:rPr lang="en-US" sz="2400" dirty="0"/>
+              <a:t>Make the output look nice: display both the Fahrenheit and Celsius temperatures in right-justified columns, with </a:t>
+            </a:r>
+            <a:r>
+              <a:rPr lang="en-US" sz="2400" b="1" dirty="0"/>
+              <a:t>two</a:t>
+            </a:r>
+            <a:r>
+              <a:rPr lang="en-US" sz="2400" dirty="0"/>
+              <a:t> digits to the right of the decimal in each column</a:t>
+            </a:r>
+          </a:p>
+          <a:p>
+            <a:pPr>
+              <a:spcBef>
+                <a:spcPts val="0"/>
+              </a:spcBef>
+              <a:spcAft>
+                <a:spcPts val="1200"/>
+              </a:spcAft>
+            </a:pPr>
+            <a:r>
+              <a:rPr lang="en-US" sz="2400" dirty="0"/>
+              <a:t>The research problem your scientist wants you to solve:</a:t>
+            </a:r>
+          </a:p>
+          <a:p>
+            <a:pPr marL="0" indent="0" algn="ctr">
+              <a:lnSpc>
+                <a:spcPct val="100000"/>
+              </a:lnSpc>
+              <a:spcBef>
+                <a:spcPts val="0"/>
+              </a:spcBef>
+              <a:buNone/>
+            </a:pPr>
+            <a:r>
+              <a:rPr lang="en-US" sz="2400" dirty="0"/>
+              <a:t>What is the </a:t>
+            </a:r>
+            <a:r>
+              <a:rPr lang="en-US" sz="2400" b="1" dirty="0">
+                <a:solidFill>
+                  <a:srgbClr val="00B050"/>
+                </a:solidFill>
+              </a:rPr>
+              <a:t>one temperature that is the </a:t>
+            </a:r>
+            <a:r>
+              <a:rPr lang="en-US" sz="2400" b="1" u="sng" dirty="0">
+                <a:solidFill>
+                  <a:srgbClr val="00B050"/>
+                </a:solidFill>
+              </a:rPr>
+              <a:t>same</a:t>
+            </a:r>
+          </a:p>
+          <a:p>
+            <a:pPr marL="0" indent="0" algn="ctr">
+              <a:lnSpc>
+                <a:spcPct val="100000"/>
+              </a:lnSpc>
+              <a:spcBef>
+                <a:spcPts val="0"/>
+              </a:spcBef>
+              <a:buNone/>
+            </a:pPr>
+            <a:r>
+              <a:rPr lang="en-US" sz="2400" dirty="0"/>
+              <a:t>in both Fahrenheit and Celsius?</a:t>
+            </a:r>
+          </a:p>
+        </p:txBody>
+      </p:sp>
+      <p:sp>
+        <p:nvSpPr>
+          <p:cNvPr id="4" name="Slide Number Placeholder 3"/>
+          <p:cNvSpPr>
+            <a:spLocks noGrp="1"/>
+          </p:cNvSpPr>
+          <p:nvPr>
+            <p:ph type="sldNum" sz="quarter" idx="12"/>
+          </p:nvPr>
+        </p:nvSpPr>
+        <p:spPr/>
+        <p:txBody>
+          <a:bodyPr/>
+          <a:lstStyle/>
+          <a:p>
+            <a:fld id="{650AD656-6FF9-465D-B7B0-1CD0DD39CD23}" type="slidenum">
+              <a:rPr lang="en-US" smtClean="0"/>
+              <a:t>30</a:t>
+            </a:fld>
+            <a:endParaRPr lang="en-US" dirty="0"/>
+          </a:p>
+        </p:txBody>
+      </p:sp>
+      <p:sp>
+        <p:nvSpPr>
+          <p:cNvPr id="5" name="Rectangle 4">
+            <a:extLst>
+              <a:ext uri="{FF2B5EF4-FFF2-40B4-BE49-F238E27FC236}">
+                <a16:creationId xmlns:a16="http://schemas.microsoft.com/office/drawing/2014/main" id="{75964841-4769-4BC4-9480-124B722FD71B}"/>
+              </a:ext>
+            </a:extLst>
+          </p:cNvPr>
+          <p:cNvSpPr/>
+          <p:nvPr/>
+        </p:nvSpPr>
+        <p:spPr>
+          <a:xfrm>
+            <a:off x="1607574" y="5231652"/>
+            <a:ext cx="5928852" cy="840658"/>
+          </a:xfrm>
+          <a:prstGeom prst="rect">
+            <a:avLst/>
+          </a:prstGeom>
+          <a:noFill/>
+          <a:ln w="28575">
+            <a:solidFill>
+              <a:schemeClr val="tx1"/>
+            </a:solidFill>
+            <a:prstDash val="dash"/>
+          </a:ln>
+        </p:spPr>
+        <p:style>
+          <a:lnRef idx="2">
+            <a:schemeClr val="accent1">
+              <a:shade val="50000"/>
+            </a:schemeClr>
+          </a:lnRef>
+          <a:fillRef idx="1">
+            <a:schemeClr val="accent1"/>
+          </a:fillRef>
+          <a:effectRef idx="0">
+            <a:schemeClr val="accent1"/>
+          </a:effectRef>
+          <a:fontRef idx="minor">
+            <a:schemeClr val="lt1"/>
+          </a:fontRef>
+        </p:style>
+        <p:txBody>
+          <a:bodyPr rtlCol="0" anchor="ctr"/>
+          <a:lstStyle/>
+          <a:p>
+            <a:pPr algn="ctr"/>
+            <a:endParaRPr lang="en-US"/>
+          </a:p>
+        </p:txBody>
+      </p:sp>
+    </p:spTree>
+    <p:extLst>
+      <p:ext uri="{BB962C8B-B14F-4D97-AF65-F5344CB8AC3E}">
+        <p14:creationId xmlns:p14="http://schemas.microsoft.com/office/powerpoint/2010/main" val="1442285161"/>
+      </p:ext>
+    </p:extLst>
+  </p:cSld>
+  <p:clrMapOvr>
+    <a:masterClrMapping/>
+  </p:clrMapOvr>
+  <p:timing>
+    <p:tnLst>
+      <p:par>
+        <p:cTn id="1" dur="indefinite" restart="never" nodeType="tmRoot">
+          <p:childTnLst>
+            <p:seq concurrent="1" nextAc="seek">
+              <p:cTn id="2" dur="indefinite" nodeType="mainSeq">
+                <p:childTnLst>
+                  <p:par>
+                    <p:cTn id="3" fill="hold">
+                      <p:stCondLst>
+                        <p:cond delay="indefinite"/>
+                      </p:stCondLst>
+                      <p:childTnLst>
+                        <p:par>
+                          <p:cTn id="4" fill="hold">
+                            <p:stCondLst>
+                              <p:cond delay="0"/>
+                            </p:stCondLst>
+                            <p:childTnLst>
+                              <p:par>
+                                <p:cTn id="5" presetID="1" presetClass="entr" presetSubtype="0" fill="hold" nodeType="clickEffect">
+                                  <p:stCondLst>
+                                    <p:cond delay="0"/>
+                                  </p:stCondLst>
+                                  <p:childTnLst>
+                                    <p:set>
+                                      <p:cBhvr>
+                                        <p:cTn id="6" dur="1" fill="hold">
+                                          <p:stCondLst>
+                                            <p:cond delay="0"/>
+                                          </p:stCondLst>
+                                        </p:cTn>
+                                        <p:tgtEl>
+                                          <p:spTgt spid="3">
+                                            <p:txEl>
+                                              <p:pRg st="1" end="1"/>
+                                            </p:txEl>
+                                          </p:spTgt>
+                                        </p:tgtEl>
+                                        <p:attrNameLst>
+                                          <p:attrName>style.visibility</p:attrName>
+                                        </p:attrNameLst>
+                                      </p:cBhvr>
+                                      <p:to>
+                                        <p:strVal val="visible"/>
+                                      </p:to>
+                                    </p:set>
+                                  </p:childTnLst>
+                                </p:cTn>
+                              </p:par>
+                            </p:childTnLst>
+                          </p:cTn>
+                        </p:par>
+                      </p:childTnLst>
+                    </p:cTn>
+                  </p:par>
+                  <p:par>
+                    <p:cTn id="7" fill="hold">
+                      <p:stCondLst>
+                        <p:cond delay="indefinite"/>
+                      </p:stCondLst>
+                      <p:childTnLst>
+                        <p:par>
+                          <p:cTn id="8" fill="hold">
+                            <p:stCondLst>
+                              <p:cond delay="0"/>
+                            </p:stCondLst>
+                            <p:childTnLst>
+                              <p:par>
+                                <p:cTn id="9" presetID="1" presetClass="entr" presetSubtype="0" fill="hold" nodeType="clickEffect">
+                                  <p:stCondLst>
+                                    <p:cond delay="0"/>
+                                  </p:stCondLst>
+                                  <p:childTnLst>
+                                    <p:set>
+                                      <p:cBhvr>
+                                        <p:cTn id="10" dur="1" fill="hold">
+                                          <p:stCondLst>
+                                            <p:cond delay="0"/>
+                                          </p:stCondLst>
+                                        </p:cTn>
+                                        <p:tgtEl>
+                                          <p:spTgt spid="3">
+                                            <p:txEl>
+                                              <p:pRg st="2" end="2"/>
+                                            </p:txEl>
+                                          </p:spTgt>
+                                        </p:tgtEl>
+                                        <p:attrNameLst>
+                                          <p:attrName>style.visibility</p:attrName>
+                                        </p:attrNameLst>
+                                      </p:cBhvr>
+                                      <p:to>
+                                        <p:strVal val="visible"/>
+                                      </p:to>
+                                    </p:set>
+                                  </p:childTnLst>
+                                </p:cTn>
+                              </p:par>
+                            </p:childTnLst>
+                          </p:cTn>
+                        </p:par>
+                      </p:childTnLst>
+                    </p:cTn>
+                  </p:par>
+                  <p:par>
+                    <p:cTn id="11" fill="hold">
+                      <p:stCondLst>
+                        <p:cond delay="indefinite"/>
+                      </p:stCondLst>
+                      <p:childTnLst>
+                        <p:par>
+                          <p:cTn id="12" fill="hold">
+                            <p:stCondLst>
+                              <p:cond delay="0"/>
+                            </p:stCondLst>
+                            <p:childTnLst>
+                              <p:par>
+                                <p:cTn id="13" presetID="1" presetClass="entr" presetSubtype="0" fill="hold" nodeType="clickEffect">
+                                  <p:stCondLst>
+                                    <p:cond delay="0"/>
+                                  </p:stCondLst>
+                                  <p:childTnLst>
+                                    <p:set>
+                                      <p:cBhvr>
+                                        <p:cTn id="14" dur="1" fill="hold">
+                                          <p:stCondLst>
+                                            <p:cond delay="0"/>
+                                          </p:stCondLst>
+                                        </p:cTn>
+                                        <p:tgtEl>
+                                          <p:spTgt spid="3">
+                                            <p:txEl>
+                                              <p:pRg st="3" end="3"/>
+                                            </p:txEl>
+                                          </p:spTgt>
+                                        </p:tgtEl>
+                                        <p:attrNameLst>
+                                          <p:attrName>style.visibility</p:attrName>
+                                        </p:attrNameLst>
+                                      </p:cBhvr>
+                                      <p:to>
+                                        <p:strVal val="visible"/>
+                                      </p:to>
+                                    </p:set>
+                                  </p:childTnLst>
+                                </p:cTn>
+                              </p:par>
+                            </p:childTnLst>
+                          </p:cTn>
+                        </p:par>
+                      </p:childTnLst>
+                    </p:cTn>
+                  </p:par>
+                  <p:par>
+                    <p:cTn id="15" fill="hold">
+                      <p:stCondLst>
+                        <p:cond delay="indefinite"/>
+                      </p:stCondLst>
+                      <p:childTnLst>
+                        <p:par>
+                          <p:cTn id="16" fill="hold">
+                            <p:stCondLst>
+                              <p:cond delay="0"/>
+                            </p:stCondLst>
+                            <p:childTnLst>
+                              <p:par>
+                                <p:cTn id="17" presetID="1" presetClass="entr" presetSubtype="0" fill="hold" nodeType="clickEffect">
+                                  <p:stCondLst>
+                                    <p:cond delay="0"/>
+                                  </p:stCondLst>
+                                  <p:childTnLst>
+                                    <p:set>
+                                      <p:cBhvr>
+                                        <p:cTn id="18" dur="1" fill="hold">
+                                          <p:stCondLst>
+                                            <p:cond delay="0"/>
+                                          </p:stCondLst>
+                                        </p:cTn>
+                                        <p:tgtEl>
+                                          <p:spTgt spid="3">
+                                            <p:txEl>
+                                              <p:pRg st="4" end="4"/>
+                                            </p:txEl>
+                                          </p:spTgt>
+                                        </p:tgtEl>
+                                        <p:attrNameLst>
+                                          <p:attrName>style.visibility</p:attrName>
+                                        </p:attrNameLst>
+                                      </p:cBhvr>
+                                      <p:to>
+                                        <p:strVal val="visible"/>
+                                      </p:to>
+                                    </p:set>
+                                  </p:childTnLst>
+                                </p:cTn>
+                              </p:par>
+                            </p:childTnLst>
+                          </p:cTn>
+                        </p:par>
+                      </p:childTnLst>
+                    </p:cTn>
+                  </p:par>
+                  <p:par>
+                    <p:cTn id="19" fill="hold">
+                      <p:stCondLst>
+                        <p:cond delay="indefinite"/>
+                      </p:stCondLst>
+                      <p:childTnLst>
+                        <p:par>
+                          <p:cTn id="20" fill="hold">
+                            <p:stCondLst>
+                              <p:cond delay="0"/>
+                            </p:stCondLst>
+                            <p:childTnLst>
+                              <p:par>
+                                <p:cTn id="21" presetID="1" presetClass="entr" presetSubtype="0" fill="hold" nodeType="clickEffect">
+                                  <p:stCondLst>
+                                    <p:cond delay="0"/>
+                                  </p:stCondLst>
+                                  <p:childTnLst>
+                                    <p:set>
+                                      <p:cBhvr>
+                                        <p:cTn id="22" dur="1" fill="hold">
+                                          <p:stCondLst>
+                                            <p:cond delay="0"/>
+                                          </p:stCondLst>
+                                        </p:cTn>
+                                        <p:tgtEl>
+                                          <p:spTgt spid="3">
+                                            <p:txEl>
+                                              <p:pRg st="5" end="5"/>
+                                            </p:txEl>
+                                          </p:spTgt>
+                                        </p:tgtEl>
+                                        <p:attrNameLst>
+                                          <p:attrName>style.visibility</p:attrName>
+                                        </p:attrNameLst>
+                                      </p:cBhvr>
+                                      <p:to>
+                                        <p:strVal val="visible"/>
+                                      </p:to>
+                                    </p:set>
+                                  </p:childTnLst>
+                                </p:cTn>
+                              </p:par>
+                              <p:par>
+                                <p:cTn id="23" presetID="1" presetClass="entr" presetSubtype="0" fill="hold" nodeType="withEffect">
+                                  <p:stCondLst>
+                                    <p:cond delay="0"/>
+                                  </p:stCondLst>
+                                  <p:childTnLst>
+                                    <p:set>
+                                      <p:cBhvr>
+                                        <p:cTn id="24" dur="1" fill="hold">
+                                          <p:stCondLst>
+                                            <p:cond delay="0"/>
+                                          </p:stCondLst>
+                                        </p:cTn>
+                                        <p:tgtEl>
+                                          <p:spTgt spid="3">
+                                            <p:txEl>
+                                              <p:pRg st="6" end="6"/>
+                                            </p:txEl>
+                                          </p:spTgt>
+                                        </p:tgtEl>
+                                        <p:attrNameLst>
+                                          <p:attrName>style.visibility</p:attrName>
+                                        </p:attrNameLst>
+                                      </p:cBhvr>
+                                      <p:to>
+                                        <p:strVal val="visible"/>
+                                      </p:to>
+                                    </p:set>
+                                  </p:childTnLst>
+                                </p:cTn>
+                              </p:par>
+                            </p:childTnLst>
+                          </p:cTn>
+                        </p:par>
+                        <p:par>
+                          <p:cTn id="25" fill="hold">
+                            <p:stCondLst>
+                              <p:cond delay="0"/>
+                            </p:stCondLst>
+                            <p:childTnLst>
+                              <p:par>
+                                <p:cTn id="26" presetID="16" presetClass="entr" presetSubtype="21" fill="hold" grpId="0" nodeType="afterEffect">
+                                  <p:stCondLst>
+                                    <p:cond delay="0"/>
+                                  </p:stCondLst>
+                                  <p:childTnLst>
+                                    <p:set>
+                                      <p:cBhvr>
+                                        <p:cTn id="27" dur="1" fill="hold">
+                                          <p:stCondLst>
+                                            <p:cond delay="0"/>
+                                          </p:stCondLst>
+                                        </p:cTn>
+                                        <p:tgtEl>
+                                          <p:spTgt spid="5"/>
+                                        </p:tgtEl>
+                                        <p:attrNameLst>
+                                          <p:attrName>style.visibility</p:attrName>
+                                        </p:attrNameLst>
+                                      </p:cBhvr>
+                                      <p:to>
+                                        <p:strVal val="visible"/>
+                                      </p:to>
+                                    </p:set>
+                                    <p:animEffect transition="in" filter="barn(inVertical)">
+                                      <p:cBhvr>
+                                        <p:cTn id="28" dur="500"/>
+                                        <p:tgtEl>
+                                          <p:spTgt spid="5"/>
+                                        </p:tgtEl>
+                                      </p:cBhvr>
+                                    </p:animEffect>
+                                  </p:childTnLst>
+                                </p:cTn>
+                              </p:par>
+                            </p:childTnLst>
+                          </p:cTn>
+                        </p:par>
+                      </p:childTnLst>
+                    </p:cTn>
+                  </p:par>
+                </p:childTnLst>
+              </p:cTn>
+              <p:prevCondLst>
+                <p:cond evt="onPrev" delay="0">
+                  <p:tgtEl>
+                    <p:sldTgt/>
+                  </p:tgtEl>
+                </p:cond>
+              </p:prevCondLst>
+              <p:nextCondLst>
+                <p:cond evt="onNext" delay="0">
+                  <p:tgtEl>
+                    <p:sldTgt/>
+                  </p:tgtEl>
+                </p:cond>
+              </p:nextCondLst>
+            </p:seq>
+          </p:childTnLst>
+        </p:cTn>
+      </p:par>
+    </p:tnLst>
+    <p:bldLst>
+      <p:bldP spid="5" grpId="0" animBg="1"/>
+    </p:bldLst>
+  </p:timing>
+</p:sld>
+</file>
+
+<file path=ppt/slides/slide31.xml><?xml version="1.0" encoding="utf-8"?>
 <p:sld xmlns:a="http://schemas.openxmlformats.org/drawingml/2006/main" xmlns:r="http://schemas.openxmlformats.org/officeDocument/2006/relationships" xmlns:p="http://schemas.openxmlformats.org/presentationml/2006/main">
   <p:cSld>
     <p:spTree>
@@ -21070,7 +22207,7 @@
             <a:fld id="{650AD656-6FF9-465D-B7B0-1CD0DD39CD23}" type="slidenum">
               <a:rPr lang="en-US" smtClean="0"/>
               <a:pPr/>
-              <a:t>30</a:t>
+              <a:t>31</a:t>
             </a:fld>
             <a:endParaRPr lang="en-US"/>
           </a:p>
@@ -21448,6 +22585,46 @@
           </p:style>
         </p:cxnSp>
       </p:grpSp>
+      <p:sp>
+        <p:nvSpPr>
+          <p:cNvPr id="3" name="TextBox 2">
+            <a:extLst>
+              <a:ext uri="{FF2B5EF4-FFF2-40B4-BE49-F238E27FC236}">
+                <a16:creationId xmlns:a16="http://schemas.microsoft.com/office/drawing/2014/main" id="{9ABD3BBB-1E64-CDA2-990E-3416FF51FC78}"/>
+              </a:ext>
+            </a:extLst>
+          </p:cNvPr>
+          <p:cNvSpPr txBox="1"/>
+          <p:nvPr/>
+        </p:nvSpPr>
+        <p:spPr>
+          <a:xfrm>
+            <a:off x="7210925" y="365126"/>
+            <a:ext cx="1548064" cy="646331"/>
+          </a:xfrm>
+          <a:prstGeom prst="rect">
+            <a:avLst/>
+          </a:prstGeom>
+          <a:noFill/>
+        </p:spPr>
+        <p:txBody>
+          <a:bodyPr wrap="square" rtlCol="0">
+            <a:spAutoFit/>
+          </a:bodyPr>
+          <a:lstStyle/>
+          <a:p>
+            <a:pPr algn="ctr"/>
+            <a:r>
+              <a:rPr lang="en-US" b="1" dirty="0">
+                <a:solidFill>
+                  <a:srgbClr val="7030A0"/>
+                </a:solidFill>
+              </a:rPr>
+              <a:t>You must type in this code</a:t>
+            </a:r>
+          </a:p>
+        </p:txBody>
+      </p:sp>
     </p:spTree>
     <p:extLst>
       <p:ext uri="{BB962C8B-B14F-4D97-AF65-F5344CB8AC3E}">
@@ -21482,7 +22659,7 @@
                             </p:stCondLst>
                             <p:childTnLst>
                               <p:par>
-                                <p:cTn id="5" presetID="2" presetClass="entr" presetSubtype="2" fill="hold" nodeType="afterEffect">
+                                <p:cTn id="5" presetID="2" presetClass="entr" presetSubtype="2" fill="hold" grpId="0" nodeType="afterEffect">
                                   <p:stCondLst>
                                     <p:cond delay="0"/>
                                   </p:stCondLst>
@@ -21495,7 +22672,7 @@
                                           </p:stCondLst>
                                         </p:cTn>
                                         <p:tgtEl>
-                                          <p:spTgt spid="40"/>
+                                          <p:spTgt spid="3"/>
                                         </p:tgtEl>
                                         <p:attrNameLst>
                                           <p:attrName>style.visibility</p:attrName>
@@ -21509,7 +22686,7 @@
                                       <p:cBhvr additive="base">
                                         <p:cTn id="7" dur="500" fill="hold"/>
                                         <p:tgtEl>
-                                          <p:spTgt spid="40"/>
+                                          <p:spTgt spid="3"/>
                                         </p:tgtEl>
                                         <p:attrNameLst>
                                           <p:attrName>ppt_x</p:attrName>
@@ -21532,7 +22709,7 @@
                                       <p:cBhvr additive="base">
                                         <p:cTn id="8" dur="500" fill="hold"/>
                                         <p:tgtEl>
-                                          <p:spTgt spid="40"/>
+                                          <p:spTgt spid="3"/>
                                         </p:tgtEl>
                                         <p:attrNameLst>
                                           <p:attrName>ppt_y</p:attrName>
@@ -21557,36 +22734,27 @@
                             </p:childTnLst>
                           </p:cTn>
                         </p:par>
-                      </p:childTnLst>
-                    </p:cTn>
-                  </p:par>
-                  <p:par>
-                    <p:cTn id="9" fill="hold">
-                      <p:stCondLst>
-                        <p:cond delay="indefinite"/>
-                      </p:stCondLst>
-                      <p:childTnLst>
                         <p:par>
-                          <p:cTn id="10" fill="hold">
+                          <p:cTn id="9" fill="hold">
                             <p:stCondLst>
-                              <p:cond delay="0"/>
+                              <p:cond delay="500"/>
                             </p:stCondLst>
                             <p:childTnLst>
                               <p:par>
-                                <p:cTn id="11" presetID="22" presetClass="entr" presetSubtype="2" fill="hold" nodeType="clickEffect">
+                                <p:cTn id="10" presetID="2" presetClass="entr" presetSubtype="2" fill="hold" nodeType="afterEffect">
                                   <p:stCondLst>
                                     <p:cond delay="0"/>
                                   </p:stCondLst>
                                   <p:childTnLst>
                                     <p:set>
                                       <p:cBhvr>
-                                        <p:cTn id="12" dur="1" fill="hold">
+                                        <p:cTn id="11" dur="1" fill="hold">
                                           <p:stCondLst>
                                             <p:cond delay="0"/>
                                           </p:stCondLst>
                                         </p:cTn>
                                         <p:tgtEl>
-                                          <p:spTgt spid="43"/>
+                                          <p:spTgt spid="40"/>
                                         </p:tgtEl>
                                         <p:attrNameLst>
                                           <p:attrName>style.visibility</p:attrName>
@@ -21596,14 +22764,52 @@
                                         <p:strVal val="visible"/>
                                       </p:to>
                                     </p:set>
-                                    <p:animEffect transition="in" filter="wipe(right)">
-                                      <p:cBhvr>
-                                        <p:cTn id="13" dur="500"/>
-                                        <p:tgtEl>
-                                          <p:spTgt spid="43"/>
-                                        </p:tgtEl>
-                                      </p:cBhvr>
-                                    </p:animEffect>
+                                    <p:anim calcmode="lin" valueType="num">
+                                      <p:cBhvr additive="base">
+                                        <p:cTn id="12" dur="500" fill="hold"/>
+                                        <p:tgtEl>
+                                          <p:spTgt spid="40"/>
+                                        </p:tgtEl>
+                                        <p:attrNameLst>
+                                          <p:attrName>ppt_x</p:attrName>
+                                        </p:attrNameLst>
+                                      </p:cBhvr>
+                                      <p:tavLst>
+                                        <p:tav tm="0">
+                                          <p:val>
+                                            <p:strVal val="1+#ppt_w/2"/>
+                                          </p:val>
+                                        </p:tav>
+                                        <p:tav tm="100000">
+                                          <p:val>
+                                            <p:strVal val="#ppt_x"/>
+                                          </p:val>
+                                        </p:tav>
+                                      </p:tavLst>
+                                    </p:anim>
+                                    <p:anim calcmode="lin" valueType="num">
+                                      <p:cBhvr additive="base">
+                                        <p:cTn id="13" dur="500" fill="hold"/>
+                                        <p:tgtEl>
+                                          <p:spTgt spid="40"/>
+                                        </p:tgtEl>
+                                        <p:attrNameLst>
+                                          <p:attrName>ppt_y</p:attrName>
+                                        </p:attrNameLst>
+                                      </p:cBhvr>
+                                      <p:tavLst>
+                                        <p:tav tm="0">
+                                          <p:val>
+                                            <p:strVal val="#ppt_y"/>
+                                          </p:val>
+                                        </p:tav>
+                                        <p:tav tm="100000">
+                                          <p:val>
+                                            <p:strVal val="#ppt_y"/>
+                                          </p:val>
+                                        </p:tav>
+                                      </p:tavLst>
+                                    </p:anim>
                                   </p:childTnLst>
                                 </p:cTn>
                               </p:par>
@@ -21639,7 +22845,7 @@
                                           </p:stCondLst>
                                         </p:cTn>
                                         <p:tgtEl>
-                                          <p:spTgt spid="46"/>
+                                          <p:spTgt spid="43"/>
                                         </p:tgtEl>
                                         <p:attrNameLst>
                                           <p:attrName>style.visibility</p:attrName>
@@ -21652,6 +22858,59 @@
                                     <p:animEffect transition="in" filter="wipe(right)">
                                       <p:cBhvr>
                                         <p:cTn id="18" dur="500"/>
+                                        <p:tgtEl>
+                                          <p:spTgt spid="43"/>
+                                        </p:tgtEl>
+                                      </p:cBhvr>
+                                    </p:animEffect>
+                                  </p:childTnLst>
+                                </p:cTn>
+                              </p:par>
+                            </p:childTnLst>
+                          </p:cTn>
+                        </p:par>
+                      </p:childTnLst>
+                    </p:cTn>
+                  </p:par>
+                  <p:par>
+                    <p:cTn id="19" fill="hold">
+                      <p:stCondLst>
+                        <p:cond delay="indefinite"/>
+                      </p:stCondLst>
+                      <p:childTnLst>
+                        <p:par>
+                          <p:cTn id="20" fill="hold">
+                            <p:stCondLst>
+                              <p:cond delay="0"/>
+                            </p:stCondLst>
+                            <p:childTnLst>
+                              <p:par>
+                                <p:cTn id="21" presetID="22" presetClass="entr" presetSubtype="2" fill="hold" nodeType="clickEffect">
+                                  <p:stCondLst>
+                                    <p:cond delay="0"/>
+                                  </p:stCondLst>
+                                  <p:childTnLst>
+                                    <p:set>
+                                      <p:cBhvr>
+                                        <p:cTn id="22" dur="1" fill="hold">
+                                          <p:stCondLst>
+                                            <p:cond delay="0"/>
+                                          </p:stCondLst>
+                                        </p:cTn>
+                                        <p:tgtEl>
+                                          <p:spTgt spid="46"/>
+                                        </p:tgtEl>
+                                        <p:attrNameLst>
+                                          <p:attrName>style.visibility</p:attrName>
+                                        </p:attrNameLst>
+                                      </p:cBhvr>
+                                      <p:to>
+                                        <p:strVal val="visible"/>
+                                      </p:to>
+                                    </p:set>
+                                    <p:animEffect transition="in" filter="wipe(right)">
+                                      <p:cBhvr>
+                                        <p:cTn id="23" dur="500"/>
                                         <p:tgtEl>
                                           <p:spTgt spid="46"/>
                                         </p:tgtEl>
@@ -21687,11 +22946,14 @@
         </p:cTn>
       </p:par>
     </p:tnLst>
+    <p:bldLst>
+      <p:bldP spid="3" grpId="0"/>
+    </p:bldLst>
   </p:timing>
 </p:sld>
 </file>
 
-<file path=ppt/slides/slide31.xml><?xml version="1.0" encoding="utf-8"?>
+<file path=ppt/slides/slide32.xml><?xml version="1.0" encoding="utf-8"?>
 <p:sld xmlns:a="http://schemas.openxmlformats.org/drawingml/2006/main" xmlns:r="http://schemas.openxmlformats.org/officeDocument/2006/relationships" xmlns:p="http://schemas.openxmlformats.org/presentationml/2006/main">
   <p:cSld>
     <p:spTree>
@@ -21761,7 +23023,7 @@
           <a:p>
             <a:fld id="{650AD656-6FF9-465D-B7B0-1CD0DD39CD23}" type="slidenum">
               <a:rPr lang="en-US" smtClean="0"/>
-              <a:t>31</a:t>
+              <a:t>32</a:t>
             </a:fld>
             <a:endParaRPr lang="en-US" dirty="0"/>
           </a:p>
@@ -21950,7 +23212,7 @@
 </p:sld>
 </file>
 
-<file path=ppt/slides/slide32.xml><?xml version="1.0" encoding="utf-8"?>
+<file path=ppt/slides/slide33.xml><?xml version="1.0" encoding="utf-8"?>
 <p:sld xmlns:a="http://schemas.openxmlformats.org/drawingml/2006/main" xmlns:r="http://schemas.openxmlformats.org/officeDocument/2006/relationships" xmlns:p="http://schemas.openxmlformats.org/presentationml/2006/main">
   <p:cSld>
     <p:spTree>
@@ -22034,7 +23296,7 @@
           <a:p>
             <a:fld id="{650AD656-6FF9-465D-B7B0-1CD0DD39CD23}" type="slidenum">
               <a:rPr lang="en-US" smtClean="0"/>
-              <a:t>32</a:t>
+              <a:t>33</a:t>
             </a:fld>
             <a:endParaRPr lang="en-US" dirty="0"/>
           </a:p>
@@ -23120,6 +24382,51 @@
           </a:p>
         </p:txBody>
       </p:sp>
+      <p:cxnSp>
+        <p:nvCxnSpPr>
+          <p:cNvPr id="5" name="Straight Arrow Connector 4">
+            <a:extLst>
+              <a:ext uri="{FF2B5EF4-FFF2-40B4-BE49-F238E27FC236}">
+                <a16:creationId xmlns:a16="http://schemas.microsoft.com/office/drawing/2014/main" id="{1B0C078F-E5C7-6750-78D8-3F93F60D21DD}"/>
+              </a:ext>
+            </a:extLst>
+          </p:cNvPr>
+          <p:cNvCxnSpPr>
+            <a:cxnSpLocks/>
+            <a:endCxn id="13" idx="3"/>
+          </p:cNvCxnSpPr>
+          <p:nvPr/>
+        </p:nvCxnSpPr>
+        <p:spPr>
+          <a:xfrm flipH="1">
+            <a:off x="5677816" y="5563191"/>
+            <a:ext cx="594647" cy="0"/>
+          </a:xfrm>
+          <a:prstGeom prst="straightConnector1">
+            <a:avLst/>
+          </a:prstGeom>
+          <a:ln w="28575">
+            <a:solidFill>
+              <a:srgbClr val="FF0000"/>
+            </a:solidFill>
+            <a:tailEnd type="triangle"/>
+          </a:ln>
+        </p:spPr>
+        <p:style>
+          <a:lnRef idx="1">
+            <a:schemeClr val="accent1"/>
+          </a:lnRef>
+          <a:fillRef idx="0">
+            <a:schemeClr val="accent1"/>
+          </a:fillRef>
+          <a:effectRef idx="0">
+            <a:schemeClr val="accent1"/>
+          </a:effectRef>
+          <a:fontRef idx="minor">
+            <a:schemeClr val="tx1"/>
+          </a:fontRef>
+        </p:style>
+      </p:cxnSp>
     </p:spTree>
     <p:extLst>
       <p:ext uri="{BB962C8B-B14F-4D97-AF65-F5344CB8AC3E}">
@@ -23416,36 +24723,27 @@
                             </p:childTnLst>
                           </p:cTn>
                         </p:par>
-                      </p:childTnLst>
-                    </p:cTn>
-                  </p:par>
-                  <p:par>
-                    <p:cTn id="28" fill="hold">
-                      <p:stCondLst>
-                        <p:cond delay="indefinite"/>
-                      </p:stCondLst>
-                      <p:childTnLst>
                         <p:par>
-                          <p:cTn id="29" fill="hold">
+                          <p:cTn id="28" fill="hold">
                             <p:stCondLst>
                               <p:cond delay="0"/>
                             </p:stCondLst>
                             <p:childTnLst>
                               <p:par>
-                                <p:cTn id="30" presetID="22" presetClass="entr" presetSubtype="1" fill="hold" grpId="0" nodeType="clickEffect">
+                                <p:cTn id="29" presetID="22" presetClass="entr" presetSubtype="2" fill="hold" nodeType="afterEffect">
                                   <p:stCondLst>
                                     <p:cond delay="0"/>
                                   </p:stCondLst>
                                   <p:childTnLst>
                                     <p:set>
                                       <p:cBhvr>
-                                        <p:cTn id="31" dur="1" fill="hold">
+                                        <p:cTn id="30" dur="1" fill="hold">
                                           <p:stCondLst>
                                             <p:cond delay="0"/>
                                           </p:stCondLst>
                                         </p:cTn>
                                         <p:tgtEl>
-                                          <p:spTgt spid="16"/>
+                                          <p:spTgt spid="5"/>
                                         </p:tgtEl>
                                         <p:attrNameLst>
                                           <p:attrName>style.visibility</p:attrName>
@@ -23455,11 +24753,11 @@
                                         <p:strVal val="visible"/>
                                       </p:to>
                                     </p:set>
-                                    <p:animEffect transition="in" filter="wipe(up)">
+                                    <p:animEffect transition="in" filter="wipe(right)">
                                       <p:cBhvr>
-                                        <p:cTn id="32" dur="500"/>
-                                        <p:tgtEl>
-                                          <p:spTgt spid="16"/>
+                                        <p:cTn id="31" dur="500"/>
+                                        <p:tgtEl>
+                                          <p:spTgt spid="5"/>
                                         </p:tgtEl>
                                       </p:cBhvr>
                                     </p:animEffect>
@@ -23473,32 +24771,32 @@
                     </p:cTn>
                   </p:par>
                   <p:par>
-                    <p:cTn id="33" fill="hold">
+                    <p:cTn id="32" fill="hold">
                       <p:stCondLst>
                         <p:cond delay="indefinite"/>
                       </p:stCondLst>
                       <p:childTnLst>
                         <p:par>
-                          <p:cTn id="34" fill="hold">
+                          <p:cTn id="33" fill="hold">
                             <p:stCondLst>
                               <p:cond delay="0"/>
                             </p:stCondLst>
                             <p:childTnLst>
                               <p:par>
-                                <p:cTn id="35" presetID="22" presetClass="entr" presetSubtype="1" fill="hold" grpId="0" nodeType="clickEffect">
+                                <p:cTn id="34" presetID="22" presetClass="entr" presetSubtype="1" fill="hold" grpId="0" nodeType="clickEffect">
                                   <p:stCondLst>
                                     <p:cond delay="0"/>
                                   </p:stCondLst>
                                   <p:childTnLst>
                                     <p:set>
                                       <p:cBhvr>
-                                        <p:cTn id="36" dur="1" fill="hold">
+                                        <p:cTn id="35" dur="1" fill="hold">
                                           <p:stCondLst>
                                             <p:cond delay="0"/>
                                           </p:stCondLst>
                                         </p:cTn>
                                         <p:tgtEl>
-                                          <p:spTgt spid="17"/>
+                                          <p:spTgt spid="16"/>
                                         </p:tgtEl>
                                         <p:attrNameLst>
                                           <p:attrName>style.visibility</p:attrName>
@@ -23510,7 +24808,60 @@
                                     </p:set>
                                     <p:animEffect transition="in" filter="wipe(up)">
                                       <p:cBhvr>
-                                        <p:cTn id="37" dur="500"/>
+                                        <p:cTn id="36" dur="500"/>
+                                        <p:tgtEl>
+                                          <p:spTgt spid="16"/>
+                                        </p:tgtEl>
+                                      </p:cBhvr>
+                                    </p:animEffect>
+                                  </p:childTnLst>
+                                </p:cTn>
+                              </p:par>
+                            </p:childTnLst>
+                          </p:cTn>
+                        </p:par>
+                      </p:childTnLst>
+                    </p:cTn>
+                  </p:par>
+                  <p:par>
+                    <p:cTn id="37" fill="hold">
+                      <p:stCondLst>
+                        <p:cond delay="indefinite"/>
+                      </p:stCondLst>
+                      <p:childTnLst>
+                        <p:par>
+                          <p:cTn id="38" fill="hold">
+                            <p:stCondLst>
+                              <p:cond delay="0"/>
+                            </p:stCondLst>
+                            <p:childTnLst>
+                              <p:par>
+                                <p:cTn id="39" presetID="22" presetClass="entr" presetSubtype="1" fill="hold" grpId="0" nodeType="clickEffect">
+                                  <p:stCondLst>
+                                    <p:cond delay="0"/>
+                                  </p:stCondLst>
+                                  <p:childTnLst>
+                                    <p:set>
+                                      <p:cBhvr>
+                                        <p:cTn id="40" dur="1" fill="hold">
+                                          <p:stCondLst>
+                                            <p:cond delay="0"/>
+                                          </p:stCondLst>
+                                        </p:cTn>
+                                        <p:tgtEl>
+                                          <p:spTgt spid="17"/>
+                                        </p:tgtEl>
+                                        <p:attrNameLst>
+                                          <p:attrName>style.visibility</p:attrName>
+                                        </p:attrNameLst>
+                                      </p:cBhvr>
+                                      <p:to>
+                                        <p:strVal val="visible"/>
+                                      </p:to>
+                                    </p:set>
+                                    <p:animEffect transition="in" filter="wipe(up)">
+                                      <p:cBhvr>
+                                        <p:cTn id="41" dur="500"/>
                                         <p:tgtEl>
                                           <p:spTgt spid="17"/>
                                         </p:tgtEl>
@@ -23560,7 +24911,7 @@
 </p:sld>
 </file>
 
-<file path=ppt/slides/slide33.xml><?xml version="1.0" encoding="utf-8"?>
+<file path=ppt/slides/slide34.xml><?xml version="1.0" encoding="utf-8"?>
 <p:sld xmlns:a="http://schemas.openxmlformats.org/drawingml/2006/main" xmlns:r="http://schemas.openxmlformats.org/officeDocument/2006/relationships" xmlns:p="http://schemas.openxmlformats.org/presentationml/2006/main">
   <p:cSld>
     <p:spTree>
@@ -23691,7 +25042,7 @@
           <a:p>
             <a:fld id="{650AD656-6FF9-465D-B7B0-1CD0DD39CD23}" type="slidenum">
               <a:rPr lang="en-US" smtClean="0"/>
-              <a:t>33</a:t>
+              <a:t>34</a:t>
             </a:fld>
             <a:endParaRPr lang="en-US" dirty="0"/>
           </a:p>
@@ -24486,7 +25837,7 @@
 </p:sld>
 </file>
 
-<file path=ppt/slides/slide34.xml><?xml version="1.0" encoding="utf-8"?>
+<file path=ppt/slides/slide35.xml><?xml version="1.0" encoding="utf-8"?>
 <p:sld xmlns:a="http://schemas.openxmlformats.org/drawingml/2006/main" xmlns:r="http://schemas.openxmlformats.org/officeDocument/2006/relationships" xmlns:p="http://schemas.openxmlformats.org/presentationml/2006/main">
   <p:cSld>
     <p:spTree>
@@ -24661,6 +26012,36 @@
             </a:r>
             <a:r>
               <a:rPr lang="en-US" sz="2400" b="1" dirty="0"/>
+              <a:t>f-strings</a:t>
+            </a:r>
+            <a:r>
+              <a:rPr lang="en-US" sz="2400" dirty="0"/>
+              <a:t> and </a:t>
+            </a:r>
+            <a:r>
+              <a:rPr lang="en-US" sz="2400" b="1" dirty="0"/>
+              <a:t>print format specifiers</a:t>
+            </a:r>
+            <a:r>
+              <a:rPr lang="en-US" sz="2400" dirty="0"/>
+              <a:t> (replacement fields) to give your output a more professional appearance</a:t>
+            </a:r>
+          </a:p>
+          <a:p>
+            <a:pPr>
+              <a:spcBef>
+                <a:spcPts val="0"/>
+              </a:spcBef>
+              <a:spcAft>
+                <a:spcPts val="1200"/>
+              </a:spcAft>
+            </a:pPr>
+            <a:r>
+              <a:rPr lang="en-US" sz="2400" dirty="0"/>
+              <a:t>How to use </a:t>
+            </a:r>
+            <a:r>
+              <a:rPr lang="en-US" sz="2400" b="1" dirty="0"/>
               <a:t>for</a:t>
             </a:r>
             <a:r>
@@ -24696,7 +26077,7 @@
           <a:p>
             <a:fld id="{650AD656-6FF9-465D-B7B0-1CD0DD39CD23}" type="slidenum">
               <a:rPr lang="en-US" smtClean="0"/>
-              <a:t>34</a:t>
+              <a:t>35</a:t>
             </a:fld>
             <a:endParaRPr lang="en-US" dirty="0"/>
           </a:p>
@@ -24763,15 +26144,33 @@
                                   </p:childTnLst>
                                 </p:cTn>
                               </p:par>
+                            </p:childTnLst>
+                          </p:cTn>
+                        </p:par>
+                      </p:childTnLst>
+                    </p:cTn>
+                  </p:par>
+                  <p:par>
+                    <p:cTn id="7" fill="hold">
+                      <p:stCondLst>
+                        <p:cond delay="indefinite"/>
+                      </p:stCondLst>
+                      <p:childTnLst>
+                        <p:par>
+                          <p:cTn id="8" fill="hold">
+                            <p:stCondLst>
+                              <p:cond delay="0"/>
+                            </p:stCondLst>
+                            <p:childTnLst>
                               <p:par>
-                                <p:cTn id="7" presetID="1" presetClass="entr" presetSubtype="0" fill="hold" nodeType="withEffect">
+                                <p:cTn id="9" presetID="1" presetClass="entr" presetSubtype="0" fill="hold" nodeType="clickEffect">
                                   <p:stCondLst>
                                     <p:cond delay="0"/>
                                   </p:stCondLst>
                                   <p:childTnLst>
                                     <p:set>
                                       <p:cBhvr>
-                                        <p:cTn id="8" dur="1" fill="hold">
+                                        <p:cTn id="10" dur="1" fill="hold">
                                           <p:stCondLst>
                                             <p:cond delay="0"/>
                                           </p:stCondLst>
@@ -24801,26 +26200,26 @@
                     </p:cTn>
                   </p:par>
                   <p:par>
-                    <p:cTn id="9" fill="hold">
+                    <p:cTn id="11" fill="hold">
                       <p:stCondLst>
                         <p:cond delay="indefinite"/>
                       </p:stCondLst>
                       <p:childTnLst>
                         <p:par>
-                          <p:cTn id="10" fill="hold">
+                          <p:cTn id="12" fill="hold">
                             <p:stCondLst>
                               <p:cond delay="0"/>
                             </p:stCondLst>
                             <p:childTnLst>
                               <p:par>
-                                <p:cTn id="11" presetID="1" presetClass="entr" presetSubtype="0" fill="hold" nodeType="clickEffect">
+                                <p:cTn id="13" presetID="1" presetClass="entr" presetSubtype="0" fill="hold" nodeType="clickEffect">
                                   <p:stCondLst>
                                     <p:cond delay="0"/>
                                   </p:stCondLst>
                                   <p:childTnLst>
                                     <p:set>
                                       <p:cBhvr>
-                                        <p:cTn id="12" dur="1" fill="hold">
+                                        <p:cTn id="14" dur="1" fill="hold">
                                           <p:stCondLst>
                                             <p:cond delay="0"/>
                                           </p:stCondLst>
@@ -24829,6 +26228,55 @@
                                           <p:spTgt spid="3">
                                             <p:txEl>
                                               <p:pRg st="3" end="3"/>
+                                            </p:txEl>
+                                          </p:spTgt>
+                                        </p:tgtEl>
+                                        <p:attrNameLst>
+                                          <p:attrName>style.visibility</p:attrName>
+                                        </p:attrNameLst>
+                                      </p:cBhvr>
+                                      <p:to>
+                                        <p:strVal val="visible"/>
+                                      </p:to>
+                                    </p:set>
+                                  </p:childTnLst>
+                                </p:cTn>
+                              </p:par>
+                            </p:childTnLst>
+                          </p:cTn>
+                        </p:par>
+                      </p:childTnLst>
+                    </p:cTn>
+                  </p:par>
+                  <p:par>
+                    <p:cTn id="15" fill="hold">
+                      <p:stCondLst>
+                        <p:cond delay="indefinite"/>
+                      </p:stCondLst>
+                      <p:childTnLst>
+                        <p:par>
+                          <p:cTn id="16" fill="hold">
+                            <p:stCondLst>
+                              <p:cond delay="0"/>
+                            </p:stCondLst>
+                            <p:childTnLst>
+                              <p:par>
+                                <p:cTn id="17" presetID="1" presetClass="entr" presetSubtype="0" fill="hold" nodeType="clickEffect">
+                                  <p:stCondLst>
+                                    <p:cond delay="0"/>
+                                  </p:stCondLst>
+                                  <p:childTnLst>
+                                    <p:set>
+                                      <p:cBhvr>
+                                        <p:cTn id="18" dur="1" fill="hold">
+                                          <p:stCondLst>
+                                            <p:cond delay="0"/>
+                                          </p:stCondLst>
+                                        </p:cTn>
+                                        <p:tgtEl>
+                                          <p:spTgt spid="3">
+                                            <p:txEl>
+                                              <p:pRg st="4" end="4"/>
                                             </p:txEl>
                                           </p:spTgt>
                                         </p:tgtEl>
@@ -24874,7 +26322,7 @@
 </p:sld>
 </file>
 
-<file path=ppt/slides/slide35.xml><?xml version="1.0" encoding="utf-8"?>
+<file path=ppt/slides/slide36.xml><?xml version="1.0" encoding="utf-8"?>
 <p:sld xmlns:a="http://schemas.openxmlformats.org/drawingml/2006/main" xmlns:r="http://schemas.openxmlformats.org/officeDocument/2006/relationships" xmlns:p="http://schemas.openxmlformats.org/presentationml/2006/main">
   <p:cSld>
     <p:spTree>
@@ -25010,7 +26458,7 @@
             <a:fld id="{650AD656-6FF9-465D-B7B0-1CD0DD39CD23}" type="slidenum">
               <a:rPr lang="en-US" smtClean="0"/>
               <a:pPr/>
-              <a:t>35</a:t>
+              <a:t>36</a:t>
             </a:fld>
             <a:endParaRPr lang="en-US"/>
           </a:p>
@@ -27882,6 +29330,46 @@
           </a:fontRef>
         </p:style>
       </p:cxnSp>
+      <p:sp>
+        <p:nvSpPr>
+          <p:cNvPr id="4" name="TextBox 3">
+            <a:extLst>
+              <a:ext uri="{FF2B5EF4-FFF2-40B4-BE49-F238E27FC236}">
+                <a16:creationId xmlns:a16="http://schemas.microsoft.com/office/drawing/2014/main" id="{66FD4D29-8732-AD98-353E-D778C1E6643B}"/>
+              </a:ext>
+            </a:extLst>
+          </p:cNvPr>
+          <p:cNvSpPr txBox="1"/>
+          <p:nvPr/>
+        </p:nvSpPr>
+        <p:spPr>
+          <a:xfrm>
+            <a:off x="7210925" y="365126"/>
+            <a:ext cx="1548064" cy="646331"/>
+          </a:xfrm>
+          <a:prstGeom prst="rect">
+            <a:avLst/>
+          </a:prstGeom>
+          <a:noFill/>
+        </p:spPr>
+        <p:txBody>
+          <a:bodyPr wrap="square" rtlCol="0">
+            <a:spAutoFit/>
+          </a:bodyPr>
+          <a:lstStyle/>
+          <a:p>
+            <a:pPr algn="ctr"/>
+            <a:r>
+              <a:rPr lang="en-US" b="1" dirty="0">
+                <a:solidFill>
+                  <a:srgbClr val="7030A0"/>
+                </a:solidFill>
+              </a:rPr>
+              <a:t>You must type in this code</a:t>
+            </a:r>
+          </a:p>
+        </p:txBody>
+      </p:sp>
     </p:spTree>
     <p:extLst>
       <p:ext uri="{BB962C8B-B14F-4D97-AF65-F5344CB8AC3E}">
@@ -27916,7 +29404,7 @@
                             </p:stCondLst>
                             <p:childTnLst>
                               <p:par>
-                                <p:cTn id="5" presetID="22" presetClass="entr" presetSubtype="2" fill="hold" nodeType="afterEffect">
+                                <p:cTn id="5" presetID="2" presetClass="entr" presetSubtype="2" fill="hold" grpId="0" nodeType="afterEffect">
                                   <p:stCondLst>
                                     <p:cond delay="0"/>
                                   </p:stCondLst>
@@ -27929,6 +29417,88 @@
                                           </p:stCondLst>
                                         </p:cTn>
                                         <p:tgtEl>
+                                          <p:spTgt spid="4"/>
+                                        </p:tgtEl>
+                                        <p:attrNameLst>
+                                          <p:attrName>style.visibility</p:attrName>
+                                        </p:attrNameLst>
+                                      </p:cBhvr>
+                                      <p:to>
+                                        <p:strVal val="visible"/>
+                                      </p:to>
+                                    </p:set>
+                                    <p:anim calcmode="lin" valueType="num">
+                                      <p:cBhvr additive="base">
+                                        <p:cTn id="7" dur="500" fill="hold"/>
+                                        <p:tgtEl>
+                                          <p:spTgt spid="4"/>
+                                        </p:tgtEl>
+                                        <p:attrNameLst>
+                                          <p:attrName>ppt_x</p:attrName>
+                                        </p:attrNameLst>
+                                      </p:cBhvr>
+                                      <p:tavLst>
+                                        <p:tav tm="0">
+                                          <p:val>
+                                            <p:strVal val="1+#ppt_w/2"/>
+                                          </p:val>
+                                        </p:tav>
+                                        <p:tav tm="100000">
+                                          <p:val>
+                                            <p:strVal val="#ppt_x"/>
+                                          </p:val>
+                                        </p:tav>
+                                      </p:tavLst>
+                                    </p:anim>
+                                    <p:anim calcmode="lin" valueType="num">
+                                      <p:cBhvr additive="base">
+                                        <p:cTn id="8" dur="500" fill="hold"/>
+                                        <p:tgtEl>
+                                          <p:spTgt spid="4"/>
+                                        </p:tgtEl>
+                                        <p:attrNameLst>
+                                          <p:attrName>ppt_y</p:attrName>
+                                        </p:attrNameLst>
+                                      </p:cBhvr>
+                                      <p:tavLst>
+                                        <p:tav tm="0">
+                                          <p:val>
+                                            <p:strVal val="#ppt_y"/>
+                                          </p:val>
+                                        </p:tav>
+                                        <p:tav tm="100000">
+                                          <p:val>
+                                            <p:strVal val="#ppt_y"/>
+                                          </p:val>
+                                        </p:tav>
+                                      </p:tavLst>
+                                    </p:anim>
+                                  </p:childTnLst>
+                                </p:cTn>
+                              </p:par>
+                            </p:childTnLst>
+                          </p:cTn>
+                        </p:par>
+                        <p:par>
+                          <p:cTn id="9" fill="hold">
+                            <p:stCondLst>
+                              <p:cond delay="500"/>
+                            </p:stCondLst>
+                            <p:childTnLst>
+                              <p:par>
+                                <p:cTn id="10" presetID="22" presetClass="entr" presetSubtype="2" fill="hold" nodeType="afterEffect">
+                                  <p:stCondLst>
+                                    <p:cond delay="0"/>
+                                  </p:stCondLst>
+                                  <p:childTnLst>
+                                    <p:set>
+                                      <p:cBhvr>
+                                        <p:cTn id="11" dur="1" fill="hold">
+                                          <p:stCondLst>
+                                            <p:cond delay="0"/>
+                                          </p:stCondLst>
+                                        </p:cTn>
+                                        <p:tgtEl>
                                           <p:spTgt spid="6"/>
                                         </p:tgtEl>
                                         <p:attrNameLst>
@@ -27941,7 +29511,7 @@
                                     </p:set>
                                     <p:animEffect transition="in" filter="wipe(right)">
                                       <p:cBhvr>
-                                        <p:cTn id="7" dur="500"/>
+                                        <p:cTn id="12" dur="500"/>
                                         <p:tgtEl>
                                           <p:spTgt spid="6"/>
                                         </p:tgtEl>
@@ -27957,26 +29527,26 @@
                     </p:cTn>
                   </p:par>
                   <p:par>
-                    <p:cTn id="8" fill="hold">
+                    <p:cTn id="13" fill="hold">
                       <p:stCondLst>
                         <p:cond delay="indefinite"/>
                       </p:stCondLst>
                       <p:childTnLst>
                         <p:par>
-                          <p:cTn id="9" fill="hold">
+                          <p:cTn id="14" fill="hold">
                             <p:stCondLst>
                               <p:cond delay="0"/>
                             </p:stCondLst>
                             <p:childTnLst>
                               <p:par>
-                                <p:cTn id="10" presetID="22" presetClass="entr" presetSubtype="8" fill="hold" nodeType="clickEffect">
+                                <p:cTn id="15" presetID="22" presetClass="entr" presetSubtype="8" fill="hold" nodeType="clickEffect">
                                   <p:stCondLst>
                                     <p:cond delay="0"/>
                                   </p:stCondLst>
                                   <p:childTnLst>
                                     <p:set>
                                       <p:cBhvr>
-                                        <p:cTn id="11" dur="1" fill="hold">
+                                        <p:cTn id="16" dur="1" fill="hold">
                                           <p:stCondLst>
                                             <p:cond delay="0"/>
                                           </p:stCondLst>
@@ -27994,7 +29564,7 @@
                                     </p:set>
                                     <p:animEffect transition="in" filter="wipe(left)">
                                       <p:cBhvr>
-                                        <p:cTn id="12" dur="500"/>
+                                        <p:cTn id="17" dur="500"/>
                                         <p:tgtEl>
                                           <p:spTgt spid="13"/>
                                         </p:tgtEl>
@@ -28007,20 +29577,20 @@
                           </p:cTn>
                         </p:par>
                         <p:par>
-                          <p:cTn id="13" fill="hold">
+                          <p:cTn id="18" fill="hold">
                             <p:stCondLst>
                               <p:cond delay="500"/>
                             </p:stCondLst>
                             <p:childTnLst>
                               <p:par>
-                                <p:cTn id="14" presetID="16" presetClass="entr" presetSubtype="21" fill="hold" grpId="0" nodeType="afterEffect">
+                                <p:cTn id="19" presetID="16" presetClass="entr" presetSubtype="21" fill="hold" grpId="0" nodeType="afterEffect">
                                   <p:stCondLst>
                                     <p:cond delay="0"/>
                                   </p:stCondLst>
                                   <p:childTnLst>
                                     <p:set>
                                       <p:cBhvr>
-                                        <p:cTn id="15" dur="1" fill="hold">
+                                        <p:cTn id="20" dur="1" fill="hold">
                                           <p:stCondLst>
                                             <p:cond delay="0"/>
                                           </p:stCondLst>
@@ -28038,7 +29608,7 @@
                                     </p:set>
                                     <p:animEffect transition="in" filter="barn(inVertical)">
                                       <p:cBhvr>
-                                        <p:cTn id="16" dur="500"/>
+                                        <p:cTn id="21" dur="500"/>
                                         <p:tgtEl>
                                           <p:spTgt spid="12"/>
                                         </p:tgtEl>
@@ -28054,26 +29624,26 @@
                     </p:cTn>
                   </p:par>
                   <p:par>
-                    <p:cTn id="17" fill="hold">
+                    <p:cTn id="22" fill="hold">
                       <p:stCondLst>
                         <p:cond delay="indefinite"/>
                       </p:stCondLst>
                       <p:childTnLst>
                         <p:par>
-                          <p:cTn id="18" fill="hold">
+                          <p:cTn id="23" fill="hold">
                             <p:stCondLst>
                               <p:cond delay="0"/>
                             </p:stCondLst>
                             <p:childTnLst>
                               <p:par>
-                                <p:cTn id="19" presetID="22" presetClass="entr" presetSubtype="8" fill="hold" nodeType="clickEffect">
+                                <p:cTn id="24" presetID="22" presetClass="entr" presetSubtype="8" fill="hold" nodeType="clickEffect">
                                   <p:stCondLst>
                                     <p:cond delay="0"/>
                                   </p:stCondLst>
                                   <p:childTnLst>
                                     <p:set>
                                       <p:cBhvr>
-                                        <p:cTn id="20" dur="1" fill="hold">
+                                        <p:cTn id="25" dur="1" fill="hold">
                                           <p:stCondLst>
                                             <p:cond delay="0"/>
                                           </p:stCondLst>
@@ -28091,7 +29661,7 @@
                                     </p:set>
                                     <p:animEffect transition="in" filter="wipe(left)">
                                       <p:cBhvr>
-                                        <p:cTn id="21" dur="500"/>
+                                        <p:cTn id="26" dur="500"/>
                                         <p:tgtEl>
                                           <p:spTgt spid="18"/>
                                         </p:tgtEl>
@@ -28104,20 +29674,20 @@
                           </p:cTn>
                         </p:par>
                         <p:par>
-                          <p:cTn id="22" fill="hold">
+                          <p:cTn id="27" fill="hold">
                             <p:stCondLst>
                               <p:cond delay="500"/>
                             </p:stCondLst>
                             <p:childTnLst>
                               <p:par>
-                                <p:cTn id="23" presetID="16" presetClass="entr" presetSubtype="21" fill="hold" grpId="0" nodeType="afterEffect">
+                                <p:cTn id="28" presetID="16" presetClass="entr" presetSubtype="21" fill="hold" grpId="0" nodeType="afterEffect">
                                   <p:stCondLst>
                                     <p:cond delay="0"/>
                                   </p:stCondLst>
                                   <p:childTnLst>
                                     <p:set>
                                       <p:cBhvr>
-                                        <p:cTn id="24" dur="1" fill="hold">
+                                        <p:cTn id="29" dur="1" fill="hold">
                                           <p:stCondLst>
                                             <p:cond delay="0"/>
                                           </p:stCondLst>
@@ -28135,7 +29705,7 @@
                                     </p:set>
                                     <p:animEffect transition="in" filter="barn(inVertical)">
                                       <p:cBhvr>
-                                        <p:cTn id="25" dur="500"/>
+                                        <p:cTn id="30" dur="500"/>
                                         <p:tgtEl>
                                           <p:spTgt spid="17"/>
                                         </p:tgtEl>
@@ -28174,6 +29744,7 @@
     <p:bldLst>
       <p:bldP spid="12" grpId="0" animBg="1"/>
       <p:bldP spid="17" grpId="0" animBg="1"/>
+      <p:bldP spid="4" grpId="0"/>
     </p:bldLst>
   </p:timing>
 </p:sld>
@@ -28566,6 +30137,46 @@
           </a:fontRef>
         </p:style>
       </p:cxnSp>
+      <p:sp>
+        <p:nvSpPr>
+          <p:cNvPr id="4" name="TextBox 3">
+            <a:extLst>
+              <a:ext uri="{FF2B5EF4-FFF2-40B4-BE49-F238E27FC236}">
+                <a16:creationId xmlns:a16="http://schemas.microsoft.com/office/drawing/2014/main" id="{56169492-56BC-8629-CC90-8BC9F872FE79}"/>
+              </a:ext>
+            </a:extLst>
+          </p:cNvPr>
+          <p:cNvSpPr txBox="1"/>
+          <p:nvPr/>
+        </p:nvSpPr>
+        <p:spPr>
+          <a:xfrm>
+            <a:off x="7210925" y="365126"/>
+            <a:ext cx="1548064" cy="646331"/>
+          </a:xfrm>
+          <a:prstGeom prst="rect">
+            <a:avLst/>
+          </a:prstGeom>
+          <a:noFill/>
+        </p:spPr>
+        <p:txBody>
+          <a:bodyPr wrap="square" rtlCol="0">
+            <a:spAutoFit/>
+          </a:bodyPr>
+          <a:lstStyle/>
+          <a:p>
+            <a:pPr algn="ctr"/>
+            <a:r>
+              <a:rPr lang="en-US" b="1" dirty="0">
+                <a:solidFill>
+                  <a:srgbClr val="7030A0"/>
+                </a:solidFill>
+              </a:rPr>
+              <a:t>You must type in this code</a:t>
+            </a:r>
+          </a:p>
+        </p:txBody>
+      </p:sp>
     </p:spTree>
     <p:extLst>
       <p:ext uri="{BB962C8B-B14F-4D97-AF65-F5344CB8AC3E}">
@@ -28600,7 +30211,7 @@
                             </p:stCondLst>
                             <p:childTnLst>
                               <p:par>
-                                <p:cTn id="5" presetID="22" presetClass="entr" presetSubtype="2" fill="hold" nodeType="afterEffect">
+                                <p:cTn id="5" presetID="2" presetClass="entr" presetSubtype="2" fill="hold" grpId="0" nodeType="afterEffect">
                                   <p:stCondLst>
                                     <p:cond delay="0"/>
                                   </p:stCondLst>
@@ -28613,7 +30224,7 @@
                                           </p:stCondLst>
                                         </p:cTn>
                                         <p:tgtEl>
-                                          <p:spTgt spid="10"/>
+                                          <p:spTgt spid="4"/>
                                         </p:tgtEl>
                                         <p:attrNameLst>
                                           <p:attrName>style.visibility</p:attrName>
@@ -28623,37 +30234,66 @@
                                         <p:strVal val="visible"/>
                                       </p:to>
                                     </p:set>
-                                    <p:animEffect transition="in" filter="wipe(right)">
-                                      <p:cBhvr>
-                                        <p:cTn id="7" dur="500"/>
-                                        <p:tgtEl>
-                                          <p:spTgt spid="10"/>
-                                        </p:tgtEl>
-                                      </p:cBhvr>
-                                    </p:animEffect>
+                                    <p:anim calcmode="lin" valueType="num">
+                                      <p:cBhvr additive="base">
+                                        <p:cTn id="7" dur="500" fill="hold"/>
+                                        <p:tgtEl>
+                                          <p:spTgt spid="4"/>
+                                        </p:tgtEl>
+                                        <p:attrNameLst>
+                                          <p:attrName>ppt_x</p:attrName>
+                                        </p:attrNameLst>
+                                      </p:cBhvr>
+                                      <p:tavLst>
+                                        <p:tav tm="0">
+                                          <p:val>
+                                            <p:strVal val="1+#ppt_w/2"/>
+                                          </p:val>
+                                        </p:tav>
+                                        <p:tav tm="100000">
+                                          <p:val>
+                                            <p:strVal val="#ppt_x"/>
+                                          </p:val>
+                                        </p:tav>
+                                      </p:tavLst>
+                                    </p:anim>
+                                    <p:anim calcmode="lin" valueType="num">
+                                      <p:cBhvr additive="base">
+                                        <p:cTn id="8" dur="500" fill="hold"/>
+                                        <p:tgtEl>
+                                          <p:spTgt spid="4"/>
+                                        </p:tgtEl>
+                                        <p:attrNameLst>
+                                          <p:attrName>ppt_y</p:attrName>
+                                        </p:attrNameLst>
+                                      </p:cBhvr>
+                                      <p:tavLst>
+                                        <p:tav tm="0">
+                                          <p:val>
+                                            <p:strVal val="#ppt_y"/>
+                                          </p:val>
+                                        </p:tav>
+                                        <p:tav tm="100000">
+                                          <p:val>
+                                            <p:strVal val="#ppt_y"/>
+                                          </p:val>
+                                        </p:tav>
+                                      </p:tavLst>
+                                    </p:anim>
                                   </p:childTnLst>
                                 </p:cTn>
                               </p:par>
                             </p:childTnLst>
                           </p:cTn>
                         </p:par>
-                      </p:childTnLst>
-                    </p:cTn>
-                  </p:par>
-                  <p:par>
-                    <p:cTn id="8" fill="hold">
-                      <p:stCondLst>
-                        <p:cond delay="indefinite"/>
-                      </p:stCondLst>
-                      <p:childTnLst>
                         <p:par>
                           <p:cTn id="9" fill="hold">
                             <p:stCondLst>
-                              <p:cond delay="0"/>
+                              <p:cond delay="500"/>
                             </p:stCondLst>
                             <p:childTnLst>
                               <p:par>
-                                <p:cTn id="10" presetID="22" presetClass="entr" presetSubtype="1" fill="hold" nodeType="clickEffect">
+                                <p:cTn id="10" presetID="22" presetClass="entr" presetSubtype="2" fill="hold" nodeType="afterEffect">
                                   <p:stCondLst>
                                     <p:cond delay="0"/>
                                   </p:stCondLst>
@@ -28666,7 +30306,7 @@
                                           </p:stCondLst>
                                         </p:cTn>
                                         <p:tgtEl>
-                                          <p:spTgt spid="11"/>
+                                          <p:spTgt spid="10"/>
                                         </p:tgtEl>
                                         <p:attrNameLst>
                                           <p:attrName>style.visibility</p:attrName>
@@ -28676,11 +30316,11 @@
                                         <p:strVal val="visible"/>
                                       </p:to>
                                     </p:set>
-                                    <p:animEffect transition="in" filter="wipe(up)">
+                                    <p:animEffect transition="in" filter="wipe(right)">
                                       <p:cBhvr>
                                         <p:cTn id="12" dur="500"/>
                                         <p:tgtEl>
-                                          <p:spTgt spid="11"/>
+                                          <p:spTgt spid="10"/>
                                         </p:tgtEl>
                                       </p:cBhvr>
                                     </p:animEffect>
@@ -28706,7 +30346,7 @@
                             </p:stCondLst>
                             <p:childTnLst>
                               <p:par>
-                                <p:cTn id="15" presetID="22" presetClass="entr" presetSubtype="8" fill="hold" nodeType="clickEffect">
+                                <p:cTn id="15" presetID="22" presetClass="entr" presetSubtype="1" fill="hold" nodeType="clickEffect">
                                   <p:stCondLst>
                                     <p:cond delay="0"/>
                                   </p:stCondLst>
@@ -28719,7 +30359,7 @@
                                           </p:stCondLst>
                                         </p:cTn>
                                         <p:tgtEl>
-                                          <p:spTgt spid="15"/>
+                                          <p:spTgt spid="11"/>
                                         </p:tgtEl>
                                         <p:attrNameLst>
                                           <p:attrName>style.visibility</p:attrName>
@@ -28729,55 +30369,11 @@
                                         <p:strVal val="visible"/>
                                       </p:to>
                                     </p:set>
-                                    <p:animEffect transition="in" filter="wipe(left)">
+                                    <p:animEffect transition="in" filter="wipe(up)">
                                       <p:cBhvr>
                                         <p:cTn id="17" dur="500"/>
                                         <p:tgtEl>
-                                          <p:spTgt spid="15"/>
-                                        </p:tgtEl>
-                                      </p:cBhvr>
-                                    </p:animEffect>
-                                  </p:childTnLst>
-                                </p:cTn>
-                              </p:par>
-                            </p:childTnLst>
-                          </p:cTn>
-                        </p:par>
-                        <p:par>
-                          <p:cTn id="18" fill="hold">
-                            <p:stCondLst>
-                              <p:cond delay="500"/>
-                            </p:stCondLst>
-                            <p:childTnLst>
-                              <p:par>
-                                <p:cTn id="19" presetID="16" presetClass="entr" presetSubtype="21" fill="hold" grpId="0" nodeType="afterEffect">
-                                  <p:stCondLst>
-                                    <p:cond delay="0"/>
-                                  </p:stCondLst>
-                                  <p:childTnLst>
-                                    <p:set>
-                                      <p:cBhvr>
-                                        <p:cTn id="20" dur="1" fill="hold">
-                                          <p:stCondLst>
-                                            <p:cond delay="0"/>
-                                          </p:stCondLst>
-                                        </p:cTn>
-                                        <p:tgtEl>
-                                          <p:spTgt spid="14"/>
-                                        </p:tgtEl>
-                                        <p:attrNameLst>
-                                          <p:attrName>style.visibility</p:attrName>
-                                        </p:attrNameLst>
-                                      </p:cBhvr>
-                                      <p:to>
-                                        <p:strVal val="visible"/>
-                                      </p:to>
-                                    </p:set>
-                                    <p:animEffect transition="in" filter="barn(inVertical)">
-                                      <p:cBhvr>
-                                        <p:cTn id="21" dur="500"/>
-                                        <p:tgtEl>
-                                          <p:spTgt spid="14"/>
+                                          <p:spTgt spid="11"/>
                                         </p:tgtEl>
                                       </p:cBhvr>
                                     </p:animEffect>
@@ -28791,19 +30387,63 @@
                     </p:cTn>
                   </p:par>
                   <p:par>
-                    <p:cTn id="22" fill="hold">
+                    <p:cTn id="18" fill="hold">
                       <p:stCondLst>
                         <p:cond delay="indefinite"/>
                       </p:stCondLst>
                       <p:childTnLst>
                         <p:par>
-                          <p:cTn id="23" fill="hold">
+                          <p:cTn id="19" fill="hold">
                             <p:stCondLst>
                               <p:cond delay="0"/>
                             </p:stCondLst>
                             <p:childTnLst>
                               <p:par>
-                                <p:cTn id="24" presetID="22" presetClass="entr" presetSubtype="8" fill="hold" nodeType="clickEffect">
+                                <p:cTn id="20" presetID="22" presetClass="entr" presetSubtype="8" fill="hold" nodeType="clickEffect">
+                                  <p:stCondLst>
+                                    <p:cond delay="0"/>
+                                  </p:stCondLst>
+                                  <p:childTnLst>
+                                    <p:set>
+                                      <p:cBhvr>
+                                        <p:cTn id="21" dur="1" fill="hold">
+                                          <p:stCondLst>
+                                            <p:cond delay="0"/>
+                                          </p:stCondLst>
+                                        </p:cTn>
+                                        <p:tgtEl>
+                                          <p:spTgt spid="15"/>
+                                        </p:tgtEl>
+                                        <p:attrNameLst>
+                                          <p:attrName>style.visibility</p:attrName>
+                                        </p:attrNameLst>
+                                      </p:cBhvr>
+                                      <p:to>
+                                        <p:strVal val="visible"/>
+                                      </p:to>
+                                    </p:set>
+                                    <p:animEffect transition="in" filter="wipe(left)">
+                                      <p:cBhvr>
+                                        <p:cTn id="22" dur="500"/>
+                                        <p:tgtEl>
+                                          <p:spTgt spid="15"/>
+                                        </p:tgtEl>
+                                      </p:cBhvr>
+                                    </p:animEffect>
+                                  </p:childTnLst>
+                                </p:cTn>
+                              </p:par>
+                            </p:childTnLst>
+                          </p:cTn>
+                        </p:par>
+                        <p:par>
+                          <p:cTn id="23" fill="hold">
+                            <p:stCondLst>
+                              <p:cond delay="500"/>
+                            </p:stCondLst>
+                            <p:childTnLst>
+                              <p:par>
+                                <p:cTn id="24" presetID="16" presetClass="entr" presetSubtype="21" fill="hold" grpId="0" nodeType="afterEffect">
                                   <p:stCondLst>
                                     <p:cond delay="0"/>
                                   </p:stCondLst>
@@ -28816,6 +30456,59 @@
                                           </p:stCondLst>
                                         </p:cTn>
                                         <p:tgtEl>
+                                          <p:spTgt spid="14"/>
+                                        </p:tgtEl>
+                                        <p:attrNameLst>
+                                          <p:attrName>style.visibility</p:attrName>
+                                        </p:attrNameLst>
+                                      </p:cBhvr>
+                                      <p:to>
+                                        <p:strVal val="visible"/>
+                                      </p:to>
+                                    </p:set>
+                                    <p:animEffect transition="in" filter="barn(inVertical)">
+                                      <p:cBhvr>
+                                        <p:cTn id="26" dur="500"/>
+                                        <p:tgtEl>
+                                          <p:spTgt spid="14"/>
+                                        </p:tgtEl>
+                                      </p:cBhvr>
+                                    </p:animEffect>
+                                  </p:childTnLst>
+                                </p:cTn>
+                              </p:par>
+                            </p:childTnLst>
+                          </p:cTn>
+                        </p:par>
+                      </p:childTnLst>
+                    </p:cTn>
+                  </p:par>
+                  <p:par>
+                    <p:cTn id="27" fill="hold">
+                      <p:stCondLst>
+                        <p:cond delay="indefinite"/>
+                      </p:stCondLst>
+                      <p:childTnLst>
+                        <p:par>
+                          <p:cTn id="28" fill="hold">
+                            <p:stCondLst>
+                              <p:cond delay="0"/>
+                            </p:stCondLst>
+                            <p:childTnLst>
+                              <p:par>
+                                <p:cTn id="29" presetID="22" presetClass="entr" presetSubtype="8" fill="hold" nodeType="clickEffect">
+                                  <p:stCondLst>
+                                    <p:cond delay="0"/>
+                                  </p:stCondLst>
+                                  <p:childTnLst>
+                                    <p:set>
+                                      <p:cBhvr>
+                                        <p:cTn id="30" dur="1" fill="hold">
+                                          <p:stCondLst>
+                                            <p:cond delay="0"/>
+                                          </p:stCondLst>
+                                        </p:cTn>
+                                        <p:tgtEl>
                                           <p:spTgt spid="12"/>
                                         </p:tgtEl>
                                         <p:attrNameLst>
@@ -28828,7 +30521,7 @@
                                     </p:set>
                                     <p:animEffect transition="in" filter="wipe(left)">
                                       <p:cBhvr>
-                                        <p:cTn id="26" dur="500"/>
+                                        <p:cTn id="31" dur="500"/>
                                         <p:tgtEl>
                                           <p:spTgt spid="12"/>
                                         </p:tgtEl>
@@ -28841,20 +30534,20 @@
                           </p:cTn>
                         </p:par>
                         <p:par>
-                          <p:cTn id="27" fill="hold">
+                          <p:cTn id="32" fill="hold">
                             <p:stCondLst>
                               <p:cond delay="500"/>
                             </p:stCondLst>
                             <p:childTnLst>
                               <p:par>
-                                <p:cTn id="28" presetID="16" presetClass="entr" presetSubtype="21" fill="hold" grpId="0" nodeType="afterEffect">
+                                <p:cTn id="33" presetID="16" presetClass="entr" presetSubtype="21" fill="hold" grpId="0" nodeType="afterEffect">
                                   <p:stCondLst>
                                     <p:cond delay="0"/>
                                   </p:stCondLst>
                                   <p:childTnLst>
                                     <p:set>
                                       <p:cBhvr>
-                                        <p:cTn id="29" dur="1" fill="hold">
+                                        <p:cTn id="34" dur="1" fill="hold">
                                           <p:stCondLst>
                                             <p:cond delay="0"/>
                                           </p:stCondLst>
@@ -28872,7 +30565,7 @@
                                     </p:set>
                                     <p:animEffect transition="in" filter="barn(inVertical)">
                                       <p:cBhvr>
-                                        <p:cTn id="30" dur="500"/>
+                                        <p:cTn id="35" dur="500"/>
                                         <p:tgtEl>
                                           <p:spTgt spid="8"/>
                                         </p:tgtEl>
@@ -28911,6 +30604,7 @@
     <p:bldLst>
       <p:bldP spid="8" grpId="0" animBg="1"/>
       <p:bldP spid="14" grpId="0" animBg="1"/>
+      <p:bldP spid="4" grpId="0"/>
     </p:bldLst>
   </p:timing>
 </p:sld>

--- a/Session 02 - Python Fundamentals/Session 02 - Python Fundamentals.pptx
+++ b/Session 02 - Python Fundamentals/Session 02 - Python Fundamentals.pptx
@@ -5,10 +5,10 @@
     <p:sldMasterId id="2147483660" r:id="rId1"/>
   </p:sldMasterIdLst>
   <p:notesMasterIdLst>
-    <p:notesMasterId r:id="rId38"/>
+    <p:notesMasterId r:id="rId39"/>
   </p:notesMasterIdLst>
   <p:handoutMasterIdLst>
-    <p:handoutMasterId r:id="rId39"/>
+    <p:handoutMasterId r:id="rId40"/>
   </p:handoutMasterIdLst>
   <p:sldIdLst>
     <p:sldId id="1220" r:id="rId2"/>
@@ -33,20 +33,21 @@
     <p:sldId id="932" r:id="rId21"/>
     <p:sldId id="933" r:id="rId22"/>
     <p:sldId id="1235" r:id="rId23"/>
-    <p:sldId id="1363" r:id="rId24"/>
+    <p:sldId id="1365" r:id="rId24"/>
     <p:sldId id="1264" r:id="rId25"/>
     <p:sldId id="1299" r:id="rId26"/>
-    <p:sldId id="1291" r:id="rId27"/>
-    <p:sldId id="1284" r:id="rId28"/>
-    <p:sldId id="1364" r:id="rId29"/>
-    <p:sldId id="1281" r:id="rId30"/>
-    <p:sldId id="412" r:id="rId31"/>
-    <p:sldId id="1348" r:id="rId32"/>
-    <p:sldId id="983" r:id="rId33"/>
-    <p:sldId id="1362" r:id="rId34"/>
-    <p:sldId id="415" r:id="rId35"/>
-    <p:sldId id="416" r:id="rId36"/>
-    <p:sldId id="995" r:id="rId37"/>
+    <p:sldId id="1363" r:id="rId27"/>
+    <p:sldId id="1291" r:id="rId28"/>
+    <p:sldId id="1284" r:id="rId29"/>
+    <p:sldId id="1364" r:id="rId30"/>
+    <p:sldId id="1281" r:id="rId31"/>
+    <p:sldId id="412" r:id="rId32"/>
+    <p:sldId id="1348" r:id="rId33"/>
+    <p:sldId id="983" r:id="rId34"/>
+    <p:sldId id="1362" r:id="rId35"/>
+    <p:sldId id="415" r:id="rId36"/>
+    <p:sldId id="416" r:id="rId37"/>
+    <p:sldId id="995" r:id="rId38"/>
   </p:sldIdLst>
   <p:sldSz cx="9144000" cy="6858000" type="screen4x3"/>
   <p:notesSz cx="7077075" cy="9363075"/>
@@ -294,7 +295,7 @@
           <a:p>
             <a:fld id="{A241AC98-512A-4A35-865E-757B6C1F07A2}" type="datetimeFigureOut">
               <a:rPr lang="en-US" smtClean="0"/>
-              <a:t>11/18/2025</a:t>
+              <a:t>11/20/2025</a:t>
             </a:fld>
             <a:endParaRPr lang="en-US"/>
           </a:p>
@@ -460,7 +461,7 @@
           <a:p>
             <a:fld id="{3854CEE7-15DE-41D9-8CA2-D1E137B1D850}" type="datetimeFigureOut">
               <a:rPr lang="en-US" smtClean="0"/>
-              <a:t>11/18/2025</a:t>
+              <a:t>11/20/2025</a:t>
             </a:fld>
             <a:endParaRPr lang="en-US"/>
           </a:p>
@@ -1027,7 +1028,7 @@
           <a:p>
             <a:fld id="{5555EB2C-244D-4423-AD97-018ED6478B87}" type="datetime1">
               <a:rPr lang="en-US" smtClean="0"/>
-              <a:t>11/18/2025</a:t>
+              <a:t>11/20/2025</a:t>
             </a:fld>
             <a:endParaRPr lang="en-US"/>
           </a:p>
@@ -1206,7 +1207,7 @@
           <a:p>
             <a:fld id="{A2B41D1F-7576-4C60-B4EB-5115BC56CF40}" type="datetime1">
               <a:rPr lang="en-US" smtClean="0"/>
-              <a:t>11/18/2025</a:t>
+              <a:t>11/20/2025</a:t>
             </a:fld>
             <a:endParaRPr lang="en-US"/>
           </a:p>
@@ -1398,7 +1399,7 @@
           <a:p>
             <a:fld id="{E79D1398-4D56-44F9-BA35-34ACF3159A64}" type="datetime1">
               <a:rPr lang="en-US" smtClean="0"/>
-              <a:t>11/18/2025</a:t>
+              <a:t>11/20/2025</a:t>
             </a:fld>
             <a:endParaRPr lang="en-US"/>
           </a:p>
@@ -1580,7 +1581,7 @@
           <a:p>
             <a:fld id="{A3CF632E-48CB-4EEB-A6B6-DEC7AD7CC976}" type="datetime1">
               <a:rPr lang="en-US" smtClean="0"/>
-              <a:t>11/18/2025</a:t>
+              <a:t>11/20/2025</a:t>
             </a:fld>
             <a:endParaRPr lang="en-US"/>
           </a:p>
@@ -1833,7 +1834,7 @@
           <a:p>
             <a:fld id="{BAEEE52C-3A57-458E-95F6-96B2FA9D1DD4}" type="datetime1">
               <a:rPr lang="en-US" smtClean="0"/>
-              <a:t>11/18/2025</a:t>
+              <a:t>11/20/2025</a:t>
             </a:fld>
             <a:endParaRPr lang="en-US"/>
           </a:p>
@@ -2077,7 +2078,7 @@
           <a:p>
             <a:fld id="{766FC747-A48A-4FF2-8EE4-3E95ECD1C2A8}" type="datetime1">
               <a:rPr lang="en-US" smtClean="0"/>
-              <a:t>11/18/2025</a:t>
+              <a:t>11/20/2025</a:t>
             </a:fld>
             <a:endParaRPr lang="en-US"/>
           </a:p>
@@ -2456,7 +2457,7 @@
           <a:p>
             <a:fld id="{C9BF5758-AB7F-463D-B638-E1729B95E126}" type="datetime1">
               <a:rPr lang="en-US" smtClean="0"/>
-              <a:t>11/18/2025</a:t>
+              <a:t>11/20/2025</a:t>
             </a:fld>
             <a:endParaRPr lang="en-US"/>
           </a:p>
@@ -2586,7 +2587,7 @@
           <a:p>
             <a:fld id="{F3718C77-7DD0-4738-BF52-D0EC9F78A76E}" type="datetime1">
               <a:rPr lang="en-US" smtClean="0"/>
-              <a:t>11/18/2025</a:t>
+              <a:t>11/20/2025</a:t>
             </a:fld>
             <a:endParaRPr lang="en-US"/>
           </a:p>
@@ -2693,7 +2694,7 @@
           <a:p>
             <a:fld id="{948970CF-13D9-4E1D-A74F-2CFE4953FCDB}" type="datetime1">
               <a:rPr lang="en-US" smtClean="0"/>
-              <a:t>11/18/2025</a:t>
+              <a:t>11/20/2025</a:t>
             </a:fld>
             <a:endParaRPr lang="en-US"/>
           </a:p>
@@ -2982,7 +2983,7 @@
           <a:p>
             <a:fld id="{F68C49B9-4E1C-4967-B9CF-0BF9FECBE837}" type="datetime1">
               <a:rPr lang="en-US" smtClean="0"/>
-              <a:t>11/18/2025</a:t>
+              <a:t>11/20/2025</a:t>
             </a:fld>
             <a:endParaRPr lang="en-US"/>
           </a:p>
@@ -3250,7 +3251,7 @@
           <a:p>
             <a:fld id="{7E338CBB-1F06-4333-9BBF-66628B15E581}" type="datetime1">
               <a:rPr lang="en-US" smtClean="0"/>
-              <a:t>11/18/2025</a:t>
+              <a:t>11/20/2025</a:t>
             </a:fld>
             <a:endParaRPr lang="en-US"/>
           </a:p>
@@ -3475,7 +3476,7 @@
           <a:p>
             <a:fld id="{705EC883-F03C-4CA3-AF62-BEF30EEA4F65}" type="datetime1">
               <a:rPr lang="en-US" smtClean="0"/>
-              <a:t>11/18/2025</a:t>
+              <a:t>11/20/2025</a:t>
             </a:fld>
             <a:endParaRPr lang="en-US"/>
           </a:p>
@@ -17134,6 +17135,2023 @@
         <p:cNvPr id="1" name="">
           <a:extLst>
             <a:ext uri="{FF2B5EF4-FFF2-40B4-BE49-F238E27FC236}">
+              <a16:creationId xmlns:a16="http://schemas.microsoft.com/office/drawing/2014/main" id="{9CB55765-35BE-33A8-3315-24FCDA7AA0B0}"/>
+            </a:ext>
+          </a:extLst>
+        </p:cNvPr>
+        <p:cNvGrpSpPr/>
+        <p:nvPr/>
+      </p:nvGrpSpPr>
+      <p:grpSpPr>
+        <a:xfrm>
+          <a:off x="0" y="0"/>
+          <a:ext cx="0" cy="0"/>
+          <a:chOff x="0" y="0"/>
+          <a:chExt cx="0" cy="0"/>
+        </a:xfrm>
+      </p:grpSpPr>
+      <p:pic>
+        <p:nvPicPr>
+          <p:cNvPr id="16" name="Picture 15">
+            <a:extLst>
+              <a:ext uri="{FF2B5EF4-FFF2-40B4-BE49-F238E27FC236}">
+                <a16:creationId xmlns:a16="http://schemas.microsoft.com/office/drawing/2014/main" id="{4A3C1E2B-56EA-6341-909E-D26853746F4E}"/>
+              </a:ext>
+            </a:extLst>
+          </p:cNvPr>
+          <p:cNvPicPr>
+            <a:picLocks noChangeAspect="1"/>
+          </p:cNvPicPr>
+          <p:nvPr/>
+        </p:nvPicPr>
+        <p:blipFill>
+          <a:blip r:embed="rId2"/>
+          <a:stretch>
+            <a:fillRect/>
+          </a:stretch>
+        </p:blipFill>
+        <p:spPr>
+          <a:xfrm>
+            <a:off x="1705938" y="4594309"/>
+            <a:ext cx="3659107" cy="1413746"/>
+          </a:xfrm>
+          <a:prstGeom prst="rect">
+            <a:avLst/>
+          </a:prstGeom>
+        </p:spPr>
+      </p:pic>
+      <p:pic>
+        <p:nvPicPr>
+          <p:cNvPr id="7" name="Picture 6">
+            <a:extLst>
+              <a:ext uri="{FF2B5EF4-FFF2-40B4-BE49-F238E27FC236}">
+                <a16:creationId xmlns:a16="http://schemas.microsoft.com/office/drawing/2014/main" id="{1F96A778-73EF-82B9-01CF-0426479DA138}"/>
+              </a:ext>
+            </a:extLst>
+          </p:cNvPr>
+          <p:cNvPicPr>
+            <a:picLocks noChangeAspect="1"/>
+          </p:cNvPicPr>
+          <p:nvPr/>
+        </p:nvPicPr>
+        <p:blipFill>
+          <a:blip r:embed="rId3"/>
+          <a:stretch>
+            <a:fillRect/>
+          </a:stretch>
+        </p:blipFill>
+        <p:spPr>
+          <a:xfrm>
+            <a:off x="744087" y="1648979"/>
+            <a:ext cx="4186443" cy="2319761"/>
+          </a:xfrm>
+          <a:prstGeom prst="rect">
+            <a:avLst/>
+          </a:prstGeom>
+        </p:spPr>
+      </p:pic>
+      <p:sp>
+        <p:nvSpPr>
+          <p:cNvPr id="2" name="Title 1">
+            <a:extLst>
+              <a:ext uri="{FF2B5EF4-FFF2-40B4-BE49-F238E27FC236}">
+                <a16:creationId xmlns:a16="http://schemas.microsoft.com/office/drawing/2014/main" id="{801D4246-8E03-2BEC-81D0-6A3D34E78E69}"/>
+              </a:ext>
+            </a:extLst>
+          </p:cNvPr>
+          <p:cNvSpPr>
+            <a:spLocks noGrp="1"/>
+          </p:cNvSpPr>
+          <p:nvPr>
+            <p:ph type="title"/>
+          </p:nvPr>
+        </p:nvSpPr>
+        <p:spPr/>
+        <p:txBody>
+          <a:bodyPr>
+            <a:noAutofit/>
+          </a:bodyPr>
+          <a:lstStyle/>
+          <a:p>
+            <a:pPr algn="ctr"/>
+            <a:r>
+              <a:rPr lang="en-US" sz="3200" b="1" dirty="0">
+                <a:solidFill>
+                  <a:srgbClr val="FF0000"/>
+                </a:solidFill>
+                <a:latin typeface="+mn-lt"/>
+              </a:rPr>
+              <a:t>Edit</a:t>
+            </a:r>
+            <a:r>
+              <a:rPr lang="en-US" sz="3200" dirty="0">
+                <a:latin typeface="+mn-lt"/>
+              </a:rPr>
+              <a:t> then </a:t>
+            </a:r>
+            <a:r>
+              <a:rPr lang="en-US" sz="3200" b="1" dirty="0">
+                <a:solidFill>
+                  <a:srgbClr val="00B050"/>
+                </a:solidFill>
+                <a:latin typeface="+mn-lt"/>
+              </a:rPr>
+              <a:t>Run</a:t>
+            </a:r>
+            <a:r>
+              <a:rPr lang="en-US" sz="3200" dirty="0">
+                <a:latin typeface="+mn-lt"/>
+              </a:rPr>
+              <a:t> pemdas.py</a:t>
+            </a:r>
+          </a:p>
+        </p:txBody>
+      </p:sp>
+      <p:sp>
+        <p:nvSpPr>
+          <p:cNvPr id="3" name="Slide Number Placeholder 2">
+            <a:extLst>
+              <a:ext uri="{FF2B5EF4-FFF2-40B4-BE49-F238E27FC236}">
+                <a16:creationId xmlns:a16="http://schemas.microsoft.com/office/drawing/2014/main" id="{F553970A-3690-2B73-414D-ECB9B05A515C}"/>
+              </a:ext>
+            </a:extLst>
+          </p:cNvPr>
+          <p:cNvSpPr>
+            <a:spLocks noGrp="1"/>
+          </p:cNvSpPr>
+          <p:nvPr>
+            <p:ph type="sldNum" sz="quarter" idx="12"/>
+          </p:nvPr>
+        </p:nvSpPr>
+        <p:spPr/>
+        <p:txBody>
+          <a:bodyPr/>
+          <a:lstStyle/>
+          <a:p>
+            <a:fld id="{650AD656-6FF9-465D-B7B0-1CD0DD39CD23}" type="slidenum">
+              <a:rPr lang="en-US" smtClean="0"/>
+              <a:t>23</a:t>
+            </a:fld>
+            <a:endParaRPr lang="en-US" dirty="0"/>
+          </a:p>
+        </p:txBody>
+      </p:sp>
+      <p:grpSp>
+        <p:nvGrpSpPr>
+          <p:cNvPr id="8" name="Group 7">
+            <a:extLst>
+              <a:ext uri="{FF2B5EF4-FFF2-40B4-BE49-F238E27FC236}">
+                <a16:creationId xmlns:a16="http://schemas.microsoft.com/office/drawing/2014/main" id="{2802D0C7-1407-4D5F-379B-0917D36244F2}"/>
+              </a:ext>
+            </a:extLst>
+          </p:cNvPr>
+          <p:cNvGrpSpPr/>
+          <p:nvPr/>
+        </p:nvGrpSpPr>
+        <p:grpSpPr>
+          <a:xfrm>
+            <a:off x="2997175" y="2169079"/>
+            <a:ext cx="1076632" cy="369332"/>
+            <a:chOff x="4968362" y="2079211"/>
+            <a:chExt cx="1076632" cy="369332"/>
+          </a:xfrm>
+        </p:grpSpPr>
+        <p:cxnSp>
+          <p:nvCxnSpPr>
+            <p:cNvPr id="12" name="Straight Arrow Connector 11">
+              <a:extLst>
+                <a:ext uri="{FF2B5EF4-FFF2-40B4-BE49-F238E27FC236}">
+                  <a16:creationId xmlns:a16="http://schemas.microsoft.com/office/drawing/2014/main" id="{B90F87B0-FDFB-99E2-5BD2-2F0897593296}"/>
+                </a:ext>
+              </a:extLst>
+            </p:cNvPr>
+            <p:cNvCxnSpPr>
+              <a:cxnSpLocks/>
+            </p:cNvCxnSpPr>
+            <p:nvPr/>
+          </p:nvCxnSpPr>
+          <p:spPr>
+            <a:xfrm flipH="1">
+              <a:off x="4968362" y="2263877"/>
+              <a:ext cx="693174" cy="0"/>
+            </a:xfrm>
+            <a:prstGeom prst="straightConnector1">
+              <a:avLst/>
+            </a:prstGeom>
+            <a:ln w="38100">
+              <a:solidFill>
+                <a:srgbClr val="FF0000"/>
+              </a:solidFill>
+              <a:tailEnd type="triangle"/>
+            </a:ln>
+          </p:spPr>
+          <p:style>
+            <a:lnRef idx="1">
+              <a:schemeClr val="accent1"/>
+            </a:lnRef>
+            <a:fillRef idx="0">
+              <a:schemeClr val="accent1"/>
+            </a:fillRef>
+            <a:effectRef idx="0">
+              <a:schemeClr val="accent1"/>
+            </a:effectRef>
+            <a:fontRef idx="minor">
+              <a:schemeClr val="tx1"/>
+            </a:fontRef>
+          </p:style>
+        </p:cxnSp>
+        <p:sp>
+          <p:nvSpPr>
+            <p:cNvPr id="13" name="TextBox 12">
+              <a:extLst>
+                <a:ext uri="{FF2B5EF4-FFF2-40B4-BE49-F238E27FC236}">
+                  <a16:creationId xmlns:a16="http://schemas.microsoft.com/office/drawing/2014/main" id="{F9A03964-D34F-5A6C-AA6E-2F7725A57A40}"/>
+                </a:ext>
+              </a:extLst>
+            </p:cNvPr>
+            <p:cNvSpPr txBox="1"/>
+            <p:nvPr/>
+          </p:nvSpPr>
+          <p:spPr>
+            <a:xfrm>
+              <a:off x="5661536" y="2079211"/>
+              <a:ext cx="383458" cy="369332"/>
+            </a:xfrm>
+            <a:prstGeom prst="rect">
+              <a:avLst/>
+            </a:prstGeom>
+            <a:noFill/>
+          </p:spPr>
+          <p:txBody>
+            <a:bodyPr wrap="square" rtlCol="0">
+              <a:spAutoFit/>
+            </a:bodyPr>
+            <a:lstStyle/>
+            <a:p>
+              <a:r>
+                <a:rPr lang="en-US" dirty="0">
+                  <a:ln>
+                    <a:solidFill>
+                      <a:srgbClr val="FF0000"/>
+                    </a:solidFill>
+                  </a:ln>
+                  <a:solidFill>
+                    <a:srgbClr val="FF0000"/>
+                  </a:solidFill>
+                  <a:sym typeface="Wingdings" panose="05000000000000000000" pitchFamily="2" charset="2"/>
+                </a:rPr>
+                <a:t></a:t>
+              </a:r>
+              <a:endParaRPr lang="en-US" dirty="0">
+                <a:ln>
+                  <a:solidFill>
+                    <a:srgbClr val="FF0000"/>
+                  </a:solidFill>
+                </a:ln>
+                <a:solidFill>
+                  <a:srgbClr val="FF0000"/>
+                </a:solidFill>
+              </a:endParaRPr>
+            </a:p>
+          </p:txBody>
+        </p:sp>
+      </p:grpSp>
+      <p:grpSp>
+        <p:nvGrpSpPr>
+          <p:cNvPr id="17" name="Group 16">
+            <a:extLst>
+              <a:ext uri="{FF2B5EF4-FFF2-40B4-BE49-F238E27FC236}">
+                <a16:creationId xmlns:a16="http://schemas.microsoft.com/office/drawing/2014/main" id="{32613EDA-1764-5821-F711-22DCC2D48CC8}"/>
+              </a:ext>
+            </a:extLst>
+          </p:cNvPr>
+          <p:cNvGrpSpPr/>
+          <p:nvPr/>
+        </p:nvGrpSpPr>
+        <p:grpSpPr>
+          <a:xfrm>
+            <a:off x="1920543" y="4681001"/>
+            <a:ext cx="1076632" cy="369332"/>
+            <a:chOff x="4704120" y="2356972"/>
+            <a:chExt cx="1076632" cy="369332"/>
+          </a:xfrm>
+        </p:grpSpPr>
+        <p:cxnSp>
+          <p:nvCxnSpPr>
+            <p:cNvPr id="18" name="Straight Arrow Connector 17">
+              <a:extLst>
+                <a:ext uri="{FF2B5EF4-FFF2-40B4-BE49-F238E27FC236}">
+                  <a16:creationId xmlns:a16="http://schemas.microsoft.com/office/drawing/2014/main" id="{862AE435-3282-4431-71F0-EE69F00A154B}"/>
+                </a:ext>
+              </a:extLst>
+            </p:cNvPr>
+            <p:cNvCxnSpPr>
+              <a:cxnSpLocks/>
+            </p:cNvCxnSpPr>
+            <p:nvPr/>
+          </p:nvCxnSpPr>
+          <p:spPr>
+            <a:xfrm flipH="1">
+              <a:off x="4704120" y="2541638"/>
+              <a:ext cx="693174" cy="0"/>
+            </a:xfrm>
+            <a:prstGeom prst="straightConnector1">
+              <a:avLst/>
+            </a:prstGeom>
+            <a:ln w="38100">
+              <a:solidFill>
+                <a:srgbClr val="FF0000"/>
+              </a:solidFill>
+              <a:tailEnd type="triangle"/>
+            </a:ln>
+          </p:spPr>
+          <p:style>
+            <a:lnRef idx="1">
+              <a:schemeClr val="accent1"/>
+            </a:lnRef>
+            <a:fillRef idx="0">
+              <a:schemeClr val="accent1"/>
+            </a:fillRef>
+            <a:effectRef idx="0">
+              <a:schemeClr val="accent1"/>
+            </a:effectRef>
+            <a:fontRef idx="minor">
+              <a:schemeClr val="tx1"/>
+            </a:fontRef>
+          </p:style>
+        </p:cxnSp>
+        <p:sp>
+          <p:nvSpPr>
+            <p:cNvPr id="19" name="TextBox 18">
+              <a:extLst>
+                <a:ext uri="{FF2B5EF4-FFF2-40B4-BE49-F238E27FC236}">
+                  <a16:creationId xmlns:a16="http://schemas.microsoft.com/office/drawing/2014/main" id="{58114AA7-158D-0CC6-2DE4-FD75C3D7063C}"/>
+                </a:ext>
+              </a:extLst>
+            </p:cNvPr>
+            <p:cNvSpPr txBox="1"/>
+            <p:nvPr/>
+          </p:nvSpPr>
+          <p:spPr>
+            <a:xfrm>
+              <a:off x="5397294" y="2356972"/>
+              <a:ext cx="383458" cy="369332"/>
+            </a:xfrm>
+            <a:prstGeom prst="rect">
+              <a:avLst/>
+            </a:prstGeom>
+            <a:noFill/>
+          </p:spPr>
+          <p:txBody>
+            <a:bodyPr wrap="square" rtlCol="0">
+              <a:spAutoFit/>
+            </a:bodyPr>
+            <a:lstStyle/>
+            <a:p>
+              <a:r>
+                <a:rPr lang="en-US" dirty="0">
+                  <a:ln>
+                    <a:solidFill>
+                      <a:srgbClr val="FF0000"/>
+                    </a:solidFill>
+                  </a:ln>
+                  <a:solidFill>
+                    <a:srgbClr val="FF0000"/>
+                  </a:solidFill>
+                  <a:sym typeface="Wingdings" panose="05000000000000000000" pitchFamily="2" charset="2"/>
+                </a:rPr>
+                <a:t></a:t>
+              </a:r>
+              <a:endParaRPr lang="en-US" dirty="0">
+                <a:ln>
+                  <a:solidFill>
+                    <a:srgbClr val="FF0000"/>
+                  </a:solidFill>
+                </a:ln>
+                <a:solidFill>
+                  <a:srgbClr val="FF0000"/>
+                </a:solidFill>
+              </a:endParaRPr>
+            </a:p>
+          </p:txBody>
+        </p:sp>
+      </p:grpSp>
+      <p:grpSp>
+        <p:nvGrpSpPr>
+          <p:cNvPr id="20" name="Group 19">
+            <a:extLst>
+              <a:ext uri="{FF2B5EF4-FFF2-40B4-BE49-F238E27FC236}">
+                <a16:creationId xmlns:a16="http://schemas.microsoft.com/office/drawing/2014/main" id="{3D3A039C-B003-203E-28AF-C968D25A2AEA}"/>
+              </a:ext>
+            </a:extLst>
+          </p:cNvPr>
+          <p:cNvGrpSpPr/>
+          <p:nvPr/>
+        </p:nvGrpSpPr>
+        <p:grpSpPr>
+          <a:xfrm>
+            <a:off x="4661396" y="2588501"/>
+            <a:ext cx="1068643" cy="369332"/>
+            <a:chOff x="3647644" y="4910075"/>
+            <a:chExt cx="1068643" cy="369332"/>
+          </a:xfrm>
+        </p:grpSpPr>
+        <p:sp>
+          <p:nvSpPr>
+            <p:cNvPr id="21" name="TextBox 20">
+              <a:extLst>
+                <a:ext uri="{FF2B5EF4-FFF2-40B4-BE49-F238E27FC236}">
+                  <a16:creationId xmlns:a16="http://schemas.microsoft.com/office/drawing/2014/main" id="{96F780EC-2D3C-4251-5812-C06B075764FE}"/>
+                </a:ext>
+              </a:extLst>
+            </p:cNvPr>
+            <p:cNvSpPr txBox="1"/>
+            <p:nvPr/>
+          </p:nvSpPr>
+          <p:spPr>
+            <a:xfrm>
+              <a:off x="4332829" y="4910075"/>
+              <a:ext cx="383458" cy="369332"/>
+            </a:xfrm>
+            <a:prstGeom prst="rect">
+              <a:avLst/>
+            </a:prstGeom>
+            <a:noFill/>
+          </p:spPr>
+          <p:txBody>
+            <a:bodyPr wrap="square" rtlCol="0">
+              <a:spAutoFit/>
+            </a:bodyPr>
+            <a:lstStyle/>
+            <a:p>
+              <a:r>
+                <a:rPr lang="en-US" dirty="0">
+                  <a:ln>
+                    <a:solidFill>
+                      <a:srgbClr val="FF0000"/>
+                    </a:solidFill>
+                  </a:ln>
+                  <a:solidFill>
+                    <a:srgbClr val="FF0000"/>
+                  </a:solidFill>
+                  <a:sym typeface="Wingdings" panose="05000000000000000000" pitchFamily="2" charset="2"/>
+                </a:rPr>
+                <a:t></a:t>
+              </a:r>
+              <a:endParaRPr lang="en-US" dirty="0">
+                <a:ln>
+                  <a:solidFill>
+                    <a:srgbClr val="FF0000"/>
+                  </a:solidFill>
+                </a:ln>
+                <a:solidFill>
+                  <a:srgbClr val="FF0000"/>
+                </a:solidFill>
+              </a:endParaRPr>
+            </a:p>
+          </p:txBody>
+        </p:sp>
+        <p:cxnSp>
+          <p:nvCxnSpPr>
+            <p:cNvPr id="22" name="Straight Arrow Connector 21">
+              <a:extLst>
+                <a:ext uri="{FF2B5EF4-FFF2-40B4-BE49-F238E27FC236}">
+                  <a16:creationId xmlns:a16="http://schemas.microsoft.com/office/drawing/2014/main" id="{FD2FA8FA-2818-8394-AE4C-FF288334833D}"/>
+                </a:ext>
+              </a:extLst>
+            </p:cNvPr>
+            <p:cNvCxnSpPr>
+              <a:cxnSpLocks/>
+            </p:cNvCxnSpPr>
+            <p:nvPr/>
+          </p:nvCxnSpPr>
+          <p:spPr>
+            <a:xfrm flipH="1">
+              <a:off x="3647644" y="5094741"/>
+              <a:ext cx="693174" cy="0"/>
+            </a:xfrm>
+            <a:prstGeom prst="straightConnector1">
+              <a:avLst/>
+            </a:prstGeom>
+            <a:ln w="38100">
+              <a:solidFill>
+                <a:srgbClr val="FF0000"/>
+              </a:solidFill>
+              <a:tailEnd type="triangle"/>
+            </a:ln>
+          </p:spPr>
+          <p:style>
+            <a:lnRef idx="1">
+              <a:schemeClr val="accent1"/>
+            </a:lnRef>
+            <a:fillRef idx="0">
+              <a:schemeClr val="accent1"/>
+            </a:fillRef>
+            <a:effectRef idx="0">
+              <a:schemeClr val="accent1"/>
+            </a:effectRef>
+            <a:fontRef idx="minor">
+              <a:schemeClr val="tx1"/>
+            </a:fontRef>
+          </p:style>
+        </p:cxnSp>
+      </p:grpSp>
+      <p:sp>
+        <p:nvSpPr>
+          <p:cNvPr id="6" name="TextBox 5">
+            <a:extLst>
+              <a:ext uri="{FF2B5EF4-FFF2-40B4-BE49-F238E27FC236}">
+                <a16:creationId xmlns:a16="http://schemas.microsoft.com/office/drawing/2014/main" id="{68AA9C2C-E30F-1166-E557-E16613BF35DC}"/>
+              </a:ext>
+            </a:extLst>
+          </p:cNvPr>
+          <p:cNvSpPr txBox="1"/>
+          <p:nvPr/>
+        </p:nvSpPr>
+        <p:spPr>
+          <a:xfrm>
+            <a:off x="5855516" y="2808859"/>
+            <a:ext cx="2685292" cy="923330"/>
+          </a:xfrm>
+          <a:prstGeom prst="rect">
+            <a:avLst/>
+          </a:prstGeom>
+          <a:noFill/>
+        </p:spPr>
+        <p:txBody>
+          <a:bodyPr wrap="square" rtlCol="0">
+            <a:spAutoFit/>
+          </a:bodyPr>
+          <a:lstStyle/>
+          <a:p>
+            <a:pPr algn="ctr"/>
+            <a:r>
+              <a:rPr lang="en-US" dirty="0">
+                <a:solidFill>
+                  <a:srgbClr val="7030A0"/>
+                </a:solidFill>
+              </a:rPr>
+              <a:t>The double forward slash </a:t>
+            </a:r>
+            <a:r>
+              <a:rPr lang="en-US" b="1" dirty="0">
+                <a:solidFill>
+                  <a:srgbClr val="7030A0"/>
+                </a:solidFill>
+              </a:rPr>
+              <a:t>//</a:t>
+            </a:r>
+            <a:r>
+              <a:rPr lang="en-US" dirty="0">
+                <a:solidFill>
+                  <a:srgbClr val="7030A0"/>
+                </a:solidFill>
+              </a:rPr>
+              <a:t> is the </a:t>
+            </a:r>
+            <a:r>
+              <a:rPr lang="en-US" u="sng" dirty="0">
+                <a:solidFill>
+                  <a:srgbClr val="7030A0"/>
+                </a:solidFill>
+              </a:rPr>
+              <a:t>integer</a:t>
+            </a:r>
+            <a:r>
+              <a:rPr lang="en-US" dirty="0">
+                <a:solidFill>
+                  <a:srgbClr val="7030A0"/>
+                </a:solidFill>
+              </a:rPr>
+              <a:t> (round down) division operator</a:t>
+            </a:r>
+            <a:endParaRPr lang="en-US" b="1" dirty="0">
+              <a:solidFill>
+                <a:srgbClr val="7030A0"/>
+              </a:solidFill>
+            </a:endParaRPr>
+          </a:p>
+        </p:txBody>
+      </p:sp>
+      <p:grpSp>
+        <p:nvGrpSpPr>
+          <p:cNvPr id="9" name="Group 8">
+            <a:extLst>
+              <a:ext uri="{FF2B5EF4-FFF2-40B4-BE49-F238E27FC236}">
+                <a16:creationId xmlns:a16="http://schemas.microsoft.com/office/drawing/2014/main" id="{CB475B39-7EB1-DC44-E061-AAE6E72173B8}"/>
+              </a:ext>
+            </a:extLst>
+          </p:cNvPr>
+          <p:cNvGrpSpPr/>
+          <p:nvPr/>
+        </p:nvGrpSpPr>
+        <p:grpSpPr>
+          <a:xfrm>
+            <a:off x="5346581" y="5136196"/>
+            <a:ext cx="1064340" cy="369332"/>
+            <a:chOff x="3647644" y="5421073"/>
+            <a:chExt cx="1064340" cy="369332"/>
+          </a:xfrm>
+        </p:grpSpPr>
+        <p:sp>
+          <p:nvSpPr>
+            <p:cNvPr id="10" name="TextBox 9">
+              <a:extLst>
+                <a:ext uri="{FF2B5EF4-FFF2-40B4-BE49-F238E27FC236}">
+                  <a16:creationId xmlns:a16="http://schemas.microsoft.com/office/drawing/2014/main" id="{D8634D14-A8ED-F995-44DA-8E979EE6635D}"/>
+                </a:ext>
+              </a:extLst>
+            </p:cNvPr>
+            <p:cNvSpPr txBox="1"/>
+            <p:nvPr/>
+          </p:nvSpPr>
+          <p:spPr>
+            <a:xfrm>
+              <a:off x="4328526" y="5421073"/>
+              <a:ext cx="383458" cy="369332"/>
+            </a:xfrm>
+            <a:prstGeom prst="rect">
+              <a:avLst/>
+            </a:prstGeom>
+            <a:noFill/>
+          </p:spPr>
+          <p:txBody>
+            <a:bodyPr wrap="square" rtlCol="0">
+              <a:spAutoFit/>
+            </a:bodyPr>
+            <a:lstStyle/>
+            <a:p>
+              <a:r>
+                <a:rPr lang="en-US" dirty="0">
+                  <a:ln>
+                    <a:solidFill>
+                      <a:srgbClr val="FF0000"/>
+                    </a:solidFill>
+                  </a:ln>
+                  <a:solidFill>
+                    <a:srgbClr val="FF0000"/>
+                  </a:solidFill>
+                  <a:sym typeface="Wingdings" panose="05000000000000000000" pitchFamily="2" charset="2"/>
+                </a:rPr>
+                <a:t></a:t>
+              </a:r>
+              <a:endParaRPr lang="en-US" dirty="0">
+                <a:ln>
+                  <a:solidFill>
+                    <a:srgbClr val="FF0000"/>
+                  </a:solidFill>
+                </a:ln>
+                <a:solidFill>
+                  <a:srgbClr val="FF0000"/>
+                </a:solidFill>
+              </a:endParaRPr>
+            </a:p>
+          </p:txBody>
+        </p:sp>
+        <p:cxnSp>
+          <p:nvCxnSpPr>
+            <p:cNvPr id="11" name="Straight Arrow Connector 10">
+              <a:extLst>
+                <a:ext uri="{FF2B5EF4-FFF2-40B4-BE49-F238E27FC236}">
+                  <a16:creationId xmlns:a16="http://schemas.microsoft.com/office/drawing/2014/main" id="{327966B8-AAD5-A4FD-0CD5-C2822F8EBC25}"/>
+                </a:ext>
+              </a:extLst>
+            </p:cNvPr>
+            <p:cNvCxnSpPr>
+              <a:cxnSpLocks/>
+            </p:cNvCxnSpPr>
+            <p:nvPr/>
+          </p:nvCxnSpPr>
+          <p:spPr>
+            <a:xfrm flipH="1">
+              <a:off x="3647644" y="5594437"/>
+              <a:ext cx="693174" cy="0"/>
+            </a:xfrm>
+            <a:prstGeom prst="straightConnector1">
+              <a:avLst/>
+            </a:prstGeom>
+            <a:ln w="38100">
+              <a:solidFill>
+                <a:srgbClr val="FF0000"/>
+              </a:solidFill>
+              <a:tailEnd type="triangle"/>
+            </a:ln>
+          </p:spPr>
+          <p:style>
+            <a:lnRef idx="1">
+              <a:schemeClr val="accent1"/>
+            </a:lnRef>
+            <a:fillRef idx="0">
+              <a:schemeClr val="accent1"/>
+            </a:fillRef>
+            <a:effectRef idx="0">
+              <a:schemeClr val="accent1"/>
+            </a:effectRef>
+            <a:fontRef idx="minor">
+              <a:schemeClr val="tx1"/>
+            </a:fontRef>
+          </p:style>
+        </p:cxnSp>
+      </p:grpSp>
+      <p:sp>
+        <p:nvSpPr>
+          <p:cNvPr id="4" name="TextBox 3">
+            <a:extLst>
+              <a:ext uri="{FF2B5EF4-FFF2-40B4-BE49-F238E27FC236}">
+                <a16:creationId xmlns:a16="http://schemas.microsoft.com/office/drawing/2014/main" id="{3F91673F-5926-CB20-035D-61278381C5B1}"/>
+              </a:ext>
+            </a:extLst>
+          </p:cNvPr>
+          <p:cNvSpPr txBox="1"/>
+          <p:nvPr/>
+        </p:nvSpPr>
+        <p:spPr>
+          <a:xfrm>
+            <a:off x="7210925" y="365126"/>
+            <a:ext cx="1548064" cy="646331"/>
+          </a:xfrm>
+          <a:prstGeom prst="rect">
+            <a:avLst/>
+          </a:prstGeom>
+          <a:noFill/>
+        </p:spPr>
+        <p:txBody>
+          <a:bodyPr wrap="square" rtlCol="0">
+            <a:spAutoFit/>
+          </a:bodyPr>
+          <a:lstStyle/>
+          <a:p>
+            <a:pPr algn="ctr"/>
+            <a:r>
+              <a:rPr lang="en-US" b="1" dirty="0">
+                <a:solidFill>
+                  <a:srgbClr val="7030A0"/>
+                </a:solidFill>
+              </a:rPr>
+              <a:t>You must type in this code</a:t>
+            </a:r>
+          </a:p>
+        </p:txBody>
+      </p:sp>
+      <p:grpSp>
+        <p:nvGrpSpPr>
+          <p:cNvPr id="23" name="Group 22">
+            <a:extLst>
+              <a:ext uri="{FF2B5EF4-FFF2-40B4-BE49-F238E27FC236}">
+                <a16:creationId xmlns:a16="http://schemas.microsoft.com/office/drawing/2014/main" id="{32C255BB-7D1B-C309-452C-E8A141E10E0E}"/>
+              </a:ext>
+            </a:extLst>
+          </p:cNvPr>
+          <p:cNvGrpSpPr/>
+          <p:nvPr/>
+        </p:nvGrpSpPr>
+        <p:grpSpPr>
+          <a:xfrm>
+            <a:off x="4812259" y="3046938"/>
+            <a:ext cx="1068643" cy="369332"/>
+            <a:chOff x="3647644" y="5359159"/>
+            <a:chExt cx="1068643" cy="369332"/>
+          </a:xfrm>
+        </p:grpSpPr>
+        <p:sp>
+          <p:nvSpPr>
+            <p:cNvPr id="25" name="TextBox 24">
+              <a:extLst>
+                <a:ext uri="{FF2B5EF4-FFF2-40B4-BE49-F238E27FC236}">
+                  <a16:creationId xmlns:a16="http://schemas.microsoft.com/office/drawing/2014/main" id="{888860E0-879F-AA87-75DF-F09C3444B275}"/>
+                </a:ext>
+              </a:extLst>
+            </p:cNvPr>
+            <p:cNvSpPr txBox="1"/>
+            <p:nvPr/>
+          </p:nvSpPr>
+          <p:spPr>
+            <a:xfrm>
+              <a:off x="4332829" y="5359159"/>
+              <a:ext cx="383458" cy="369332"/>
+            </a:xfrm>
+            <a:prstGeom prst="rect">
+              <a:avLst/>
+            </a:prstGeom>
+            <a:noFill/>
+          </p:spPr>
+          <p:txBody>
+            <a:bodyPr wrap="square" rtlCol="0">
+              <a:spAutoFit/>
+            </a:bodyPr>
+            <a:lstStyle/>
+            <a:p>
+              <a:r>
+                <a:rPr lang="en-US" dirty="0">
+                  <a:ln>
+                    <a:solidFill>
+                      <a:srgbClr val="FF0000"/>
+                    </a:solidFill>
+                  </a:ln>
+                  <a:solidFill>
+                    <a:srgbClr val="FF0000"/>
+                  </a:solidFill>
+                  <a:sym typeface="Wingdings" panose="05000000000000000000" pitchFamily="2" charset="2"/>
+                </a:rPr>
+                <a:t></a:t>
+              </a:r>
+              <a:endParaRPr lang="en-US" dirty="0">
+                <a:ln>
+                  <a:solidFill>
+                    <a:srgbClr val="FF0000"/>
+                  </a:solidFill>
+                </a:ln>
+                <a:solidFill>
+                  <a:srgbClr val="FF0000"/>
+                </a:solidFill>
+              </a:endParaRPr>
+            </a:p>
+          </p:txBody>
+        </p:sp>
+        <p:cxnSp>
+          <p:nvCxnSpPr>
+            <p:cNvPr id="27" name="Straight Arrow Connector 26">
+              <a:extLst>
+                <a:ext uri="{FF2B5EF4-FFF2-40B4-BE49-F238E27FC236}">
+                  <a16:creationId xmlns:a16="http://schemas.microsoft.com/office/drawing/2014/main" id="{48F01928-38DA-3D96-9477-51CE68E01812}"/>
+                </a:ext>
+              </a:extLst>
+            </p:cNvPr>
+            <p:cNvCxnSpPr>
+              <a:cxnSpLocks/>
+            </p:cNvCxnSpPr>
+            <p:nvPr/>
+          </p:nvCxnSpPr>
+          <p:spPr>
+            <a:xfrm flipH="1">
+              <a:off x="3647644" y="5541057"/>
+              <a:ext cx="693174" cy="0"/>
+            </a:xfrm>
+            <a:prstGeom prst="straightConnector1">
+              <a:avLst/>
+            </a:prstGeom>
+            <a:ln w="38100">
+              <a:solidFill>
+                <a:srgbClr val="FF0000"/>
+              </a:solidFill>
+              <a:tailEnd type="triangle"/>
+            </a:ln>
+          </p:spPr>
+          <p:style>
+            <a:lnRef idx="1">
+              <a:schemeClr val="accent1"/>
+            </a:lnRef>
+            <a:fillRef idx="0">
+              <a:schemeClr val="accent1"/>
+            </a:fillRef>
+            <a:effectRef idx="0">
+              <a:schemeClr val="accent1"/>
+            </a:effectRef>
+            <a:fontRef idx="minor">
+              <a:schemeClr val="tx1"/>
+            </a:fontRef>
+          </p:style>
+        </p:cxnSp>
+      </p:grpSp>
+      <p:grpSp>
+        <p:nvGrpSpPr>
+          <p:cNvPr id="28" name="Group 27">
+            <a:extLst>
+              <a:ext uri="{FF2B5EF4-FFF2-40B4-BE49-F238E27FC236}">
+                <a16:creationId xmlns:a16="http://schemas.microsoft.com/office/drawing/2014/main" id="{C5925875-8638-43B6-711F-87FB003F6169}"/>
+              </a:ext>
+            </a:extLst>
+          </p:cNvPr>
+          <p:cNvGrpSpPr/>
+          <p:nvPr/>
+        </p:nvGrpSpPr>
+        <p:grpSpPr>
+          <a:xfrm>
+            <a:off x="2386214" y="5562432"/>
+            <a:ext cx="1076632" cy="369332"/>
+            <a:chOff x="2157212" y="5356391"/>
+            <a:chExt cx="1076632" cy="369332"/>
+          </a:xfrm>
+        </p:grpSpPr>
+        <p:sp>
+          <p:nvSpPr>
+            <p:cNvPr id="29" name="TextBox 28">
+              <a:extLst>
+                <a:ext uri="{FF2B5EF4-FFF2-40B4-BE49-F238E27FC236}">
+                  <a16:creationId xmlns:a16="http://schemas.microsoft.com/office/drawing/2014/main" id="{884B84AC-156F-A9D8-3EB6-F0E8117210B4}"/>
+                </a:ext>
+              </a:extLst>
+            </p:cNvPr>
+            <p:cNvSpPr txBox="1"/>
+            <p:nvPr/>
+          </p:nvSpPr>
+          <p:spPr>
+            <a:xfrm>
+              <a:off x="2850386" y="5356391"/>
+              <a:ext cx="383458" cy="369332"/>
+            </a:xfrm>
+            <a:prstGeom prst="rect">
+              <a:avLst/>
+            </a:prstGeom>
+            <a:noFill/>
+          </p:spPr>
+          <p:txBody>
+            <a:bodyPr wrap="square" rtlCol="0">
+              <a:spAutoFit/>
+            </a:bodyPr>
+            <a:lstStyle/>
+            <a:p>
+              <a:r>
+                <a:rPr lang="en-US" dirty="0">
+                  <a:ln>
+                    <a:solidFill>
+                      <a:srgbClr val="FF0000"/>
+                    </a:solidFill>
+                  </a:ln>
+                  <a:solidFill>
+                    <a:srgbClr val="FF0000"/>
+                  </a:solidFill>
+                  <a:sym typeface="Wingdings" panose="05000000000000000000" pitchFamily="2" charset="2"/>
+                </a:rPr>
+                <a:t></a:t>
+              </a:r>
+              <a:endParaRPr lang="en-US" dirty="0">
+                <a:ln>
+                  <a:solidFill>
+                    <a:srgbClr val="FF0000"/>
+                  </a:solidFill>
+                </a:ln>
+                <a:solidFill>
+                  <a:srgbClr val="FF0000"/>
+                </a:solidFill>
+              </a:endParaRPr>
+            </a:p>
+          </p:txBody>
+        </p:sp>
+        <p:cxnSp>
+          <p:nvCxnSpPr>
+            <p:cNvPr id="30" name="Straight Arrow Connector 29">
+              <a:extLst>
+                <a:ext uri="{FF2B5EF4-FFF2-40B4-BE49-F238E27FC236}">
+                  <a16:creationId xmlns:a16="http://schemas.microsoft.com/office/drawing/2014/main" id="{AB68A333-DB8E-E7CB-054E-3955360B9A43}"/>
+                </a:ext>
+              </a:extLst>
+            </p:cNvPr>
+            <p:cNvCxnSpPr>
+              <a:cxnSpLocks/>
+            </p:cNvCxnSpPr>
+            <p:nvPr/>
+          </p:nvCxnSpPr>
+          <p:spPr>
+            <a:xfrm flipH="1">
+              <a:off x="2157212" y="5545146"/>
+              <a:ext cx="693174" cy="0"/>
+            </a:xfrm>
+            <a:prstGeom prst="straightConnector1">
+              <a:avLst/>
+            </a:prstGeom>
+            <a:ln w="38100">
+              <a:solidFill>
+                <a:srgbClr val="FF0000"/>
+              </a:solidFill>
+              <a:tailEnd type="triangle"/>
+            </a:ln>
+          </p:spPr>
+          <p:style>
+            <a:lnRef idx="1">
+              <a:schemeClr val="accent1"/>
+            </a:lnRef>
+            <a:fillRef idx="0">
+              <a:schemeClr val="accent1"/>
+            </a:fillRef>
+            <a:effectRef idx="0">
+              <a:schemeClr val="accent1"/>
+            </a:effectRef>
+            <a:fontRef idx="minor">
+              <a:schemeClr val="tx1"/>
+            </a:fontRef>
+          </p:style>
+        </p:cxnSp>
+      </p:grpSp>
+      <p:sp>
+        <p:nvSpPr>
+          <p:cNvPr id="31" name="TextBox 30">
+            <a:extLst>
+              <a:ext uri="{FF2B5EF4-FFF2-40B4-BE49-F238E27FC236}">
+                <a16:creationId xmlns:a16="http://schemas.microsoft.com/office/drawing/2014/main" id="{C1EECF9D-4757-5160-FA3E-BCAECCAEE096}"/>
+              </a:ext>
+            </a:extLst>
+          </p:cNvPr>
+          <p:cNvSpPr txBox="1"/>
+          <p:nvPr/>
+        </p:nvSpPr>
+        <p:spPr>
+          <a:xfrm>
+            <a:off x="5855516" y="1659296"/>
+            <a:ext cx="2685292" cy="923330"/>
+          </a:xfrm>
+          <a:prstGeom prst="rect">
+            <a:avLst/>
+          </a:prstGeom>
+          <a:noFill/>
+        </p:spPr>
+        <p:txBody>
+          <a:bodyPr wrap="square" rtlCol="0">
+            <a:spAutoFit/>
+          </a:bodyPr>
+          <a:lstStyle/>
+          <a:p>
+            <a:pPr algn="ctr"/>
+            <a:r>
+              <a:rPr lang="en-US" dirty="0">
+                <a:solidFill>
+                  <a:srgbClr val="7030A0"/>
+                </a:solidFill>
+              </a:rPr>
+              <a:t>Calling </a:t>
+            </a:r>
+            <a:r>
+              <a:rPr lang="en-US" b="1" dirty="0">
+                <a:solidFill>
+                  <a:srgbClr val="7030A0"/>
+                </a:solidFill>
+              </a:rPr>
+              <a:t>print() </a:t>
+            </a:r>
+            <a:r>
+              <a:rPr lang="en-US" dirty="0">
+                <a:solidFill>
+                  <a:srgbClr val="7030A0"/>
+                </a:solidFill>
+              </a:rPr>
+              <a:t>with no arguments just displays a blank line</a:t>
+            </a:r>
+            <a:endParaRPr lang="en-US" b="1" dirty="0">
+              <a:solidFill>
+                <a:srgbClr val="7030A0"/>
+              </a:solidFill>
+            </a:endParaRPr>
+          </a:p>
+        </p:txBody>
+      </p:sp>
+    </p:spTree>
+    <p:extLst>
+      <p:ext uri="{BB962C8B-B14F-4D97-AF65-F5344CB8AC3E}">
+        <p14:creationId xmlns:p14="http://schemas.microsoft.com/office/powerpoint/2010/main" val="3804084852"/>
+      </p:ext>
+    </p:extLst>
+  </p:cSld>
+  <p:clrMapOvr>
+    <a:masterClrMapping/>
+  </p:clrMapOvr>
+  <p:timing>
+    <p:tnLst>
+      <p:par>
+        <p:cTn id="1" dur="indefinite" restart="never" nodeType="tmRoot">
+          <p:childTnLst>
+            <p:seq concurrent="1" nextAc="seek">
+              <p:cTn id="2" dur="indefinite" nodeType="mainSeq">
+                <p:childTnLst>
+                  <p:par>
+                    <p:cTn id="3" fill="hold">
+                      <p:stCondLst>
+                        <p:cond delay="indefinite"/>
+                        <p:cond evt="onBegin" delay="0">
+                          <p:tn val="2"/>
+                        </p:cond>
+                      </p:stCondLst>
+                      <p:childTnLst>
+                        <p:par>
+                          <p:cTn id="4" fill="hold">
+                            <p:stCondLst>
+                              <p:cond delay="0"/>
+                            </p:stCondLst>
+                            <p:childTnLst>
+                              <p:par>
+                                <p:cTn id="5" presetID="2" presetClass="entr" presetSubtype="2" fill="hold" grpId="0" nodeType="afterEffect">
+                                  <p:stCondLst>
+                                    <p:cond delay="0"/>
+                                  </p:stCondLst>
+                                  <p:childTnLst>
+                                    <p:set>
+                                      <p:cBhvr>
+                                        <p:cTn id="6" dur="1" fill="hold">
+                                          <p:stCondLst>
+                                            <p:cond delay="0"/>
+                                          </p:stCondLst>
+                                        </p:cTn>
+                                        <p:tgtEl>
+                                          <p:spTgt spid="4"/>
+                                        </p:tgtEl>
+                                        <p:attrNameLst>
+                                          <p:attrName>style.visibility</p:attrName>
+                                        </p:attrNameLst>
+                                      </p:cBhvr>
+                                      <p:to>
+                                        <p:strVal val="visible"/>
+                                      </p:to>
+                                    </p:set>
+                                    <p:anim calcmode="lin" valueType="num">
+                                      <p:cBhvr additive="base">
+                                        <p:cTn id="7" dur="500" fill="hold"/>
+                                        <p:tgtEl>
+                                          <p:spTgt spid="4"/>
+                                        </p:tgtEl>
+                                        <p:attrNameLst>
+                                          <p:attrName>ppt_x</p:attrName>
+                                        </p:attrNameLst>
+                                      </p:cBhvr>
+                                      <p:tavLst>
+                                        <p:tav tm="0">
+                                          <p:val>
+                                            <p:strVal val="1+#ppt_w/2"/>
+                                          </p:val>
+                                        </p:tav>
+                                        <p:tav tm="100000">
+                                          <p:val>
+                                            <p:strVal val="#ppt_x"/>
+                                          </p:val>
+                                        </p:tav>
+                                      </p:tavLst>
+                                    </p:anim>
+                                    <p:anim calcmode="lin" valueType="num">
+                                      <p:cBhvr additive="base">
+                                        <p:cTn id="8" dur="500" fill="hold"/>
+                                        <p:tgtEl>
+                                          <p:spTgt spid="4"/>
+                                        </p:tgtEl>
+                                        <p:attrNameLst>
+                                          <p:attrName>ppt_y</p:attrName>
+                                        </p:attrNameLst>
+                                      </p:cBhvr>
+                                      <p:tavLst>
+                                        <p:tav tm="0">
+                                          <p:val>
+                                            <p:strVal val="#ppt_y"/>
+                                          </p:val>
+                                        </p:tav>
+                                        <p:tav tm="100000">
+                                          <p:val>
+                                            <p:strVal val="#ppt_y"/>
+                                          </p:val>
+                                        </p:tav>
+                                      </p:tavLst>
+                                    </p:anim>
+                                  </p:childTnLst>
+                                </p:cTn>
+                              </p:par>
+                            </p:childTnLst>
+                          </p:cTn>
+                        </p:par>
+                        <p:par>
+                          <p:cTn id="9" fill="hold">
+                            <p:stCondLst>
+                              <p:cond delay="500"/>
+                            </p:stCondLst>
+                            <p:childTnLst>
+                              <p:par>
+                                <p:cTn id="10" presetID="22" presetClass="entr" presetSubtype="2" fill="hold" nodeType="afterEffect">
+                                  <p:stCondLst>
+                                    <p:cond delay="0"/>
+                                  </p:stCondLst>
+                                  <p:childTnLst>
+                                    <p:set>
+                                      <p:cBhvr>
+                                        <p:cTn id="11" dur="1" fill="hold">
+                                          <p:stCondLst>
+                                            <p:cond delay="0"/>
+                                          </p:stCondLst>
+                                        </p:cTn>
+                                        <p:tgtEl>
+                                          <p:spTgt spid="8"/>
+                                        </p:tgtEl>
+                                        <p:attrNameLst>
+                                          <p:attrName>style.visibility</p:attrName>
+                                        </p:attrNameLst>
+                                      </p:cBhvr>
+                                      <p:to>
+                                        <p:strVal val="visible"/>
+                                      </p:to>
+                                    </p:set>
+                                    <p:animEffect transition="in" filter="wipe(right)">
+                                      <p:cBhvr>
+                                        <p:cTn id="12" dur="500"/>
+                                        <p:tgtEl>
+                                          <p:spTgt spid="8"/>
+                                        </p:tgtEl>
+                                      </p:cBhvr>
+                                    </p:animEffect>
+                                  </p:childTnLst>
+                                </p:cTn>
+                              </p:par>
+                            </p:childTnLst>
+                          </p:cTn>
+                        </p:par>
+                        <p:par>
+                          <p:cTn id="13" fill="hold">
+                            <p:stCondLst>
+                              <p:cond delay="1000"/>
+                            </p:stCondLst>
+                            <p:childTnLst>
+                              <p:par>
+                                <p:cTn id="14" presetID="22" presetClass="entr" presetSubtype="8" fill="hold" grpId="0" nodeType="afterEffect">
+                                  <p:stCondLst>
+                                    <p:cond delay="0"/>
+                                  </p:stCondLst>
+                                  <p:childTnLst>
+                                    <p:set>
+                                      <p:cBhvr>
+                                        <p:cTn id="15" dur="1" fill="hold">
+                                          <p:stCondLst>
+                                            <p:cond delay="0"/>
+                                          </p:stCondLst>
+                                        </p:cTn>
+                                        <p:tgtEl>
+                                          <p:spTgt spid="31"/>
+                                        </p:tgtEl>
+                                        <p:attrNameLst>
+                                          <p:attrName>style.visibility</p:attrName>
+                                        </p:attrNameLst>
+                                      </p:cBhvr>
+                                      <p:to>
+                                        <p:strVal val="visible"/>
+                                      </p:to>
+                                    </p:set>
+                                    <p:animEffect transition="in" filter="wipe(left)">
+                                      <p:cBhvr>
+                                        <p:cTn id="16" dur="500"/>
+                                        <p:tgtEl>
+                                          <p:spTgt spid="31"/>
+                                        </p:tgtEl>
+                                      </p:cBhvr>
+                                    </p:animEffect>
+                                  </p:childTnLst>
+                                </p:cTn>
+                              </p:par>
+                            </p:childTnLst>
+                          </p:cTn>
+                        </p:par>
+                      </p:childTnLst>
+                    </p:cTn>
+                  </p:par>
+                  <p:par>
+                    <p:cTn id="17" fill="hold">
+                      <p:stCondLst>
+                        <p:cond delay="indefinite"/>
+                      </p:stCondLst>
+                      <p:childTnLst>
+                        <p:par>
+                          <p:cTn id="18" fill="hold">
+                            <p:stCondLst>
+                              <p:cond delay="0"/>
+                            </p:stCondLst>
+                            <p:childTnLst>
+                              <p:par>
+                                <p:cTn id="19" presetID="22" presetClass="entr" presetSubtype="8" fill="hold" nodeType="clickEffect">
+                                  <p:stCondLst>
+                                    <p:cond delay="0"/>
+                                  </p:stCondLst>
+                                  <p:childTnLst>
+                                    <p:set>
+                                      <p:cBhvr>
+                                        <p:cTn id="20" dur="1" fill="hold">
+                                          <p:stCondLst>
+                                            <p:cond delay="0"/>
+                                          </p:stCondLst>
+                                        </p:cTn>
+                                        <p:tgtEl>
+                                          <p:spTgt spid="16"/>
+                                        </p:tgtEl>
+                                        <p:attrNameLst>
+                                          <p:attrName>style.visibility</p:attrName>
+                                        </p:attrNameLst>
+                                      </p:cBhvr>
+                                      <p:to>
+                                        <p:strVal val="visible"/>
+                                      </p:to>
+                                    </p:set>
+                                    <p:animEffect transition="in" filter="wipe(left)">
+                                      <p:cBhvr>
+                                        <p:cTn id="21" dur="500"/>
+                                        <p:tgtEl>
+                                          <p:spTgt spid="16"/>
+                                        </p:tgtEl>
+                                      </p:cBhvr>
+                                    </p:animEffect>
+                                  </p:childTnLst>
+                                </p:cTn>
+                              </p:par>
+                            </p:childTnLst>
+                          </p:cTn>
+                        </p:par>
+                        <p:par>
+                          <p:cTn id="22" fill="hold">
+                            <p:stCondLst>
+                              <p:cond delay="500"/>
+                            </p:stCondLst>
+                            <p:childTnLst>
+                              <p:par>
+                                <p:cTn id="23" presetID="22" presetClass="entr" presetSubtype="2" fill="hold" nodeType="afterEffect">
+                                  <p:stCondLst>
+                                    <p:cond delay="0"/>
+                                  </p:stCondLst>
+                                  <p:childTnLst>
+                                    <p:set>
+                                      <p:cBhvr>
+                                        <p:cTn id="24" dur="1" fill="hold">
+                                          <p:stCondLst>
+                                            <p:cond delay="0"/>
+                                          </p:stCondLst>
+                                        </p:cTn>
+                                        <p:tgtEl>
+                                          <p:spTgt spid="17"/>
+                                        </p:tgtEl>
+                                        <p:attrNameLst>
+                                          <p:attrName>style.visibility</p:attrName>
+                                        </p:attrNameLst>
+                                      </p:cBhvr>
+                                      <p:to>
+                                        <p:strVal val="visible"/>
+                                      </p:to>
+                                    </p:set>
+                                    <p:animEffect transition="in" filter="wipe(right)">
+                                      <p:cBhvr>
+                                        <p:cTn id="25" dur="500"/>
+                                        <p:tgtEl>
+                                          <p:spTgt spid="17"/>
+                                        </p:tgtEl>
+                                      </p:cBhvr>
+                                    </p:animEffect>
+                                  </p:childTnLst>
+                                </p:cTn>
+                              </p:par>
+                            </p:childTnLst>
+                          </p:cTn>
+                        </p:par>
+                      </p:childTnLst>
+                    </p:cTn>
+                  </p:par>
+                  <p:par>
+                    <p:cTn id="26" fill="hold">
+                      <p:stCondLst>
+                        <p:cond delay="indefinite"/>
+                      </p:stCondLst>
+                      <p:childTnLst>
+                        <p:par>
+                          <p:cTn id="27" fill="hold">
+                            <p:stCondLst>
+                              <p:cond delay="0"/>
+                            </p:stCondLst>
+                            <p:childTnLst>
+                              <p:par>
+                                <p:cTn id="28" presetID="22" presetClass="entr" presetSubtype="2" fill="hold" nodeType="clickEffect">
+                                  <p:stCondLst>
+                                    <p:cond delay="0"/>
+                                  </p:stCondLst>
+                                  <p:childTnLst>
+                                    <p:set>
+                                      <p:cBhvr>
+                                        <p:cTn id="29" dur="1" fill="hold">
+                                          <p:stCondLst>
+                                            <p:cond delay="0"/>
+                                          </p:stCondLst>
+                                        </p:cTn>
+                                        <p:tgtEl>
+                                          <p:spTgt spid="20"/>
+                                        </p:tgtEl>
+                                        <p:attrNameLst>
+                                          <p:attrName>style.visibility</p:attrName>
+                                        </p:attrNameLst>
+                                      </p:cBhvr>
+                                      <p:to>
+                                        <p:strVal val="visible"/>
+                                      </p:to>
+                                    </p:set>
+                                    <p:animEffect transition="in" filter="wipe(right)">
+                                      <p:cBhvr>
+                                        <p:cTn id="30" dur="500"/>
+                                        <p:tgtEl>
+                                          <p:spTgt spid="20"/>
+                                        </p:tgtEl>
+                                      </p:cBhvr>
+                                    </p:animEffect>
+                                  </p:childTnLst>
+                                </p:cTn>
+                              </p:par>
+                            </p:childTnLst>
+                          </p:cTn>
+                        </p:par>
+                        <p:par>
+                          <p:cTn id="31" fill="hold">
+                            <p:stCondLst>
+                              <p:cond delay="500"/>
+                            </p:stCondLst>
+                            <p:childTnLst>
+                              <p:par>
+                                <p:cTn id="32" presetID="22" presetClass="entr" presetSubtype="2" fill="hold" nodeType="afterEffect">
+                                  <p:stCondLst>
+                                    <p:cond delay="0"/>
+                                  </p:stCondLst>
+                                  <p:childTnLst>
+                                    <p:set>
+                                      <p:cBhvr>
+                                        <p:cTn id="33" dur="1" fill="hold">
+                                          <p:stCondLst>
+                                            <p:cond delay="0"/>
+                                          </p:stCondLst>
+                                        </p:cTn>
+                                        <p:tgtEl>
+                                          <p:spTgt spid="9"/>
+                                        </p:tgtEl>
+                                        <p:attrNameLst>
+                                          <p:attrName>style.visibility</p:attrName>
+                                        </p:attrNameLst>
+                                      </p:cBhvr>
+                                      <p:to>
+                                        <p:strVal val="visible"/>
+                                      </p:to>
+                                    </p:set>
+                                    <p:animEffect transition="in" filter="wipe(right)">
+                                      <p:cBhvr>
+                                        <p:cTn id="34" dur="500"/>
+                                        <p:tgtEl>
+                                          <p:spTgt spid="9"/>
+                                        </p:tgtEl>
+                                      </p:cBhvr>
+                                    </p:animEffect>
+                                  </p:childTnLst>
+                                </p:cTn>
+                              </p:par>
+                            </p:childTnLst>
+                          </p:cTn>
+                        </p:par>
+                      </p:childTnLst>
+                    </p:cTn>
+                  </p:par>
+                  <p:par>
+                    <p:cTn id="35" fill="hold">
+                      <p:stCondLst>
+                        <p:cond delay="indefinite"/>
+                      </p:stCondLst>
+                      <p:childTnLst>
+                        <p:par>
+                          <p:cTn id="36" fill="hold">
+                            <p:stCondLst>
+                              <p:cond delay="0"/>
+                            </p:stCondLst>
+                            <p:childTnLst>
+                              <p:par>
+                                <p:cTn id="37" presetID="22" presetClass="entr" presetSubtype="2" fill="hold" nodeType="clickEffect">
+                                  <p:stCondLst>
+                                    <p:cond delay="0"/>
+                                  </p:stCondLst>
+                                  <p:childTnLst>
+                                    <p:set>
+                                      <p:cBhvr>
+                                        <p:cTn id="38" dur="1" fill="hold">
+                                          <p:stCondLst>
+                                            <p:cond delay="0"/>
+                                          </p:stCondLst>
+                                        </p:cTn>
+                                        <p:tgtEl>
+                                          <p:spTgt spid="23"/>
+                                        </p:tgtEl>
+                                        <p:attrNameLst>
+                                          <p:attrName>style.visibility</p:attrName>
+                                        </p:attrNameLst>
+                                      </p:cBhvr>
+                                      <p:to>
+                                        <p:strVal val="visible"/>
+                                      </p:to>
+                                    </p:set>
+                                    <p:animEffect transition="in" filter="wipe(right)">
+                                      <p:cBhvr>
+                                        <p:cTn id="39" dur="500"/>
+                                        <p:tgtEl>
+                                          <p:spTgt spid="23"/>
+                                        </p:tgtEl>
+                                      </p:cBhvr>
+                                    </p:animEffect>
+                                  </p:childTnLst>
+                                </p:cTn>
+                              </p:par>
+                            </p:childTnLst>
+                          </p:cTn>
+                        </p:par>
+                        <p:par>
+                          <p:cTn id="40" fill="hold">
+                            <p:stCondLst>
+                              <p:cond delay="500"/>
+                            </p:stCondLst>
+                            <p:childTnLst>
+                              <p:par>
+                                <p:cTn id="41" presetID="22" presetClass="entr" presetSubtype="8" fill="hold" grpId="0" nodeType="afterEffect">
+                                  <p:stCondLst>
+                                    <p:cond delay="0"/>
+                                  </p:stCondLst>
+                                  <p:childTnLst>
+                                    <p:set>
+                                      <p:cBhvr>
+                                        <p:cTn id="42" dur="1" fill="hold">
+                                          <p:stCondLst>
+                                            <p:cond delay="0"/>
+                                          </p:stCondLst>
+                                        </p:cTn>
+                                        <p:tgtEl>
+                                          <p:spTgt spid="6"/>
+                                        </p:tgtEl>
+                                        <p:attrNameLst>
+                                          <p:attrName>style.visibility</p:attrName>
+                                        </p:attrNameLst>
+                                      </p:cBhvr>
+                                      <p:to>
+                                        <p:strVal val="visible"/>
+                                      </p:to>
+                                    </p:set>
+                                    <p:animEffect transition="in" filter="wipe(left)">
+                                      <p:cBhvr>
+                                        <p:cTn id="43" dur="500"/>
+                                        <p:tgtEl>
+                                          <p:spTgt spid="6"/>
+                                        </p:tgtEl>
+                                      </p:cBhvr>
+                                    </p:animEffect>
+                                  </p:childTnLst>
+                                </p:cTn>
+                              </p:par>
+                            </p:childTnLst>
+                          </p:cTn>
+                        </p:par>
+                        <p:par>
+                          <p:cTn id="44" fill="hold">
+                            <p:stCondLst>
+                              <p:cond delay="1000"/>
+                            </p:stCondLst>
+                            <p:childTnLst>
+                              <p:par>
+                                <p:cTn id="45" presetID="22" presetClass="entr" presetSubtype="2" fill="hold" nodeType="afterEffect">
+                                  <p:stCondLst>
+                                    <p:cond delay="0"/>
+                                  </p:stCondLst>
+                                  <p:childTnLst>
+                                    <p:set>
+                                      <p:cBhvr>
+                                        <p:cTn id="46" dur="1" fill="hold">
+                                          <p:stCondLst>
+                                            <p:cond delay="0"/>
+                                          </p:stCondLst>
+                                        </p:cTn>
+                                        <p:tgtEl>
+                                          <p:spTgt spid="28"/>
+                                        </p:tgtEl>
+                                        <p:attrNameLst>
+                                          <p:attrName>style.visibility</p:attrName>
+                                        </p:attrNameLst>
+                                      </p:cBhvr>
+                                      <p:to>
+                                        <p:strVal val="visible"/>
+                                      </p:to>
+                                    </p:set>
+                                    <p:animEffect transition="in" filter="wipe(right)">
+                                      <p:cBhvr>
+                                        <p:cTn id="47" dur="500"/>
+                                        <p:tgtEl>
+                                          <p:spTgt spid="28"/>
+                                        </p:tgtEl>
+                                      </p:cBhvr>
+                                    </p:animEffect>
+                                  </p:childTnLst>
+                                </p:cTn>
+                              </p:par>
+                            </p:childTnLst>
+                          </p:cTn>
+                        </p:par>
+                      </p:childTnLst>
+                    </p:cTn>
+                  </p:par>
+                </p:childTnLst>
+              </p:cTn>
+              <p:prevCondLst>
+                <p:cond evt="onPrev" delay="0">
+                  <p:tgtEl>
+                    <p:sldTgt/>
+                  </p:tgtEl>
+                </p:cond>
+              </p:prevCondLst>
+              <p:nextCondLst>
+                <p:cond evt="onNext" delay="0">
+                  <p:tgtEl>
+                    <p:sldTgt/>
+                  </p:tgtEl>
+                </p:cond>
+              </p:nextCondLst>
+            </p:seq>
+          </p:childTnLst>
+        </p:cTn>
+      </p:par>
+    </p:tnLst>
+    <p:bldLst>
+      <p:bldP spid="6" grpId="0"/>
+      <p:bldP spid="4" grpId="0"/>
+      <p:bldP spid="31" grpId="0"/>
+    </p:bldLst>
+  </p:timing>
+</p:sld>
+</file>
+
+<file path=ppt/slides/slide24.xml><?xml version="1.0" encoding="utf-8"?>
+<p:sld xmlns:a="http://schemas.openxmlformats.org/drawingml/2006/main" xmlns:r="http://schemas.openxmlformats.org/officeDocument/2006/relationships" xmlns:p="http://schemas.openxmlformats.org/presentationml/2006/main">
+  <p:cSld>
+    <p:spTree>
+      <p:nvGrpSpPr>
+        <p:cNvPr id="1" name=""/>
+        <p:cNvGrpSpPr/>
+        <p:nvPr/>
+      </p:nvGrpSpPr>
+      <p:grpSpPr>
+        <a:xfrm>
+          <a:off x="0" y="0"/>
+          <a:ext cx="0" cy="0"/>
+          <a:chOff x="0" y="0"/>
+          <a:chExt cx="0" cy="0"/>
+        </a:xfrm>
+      </p:grpSpPr>
+      <p:sp>
+        <p:nvSpPr>
+          <p:cNvPr id="2" name="Title 1"/>
+          <p:cNvSpPr>
+            <a:spLocks noGrp="1"/>
+          </p:cNvSpPr>
+          <p:nvPr>
+            <p:ph type="title"/>
+          </p:nvPr>
+        </p:nvSpPr>
+        <p:spPr/>
+        <p:txBody>
+          <a:bodyPr>
+            <a:noAutofit/>
+          </a:bodyPr>
+          <a:lstStyle/>
+          <a:p>
+            <a:pPr algn="ctr"/>
+            <a:r>
+              <a:rPr lang="en-US" sz="3200" b="1" dirty="0">
+                <a:latin typeface="+mn-lt"/>
+              </a:rPr>
+              <a:t>PEP 8 </a:t>
+            </a:r>
+            <a:r>
+              <a:rPr lang="en-US" sz="3200" dirty="0">
+                <a:latin typeface="+mn-lt"/>
+              </a:rPr>
+              <a:t>– Style Guide for Python Code</a:t>
+            </a:r>
+          </a:p>
+        </p:txBody>
+      </p:sp>
+      <p:sp>
+        <p:nvSpPr>
+          <p:cNvPr id="3" name="Slide Number Placeholder 2"/>
+          <p:cNvSpPr>
+            <a:spLocks noGrp="1"/>
+          </p:cNvSpPr>
+          <p:nvPr>
+            <p:ph type="sldNum" sz="quarter" idx="12"/>
+          </p:nvPr>
+        </p:nvSpPr>
+        <p:spPr/>
+        <p:txBody>
+          <a:bodyPr/>
+          <a:lstStyle/>
+          <a:p>
+            <a:fld id="{650AD656-6FF9-465D-B7B0-1CD0DD39CD23}" type="slidenum">
+              <a:rPr lang="en-US" smtClean="0"/>
+              <a:t>24</a:t>
+            </a:fld>
+            <a:endParaRPr lang="en-US" dirty="0"/>
+          </a:p>
+        </p:txBody>
+      </p:sp>
+      <p:sp>
+        <p:nvSpPr>
+          <p:cNvPr id="10" name="TextBox 9">
+            <a:extLst>
+              <a:ext uri="{FF2B5EF4-FFF2-40B4-BE49-F238E27FC236}">
+                <a16:creationId xmlns:a16="http://schemas.microsoft.com/office/drawing/2014/main" id="{7EA28FBA-9A18-C43F-0200-822C69EF5FA4}"/>
+              </a:ext>
+            </a:extLst>
+          </p:cNvPr>
+          <p:cNvSpPr txBox="1"/>
+          <p:nvPr/>
+        </p:nvSpPr>
+        <p:spPr>
+          <a:xfrm>
+            <a:off x="2682303" y="1402598"/>
+            <a:ext cx="3779395" cy="369332"/>
+          </a:xfrm>
+          <a:prstGeom prst="rect">
+            <a:avLst/>
+          </a:prstGeom>
+          <a:noFill/>
+        </p:spPr>
+        <p:txBody>
+          <a:bodyPr wrap="square">
+            <a:spAutoFit/>
+          </a:bodyPr>
+          <a:lstStyle/>
+          <a:p>
+            <a:pPr algn="ctr"/>
+            <a:r>
+              <a:rPr lang="en-US" dirty="0">
+                <a:hlinkClick r:id="rId2"/>
+              </a:rPr>
+              <a:t>https://peps.python.org/pep-0008</a:t>
+            </a:r>
+            <a:endParaRPr lang="en-US" dirty="0"/>
+          </a:p>
+        </p:txBody>
+      </p:sp>
+      <p:pic>
+        <p:nvPicPr>
+          <p:cNvPr id="6" name="Picture 5">
+            <a:extLst>
+              <a:ext uri="{FF2B5EF4-FFF2-40B4-BE49-F238E27FC236}">
+                <a16:creationId xmlns:a16="http://schemas.microsoft.com/office/drawing/2014/main" id="{485092EA-7931-F912-95BF-9BDA3BCE7054}"/>
+              </a:ext>
+            </a:extLst>
+          </p:cNvPr>
+          <p:cNvPicPr>
+            <a:picLocks noChangeAspect="1"/>
+          </p:cNvPicPr>
+          <p:nvPr/>
+        </p:nvPicPr>
+        <p:blipFill>
+          <a:blip r:embed="rId3"/>
+          <a:stretch>
+            <a:fillRect/>
+          </a:stretch>
+        </p:blipFill>
+        <p:spPr>
+          <a:xfrm>
+            <a:off x="1069509" y="2062324"/>
+            <a:ext cx="7004982" cy="4212786"/>
+          </a:xfrm>
+          <a:prstGeom prst="rect">
+            <a:avLst/>
+          </a:prstGeom>
+          <a:ln>
+            <a:solidFill>
+              <a:schemeClr val="tx1"/>
+            </a:solidFill>
+          </a:ln>
+        </p:spPr>
+      </p:pic>
+      <p:sp>
+        <p:nvSpPr>
+          <p:cNvPr id="7" name="Rectangle 6">
+            <a:extLst>
+              <a:ext uri="{FF2B5EF4-FFF2-40B4-BE49-F238E27FC236}">
+                <a16:creationId xmlns:a16="http://schemas.microsoft.com/office/drawing/2014/main" id="{D72D1C34-BA5C-8DF0-EA18-91727EDF738C}"/>
+              </a:ext>
+            </a:extLst>
+          </p:cNvPr>
+          <p:cNvSpPr/>
+          <p:nvPr/>
+        </p:nvSpPr>
+        <p:spPr>
+          <a:xfrm>
+            <a:off x="3200401" y="5021705"/>
+            <a:ext cx="4083844" cy="164892"/>
+          </a:xfrm>
+          <a:prstGeom prst="rect">
+            <a:avLst/>
+          </a:prstGeom>
+          <a:noFill/>
+          <a:ln w="19050">
+            <a:solidFill>
+              <a:srgbClr val="FF0000"/>
+            </a:solidFill>
+          </a:ln>
+        </p:spPr>
+        <p:style>
+          <a:lnRef idx="2">
+            <a:schemeClr val="accent1">
+              <a:shade val="15000"/>
+            </a:schemeClr>
+          </a:lnRef>
+          <a:fillRef idx="1">
+            <a:schemeClr val="accent1"/>
+          </a:fillRef>
+          <a:effectRef idx="0">
+            <a:schemeClr val="accent1"/>
+          </a:effectRef>
+          <a:fontRef idx="minor">
+            <a:schemeClr val="lt1"/>
+          </a:fontRef>
+        </p:style>
+        <p:txBody>
+          <a:bodyPr rtlCol="0" anchor="ctr"/>
+          <a:lstStyle/>
+          <a:p>
+            <a:pPr algn="ctr"/>
+            <a:endParaRPr lang="en-US"/>
+          </a:p>
+        </p:txBody>
+      </p:sp>
+    </p:spTree>
+    <p:extLst>
+      <p:ext uri="{BB962C8B-B14F-4D97-AF65-F5344CB8AC3E}">
+        <p14:creationId xmlns:p14="http://schemas.microsoft.com/office/powerpoint/2010/main" val="3056779464"/>
+      </p:ext>
+    </p:extLst>
+  </p:cSld>
+  <p:clrMapOvr>
+    <a:masterClrMapping/>
+  </p:clrMapOvr>
+</p:sld>
+</file>
+
+<file path=ppt/slides/slide25.xml><?xml version="1.0" encoding="utf-8"?>
+<p:sld xmlns:a="http://schemas.openxmlformats.org/drawingml/2006/main" xmlns:r="http://schemas.openxmlformats.org/officeDocument/2006/relationships" xmlns:p="http://schemas.openxmlformats.org/presentationml/2006/main">
+  <p:cSld>
+    <p:spTree>
+      <p:nvGrpSpPr>
+        <p:cNvPr id="1" name=""/>
+        <p:cNvGrpSpPr/>
+        <p:nvPr/>
+      </p:nvGrpSpPr>
+      <p:grpSpPr>
+        <a:xfrm>
+          <a:off x="0" y="0"/>
+          <a:ext cx="0" cy="0"/>
+          <a:chOff x="0" y="0"/>
+          <a:chExt cx="0" cy="0"/>
+        </a:xfrm>
+      </p:grpSpPr>
+      <p:pic>
+        <p:nvPicPr>
+          <p:cNvPr id="8" name="Picture 7">
+            <a:extLst>
+              <a:ext uri="{FF2B5EF4-FFF2-40B4-BE49-F238E27FC236}">
+                <a16:creationId xmlns:a16="http://schemas.microsoft.com/office/drawing/2014/main" id="{8B590FAD-738C-0C94-D11D-559440D474DB}"/>
+              </a:ext>
+            </a:extLst>
+          </p:cNvPr>
+          <p:cNvPicPr>
+            <a:picLocks noChangeAspect="1"/>
+          </p:cNvPicPr>
+          <p:nvPr/>
+        </p:nvPicPr>
+        <p:blipFill>
+          <a:blip r:embed="rId2"/>
+          <a:stretch>
+            <a:fillRect/>
+          </a:stretch>
+        </p:blipFill>
+        <p:spPr>
+          <a:xfrm>
+            <a:off x="808600" y="1897177"/>
+            <a:ext cx="7526799" cy="4396495"/>
+          </a:xfrm>
+          <a:prstGeom prst="rect">
+            <a:avLst/>
+          </a:prstGeom>
+          <a:ln>
+            <a:solidFill>
+              <a:schemeClr val="tx1"/>
+            </a:solidFill>
+          </a:ln>
+          <a:effectLst>
+            <a:outerShdw blurRad="50800" dist="38100" dir="2700000" algn="tl" rotWithShape="0">
+              <a:prstClr val="black">
+                <a:alpha val="40000"/>
+              </a:prstClr>
+            </a:outerShdw>
+          </a:effectLst>
+        </p:spPr>
+      </p:pic>
+      <p:sp>
+        <p:nvSpPr>
+          <p:cNvPr id="2" name="Title 1"/>
+          <p:cNvSpPr>
+            <a:spLocks noGrp="1"/>
+          </p:cNvSpPr>
+          <p:nvPr>
+            <p:ph type="title"/>
+          </p:nvPr>
+        </p:nvSpPr>
+        <p:spPr/>
+        <p:txBody>
+          <a:bodyPr>
+            <a:noAutofit/>
+          </a:bodyPr>
+          <a:lstStyle/>
+          <a:p>
+            <a:pPr algn="ctr"/>
+            <a:r>
+              <a:rPr lang="en-US" sz="3200" dirty="0">
+                <a:latin typeface="+mn-lt"/>
+              </a:rPr>
+              <a:t>The </a:t>
+            </a:r>
+            <a:r>
+              <a:rPr lang="en-US" sz="3200" b="1" dirty="0">
+                <a:latin typeface="+mn-lt"/>
+              </a:rPr>
+              <a:t>Ruff</a:t>
+            </a:r>
+            <a:r>
+              <a:rPr lang="en-US" sz="3200" dirty="0">
+                <a:latin typeface="+mn-lt"/>
+              </a:rPr>
+              <a:t> Formatter</a:t>
+            </a:r>
+          </a:p>
+        </p:txBody>
+      </p:sp>
+      <p:sp>
+        <p:nvSpPr>
+          <p:cNvPr id="3" name="Slide Number Placeholder 2"/>
+          <p:cNvSpPr>
+            <a:spLocks noGrp="1"/>
+          </p:cNvSpPr>
+          <p:nvPr>
+            <p:ph type="sldNum" sz="quarter" idx="12"/>
+          </p:nvPr>
+        </p:nvSpPr>
+        <p:spPr/>
+        <p:txBody>
+          <a:bodyPr/>
+          <a:lstStyle/>
+          <a:p>
+            <a:fld id="{650AD656-6FF9-465D-B7B0-1CD0DD39CD23}" type="slidenum">
+              <a:rPr lang="en-US" smtClean="0"/>
+              <a:t>25</a:t>
+            </a:fld>
+            <a:endParaRPr lang="en-US" dirty="0"/>
+          </a:p>
+        </p:txBody>
+      </p:sp>
+      <p:sp>
+        <p:nvSpPr>
+          <p:cNvPr id="10" name="TextBox 9">
+            <a:extLst>
+              <a:ext uri="{FF2B5EF4-FFF2-40B4-BE49-F238E27FC236}">
+                <a16:creationId xmlns:a16="http://schemas.microsoft.com/office/drawing/2014/main" id="{7EA28FBA-9A18-C43F-0200-822C69EF5FA4}"/>
+              </a:ext>
+            </a:extLst>
+          </p:cNvPr>
+          <p:cNvSpPr txBox="1"/>
+          <p:nvPr/>
+        </p:nvSpPr>
+        <p:spPr>
+          <a:xfrm>
+            <a:off x="2661955" y="1402598"/>
+            <a:ext cx="3820091" cy="369332"/>
+          </a:xfrm>
+          <a:prstGeom prst="rect">
+            <a:avLst/>
+          </a:prstGeom>
+          <a:noFill/>
+        </p:spPr>
+        <p:txBody>
+          <a:bodyPr wrap="square">
+            <a:spAutoFit/>
+          </a:bodyPr>
+          <a:lstStyle/>
+          <a:p>
+            <a:pPr algn="ctr"/>
+            <a:r>
+              <a:rPr lang="en-US" dirty="0">
+                <a:hlinkClick r:id="rId3"/>
+              </a:rPr>
+              <a:t>https://docs.astral.sh/ruff/formatter</a:t>
+            </a:r>
+            <a:endParaRPr lang="en-US" dirty="0"/>
+          </a:p>
+        </p:txBody>
+      </p:sp>
+    </p:spTree>
+    <p:extLst>
+      <p:ext uri="{BB962C8B-B14F-4D97-AF65-F5344CB8AC3E}">
+        <p14:creationId xmlns:p14="http://schemas.microsoft.com/office/powerpoint/2010/main" val="1424910514"/>
+      </p:ext>
+    </p:extLst>
+  </p:cSld>
+  <p:clrMapOvr>
+    <a:masterClrMapping/>
+  </p:clrMapOvr>
+</p:sld>
+</file>
+
+<file path=ppt/slides/slide26.xml><?xml version="1.0" encoding="utf-8"?>
+<p:sld xmlns:a="http://schemas.openxmlformats.org/drawingml/2006/main" xmlns:r="http://schemas.openxmlformats.org/officeDocument/2006/relationships" xmlns:p="http://schemas.openxmlformats.org/presentationml/2006/main">
+  <p:cSld>
+    <p:spTree>
+      <p:nvGrpSpPr>
+        <p:cNvPr id="1" name="">
+          <a:extLst>
+            <a:ext uri="{FF2B5EF4-FFF2-40B4-BE49-F238E27FC236}">
               <a16:creationId xmlns:a16="http://schemas.microsoft.com/office/drawing/2014/main" id="{F0CF7ECC-CED2-47A5-D9CB-F245F9E64438}"/>
             </a:ext>
           </a:extLst>
@@ -17259,7 +19277,7 @@
           <a:p>
             <a:fld id="{650AD656-6FF9-465D-B7B0-1CD0DD39CD23}" type="slidenum">
               <a:rPr lang="en-US" smtClean="0"/>
-              <a:t>23</a:t>
+              <a:t>26</a:t>
             </a:fld>
             <a:endParaRPr lang="en-US" dirty="0"/>
           </a:p>
@@ -18802,392 +20820,7 @@
 </p:sld>
 </file>
 
-<file path=ppt/slides/slide24.xml><?xml version="1.0" encoding="utf-8"?>
-<p:sld xmlns:a="http://schemas.openxmlformats.org/drawingml/2006/main" xmlns:r="http://schemas.openxmlformats.org/officeDocument/2006/relationships" xmlns:p="http://schemas.openxmlformats.org/presentationml/2006/main">
-  <p:cSld>
-    <p:spTree>
-      <p:nvGrpSpPr>
-        <p:cNvPr id="1" name=""/>
-        <p:cNvGrpSpPr/>
-        <p:nvPr/>
-      </p:nvGrpSpPr>
-      <p:grpSpPr>
-        <a:xfrm>
-          <a:off x="0" y="0"/>
-          <a:ext cx="0" cy="0"/>
-          <a:chOff x="0" y="0"/>
-          <a:chExt cx="0" cy="0"/>
-        </a:xfrm>
-      </p:grpSpPr>
-      <p:sp>
-        <p:nvSpPr>
-          <p:cNvPr id="2" name="Title 1"/>
-          <p:cNvSpPr>
-            <a:spLocks noGrp="1"/>
-          </p:cNvSpPr>
-          <p:nvPr>
-            <p:ph type="title"/>
-          </p:nvPr>
-        </p:nvSpPr>
-        <p:spPr/>
-        <p:txBody>
-          <a:bodyPr>
-            <a:noAutofit/>
-          </a:bodyPr>
-          <a:lstStyle/>
-          <a:p>
-            <a:pPr algn="ctr"/>
-            <a:r>
-              <a:rPr lang="en-US" sz="3200" b="1" dirty="0">
-                <a:latin typeface="+mn-lt"/>
-              </a:rPr>
-              <a:t>PEP 8 </a:t>
-            </a:r>
-            <a:r>
-              <a:rPr lang="en-US" sz="3200" dirty="0">
-                <a:latin typeface="+mn-lt"/>
-              </a:rPr>
-              <a:t>– Style Guide for Python Code</a:t>
-            </a:r>
-          </a:p>
-        </p:txBody>
-      </p:sp>
-      <p:sp>
-        <p:nvSpPr>
-          <p:cNvPr id="3" name="Slide Number Placeholder 2"/>
-          <p:cNvSpPr>
-            <a:spLocks noGrp="1"/>
-          </p:cNvSpPr>
-          <p:nvPr>
-            <p:ph type="sldNum" sz="quarter" idx="12"/>
-          </p:nvPr>
-        </p:nvSpPr>
-        <p:spPr/>
-        <p:txBody>
-          <a:bodyPr/>
-          <a:lstStyle/>
-          <a:p>
-            <a:fld id="{650AD656-6FF9-465D-B7B0-1CD0DD39CD23}" type="slidenum">
-              <a:rPr lang="en-US" smtClean="0"/>
-              <a:t>24</a:t>
-            </a:fld>
-            <a:endParaRPr lang="en-US" dirty="0"/>
-          </a:p>
-        </p:txBody>
-      </p:sp>
-      <p:sp>
-        <p:nvSpPr>
-          <p:cNvPr id="10" name="TextBox 9">
-            <a:extLst>
-              <a:ext uri="{FF2B5EF4-FFF2-40B4-BE49-F238E27FC236}">
-                <a16:creationId xmlns:a16="http://schemas.microsoft.com/office/drawing/2014/main" id="{7EA28FBA-9A18-C43F-0200-822C69EF5FA4}"/>
-              </a:ext>
-            </a:extLst>
-          </p:cNvPr>
-          <p:cNvSpPr txBox="1"/>
-          <p:nvPr/>
-        </p:nvSpPr>
-        <p:spPr>
-          <a:xfrm>
-            <a:off x="2682303" y="1402598"/>
-            <a:ext cx="3779395" cy="369332"/>
-          </a:xfrm>
-          <a:prstGeom prst="rect">
-            <a:avLst/>
-          </a:prstGeom>
-          <a:noFill/>
-        </p:spPr>
-        <p:txBody>
-          <a:bodyPr wrap="square">
-            <a:spAutoFit/>
-          </a:bodyPr>
-          <a:lstStyle/>
-          <a:p>
-            <a:pPr algn="ctr"/>
-            <a:r>
-              <a:rPr lang="en-US" dirty="0">
-                <a:hlinkClick r:id="rId2"/>
-              </a:rPr>
-              <a:t>https://peps.python.org/pep-0008</a:t>
-            </a:r>
-            <a:endParaRPr lang="en-US" dirty="0"/>
-          </a:p>
-        </p:txBody>
-      </p:sp>
-      <p:pic>
-        <p:nvPicPr>
-          <p:cNvPr id="6" name="Picture 5">
-            <a:extLst>
-              <a:ext uri="{FF2B5EF4-FFF2-40B4-BE49-F238E27FC236}">
-                <a16:creationId xmlns:a16="http://schemas.microsoft.com/office/drawing/2014/main" id="{485092EA-7931-F912-95BF-9BDA3BCE7054}"/>
-              </a:ext>
-            </a:extLst>
-          </p:cNvPr>
-          <p:cNvPicPr>
-            <a:picLocks noChangeAspect="1"/>
-          </p:cNvPicPr>
-          <p:nvPr/>
-        </p:nvPicPr>
-        <p:blipFill>
-          <a:blip r:embed="rId3"/>
-          <a:stretch>
-            <a:fillRect/>
-          </a:stretch>
-        </p:blipFill>
-        <p:spPr>
-          <a:xfrm>
-            <a:off x="1069509" y="2062324"/>
-            <a:ext cx="7004982" cy="4212786"/>
-          </a:xfrm>
-          <a:prstGeom prst="rect">
-            <a:avLst/>
-          </a:prstGeom>
-          <a:ln>
-            <a:solidFill>
-              <a:schemeClr val="tx1"/>
-            </a:solidFill>
-          </a:ln>
-        </p:spPr>
-      </p:pic>
-      <p:sp>
-        <p:nvSpPr>
-          <p:cNvPr id="7" name="Rectangle 6">
-            <a:extLst>
-              <a:ext uri="{FF2B5EF4-FFF2-40B4-BE49-F238E27FC236}">
-                <a16:creationId xmlns:a16="http://schemas.microsoft.com/office/drawing/2014/main" id="{D72D1C34-BA5C-8DF0-EA18-91727EDF738C}"/>
-              </a:ext>
-            </a:extLst>
-          </p:cNvPr>
-          <p:cNvSpPr/>
-          <p:nvPr/>
-        </p:nvSpPr>
-        <p:spPr>
-          <a:xfrm>
-            <a:off x="3200401" y="5021705"/>
-            <a:ext cx="4083844" cy="164892"/>
-          </a:xfrm>
-          <a:prstGeom prst="rect">
-            <a:avLst/>
-          </a:prstGeom>
-          <a:noFill/>
-          <a:ln w="19050">
-            <a:solidFill>
-              <a:srgbClr val="FF0000"/>
-            </a:solidFill>
-          </a:ln>
-        </p:spPr>
-        <p:style>
-          <a:lnRef idx="2">
-            <a:schemeClr val="accent1">
-              <a:shade val="15000"/>
-            </a:schemeClr>
-          </a:lnRef>
-          <a:fillRef idx="1">
-            <a:schemeClr val="accent1"/>
-          </a:fillRef>
-          <a:effectRef idx="0">
-            <a:schemeClr val="accent1"/>
-          </a:effectRef>
-          <a:fontRef idx="minor">
-            <a:schemeClr val="lt1"/>
-          </a:fontRef>
-        </p:style>
-        <p:txBody>
-          <a:bodyPr rtlCol="0" anchor="ctr"/>
-          <a:lstStyle/>
-          <a:p>
-            <a:pPr algn="ctr"/>
-            <a:endParaRPr lang="en-US"/>
-          </a:p>
-        </p:txBody>
-      </p:sp>
-    </p:spTree>
-    <p:extLst>
-      <p:ext uri="{BB962C8B-B14F-4D97-AF65-F5344CB8AC3E}">
-        <p14:creationId xmlns:p14="http://schemas.microsoft.com/office/powerpoint/2010/main" val="3056779464"/>
-      </p:ext>
-    </p:extLst>
-  </p:cSld>
-  <p:clrMapOvr>
-    <a:masterClrMapping/>
-  </p:clrMapOvr>
-</p:sld>
-</file>
-
-<file path=ppt/slides/slide25.xml><?xml version="1.0" encoding="utf-8"?>
-<p:sld xmlns:a="http://schemas.openxmlformats.org/drawingml/2006/main" xmlns:r="http://schemas.openxmlformats.org/officeDocument/2006/relationships" xmlns:p="http://schemas.openxmlformats.org/presentationml/2006/main">
-  <p:cSld>
-    <p:spTree>
-      <p:nvGrpSpPr>
-        <p:cNvPr id="1" name=""/>
-        <p:cNvGrpSpPr/>
-        <p:nvPr/>
-      </p:nvGrpSpPr>
-      <p:grpSpPr>
-        <a:xfrm>
-          <a:off x="0" y="0"/>
-          <a:ext cx="0" cy="0"/>
-          <a:chOff x="0" y="0"/>
-          <a:chExt cx="0" cy="0"/>
-        </a:xfrm>
-      </p:grpSpPr>
-      <p:pic>
-        <p:nvPicPr>
-          <p:cNvPr id="8" name="Picture 7">
-            <a:extLst>
-              <a:ext uri="{FF2B5EF4-FFF2-40B4-BE49-F238E27FC236}">
-                <a16:creationId xmlns:a16="http://schemas.microsoft.com/office/drawing/2014/main" id="{8B590FAD-738C-0C94-D11D-559440D474DB}"/>
-              </a:ext>
-            </a:extLst>
-          </p:cNvPr>
-          <p:cNvPicPr>
-            <a:picLocks noChangeAspect="1"/>
-          </p:cNvPicPr>
-          <p:nvPr/>
-        </p:nvPicPr>
-        <p:blipFill>
-          <a:blip r:embed="rId2"/>
-          <a:stretch>
-            <a:fillRect/>
-          </a:stretch>
-        </p:blipFill>
-        <p:spPr>
-          <a:xfrm>
-            <a:off x="808600" y="1897177"/>
-            <a:ext cx="7526799" cy="4396495"/>
-          </a:xfrm>
-          <a:prstGeom prst="rect">
-            <a:avLst/>
-          </a:prstGeom>
-          <a:ln>
-            <a:solidFill>
-              <a:schemeClr val="tx1"/>
-            </a:solidFill>
-          </a:ln>
-          <a:effectLst>
-            <a:outerShdw blurRad="50800" dist="38100" dir="2700000" algn="tl" rotWithShape="0">
-              <a:prstClr val="black">
-                <a:alpha val="40000"/>
-              </a:prstClr>
-            </a:outerShdw>
-          </a:effectLst>
-        </p:spPr>
-      </p:pic>
-      <p:sp>
-        <p:nvSpPr>
-          <p:cNvPr id="2" name="Title 1"/>
-          <p:cNvSpPr>
-            <a:spLocks noGrp="1"/>
-          </p:cNvSpPr>
-          <p:nvPr>
-            <p:ph type="title"/>
-          </p:nvPr>
-        </p:nvSpPr>
-        <p:spPr/>
-        <p:txBody>
-          <a:bodyPr>
-            <a:noAutofit/>
-          </a:bodyPr>
-          <a:lstStyle/>
-          <a:p>
-            <a:pPr algn="ctr"/>
-            <a:r>
-              <a:rPr lang="en-US" sz="3200" dirty="0">
-                <a:latin typeface="+mn-lt"/>
-              </a:rPr>
-              <a:t>The </a:t>
-            </a:r>
-            <a:r>
-              <a:rPr lang="en-US" sz="3200" b="1" dirty="0">
-                <a:latin typeface="+mn-lt"/>
-              </a:rPr>
-              <a:t>Ruff</a:t>
-            </a:r>
-            <a:r>
-              <a:rPr lang="en-US" sz="3200" dirty="0">
-                <a:latin typeface="+mn-lt"/>
-              </a:rPr>
-              <a:t> Formatter</a:t>
-            </a:r>
-          </a:p>
-        </p:txBody>
-      </p:sp>
-      <p:sp>
-        <p:nvSpPr>
-          <p:cNvPr id="3" name="Slide Number Placeholder 2"/>
-          <p:cNvSpPr>
-            <a:spLocks noGrp="1"/>
-          </p:cNvSpPr>
-          <p:nvPr>
-            <p:ph type="sldNum" sz="quarter" idx="12"/>
-          </p:nvPr>
-        </p:nvSpPr>
-        <p:spPr/>
-        <p:txBody>
-          <a:bodyPr/>
-          <a:lstStyle/>
-          <a:p>
-            <a:fld id="{650AD656-6FF9-465D-B7B0-1CD0DD39CD23}" type="slidenum">
-              <a:rPr lang="en-US" smtClean="0"/>
-              <a:t>25</a:t>
-            </a:fld>
-            <a:endParaRPr lang="en-US" dirty="0"/>
-          </a:p>
-        </p:txBody>
-      </p:sp>
-      <p:sp>
-        <p:nvSpPr>
-          <p:cNvPr id="10" name="TextBox 9">
-            <a:extLst>
-              <a:ext uri="{FF2B5EF4-FFF2-40B4-BE49-F238E27FC236}">
-                <a16:creationId xmlns:a16="http://schemas.microsoft.com/office/drawing/2014/main" id="{7EA28FBA-9A18-C43F-0200-822C69EF5FA4}"/>
-              </a:ext>
-            </a:extLst>
-          </p:cNvPr>
-          <p:cNvSpPr txBox="1"/>
-          <p:nvPr/>
-        </p:nvSpPr>
-        <p:spPr>
-          <a:xfrm>
-            <a:off x="2661955" y="1402598"/>
-            <a:ext cx="3820091" cy="369332"/>
-          </a:xfrm>
-          <a:prstGeom prst="rect">
-            <a:avLst/>
-          </a:prstGeom>
-          <a:noFill/>
-        </p:spPr>
-        <p:txBody>
-          <a:bodyPr wrap="square">
-            <a:spAutoFit/>
-          </a:bodyPr>
-          <a:lstStyle/>
-          <a:p>
-            <a:pPr algn="ctr"/>
-            <a:r>
-              <a:rPr lang="en-US" dirty="0">
-                <a:hlinkClick r:id="rId3"/>
-              </a:rPr>
-              <a:t>https://docs.astral.sh/ruff/formatter</a:t>
-            </a:r>
-            <a:endParaRPr lang="en-US" dirty="0"/>
-          </a:p>
-        </p:txBody>
-      </p:sp>
-    </p:spTree>
-    <p:extLst>
-      <p:ext uri="{BB962C8B-B14F-4D97-AF65-F5344CB8AC3E}">
-        <p14:creationId xmlns:p14="http://schemas.microsoft.com/office/powerpoint/2010/main" val="1424910514"/>
-      </p:ext>
-    </p:extLst>
-  </p:cSld>
-  <p:clrMapOvr>
-    <a:masterClrMapping/>
-  </p:clrMapOvr>
-</p:sld>
-</file>
-
-<file path=ppt/slides/slide26.xml><?xml version="1.0" encoding="utf-8"?>
+<file path=ppt/slides/slide27.xml><?xml version="1.0" encoding="utf-8"?>
 <p:sld xmlns:a="http://schemas.openxmlformats.org/drawingml/2006/main" xmlns:r="http://schemas.openxmlformats.org/officeDocument/2006/relationships" xmlns:p="http://schemas.openxmlformats.org/presentationml/2006/main">
   <p:cSld>
     <p:spTree>
@@ -19374,7 +21007,15 @@
             </a:r>
             <a:r>
               <a:rPr lang="en-US" sz="2400" dirty="0"/>
-              <a:t>function takes three parameters: (</a:t>
+              <a:t>function takes </a:t>
+            </a:r>
+            <a:r>
+              <a:rPr lang="en-US" sz="2400" i="1" dirty="0"/>
+              <a:t>up to three</a:t>
+            </a:r>
+            <a:r>
+              <a:rPr lang="en-US" sz="2400" dirty="0"/>
+              <a:t> parameters: (</a:t>
             </a:r>
             <a:r>
               <a:rPr lang="en-US" sz="2400" b="1" dirty="0">
@@ -19389,7 +21030,7 @@
               <a:t>, </a:t>
             </a:r>
             <a:r>
-              <a:rPr lang="en-US" sz="2400" b="1" u="sng" dirty="0">
+              <a:rPr lang="en-US" sz="2400" b="1" dirty="0">
                 <a:solidFill>
                   <a:srgbClr val="FF0000"/>
                 </a:solidFill>
@@ -19548,7 +21189,15 @@
             </a:pPr>
             <a:r>
               <a:rPr lang="en-US" sz="2000" dirty="0"/>
-              <a:t>The range is inclusive, </a:t>
+              <a:t>The range </a:t>
+            </a:r>
+            <a:r>
+              <a:rPr lang="en-US" sz="2000" b="1" dirty="0"/>
+              <a:t>span</a:t>
+            </a:r>
+            <a:r>
+              <a:rPr lang="en-US" sz="2000" dirty="0"/>
+              <a:t> is inclusive, </a:t>
             </a:r>
             <a:r>
               <a:rPr lang="en-US" sz="2000" i="1" u="sng" dirty="0"/>
@@ -19582,7 +21231,7 @@
           <a:p>
             <a:fld id="{650AD656-6FF9-465D-B7B0-1CD0DD39CD23}" type="slidenum">
               <a:rPr lang="en-US" smtClean="0"/>
-              <a:t>26</a:t>
+              <a:t>27</a:t>
             </a:fld>
             <a:endParaRPr lang="en-US" dirty="0"/>
           </a:p>
@@ -19602,7 +21251,7 @@
         </p:nvCxnSpPr>
         <p:spPr>
           <a:xfrm flipH="1">
-            <a:off x="6106195" y="5300474"/>
+            <a:off x="6595476" y="5300474"/>
             <a:ext cx="1216741" cy="0"/>
           </a:xfrm>
           <a:prstGeom prst="straightConnector1">
@@ -19952,21 +21601,30 @@
                             </p:childTnLst>
                           </p:cTn>
                         </p:par>
+                      </p:childTnLst>
+                    </p:cTn>
+                  </p:par>
+                  <p:par>
+                    <p:cTn id="11" fill="hold">
+                      <p:stCondLst>
+                        <p:cond delay="indefinite"/>
+                      </p:stCondLst>
+                      <p:childTnLst>
                         <p:par>
-                          <p:cTn id="11" fill="hold">
+                          <p:cTn id="12" fill="hold">
                             <p:stCondLst>
                               <p:cond delay="0"/>
                             </p:stCondLst>
                             <p:childTnLst>
                               <p:par>
-                                <p:cTn id="12" presetID="1" presetClass="entr" presetSubtype="0" fill="hold" nodeType="afterEffect">
+                                <p:cTn id="13" presetID="1" presetClass="entr" presetSubtype="0" fill="hold" nodeType="clickEffect">
                                   <p:stCondLst>
                                     <p:cond delay="0"/>
                                   </p:stCondLst>
                                   <p:childTnLst>
                                     <p:set>
                                       <p:cBhvr>
-                                        <p:cTn id="13" dur="1" fill="hold">
+                                        <p:cTn id="14" dur="1" fill="hold">
                                           <p:stCondLst>
                                             <p:cond delay="0"/>
                                           </p:stCondLst>
@@ -19986,103 +21644,6 @@
                                         <p:strVal val="visible"/>
                                       </p:to>
                                     </p:set>
-                                  </p:childTnLst>
-                                </p:cTn>
-                              </p:par>
-                              <p:par>
-                                <p:cTn id="14" presetID="1" presetClass="entr" presetSubtype="0" fill="hold" nodeType="withEffect">
-                                  <p:stCondLst>
-                                    <p:cond delay="0"/>
-                                  </p:stCondLst>
-                                  <p:childTnLst>
-                                    <p:set>
-                                      <p:cBhvr>
-                                        <p:cTn id="15" dur="1" fill="hold">
-                                          <p:stCondLst>
-                                            <p:cond delay="0"/>
-                                          </p:stCondLst>
-                                        </p:cTn>
-                                        <p:tgtEl>
-                                          <p:spTgt spid="3">
-                                            <p:txEl>
-                                              <p:pRg st="4" end="4"/>
-                                            </p:txEl>
-                                          </p:spTgt>
-                                        </p:tgtEl>
-                                        <p:attrNameLst>
-                                          <p:attrName>style.visibility</p:attrName>
-                                        </p:attrNameLst>
-                                      </p:cBhvr>
-                                      <p:to>
-                                        <p:strVal val="visible"/>
-                                      </p:to>
-                                    </p:set>
-                                  </p:childTnLst>
-                                </p:cTn>
-                              </p:par>
-                              <p:par>
-                                <p:cTn id="16" presetID="1" presetClass="entr" presetSubtype="0" fill="hold" nodeType="withEffect">
-                                  <p:stCondLst>
-                                    <p:cond delay="0"/>
-                                  </p:stCondLst>
-                                  <p:childTnLst>
-                                    <p:set>
-                                      <p:cBhvr>
-                                        <p:cTn id="17" dur="1" fill="hold">
-                                          <p:stCondLst>
-                                            <p:cond delay="0"/>
-                                          </p:stCondLst>
-                                        </p:cTn>
-                                        <p:tgtEl>
-                                          <p:spTgt spid="3">
-                                            <p:txEl>
-                                              <p:pRg st="5" end="5"/>
-                                            </p:txEl>
-                                          </p:spTgt>
-                                        </p:tgtEl>
-                                        <p:attrNameLst>
-                                          <p:attrName>style.visibility</p:attrName>
-                                        </p:attrNameLst>
-                                      </p:cBhvr>
-                                      <p:to>
-                                        <p:strVal val="visible"/>
-                                      </p:to>
-                                    </p:set>
-                                  </p:childTnLst>
-                                </p:cTn>
-                              </p:par>
-                              <p:par>
-                                <p:cTn id="18" presetID="22" presetClass="entr" presetSubtype="2" fill="hold" nodeType="withEffect">
-                                  <p:stCondLst>
-                                    <p:cond delay="0"/>
-                                  </p:stCondLst>
-                                  <p:childTnLst>
-                                    <p:set>
-                                      <p:cBhvr>
-                                        <p:cTn id="19" dur="1" fill="hold">
-                                          <p:stCondLst>
-                                            <p:cond delay="0"/>
-                                          </p:stCondLst>
-                                        </p:cTn>
-                                        <p:tgtEl>
-                                          <p:spTgt spid="5"/>
-                                        </p:tgtEl>
-                                        <p:attrNameLst>
-                                          <p:attrName>style.visibility</p:attrName>
-                                        </p:attrNameLst>
-                                      </p:cBhvr>
-                                      <p:to>
-                                        <p:strVal val="visible"/>
-                                      </p:to>
-                                    </p:set>
-                                    <p:animEffect transition="in" filter="wipe(right)">
-                                      <p:cBhvr>
-                                        <p:cTn id="20" dur="500"/>
-                                        <p:tgtEl>
-                                          <p:spTgt spid="5"/>
-                                        </p:tgtEl>
-                                      </p:cBhvr>
-                                    </p:animEffect>
                                   </p:childTnLst>
                                 </p:cTn>
                               </p:par>
@@ -20093,19 +21654,99 @@
                     </p:cTn>
                   </p:par>
                   <p:par>
-                    <p:cTn id="21" fill="hold">
+                    <p:cTn id="15" fill="hold">
                       <p:stCondLst>
                         <p:cond delay="indefinite"/>
                       </p:stCondLst>
                       <p:childTnLst>
                         <p:par>
-                          <p:cTn id="22" fill="hold">
+                          <p:cTn id="16" fill="hold">
                             <p:stCondLst>
                               <p:cond delay="0"/>
                             </p:stCondLst>
                             <p:childTnLst>
                               <p:par>
-                                <p:cTn id="23" presetID="22" presetClass="entr" presetSubtype="8" fill="hold" nodeType="clickEffect">
+                                <p:cTn id="17" presetID="1" presetClass="entr" presetSubtype="0" fill="hold" nodeType="clickEffect">
+                                  <p:stCondLst>
+                                    <p:cond delay="0"/>
+                                  </p:stCondLst>
+                                  <p:childTnLst>
+                                    <p:set>
+                                      <p:cBhvr>
+                                        <p:cTn id="18" dur="1" fill="hold">
+                                          <p:stCondLst>
+                                            <p:cond delay="0"/>
+                                          </p:stCondLst>
+                                        </p:cTn>
+                                        <p:tgtEl>
+                                          <p:spTgt spid="3">
+                                            <p:txEl>
+                                              <p:pRg st="4" end="4"/>
+                                            </p:txEl>
+                                          </p:spTgt>
+                                        </p:tgtEl>
+                                        <p:attrNameLst>
+                                          <p:attrName>style.visibility</p:attrName>
+                                        </p:attrNameLst>
+                                      </p:cBhvr>
+                                      <p:to>
+                                        <p:strVal val="visible"/>
+                                      </p:to>
+                                    </p:set>
+                                  </p:childTnLst>
+                                </p:cTn>
+                              </p:par>
+                            </p:childTnLst>
+                          </p:cTn>
+                        </p:par>
+                      </p:childTnLst>
+                    </p:cTn>
+                  </p:par>
+                  <p:par>
+                    <p:cTn id="19" fill="hold">
+                      <p:stCondLst>
+                        <p:cond delay="indefinite"/>
+                      </p:stCondLst>
+                      <p:childTnLst>
+                        <p:par>
+                          <p:cTn id="20" fill="hold">
+                            <p:stCondLst>
+                              <p:cond delay="0"/>
+                            </p:stCondLst>
+                            <p:childTnLst>
+                              <p:par>
+                                <p:cTn id="21" presetID="1" presetClass="entr" presetSubtype="0" fill="hold" nodeType="clickEffect">
+                                  <p:stCondLst>
+                                    <p:cond delay="0"/>
+                                  </p:stCondLst>
+                                  <p:childTnLst>
+                                    <p:set>
+                                      <p:cBhvr>
+                                        <p:cTn id="22" dur="1" fill="hold">
+                                          <p:stCondLst>
+                                            <p:cond delay="0"/>
+                                          </p:stCondLst>
+                                        </p:cTn>
+                                        <p:tgtEl>
+                                          <p:spTgt spid="3">
+                                            <p:txEl>
+                                              <p:pRg st="5" end="5"/>
+                                            </p:txEl>
+                                          </p:spTgt>
+                                        </p:tgtEl>
+                                        <p:attrNameLst>
+                                          <p:attrName>style.visibility</p:attrName>
+                                        </p:attrNameLst>
+                                      </p:cBhvr>
+                                      <p:to>
+                                        <p:strVal val="visible"/>
+                                      </p:to>
+                                    </p:set>
+                                  </p:childTnLst>
+                                </p:cTn>
+                              </p:par>
+                              <p:par>
+                                <p:cTn id="23" presetID="22" presetClass="entr" presetSubtype="2" fill="hold" nodeType="withEffect">
                                   <p:stCondLst>
                                     <p:cond delay="0"/>
                                   </p:stCondLst>
@@ -20118,7 +21759,7 @@
                                           </p:stCondLst>
                                         </p:cTn>
                                         <p:tgtEl>
-                                          <p:spTgt spid="4"/>
+                                          <p:spTgt spid="5"/>
                                         </p:tgtEl>
                                         <p:attrNameLst>
                                           <p:attrName>style.visibility</p:attrName>
@@ -20128,11 +21769,11 @@
                                         <p:strVal val="visible"/>
                                       </p:to>
                                     </p:set>
-                                    <p:animEffect transition="in" filter="wipe(left)">
+                                    <p:animEffect transition="in" filter="wipe(right)">
                                       <p:cBhvr>
                                         <p:cTn id="25" dur="500"/>
                                         <p:tgtEl>
-                                          <p:spTgt spid="4"/>
+                                          <p:spTgt spid="5"/>
                                         </p:tgtEl>
                                       </p:cBhvr>
                                     </p:animEffect>
@@ -20158,7 +21799,7 @@
                             </p:stCondLst>
                             <p:childTnLst>
                               <p:par>
-                                <p:cTn id="28" presetID="22" presetClass="entr" presetSubtype="8" fill="hold" grpId="0" nodeType="clickEffect">
+                                <p:cTn id="28" presetID="22" presetClass="entr" presetSubtype="8" fill="hold" nodeType="clickEffect">
                                   <p:stCondLst>
                                     <p:cond delay="0"/>
                                   </p:stCondLst>
@@ -20171,7 +21812,7 @@
                                           </p:stCondLst>
                                         </p:cTn>
                                         <p:tgtEl>
-                                          <p:spTgt spid="8"/>
+                                          <p:spTgt spid="4"/>
                                         </p:tgtEl>
                                         <p:attrNameLst>
                                           <p:attrName>style.visibility</p:attrName>
@@ -20185,51 +21826,7 @@
                                       <p:cBhvr>
                                         <p:cTn id="30" dur="500"/>
                                         <p:tgtEl>
-                                          <p:spTgt spid="8"/>
-                                        </p:tgtEl>
-                                      </p:cBhvr>
-                                    </p:animEffect>
-                                  </p:childTnLst>
-                                </p:cTn>
-                              </p:par>
-                            </p:childTnLst>
-                          </p:cTn>
-                        </p:par>
-                        <p:par>
-                          <p:cTn id="31" fill="hold">
-                            <p:stCondLst>
-                              <p:cond delay="500"/>
-                            </p:stCondLst>
-                            <p:childTnLst>
-                              <p:par>
-                                <p:cTn id="32" presetID="22" presetClass="entr" presetSubtype="8" fill="hold" nodeType="afterEffect">
-                                  <p:stCondLst>
-                                    <p:cond delay="0"/>
-                                  </p:stCondLst>
-                                  <p:childTnLst>
-                                    <p:set>
-                                      <p:cBhvr>
-                                        <p:cTn id="33" dur="1" fill="hold">
-                                          <p:stCondLst>
-                                            <p:cond delay="0"/>
-                                          </p:stCondLst>
-                                        </p:cTn>
-                                        <p:tgtEl>
-                                          <p:spTgt spid="6"/>
-                                        </p:tgtEl>
-                                        <p:attrNameLst>
-                                          <p:attrName>style.visibility</p:attrName>
-                                        </p:attrNameLst>
-                                      </p:cBhvr>
-                                      <p:to>
-                                        <p:strVal val="visible"/>
-                                      </p:to>
-                                    </p:set>
-                                    <p:animEffect transition="in" filter="wipe(left)">
-                                      <p:cBhvr>
-                                        <p:cTn id="34" dur="500"/>
-                                        <p:tgtEl>
-                                          <p:spTgt spid="6"/>
+                                          <p:spTgt spid="4"/>
                                         </p:tgtEl>
                                       </p:cBhvr>
                                     </p:animEffect>
@@ -20243,19 +21840,63 @@
                     </p:cTn>
                   </p:par>
                   <p:par>
-                    <p:cTn id="35" fill="hold">
+                    <p:cTn id="31" fill="hold">
                       <p:stCondLst>
                         <p:cond delay="indefinite"/>
                       </p:stCondLst>
                       <p:childTnLst>
                         <p:par>
-                          <p:cTn id="36" fill="hold">
+                          <p:cTn id="32" fill="hold">
                             <p:stCondLst>
                               <p:cond delay="0"/>
                             </p:stCondLst>
                             <p:childTnLst>
                               <p:par>
-                                <p:cTn id="37" presetID="53" presetClass="entr" presetSubtype="16" fill="hold" grpId="0" nodeType="clickEffect">
+                                <p:cTn id="33" presetID="22" presetClass="entr" presetSubtype="8" fill="hold" grpId="0" nodeType="clickEffect">
+                                  <p:stCondLst>
+                                    <p:cond delay="0"/>
+                                  </p:stCondLst>
+                                  <p:childTnLst>
+                                    <p:set>
+                                      <p:cBhvr>
+                                        <p:cTn id="34" dur="1" fill="hold">
+                                          <p:stCondLst>
+                                            <p:cond delay="0"/>
+                                          </p:stCondLst>
+                                        </p:cTn>
+                                        <p:tgtEl>
+                                          <p:spTgt spid="8"/>
+                                        </p:tgtEl>
+                                        <p:attrNameLst>
+                                          <p:attrName>style.visibility</p:attrName>
+                                        </p:attrNameLst>
+                                      </p:cBhvr>
+                                      <p:to>
+                                        <p:strVal val="visible"/>
+                                      </p:to>
+                                    </p:set>
+                                    <p:animEffect transition="in" filter="wipe(left)">
+                                      <p:cBhvr>
+                                        <p:cTn id="35" dur="500"/>
+                                        <p:tgtEl>
+                                          <p:spTgt spid="8"/>
+                                        </p:tgtEl>
+                                      </p:cBhvr>
+                                    </p:animEffect>
+                                  </p:childTnLst>
+                                </p:cTn>
+                              </p:par>
+                            </p:childTnLst>
+                          </p:cTn>
+                        </p:par>
+                        <p:par>
+                          <p:cTn id="36" fill="hold">
+                            <p:stCondLst>
+                              <p:cond delay="500"/>
+                            </p:stCondLst>
+                            <p:childTnLst>
+                              <p:par>
+                                <p:cTn id="37" presetID="22" presetClass="entr" presetSubtype="8" fill="hold" nodeType="afterEffect">
                                   <p:stCondLst>
                                     <p:cond delay="0"/>
                                   </p:stCondLst>
@@ -20268,6 +21909,59 @@
                                           </p:stCondLst>
                                         </p:cTn>
                                         <p:tgtEl>
+                                          <p:spTgt spid="6"/>
+                                        </p:tgtEl>
+                                        <p:attrNameLst>
+                                          <p:attrName>style.visibility</p:attrName>
+                                        </p:attrNameLst>
+                                      </p:cBhvr>
+                                      <p:to>
+                                        <p:strVal val="visible"/>
+                                      </p:to>
+                                    </p:set>
+                                    <p:animEffect transition="in" filter="wipe(left)">
+                                      <p:cBhvr>
+                                        <p:cTn id="39" dur="500"/>
+                                        <p:tgtEl>
+                                          <p:spTgt spid="6"/>
+                                        </p:tgtEl>
+                                      </p:cBhvr>
+                                    </p:animEffect>
+                                  </p:childTnLst>
+                                </p:cTn>
+                              </p:par>
+                            </p:childTnLst>
+                          </p:cTn>
+                        </p:par>
+                      </p:childTnLst>
+                    </p:cTn>
+                  </p:par>
+                  <p:par>
+                    <p:cTn id="40" fill="hold">
+                      <p:stCondLst>
+                        <p:cond delay="indefinite"/>
+                      </p:stCondLst>
+                      <p:childTnLst>
+                        <p:par>
+                          <p:cTn id="41" fill="hold">
+                            <p:stCondLst>
+                              <p:cond delay="0"/>
+                            </p:stCondLst>
+                            <p:childTnLst>
+                              <p:par>
+                                <p:cTn id="42" presetID="53" presetClass="entr" presetSubtype="16" fill="hold" grpId="0" nodeType="clickEffect">
+                                  <p:stCondLst>
+                                    <p:cond delay="0"/>
+                                  </p:stCondLst>
+                                  <p:childTnLst>
+                                    <p:set>
+                                      <p:cBhvr>
+                                        <p:cTn id="43" dur="1" fill="hold">
+                                          <p:stCondLst>
+                                            <p:cond delay="0"/>
+                                          </p:stCondLst>
+                                        </p:cTn>
+                                        <p:tgtEl>
                                           <p:spTgt spid="9"/>
                                         </p:tgtEl>
                                         <p:attrNameLst>
@@ -20280,7 +21974,7 @@
                                     </p:set>
                                     <p:anim calcmode="lin" valueType="num">
                                       <p:cBhvr>
-                                        <p:cTn id="39" dur="500" fill="hold"/>
+                                        <p:cTn id="44" dur="500" fill="hold"/>
                                         <p:tgtEl>
                                           <p:spTgt spid="9"/>
                                         </p:tgtEl>
@@ -20303,7 +21997,7 @@
                                     </p:anim>
                                     <p:anim calcmode="lin" valueType="num">
                                       <p:cBhvr>
-                                        <p:cTn id="40" dur="500" fill="hold"/>
+                                        <p:cTn id="45" dur="500" fill="hold"/>
                                         <p:tgtEl>
                                           <p:spTgt spid="9"/>
                                         </p:tgtEl>
@@ -20326,7 +22020,7 @@
                                     </p:anim>
                                     <p:animEffect transition="in" filter="fade">
                                       <p:cBhvr>
-                                        <p:cTn id="41" dur="500"/>
+                                        <p:cTn id="46" dur="500"/>
                                         <p:tgtEl>
                                           <p:spTgt spid="9"/>
                                         </p:tgtEl>
@@ -20370,7 +22064,7 @@
 </p:sld>
 </file>
 
-<file path=ppt/slides/slide27.xml><?xml version="1.0" encoding="utf-8"?>
+<file path=ppt/slides/slide28.xml><?xml version="1.0" encoding="utf-8"?>
 <p:sld xmlns:a="http://schemas.openxmlformats.org/drawingml/2006/main" xmlns:r="http://schemas.openxmlformats.org/officeDocument/2006/relationships" xmlns:p="http://schemas.openxmlformats.org/presentationml/2006/main">
   <p:cSld>
     <p:spTree>
@@ -20445,7 +22139,7 @@
           <a:p>
             <a:fld id="{650AD656-6FF9-465D-B7B0-1CD0DD39CD23}" type="slidenum">
               <a:rPr lang="en-US" smtClean="0"/>
-              <a:t>27</a:t>
+              <a:t>28</a:t>
             </a:fld>
             <a:endParaRPr lang="en-US" dirty="0"/>
           </a:p>
@@ -20841,7 +22535,7 @@
 </p:sld>
 </file>
 
-<file path=ppt/slides/slide28.xml><?xml version="1.0" encoding="utf-8"?>
+<file path=ppt/slides/slide29.xml><?xml version="1.0" encoding="utf-8"?>
 <p:sld xmlns:a="http://schemas.openxmlformats.org/drawingml/2006/main" xmlns:r="http://schemas.openxmlformats.org/officeDocument/2006/relationships" xmlns:p="http://schemas.openxmlformats.org/presentationml/2006/main">
   <p:cSld>
     <p:spTree>
@@ -20934,7 +22628,7 @@
           <a:p>
             <a:fld id="{650AD656-6FF9-465D-B7B0-1CD0DD39CD23}" type="slidenum">
               <a:rPr lang="en-US" smtClean="0"/>
-              <a:t>28</a:t>
+              <a:t>29</a:t>
             </a:fld>
             <a:endParaRPr lang="en-US" dirty="0"/>
           </a:p>
@@ -20983,7 +22677,174 @@
 </p:sld>
 </file>
 
-<file path=ppt/slides/slide29.xml><?xml version="1.0" encoding="utf-8"?>
+<file path=ppt/slides/slide3.xml><?xml version="1.0" encoding="utf-8"?>
+<p:sld xmlns:a="http://schemas.openxmlformats.org/drawingml/2006/main" xmlns:r="http://schemas.openxmlformats.org/officeDocument/2006/relationships" xmlns:p="http://schemas.openxmlformats.org/presentationml/2006/main">
+  <p:cSld>
+    <p:spTree>
+      <p:nvGrpSpPr>
+        <p:cNvPr id="1" name=""/>
+        <p:cNvGrpSpPr/>
+        <p:nvPr/>
+      </p:nvGrpSpPr>
+      <p:grpSpPr>
+        <a:xfrm>
+          <a:off x="0" y="0"/>
+          <a:ext cx="0" cy="0"/>
+          <a:chOff x="0" y="0"/>
+          <a:chExt cx="0" cy="0"/>
+        </a:xfrm>
+      </p:grpSpPr>
+      <p:sp>
+        <p:nvSpPr>
+          <p:cNvPr id="2" name="Title 1">
+            <a:extLst>
+              <a:ext uri="{FF2B5EF4-FFF2-40B4-BE49-F238E27FC236}">
+                <a16:creationId xmlns:a16="http://schemas.microsoft.com/office/drawing/2014/main" id="{FF6597C4-7DE6-4E7A-C6B2-5ABB65AAF601}"/>
+              </a:ext>
+            </a:extLst>
+          </p:cNvPr>
+          <p:cNvSpPr>
+            <a:spLocks noGrp="1"/>
+          </p:cNvSpPr>
+          <p:nvPr>
+            <p:ph type="title"/>
+          </p:nvPr>
+        </p:nvSpPr>
+        <p:spPr/>
+        <p:txBody>
+          <a:bodyPr>
+            <a:normAutofit/>
+          </a:bodyPr>
+          <a:lstStyle/>
+          <a:p>
+            <a:pPr algn="ctr"/>
+            <a:r>
+              <a:rPr lang="en-US" sz="3200" dirty="0">
+                <a:latin typeface="+mn-lt"/>
+              </a:rPr>
+              <a:t>The Python Tutorial</a:t>
+            </a:r>
+          </a:p>
+        </p:txBody>
+      </p:sp>
+      <p:sp>
+        <p:nvSpPr>
+          <p:cNvPr id="4" name="Slide Number Placeholder 3">
+            <a:extLst>
+              <a:ext uri="{FF2B5EF4-FFF2-40B4-BE49-F238E27FC236}">
+                <a16:creationId xmlns:a16="http://schemas.microsoft.com/office/drawing/2014/main" id="{0AEFDF3A-2C6D-91EB-88A5-0196BBE62D06}"/>
+              </a:ext>
+            </a:extLst>
+          </p:cNvPr>
+          <p:cNvSpPr>
+            <a:spLocks noGrp="1"/>
+          </p:cNvSpPr>
+          <p:nvPr>
+            <p:ph type="sldNum" sz="quarter" idx="12"/>
+          </p:nvPr>
+        </p:nvSpPr>
+        <p:spPr/>
+        <p:txBody>
+          <a:bodyPr/>
+          <a:lstStyle/>
+          <a:p>
+            <a:fld id="{650AD656-6FF9-465D-B7B0-1CD0DD39CD23}" type="slidenum">
+              <a:rPr lang="en-US" smtClean="0"/>
+              <a:pPr/>
+              <a:t>3</a:t>
+            </a:fld>
+            <a:endParaRPr lang="en-US"/>
+          </a:p>
+        </p:txBody>
+      </p:sp>
+      <p:pic>
+        <p:nvPicPr>
+          <p:cNvPr id="10" name="Picture 9">
+            <a:extLst>
+              <a:ext uri="{FF2B5EF4-FFF2-40B4-BE49-F238E27FC236}">
+                <a16:creationId xmlns:a16="http://schemas.microsoft.com/office/drawing/2014/main" id="{89C52617-02CD-1191-3306-FCC4E3F33D27}"/>
+              </a:ext>
+            </a:extLst>
+          </p:cNvPr>
+          <p:cNvPicPr>
+            <a:picLocks noChangeAspect="1"/>
+          </p:cNvPicPr>
+          <p:nvPr/>
+        </p:nvPicPr>
+        <p:blipFill>
+          <a:blip r:embed="rId2"/>
+          <a:stretch>
+            <a:fillRect/>
+          </a:stretch>
+        </p:blipFill>
+        <p:spPr>
+          <a:xfrm>
+            <a:off x="378501" y="1993051"/>
+            <a:ext cx="8386997" cy="3782973"/>
+          </a:xfrm>
+          <a:prstGeom prst="rect">
+            <a:avLst/>
+          </a:prstGeom>
+          <a:ln>
+            <a:solidFill>
+              <a:schemeClr val="tx1"/>
+            </a:solidFill>
+          </a:ln>
+        </p:spPr>
+      </p:pic>
+      <p:sp>
+        <p:nvSpPr>
+          <p:cNvPr id="11" name="TextBox 10">
+            <a:extLst>
+              <a:ext uri="{FF2B5EF4-FFF2-40B4-BE49-F238E27FC236}">
+                <a16:creationId xmlns:a16="http://schemas.microsoft.com/office/drawing/2014/main" id="{EBF2CDAF-837D-4635-542D-28702E1CFE86}"/>
+              </a:ext>
+            </a:extLst>
+          </p:cNvPr>
+          <p:cNvSpPr txBox="1"/>
+          <p:nvPr/>
+        </p:nvSpPr>
+        <p:spPr>
+          <a:xfrm>
+            <a:off x="2746948" y="1424066"/>
+            <a:ext cx="3650104" cy="369332"/>
+          </a:xfrm>
+          <a:prstGeom prst="rect">
+            <a:avLst/>
+          </a:prstGeom>
+          <a:noFill/>
+        </p:spPr>
+        <p:txBody>
+          <a:bodyPr wrap="square" rtlCol="0">
+            <a:spAutoFit/>
+          </a:bodyPr>
+          <a:lstStyle/>
+          <a:p>
+            <a:pPr algn="ctr"/>
+            <a:r>
+              <a:rPr lang="en-US" dirty="0">
+                <a:hlinkClick r:id="rId3"/>
+              </a:rPr>
+              <a:t>https://docs.python.org/3/tutorial</a:t>
+            </a:r>
+            <a:endParaRPr lang="en-US" dirty="0"/>
+          </a:p>
+        </p:txBody>
+      </p:sp>
+    </p:spTree>
+    <p:extLst>
+      <p:ext uri="{BB962C8B-B14F-4D97-AF65-F5344CB8AC3E}">
+        <p14:creationId xmlns:p14="http://schemas.microsoft.com/office/powerpoint/2010/main" val="728942069"/>
+      </p:ext>
+    </p:extLst>
+  </p:cSld>
+  <p:clrMapOvr>
+    <a:masterClrMapping/>
+  </p:clrMapOvr>
+</p:sld>
+</file>
+
+<file path=ppt/slides/slide30.xml><?xml version="1.0" encoding="utf-8"?>
 <p:sld xmlns:a="http://schemas.openxmlformats.org/drawingml/2006/main" xmlns:r="http://schemas.openxmlformats.org/officeDocument/2006/relationships" xmlns:p="http://schemas.openxmlformats.org/presentationml/2006/main">
   <p:cSld>
     <p:spTree>
@@ -21017,7 +22878,7 @@
           <a:p>
             <a:fld id="{650AD656-6FF9-465D-B7B0-1CD0DD39CD23}" type="slidenum">
               <a:rPr lang="en-US" smtClean="0"/>
-              <a:t>29</a:t>
+              <a:t>30</a:t>
             </a:fld>
             <a:endParaRPr lang="en-US" dirty="0"/>
           </a:p>
@@ -21251,174 +23112,7 @@
 </p:sld>
 </file>
 
-<file path=ppt/slides/slide3.xml><?xml version="1.0" encoding="utf-8"?>
-<p:sld xmlns:a="http://schemas.openxmlformats.org/drawingml/2006/main" xmlns:r="http://schemas.openxmlformats.org/officeDocument/2006/relationships" xmlns:p="http://schemas.openxmlformats.org/presentationml/2006/main">
-  <p:cSld>
-    <p:spTree>
-      <p:nvGrpSpPr>
-        <p:cNvPr id="1" name=""/>
-        <p:cNvGrpSpPr/>
-        <p:nvPr/>
-      </p:nvGrpSpPr>
-      <p:grpSpPr>
-        <a:xfrm>
-          <a:off x="0" y="0"/>
-          <a:ext cx="0" cy="0"/>
-          <a:chOff x="0" y="0"/>
-          <a:chExt cx="0" cy="0"/>
-        </a:xfrm>
-      </p:grpSpPr>
-      <p:sp>
-        <p:nvSpPr>
-          <p:cNvPr id="2" name="Title 1">
-            <a:extLst>
-              <a:ext uri="{FF2B5EF4-FFF2-40B4-BE49-F238E27FC236}">
-                <a16:creationId xmlns:a16="http://schemas.microsoft.com/office/drawing/2014/main" id="{FF6597C4-7DE6-4E7A-C6B2-5ABB65AAF601}"/>
-              </a:ext>
-            </a:extLst>
-          </p:cNvPr>
-          <p:cNvSpPr>
-            <a:spLocks noGrp="1"/>
-          </p:cNvSpPr>
-          <p:nvPr>
-            <p:ph type="title"/>
-          </p:nvPr>
-        </p:nvSpPr>
-        <p:spPr/>
-        <p:txBody>
-          <a:bodyPr>
-            <a:normAutofit/>
-          </a:bodyPr>
-          <a:lstStyle/>
-          <a:p>
-            <a:pPr algn="ctr"/>
-            <a:r>
-              <a:rPr lang="en-US" sz="3200" dirty="0">
-                <a:latin typeface="+mn-lt"/>
-              </a:rPr>
-              <a:t>The Python Tutorial</a:t>
-            </a:r>
-          </a:p>
-        </p:txBody>
-      </p:sp>
-      <p:sp>
-        <p:nvSpPr>
-          <p:cNvPr id="4" name="Slide Number Placeholder 3">
-            <a:extLst>
-              <a:ext uri="{FF2B5EF4-FFF2-40B4-BE49-F238E27FC236}">
-                <a16:creationId xmlns:a16="http://schemas.microsoft.com/office/drawing/2014/main" id="{0AEFDF3A-2C6D-91EB-88A5-0196BBE62D06}"/>
-              </a:ext>
-            </a:extLst>
-          </p:cNvPr>
-          <p:cNvSpPr>
-            <a:spLocks noGrp="1"/>
-          </p:cNvSpPr>
-          <p:nvPr>
-            <p:ph type="sldNum" sz="quarter" idx="12"/>
-          </p:nvPr>
-        </p:nvSpPr>
-        <p:spPr/>
-        <p:txBody>
-          <a:bodyPr/>
-          <a:lstStyle/>
-          <a:p>
-            <a:fld id="{650AD656-6FF9-465D-B7B0-1CD0DD39CD23}" type="slidenum">
-              <a:rPr lang="en-US" smtClean="0"/>
-              <a:pPr/>
-              <a:t>3</a:t>
-            </a:fld>
-            <a:endParaRPr lang="en-US"/>
-          </a:p>
-        </p:txBody>
-      </p:sp>
-      <p:pic>
-        <p:nvPicPr>
-          <p:cNvPr id="10" name="Picture 9">
-            <a:extLst>
-              <a:ext uri="{FF2B5EF4-FFF2-40B4-BE49-F238E27FC236}">
-                <a16:creationId xmlns:a16="http://schemas.microsoft.com/office/drawing/2014/main" id="{89C52617-02CD-1191-3306-FCC4E3F33D27}"/>
-              </a:ext>
-            </a:extLst>
-          </p:cNvPr>
-          <p:cNvPicPr>
-            <a:picLocks noChangeAspect="1"/>
-          </p:cNvPicPr>
-          <p:nvPr/>
-        </p:nvPicPr>
-        <p:blipFill>
-          <a:blip r:embed="rId2"/>
-          <a:stretch>
-            <a:fillRect/>
-          </a:stretch>
-        </p:blipFill>
-        <p:spPr>
-          <a:xfrm>
-            <a:off x="378501" y="1993051"/>
-            <a:ext cx="8386997" cy="3782973"/>
-          </a:xfrm>
-          <a:prstGeom prst="rect">
-            <a:avLst/>
-          </a:prstGeom>
-          <a:ln>
-            <a:solidFill>
-              <a:schemeClr val="tx1"/>
-            </a:solidFill>
-          </a:ln>
-        </p:spPr>
-      </p:pic>
-      <p:sp>
-        <p:nvSpPr>
-          <p:cNvPr id="11" name="TextBox 10">
-            <a:extLst>
-              <a:ext uri="{FF2B5EF4-FFF2-40B4-BE49-F238E27FC236}">
-                <a16:creationId xmlns:a16="http://schemas.microsoft.com/office/drawing/2014/main" id="{EBF2CDAF-837D-4635-542D-28702E1CFE86}"/>
-              </a:ext>
-            </a:extLst>
-          </p:cNvPr>
-          <p:cNvSpPr txBox="1"/>
-          <p:nvPr/>
-        </p:nvSpPr>
-        <p:spPr>
-          <a:xfrm>
-            <a:off x="2746948" y="1424066"/>
-            <a:ext cx="3650104" cy="369332"/>
-          </a:xfrm>
-          <a:prstGeom prst="rect">
-            <a:avLst/>
-          </a:prstGeom>
-          <a:noFill/>
-        </p:spPr>
-        <p:txBody>
-          <a:bodyPr wrap="square" rtlCol="0">
-            <a:spAutoFit/>
-          </a:bodyPr>
-          <a:lstStyle/>
-          <a:p>
-            <a:pPr algn="ctr"/>
-            <a:r>
-              <a:rPr lang="en-US" dirty="0">
-                <a:hlinkClick r:id="rId3"/>
-              </a:rPr>
-              <a:t>https://docs.python.org/3/tutorial</a:t>
-            </a:r>
-            <a:endParaRPr lang="en-US" dirty="0"/>
-          </a:p>
-        </p:txBody>
-      </p:sp>
-    </p:spTree>
-    <p:extLst>
-      <p:ext uri="{BB962C8B-B14F-4D97-AF65-F5344CB8AC3E}">
-        <p14:creationId xmlns:p14="http://schemas.microsoft.com/office/powerpoint/2010/main" val="728942069"/>
-      </p:ext>
-    </p:extLst>
-  </p:cSld>
-  <p:clrMapOvr>
-    <a:masterClrMapping/>
-  </p:clrMapOvr>
-</p:sld>
-</file>
-
-<file path=ppt/slides/slide30.xml><?xml version="1.0" encoding="utf-8"?>
+<file path=ppt/slides/slide31.xml><?xml version="1.0" encoding="utf-8"?>
 <p:sld xmlns:a="http://schemas.openxmlformats.org/drawingml/2006/main" xmlns:r="http://schemas.openxmlformats.org/officeDocument/2006/relationships" xmlns:p="http://schemas.openxmlformats.org/presentationml/2006/main">
   <p:cSld>
     <p:spTree>
@@ -21663,7 +23357,7 @@
           <a:p>
             <a:fld id="{650AD656-6FF9-465D-B7B0-1CD0DD39CD23}" type="slidenum">
               <a:rPr lang="en-US" smtClean="0"/>
-              <a:t>30</a:t>
+              <a:t>31</a:t>
             </a:fld>
             <a:endParaRPr lang="en-US" dirty="0"/>
           </a:p>
@@ -22088,7 +23782,7 @@
 </p:sld>
 </file>
 
-<file path=ppt/slides/slide31.xml><?xml version="1.0" encoding="utf-8"?>
+<file path=ppt/slides/slide32.xml><?xml version="1.0" encoding="utf-8"?>
 <p:sld xmlns:a="http://schemas.openxmlformats.org/drawingml/2006/main" xmlns:r="http://schemas.openxmlformats.org/officeDocument/2006/relationships" xmlns:p="http://schemas.openxmlformats.org/presentationml/2006/main">
   <p:cSld>
     <p:spTree>
@@ -22207,7 +23901,7 @@
             <a:fld id="{650AD656-6FF9-465D-B7B0-1CD0DD39CD23}" type="slidenum">
               <a:rPr lang="en-US" smtClean="0"/>
               <a:pPr/>
-              <a:t>31</a:t>
+              <a:t>32</a:t>
             </a:fld>
             <a:endParaRPr lang="en-US"/>
           </a:p>
@@ -22953,7 +24647,7 @@
 </p:sld>
 </file>
 
-<file path=ppt/slides/slide32.xml><?xml version="1.0" encoding="utf-8"?>
+<file path=ppt/slides/slide33.xml><?xml version="1.0" encoding="utf-8"?>
 <p:sld xmlns:a="http://schemas.openxmlformats.org/drawingml/2006/main" xmlns:r="http://schemas.openxmlformats.org/officeDocument/2006/relationships" xmlns:p="http://schemas.openxmlformats.org/presentationml/2006/main">
   <p:cSld>
     <p:spTree>
@@ -23023,7 +24717,7 @@
           <a:p>
             <a:fld id="{650AD656-6FF9-465D-B7B0-1CD0DD39CD23}" type="slidenum">
               <a:rPr lang="en-US" smtClean="0"/>
-              <a:t>32</a:t>
+              <a:t>33</a:t>
             </a:fld>
             <a:endParaRPr lang="en-US" dirty="0"/>
           </a:p>
@@ -23212,7 +24906,7 @@
 </p:sld>
 </file>
 
-<file path=ppt/slides/slide33.xml><?xml version="1.0" encoding="utf-8"?>
+<file path=ppt/slides/slide34.xml><?xml version="1.0" encoding="utf-8"?>
 <p:sld xmlns:a="http://schemas.openxmlformats.org/drawingml/2006/main" xmlns:r="http://schemas.openxmlformats.org/officeDocument/2006/relationships" xmlns:p="http://schemas.openxmlformats.org/presentationml/2006/main">
   <p:cSld>
     <p:spTree>
@@ -23296,7 +24990,7 @@
           <a:p>
             <a:fld id="{650AD656-6FF9-465D-B7B0-1CD0DD39CD23}" type="slidenum">
               <a:rPr lang="en-US" smtClean="0"/>
-              <a:t>33</a:t>
+              <a:t>34</a:t>
             </a:fld>
             <a:endParaRPr lang="en-US" dirty="0"/>
           </a:p>
@@ -24911,7 +26605,7 @@
 </p:sld>
 </file>
 
-<file path=ppt/slides/slide34.xml><?xml version="1.0" encoding="utf-8"?>
+<file path=ppt/slides/slide35.xml><?xml version="1.0" encoding="utf-8"?>
 <p:sld xmlns:a="http://schemas.openxmlformats.org/drawingml/2006/main" xmlns:r="http://schemas.openxmlformats.org/officeDocument/2006/relationships" xmlns:p="http://schemas.openxmlformats.org/presentationml/2006/main">
   <p:cSld>
     <p:spTree>
@@ -25042,7 +26736,7 @@
           <a:p>
             <a:fld id="{650AD656-6FF9-465D-B7B0-1CD0DD39CD23}" type="slidenum">
               <a:rPr lang="en-US" smtClean="0"/>
-              <a:t>34</a:t>
+              <a:t>35</a:t>
             </a:fld>
             <a:endParaRPr lang="en-US" dirty="0"/>
           </a:p>
@@ -25837,7 +27531,7 @@
 </p:sld>
 </file>
 
-<file path=ppt/slides/slide35.xml><?xml version="1.0" encoding="utf-8"?>
+<file path=ppt/slides/slide36.xml><?xml version="1.0" encoding="utf-8"?>
 <p:sld xmlns:a="http://schemas.openxmlformats.org/drawingml/2006/main" xmlns:r="http://schemas.openxmlformats.org/officeDocument/2006/relationships" xmlns:p="http://schemas.openxmlformats.org/presentationml/2006/main">
   <p:cSld>
     <p:spTree>
@@ -26077,7 +27771,7 @@
           <a:p>
             <a:fld id="{650AD656-6FF9-465D-B7B0-1CD0DD39CD23}" type="slidenum">
               <a:rPr lang="en-US" smtClean="0"/>
-              <a:t>35</a:t>
+              <a:t>36</a:t>
             </a:fld>
             <a:endParaRPr lang="en-US" dirty="0"/>
           </a:p>
@@ -26322,7 +28016,7 @@
 </p:sld>
 </file>
 
-<file path=ppt/slides/slide36.xml><?xml version="1.0" encoding="utf-8"?>
+<file path=ppt/slides/slide37.xml><?xml version="1.0" encoding="utf-8"?>
 <p:sld xmlns:a="http://schemas.openxmlformats.org/drawingml/2006/main" xmlns:r="http://schemas.openxmlformats.org/officeDocument/2006/relationships" xmlns:p="http://schemas.openxmlformats.org/presentationml/2006/main">
   <p:cSld>
     <p:spTree>
@@ -26458,7 +28152,7 @@
             <a:fld id="{650AD656-6FF9-465D-B7B0-1CD0DD39CD23}" type="slidenum">
               <a:rPr lang="en-US" smtClean="0"/>
               <a:pPr/>
-              <a:t>36</a:t>
+              <a:t>37</a:t>
             </a:fld>
             <a:endParaRPr lang="en-US"/>
           </a:p>
@@ -27939,8 +29633,8 @@
         </p:nvSpPr>
         <p:spPr>
           <a:xfrm>
-            <a:off x="628650" y="1825625"/>
-            <a:ext cx="7886700" cy="3213530"/>
+            <a:off x="628650" y="1825624"/>
+            <a:ext cx="7886700" cy="3821085"/>
           </a:xfrm>
         </p:spPr>
         <p:txBody>
@@ -27995,27 +29689,27 @@
             </a:pPr>
             <a:r>
               <a:rPr lang="en-US" sz="2000" dirty="0"/>
-              <a:t>Use a </a:t>
-            </a:r>
-            <a:r>
-              <a:rPr lang="en-US" sz="2000" u="sng" dirty="0"/>
-              <a:t>single</a:t>
-            </a:r>
-            <a:r>
-              <a:rPr lang="en-US" sz="2000" dirty="0"/>
-              <a:t> equal sign </a:t>
+              <a:t>Use </a:t>
             </a:r>
             <a:r>
               <a:rPr lang="en-US" sz="2000" b="1" dirty="0">
                 <a:solidFill>
-                  <a:srgbClr val="00B050"/>
+                  <a:srgbClr val="0070C0"/>
                 </a:solidFill>
               </a:rPr>
-              <a:t>=</a:t>
+              <a:t>parentheses</a:t>
             </a:r>
             <a:r>
               <a:rPr lang="en-US" sz="2000" dirty="0"/>
-              <a:t> to assign a value to a variable</a:t>
+              <a:t> to </a:t>
+            </a:r>
+            <a:r>
+              <a:rPr lang="en-US" sz="2000" b="1" dirty="0"/>
+              <a:t>override</a:t>
+            </a:r>
+            <a:r>
+              <a:rPr lang="en-US" sz="2000" dirty="0"/>
+              <a:t> the order of operations</a:t>
             </a:r>
           </a:p>
           <a:p>
@@ -28029,15 +29723,15 @@
             </a:pPr>
             <a:r>
               <a:rPr lang="en-US" sz="2000" dirty="0"/>
-              <a:t>Use </a:t>
-            </a:r>
-            <a:r>
-              <a:rPr lang="en-US" sz="2000" b="1" dirty="0"/>
-              <a:t>double</a:t>
+              <a:t>Use a </a:t>
+            </a:r>
+            <a:r>
+              <a:rPr lang="en-US" sz="2000" u="sng" dirty="0"/>
+              <a:t>single</a:t>
             </a:r>
             <a:r>
               <a:rPr lang="en-US" sz="2000" dirty="0"/>
-              <a:t> equal signs </a:t>
+              <a:t> equal sign </a:t>
             </a:r>
             <a:r>
               <a:rPr lang="en-US" sz="2000" b="1" dirty="0">
@@ -28045,17 +29739,12 @@
                   <a:srgbClr val="00B050"/>
                 </a:solidFill>
               </a:rPr>
-              <a:t>==</a:t>
+              <a:t>=</a:t>
             </a:r>
             <a:r>
               <a:rPr lang="en-US" sz="2000" dirty="0"/>
-              <a:t> to test for </a:t>
-            </a:r>
-            <a:r>
-              <a:rPr lang="en-US" sz="2000" b="1" i="1" dirty="0"/>
-              <a:t>equality</a:t>
-            </a:r>
-            <a:endParaRPr lang="en-US" sz="2000" dirty="0"/>
+              <a:t> to assign a value to a variable</a:t>
+            </a:r>
           </a:p>
           <a:p>
             <a:pPr lvl="1">
@@ -28071,29 +29760,30 @@
               <a:t>Use </a:t>
             </a:r>
             <a:r>
+              <a:rPr lang="en-US" sz="2000" b="1" dirty="0"/>
+              <a:t>double</a:t>
+            </a:r>
+            <a:r>
+              <a:rPr lang="en-US" sz="2000" dirty="0"/>
+              <a:t> equal signs </a:t>
+            </a:r>
+            <a:r>
               <a:rPr lang="en-US" sz="2000" b="1" dirty="0">
                 <a:solidFill>
                   <a:srgbClr val="00B050"/>
                 </a:solidFill>
               </a:rPr>
-              <a:t>*</a:t>
+              <a:t>==</a:t>
             </a:r>
             <a:r>
               <a:rPr lang="en-US" sz="2000" dirty="0"/>
-              <a:t> for multiplication and </a:t>
-            </a:r>
-            <a:r>
-              <a:rPr lang="en-US" sz="2000" b="1" dirty="0">
-                <a:solidFill>
-                  <a:srgbClr val="00B050"/>
-                </a:solidFill>
-              </a:rPr>
-              <a:t>/</a:t>
-            </a:r>
-            <a:r>
-              <a:rPr lang="en-US" sz="2000" dirty="0"/>
-              <a:t> for division operators</a:t>
-            </a:r>
+              <a:t> to test for </a:t>
+            </a:r>
+            <a:r>
+              <a:rPr lang="en-US" sz="2000" b="1" i="1" dirty="0"/>
+              <a:t>equality</a:t>
+            </a:r>
+            <a:endParaRPr lang="en-US" sz="2000" dirty="0"/>
           </a:p>
           <a:p>
             <a:pPr lvl="1">
@@ -28106,7 +29796,19 @@
             </a:pPr>
             <a:r>
               <a:rPr lang="en-US" sz="2000" dirty="0"/>
-              <a:t>Use parenthesis to explicitly override the order of operations</a:t>
+              <a:t>Use </a:t>
+            </a:r>
+            <a:r>
+              <a:rPr lang="en-US" sz="2000" b="1" dirty="0">
+                <a:solidFill>
+                  <a:srgbClr val="00B050"/>
+                </a:solidFill>
+              </a:rPr>
+              <a:t>*</a:t>
+            </a:r>
+            <a:r>
+              <a:rPr lang="en-US" sz="2000" dirty="0"/>
+              <a:t> for multiplication</a:t>
             </a:r>
           </a:p>
           <a:p>
@@ -28133,6 +29835,78 @@
             <a:r>
               <a:rPr lang="en-US" sz="2000" dirty="0"/>
               <a:t> for exponentiation</a:t>
+            </a:r>
+          </a:p>
+          <a:p>
+            <a:pPr lvl="1">
+              <a:spcBef>
+                <a:spcPts val="0"/>
+              </a:spcBef>
+              <a:spcAft>
+                <a:spcPts val="1200"/>
+              </a:spcAft>
+            </a:pPr>
+            <a:r>
+              <a:rPr lang="en-US" sz="2000" dirty="0"/>
+              <a:t>Use </a:t>
+            </a:r>
+            <a:r>
+              <a:rPr lang="en-US" sz="2000" b="1" dirty="0">
+                <a:solidFill>
+                  <a:srgbClr val="00B050"/>
+                </a:solidFill>
+              </a:rPr>
+              <a:t>/</a:t>
+            </a:r>
+            <a:r>
+              <a:rPr lang="en-US" sz="2000" dirty="0"/>
+              <a:t> for </a:t>
+            </a:r>
+            <a:r>
+              <a:rPr lang="en-US" sz="2000" b="1" dirty="0">
+                <a:solidFill>
+                  <a:srgbClr val="7030A0"/>
+                </a:solidFill>
+              </a:rPr>
+              <a:t>floating point</a:t>
+            </a:r>
+            <a:r>
+              <a:rPr lang="en-US" sz="2000" dirty="0"/>
+              <a:t> division</a:t>
+            </a:r>
+          </a:p>
+          <a:p>
+            <a:pPr lvl="1">
+              <a:spcBef>
+                <a:spcPts val="0"/>
+              </a:spcBef>
+              <a:spcAft>
+                <a:spcPts val="1200"/>
+              </a:spcAft>
+            </a:pPr>
+            <a:r>
+              <a:rPr lang="en-US" sz="2000" dirty="0"/>
+              <a:t>Use </a:t>
+            </a:r>
+            <a:r>
+              <a:rPr lang="en-US" sz="2000" b="1" dirty="0">
+                <a:solidFill>
+                  <a:srgbClr val="00B050"/>
+                </a:solidFill>
+              </a:rPr>
+              <a:t>//</a:t>
+            </a:r>
+            <a:r>
+              <a:rPr lang="en-US" sz="2000" dirty="0"/>
+              <a:t> for </a:t>
+            </a:r>
+            <a:r>
+              <a:rPr lang="en-US" sz="2000" b="1" dirty="0"/>
+              <a:t>integer</a:t>
+            </a:r>
+            <a:r>
+              <a:rPr lang="en-US" sz="2000" dirty="0"/>
+              <a:t> (floor, aka “round down”) division</a:t>
             </a:r>
           </a:p>
         </p:txBody>
@@ -28182,7 +29956,7 @@
         </p:blipFill>
         <p:spPr>
           <a:xfrm>
-            <a:off x="1870967" y="5332627"/>
+            <a:off x="1870967" y="5805866"/>
             <a:ext cx="5087271" cy="391329"/>
           </a:xfrm>
           <a:prstGeom prst="rect">
@@ -28303,21 +30077,70 @@
                             </p:childTnLst>
                           </p:cTn>
                         </p:par>
+                      </p:childTnLst>
+                    </p:cTn>
+                  </p:par>
+                  <p:par>
+                    <p:cTn id="11" fill="hold">
+                      <p:stCondLst>
+                        <p:cond delay="indefinite"/>
+                      </p:stCondLst>
+                      <p:childTnLst>
                         <p:par>
-                          <p:cTn id="11" fill="hold">
+                          <p:cTn id="12" fill="hold">
                             <p:stCondLst>
                               <p:cond delay="0"/>
                             </p:stCondLst>
                             <p:childTnLst>
                               <p:par>
-                                <p:cTn id="12" presetID="22" presetClass="entr" presetSubtype="8" fill="hold" nodeType="afterEffect">
+                                <p:cTn id="13" presetID="1" presetClass="entr" presetSubtype="0" fill="hold" nodeType="clickEffect">
                                   <p:stCondLst>
                                     <p:cond delay="0"/>
                                   </p:stCondLst>
                                   <p:childTnLst>
                                     <p:set>
                                       <p:cBhvr>
-                                        <p:cTn id="13" dur="1" fill="hold">
+                                        <p:cTn id="14" dur="1" fill="hold">
+                                          <p:stCondLst>
+                                            <p:cond delay="0"/>
+                                          </p:stCondLst>
+                                        </p:cTn>
+                                        <p:tgtEl>
+                                          <p:spTgt spid="3">
+                                            <p:txEl>
+                                              <p:pRg st="3" end="3"/>
+                                            </p:txEl>
+                                          </p:spTgt>
+                                        </p:tgtEl>
+                                        <p:attrNameLst>
+                                          <p:attrName>style.visibility</p:attrName>
+                                        </p:attrNameLst>
+                                      </p:cBhvr>
+                                      <p:to>
+                                        <p:strVal val="visible"/>
+                                      </p:to>
+                                    </p:set>
+                                  </p:childTnLst>
+                                </p:cTn>
+                              </p:par>
+                            </p:childTnLst>
+                          </p:cTn>
+                        </p:par>
+                        <p:par>
+                          <p:cTn id="15" fill="hold">
+                            <p:stCondLst>
+                              <p:cond delay="0"/>
+                            </p:stCondLst>
+                            <p:childTnLst>
+                              <p:par>
+                                <p:cTn id="16" presetID="22" presetClass="entr" presetSubtype="8" fill="hold" nodeType="afterEffect">
+                                  <p:stCondLst>
+                                    <p:cond delay="0"/>
+                                  </p:stCondLst>
+                                  <p:childTnLst>
+                                    <p:set>
+                                      <p:cBhvr>
+                                        <p:cTn id="17" dur="1" fill="hold">
                                           <p:stCondLst>
                                             <p:cond delay="0"/>
                                           </p:stCondLst>
@@ -28335,61 +30158,12 @@
                                     </p:set>
                                     <p:animEffect transition="in" filter="wipe(left)">
                                       <p:cBhvr>
-                                        <p:cTn id="14" dur="500"/>
+                                        <p:cTn id="18" dur="500"/>
                                         <p:tgtEl>
                                           <p:spTgt spid="5"/>
                                         </p:tgtEl>
                                       </p:cBhvr>
                                     </p:animEffect>
-                                  </p:childTnLst>
-                                </p:cTn>
-                              </p:par>
-                            </p:childTnLst>
-                          </p:cTn>
-                        </p:par>
-                      </p:childTnLst>
-                    </p:cTn>
-                  </p:par>
-                  <p:par>
-                    <p:cTn id="15" fill="hold">
-                      <p:stCondLst>
-                        <p:cond delay="indefinite"/>
-                      </p:stCondLst>
-                      <p:childTnLst>
-                        <p:par>
-                          <p:cTn id="16" fill="hold">
-                            <p:stCondLst>
-                              <p:cond delay="0"/>
-                            </p:stCondLst>
-                            <p:childTnLst>
-                              <p:par>
-                                <p:cTn id="17" presetID="1" presetClass="entr" presetSubtype="0" fill="hold" nodeType="clickEffect">
-                                  <p:stCondLst>
-                                    <p:cond delay="0"/>
-                                  </p:stCondLst>
-                                  <p:childTnLst>
-                                    <p:set>
-                                      <p:cBhvr>
-                                        <p:cTn id="18" dur="1" fill="hold">
-                                          <p:stCondLst>
-                                            <p:cond delay="0"/>
-                                          </p:stCondLst>
-                                        </p:cTn>
-                                        <p:tgtEl>
-                                          <p:spTgt spid="3">
-                                            <p:txEl>
-                                              <p:pRg st="3" end="3"/>
-                                            </p:txEl>
-                                          </p:spTgt>
-                                        </p:tgtEl>
-                                        <p:attrNameLst>
-                                          <p:attrName>style.visibility</p:attrName>
-                                        </p:attrNameLst>
-                                      </p:cBhvr>
-                                      <p:to>
-                                        <p:strVal val="visible"/>
-                                      </p:to>
-                                    </p:set>
                                   </p:childTnLst>
                                 </p:cTn>
                               </p:par>
@@ -28526,6 +30300,104 @@
                                           <p:spTgt spid="3">
                                             <p:txEl>
                                               <p:pRg st="6" end="6"/>
+                                            </p:txEl>
+                                          </p:spTgt>
+                                        </p:tgtEl>
+                                        <p:attrNameLst>
+                                          <p:attrName>style.visibility</p:attrName>
+                                        </p:attrNameLst>
+                                      </p:cBhvr>
+                                      <p:to>
+                                        <p:strVal val="visible"/>
+                                      </p:to>
+                                    </p:set>
+                                  </p:childTnLst>
+                                </p:cTn>
+                              </p:par>
+                            </p:childTnLst>
+                          </p:cTn>
+                        </p:par>
+                      </p:childTnLst>
+                    </p:cTn>
+                  </p:par>
+                  <p:par>
+                    <p:cTn id="31" fill="hold">
+                      <p:stCondLst>
+                        <p:cond delay="indefinite"/>
+                      </p:stCondLst>
+                      <p:childTnLst>
+                        <p:par>
+                          <p:cTn id="32" fill="hold">
+                            <p:stCondLst>
+                              <p:cond delay="0"/>
+                            </p:stCondLst>
+                            <p:childTnLst>
+                              <p:par>
+                                <p:cTn id="33" presetID="1" presetClass="entr" presetSubtype="0" fill="hold" nodeType="clickEffect">
+                                  <p:stCondLst>
+                                    <p:cond delay="0"/>
+                                  </p:stCondLst>
+                                  <p:childTnLst>
+                                    <p:set>
+                                      <p:cBhvr>
+                                        <p:cTn id="34" dur="1" fill="hold">
+                                          <p:stCondLst>
+                                            <p:cond delay="0"/>
+                                          </p:stCondLst>
+                                        </p:cTn>
+                                        <p:tgtEl>
+                                          <p:spTgt spid="3">
+                                            <p:txEl>
+                                              <p:pRg st="7" end="7"/>
+                                            </p:txEl>
+                                          </p:spTgt>
+                                        </p:tgtEl>
+                                        <p:attrNameLst>
+                                          <p:attrName>style.visibility</p:attrName>
+                                        </p:attrNameLst>
+                                      </p:cBhvr>
+                                      <p:to>
+                                        <p:strVal val="visible"/>
+                                      </p:to>
+                                    </p:set>
+                                  </p:childTnLst>
+                                </p:cTn>
+                              </p:par>
+                            </p:childTnLst>
+                          </p:cTn>
+                        </p:par>
+                      </p:childTnLst>
+                    </p:cTn>
+                  </p:par>
+                  <p:par>
+                    <p:cTn id="35" fill="hold">
+                      <p:stCondLst>
+                        <p:cond delay="indefinite"/>
+                      </p:stCondLst>
+                      <p:childTnLst>
+                        <p:par>
+                          <p:cTn id="36" fill="hold">
+                            <p:stCondLst>
+                              <p:cond delay="0"/>
+                            </p:stCondLst>
+                            <p:childTnLst>
+                              <p:par>
+                                <p:cTn id="37" presetID="1" presetClass="entr" presetSubtype="0" fill="hold" nodeType="clickEffect">
+                                  <p:stCondLst>
+                                    <p:cond delay="0"/>
+                                  </p:stCondLst>
+                                  <p:childTnLst>
+                                    <p:set>
+                                      <p:cBhvr>
+                                        <p:cTn id="38" dur="1" fill="hold">
+                                          <p:stCondLst>
+                                            <p:cond delay="0"/>
+                                          </p:stCondLst>
+                                        </p:cTn>
+                                        <p:tgtEl>
+                                          <p:spTgt spid="3">
+                                            <p:txEl>
+                                              <p:pRg st="8" end="8"/>
                                             </p:txEl>
                                           </p:spTgt>
                                         </p:tgtEl>

--- a/Session 02 - Python Fundamentals/Session 02 - Python Fundamentals.pptx
+++ b/Session 02 - Python Fundamentals/Session 02 - Python Fundamentals.pptx
@@ -5,10 +5,10 @@
     <p:sldMasterId id="2147483660" r:id="rId1"/>
   </p:sldMasterIdLst>
   <p:notesMasterIdLst>
-    <p:notesMasterId r:id="rId39"/>
+    <p:notesMasterId r:id="rId40"/>
   </p:notesMasterIdLst>
   <p:handoutMasterIdLst>
-    <p:handoutMasterId r:id="rId40"/>
+    <p:handoutMasterId r:id="rId41"/>
   </p:handoutMasterIdLst>
   <p:sldIdLst>
     <p:sldId id="1220" r:id="rId2"/>
@@ -35,19 +35,20 @@
     <p:sldId id="1235" r:id="rId23"/>
     <p:sldId id="1365" r:id="rId24"/>
     <p:sldId id="1264" r:id="rId25"/>
-    <p:sldId id="1299" r:id="rId26"/>
-    <p:sldId id="1363" r:id="rId27"/>
-    <p:sldId id="1291" r:id="rId28"/>
-    <p:sldId id="1284" r:id="rId29"/>
-    <p:sldId id="1364" r:id="rId30"/>
-    <p:sldId id="1281" r:id="rId31"/>
-    <p:sldId id="412" r:id="rId32"/>
-    <p:sldId id="1348" r:id="rId33"/>
-    <p:sldId id="983" r:id="rId34"/>
-    <p:sldId id="1362" r:id="rId35"/>
-    <p:sldId id="415" r:id="rId36"/>
-    <p:sldId id="416" r:id="rId37"/>
-    <p:sldId id="995" r:id="rId38"/>
+    <p:sldId id="1271" r:id="rId26"/>
+    <p:sldId id="1299" r:id="rId27"/>
+    <p:sldId id="1363" r:id="rId28"/>
+    <p:sldId id="1291" r:id="rId29"/>
+    <p:sldId id="1284" r:id="rId30"/>
+    <p:sldId id="1364" r:id="rId31"/>
+    <p:sldId id="1281" r:id="rId32"/>
+    <p:sldId id="412" r:id="rId33"/>
+    <p:sldId id="1348" r:id="rId34"/>
+    <p:sldId id="983" r:id="rId35"/>
+    <p:sldId id="1362" r:id="rId36"/>
+    <p:sldId id="415" r:id="rId37"/>
+    <p:sldId id="416" r:id="rId38"/>
+    <p:sldId id="995" r:id="rId39"/>
   </p:sldIdLst>
   <p:sldSz cx="9144000" cy="6858000" type="screen4x3"/>
   <p:notesSz cx="7077075" cy="9363075"/>
@@ -295,7 +296,7 @@
           <a:p>
             <a:fld id="{A241AC98-512A-4A35-865E-757B6C1F07A2}" type="datetimeFigureOut">
               <a:rPr lang="en-US" smtClean="0"/>
-              <a:t>11/20/2025</a:t>
+              <a:t>12/18/2025</a:t>
             </a:fld>
             <a:endParaRPr lang="en-US"/>
           </a:p>
@@ -461,7 +462,7 @@
           <a:p>
             <a:fld id="{3854CEE7-15DE-41D9-8CA2-D1E137B1D850}" type="datetimeFigureOut">
               <a:rPr lang="en-US" smtClean="0"/>
-              <a:t>11/20/2025</a:t>
+              <a:t>12/18/2025</a:t>
             </a:fld>
             <a:endParaRPr lang="en-US"/>
           </a:p>
@@ -757,6 +758,13 @@
           </p:nvPr>
         </p:nvSpPr>
         <p:spPr/>
+        <p:txBody>
+          <a:bodyPr/>
+          <a:lstStyle/>
+          <a:p>
+            <a:endParaRPr lang="en-US"/>
+          </a:p>
+        </p:txBody>
       </p:sp>
       <p:sp>
         <p:nvSpPr>
@@ -841,6 +849,13 @@
           </p:nvPr>
         </p:nvSpPr>
         <p:spPr/>
+        <p:txBody>
+          <a:bodyPr/>
+          <a:lstStyle/>
+          <a:p>
+            <a:endParaRPr lang="en-US"/>
+          </a:p>
+        </p:txBody>
       </p:sp>
       <p:sp>
         <p:nvSpPr>
@@ -1028,7 +1043,7 @@
           <a:p>
             <a:fld id="{5555EB2C-244D-4423-AD97-018ED6478B87}" type="datetime1">
               <a:rPr lang="en-US" smtClean="0"/>
-              <a:t>11/20/2025</a:t>
+              <a:t>12/18/2025</a:t>
             </a:fld>
             <a:endParaRPr lang="en-US"/>
           </a:p>
@@ -1207,7 +1222,7 @@
           <a:p>
             <a:fld id="{A2B41D1F-7576-4C60-B4EB-5115BC56CF40}" type="datetime1">
               <a:rPr lang="en-US" smtClean="0"/>
-              <a:t>11/20/2025</a:t>
+              <a:t>12/18/2025</a:t>
             </a:fld>
             <a:endParaRPr lang="en-US"/>
           </a:p>
@@ -1399,7 +1414,7 @@
           <a:p>
             <a:fld id="{E79D1398-4D56-44F9-BA35-34ACF3159A64}" type="datetime1">
               <a:rPr lang="en-US" smtClean="0"/>
-              <a:t>11/20/2025</a:t>
+              <a:t>12/18/2025</a:t>
             </a:fld>
             <a:endParaRPr lang="en-US"/>
           </a:p>
@@ -1581,7 +1596,7 @@
           <a:p>
             <a:fld id="{A3CF632E-48CB-4EEB-A6B6-DEC7AD7CC976}" type="datetime1">
               <a:rPr lang="en-US" smtClean="0"/>
-              <a:t>11/20/2025</a:t>
+              <a:t>12/18/2025</a:t>
             </a:fld>
             <a:endParaRPr lang="en-US"/>
           </a:p>
@@ -1834,7 +1849,7 @@
           <a:p>
             <a:fld id="{BAEEE52C-3A57-458E-95F6-96B2FA9D1DD4}" type="datetime1">
               <a:rPr lang="en-US" smtClean="0"/>
-              <a:t>11/20/2025</a:t>
+              <a:t>12/18/2025</a:t>
             </a:fld>
             <a:endParaRPr lang="en-US"/>
           </a:p>
@@ -2078,7 +2093,7 @@
           <a:p>
             <a:fld id="{766FC747-A48A-4FF2-8EE4-3E95ECD1C2A8}" type="datetime1">
               <a:rPr lang="en-US" smtClean="0"/>
-              <a:t>11/20/2025</a:t>
+              <a:t>12/18/2025</a:t>
             </a:fld>
             <a:endParaRPr lang="en-US"/>
           </a:p>
@@ -2457,7 +2472,7 @@
           <a:p>
             <a:fld id="{C9BF5758-AB7F-463D-B638-E1729B95E126}" type="datetime1">
               <a:rPr lang="en-US" smtClean="0"/>
-              <a:t>11/20/2025</a:t>
+              <a:t>12/18/2025</a:t>
             </a:fld>
             <a:endParaRPr lang="en-US"/>
           </a:p>
@@ -2587,7 +2602,7 @@
           <a:p>
             <a:fld id="{F3718C77-7DD0-4738-BF52-D0EC9F78A76E}" type="datetime1">
               <a:rPr lang="en-US" smtClean="0"/>
-              <a:t>11/20/2025</a:t>
+              <a:t>12/18/2025</a:t>
             </a:fld>
             <a:endParaRPr lang="en-US"/>
           </a:p>
@@ -2694,7 +2709,7 @@
           <a:p>
             <a:fld id="{948970CF-13D9-4E1D-A74F-2CFE4953FCDB}" type="datetime1">
               <a:rPr lang="en-US" smtClean="0"/>
-              <a:t>11/20/2025</a:t>
+              <a:t>12/18/2025</a:t>
             </a:fld>
             <a:endParaRPr lang="en-US"/>
           </a:p>
@@ -2983,7 +2998,7 @@
           <a:p>
             <a:fld id="{F68C49B9-4E1C-4967-B9CF-0BF9FECBE837}" type="datetime1">
               <a:rPr lang="en-US" smtClean="0"/>
-              <a:t>11/20/2025</a:t>
+              <a:t>12/18/2025</a:t>
             </a:fld>
             <a:endParaRPr lang="en-US"/>
           </a:p>
@@ -3251,7 +3266,7 @@
           <a:p>
             <a:fld id="{7E338CBB-1F06-4333-9BBF-66628B15E581}" type="datetime1">
               <a:rPr lang="en-US" smtClean="0"/>
-              <a:t>11/20/2025</a:t>
+              <a:t>12/18/2025</a:t>
             </a:fld>
             <a:endParaRPr lang="en-US"/>
           </a:p>
@@ -3476,7 +3491,7 @@
           <a:p>
             <a:fld id="{705EC883-F03C-4CA3-AF62-BEF30EEA4F65}" type="datetime1">
               <a:rPr lang="en-US" smtClean="0"/>
-              <a:t>11/20/2025</a:t>
+              <a:t>12/18/2025</a:t>
             </a:fld>
             <a:endParaRPr lang="en-US"/>
           </a:p>
@@ -18990,6 +19005,224 @@
       </p:grpSpPr>
       <p:pic>
         <p:nvPicPr>
+          <p:cNvPr id="5" name="Picture 4">
+            <a:extLst>
+              <a:ext uri="{FF2B5EF4-FFF2-40B4-BE49-F238E27FC236}">
+                <a16:creationId xmlns:a16="http://schemas.microsoft.com/office/drawing/2014/main" id="{9675ABEB-DF72-A729-25B7-225C22544610}"/>
+              </a:ext>
+            </a:extLst>
+          </p:cNvPr>
+          <p:cNvPicPr>
+            <a:picLocks noChangeAspect="1"/>
+          </p:cNvPicPr>
+          <p:nvPr/>
+        </p:nvPicPr>
+        <p:blipFill>
+          <a:blip r:embed="rId2"/>
+          <a:stretch>
+            <a:fillRect/>
+          </a:stretch>
+        </p:blipFill>
+        <p:spPr>
+          <a:xfrm>
+            <a:off x="959370" y="1897287"/>
+            <a:ext cx="7225259" cy="4681503"/>
+          </a:xfrm>
+          <a:prstGeom prst="rect">
+            <a:avLst/>
+          </a:prstGeom>
+          <a:ln>
+            <a:solidFill>
+              <a:schemeClr val="tx1"/>
+            </a:solidFill>
+          </a:ln>
+        </p:spPr>
+      </p:pic>
+      <p:sp>
+        <p:nvSpPr>
+          <p:cNvPr id="2" name="Title 1"/>
+          <p:cNvSpPr>
+            <a:spLocks noGrp="1"/>
+          </p:cNvSpPr>
+          <p:nvPr>
+            <p:ph type="title"/>
+          </p:nvPr>
+        </p:nvSpPr>
+        <p:spPr/>
+        <p:txBody>
+          <a:bodyPr>
+            <a:noAutofit/>
+          </a:bodyPr>
+          <a:lstStyle/>
+          <a:p>
+            <a:pPr algn="ctr"/>
+            <a:r>
+              <a:rPr lang="en-US" sz="3200" dirty="0">
+                <a:latin typeface="+mn-lt"/>
+              </a:rPr>
+              <a:t>The </a:t>
+            </a:r>
+            <a:r>
+              <a:rPr lang="en-US" sz="3200" b="1" dirty="0">
+                <a:latin typeface="+mn-lt"/>
+              </a:rPr>
+              <a:t>black</a:t>
+            </a:r>
+            <a:r>
+              <a:rPr lang="en-US" sz="3200" dirty="0">
+                <a:latin typeface="+mn-lt"/>
+              </a:rPr>
+              <a:t> Package</a:t>
+            </a:r>
+          </a:p>
+        </p:txBody>
+      </p:sp>
+      <p:sp>
+        <p:nvSpPr>
+          <p:cNvPr id="3" name="Slide Number Placeholder 2"/>
+          <p:cNvSpPr>
+            <a:spLocks noGrp="1"/>
+          </p:cNvSpPr>
+          <p:nvPr>
+            <p:ph type="sldNum" sz="quarter" idx="12"/>
+          </p:nvPr>
+        </p:nvSpPr>
+        <p:spPr/>
+        <p:txBody>
+          <a:bodyPr/>
+          <a:lstStyle/>
+          <a:p>
+            <a:fld id="{650AD656-6FF9-465D-B7B0-1CD0DD39CD23}" type="slidenum">
+              <a:rPr lang="en-US" smtClean="0"/>
+              <a:t>25</a:t>
+            </a:fld>
+            <a:endParaRPr lang="en-US" dirty="0"/>
+          </a:p>
+        </p:txBody>
+      </p:sp>
+      <p:sp>
+        <p:nvSpPr>
+          <p:cNvPr id="10" name="TextBox 9">
+            <a:extLst>
+              <a:ext uri="{FF2B5EF4-FFF2-40B4-BE49-F238E27FC236}">
+                <a16:creationId xmlns:a16="http://schemas.microsoft.com/office/drawing/2014/main" id="{7EA28FBA-9A18-C43F-0200-822C69EF5FA4}"/>
+              </a:ext>
+            </a:extLst>
+          </p:cNvPr>
+          <p:cNvSpPr txBox="1"/>
+          <p:nvPr/>
+        </p:nvSpPr>
+        <p:spPr>
+          <a:xfrm>
+            <a:off x="2973674" y="1402598"/>
+            <a:ext cx="3196653" cy="369332"/>
+          </a:xfrm>
+          <a:prstGeom prst="rect">
+            <a:avLst/>
+          </a:prstGeom>
+          <a:noFill/>
+        </p:spPr>
+        <p:txBody>
+          <a:bodyPr wrap="square">
+            <a:spAutoFit/>
+          </a:bodyPr>
+          <a:lstStyle/>
+          <a:p>
+            <a:pPr algn="ctr"/>
+            <a:r>
+              <a:rPr lang="en-US" dirty="0">
+                <a:hlinkClick r:id="rId3"/>
+              </a:rPr>
+              <a:t>https://github.com/psf/black</a:t>
+            </a:r>
+            <a:endParaRPr lang="en-US" dirty="0"/>
+          </a:p>
+        </p:txBody>
+      </p:sp>
+      <p:sp>
+        <p:nvSpPr>
+          <p:cNvPr id="11" name="Rectangle 10">
+            <a:extLst>
+              <a:ext uri="{FF2B5EF4-FFF2-40B4-BE49-F238E27FC236}">
+                <a16:creationId xmlns:a16="http://schemas.microsoft.com/office/drawing/2014/main" id="{758E6D21-0922-B1D6-3F20-C56734F729BB}"/>
+              </a:ext>
+            </a:extLst>
+          </p:cNvPr>
+          <p:cNvSpPr/>
+          <p:nvPr/>
+        </p:nvSpPr>
+        <p:spPr>
+          <a:xfrm>
+            <a:off x="2870617" y="3918588"/>
+            <a:ext cx="3507698" cy="323628"/>
+          </a:xfrm>
+          <a:prstGeom prst="rect">
+            <a:avLst/>
+          </a:prstGeom>
+          <a:noFill/>
+          <a:ln w="28575">
+            <a:solidFill>
+              <a:srgbClr val="FF0000"/>
+            </a:solidFill>
+          </a:ln>
+        </p:spPr>
+        <p:style>
+          <a:lnRef idx="2">
+            <a:schemeClr val="accent1">
+              <a:shade val="15000"/>
+            </a:schemeClr>
+          </a:lnRef>
+          <a:fillRef idx="1">
+            <a:schemeClr val="accent1"/>
+          </a:fillRef>
+          <a:effectRef idx="0">
+            <a:schemeClr val="accent1"/>
+          </a:effectRef>
+          <a:fontRef idx="minor">
+            <a:schemeClr val="lt1"/>
+          </a:fontRef>
+        </p:style>
+        <p:txBody>
+          <a:bodyPr rtlCol="0" anchor="ctr"/>
+          <a:lstStyle/>
+          <a:p>
+            <a:pPr algn="ctr"/>
+            <a:endParaRPr lang="en-US"/>
+          </a:p>
+        </p:txBody>
+      </p:sp>
+    </p:spTree>
+    <p:extLst>
+      <p:ext uri="{BB962C8B-B14F-4D97-AF65-F5344CB8AC3E}">
+        <p14:creationId xmlns:p14="http://schemas.microsoft.com/office/powerpoint/2010/main" val="1437037177"/>
+      </p:ext>
+    </p:extLst>
+  </p:cSld>
+  <p:clrMapOvr>
+    <a:masterClrMapping/>
+  </p:clrMapOvr>
+</p:sld>
+</file>
+
+<file path=ppt/slides/slide26.xml><?xml version="1.0" encoding="utf-8"?>
+<p:sld xmlns:a="http://schemas.openxmlformats.org/drawingml/2006/main" xmlns:r="http://schemas.openxmlformats.org/officeDocument/2006/relationships" xmlns:p="http://schemas.openxmlformats.org/presentationml/2006/main">
+  <p:cSld>
+    <p:spTree>
+      <p:nvGrpSpPr>
+        <p:cNvPr id="1" name=""/>
+        <p:cNvGrpSpPr/>
+        <p:nvPr/>
+      </p:nvGrpSpPr>
+      <p:grpSpPr>
+        <a:xfrm>
+          <a:off x="0" y="0"/>
+          <a:ext cx="0" cy="0"/>
+          <a:chOff x="0" y="0"/>
+          <a:chExt cx="0" cy="0"/>
+        </a:xfrm>
+      </p:grpSpPr>
+      <p:pic>
+        <p:nvPicPr>
           <p:cNvPr id="8" name="Picture 7">
             <a:extLst>
               <a:ext uri="{FF2B5EF4-FFF2-40B4-BE49-F238E27FC236}">
@@ -19086,7 +19319,7 @@
           <a:p>
             <a:fld id="{650AD656-6FF9-465D-B7B0-1CD0DD39CD23}" type="slidenum">
               <a:rPr lang="en-US" smtClean="0"/>
-              <a:t>25</a:t>
+              <a:t>26</a:t>
             </a:fld>
             <a:endParaRPr lang="en-US" dirty="0"/>
           </a:p>
@@ -19144,7 +19377,7 @@
 </p:sld>
 </file>
 
-<file path=ppt/slides/slide26.xml><?xml version="1.0" encoding="utf-8"?>
+<file path=ppt/slides/slide27.xml><?xml version="1.0" encoding="utf-8"?>
 <p:sld xmlns:a="http://schemas.openxmlformats.org/drawingml/2006/main" xmlns:r="http://schemas.openxmlformats.org/officeDocument/2006/relationships" xmlns:p="http://schemas.openxmlformats.org/presentationml/2006/main">
   <p:cSld>
     <p:spTree>
@@ -19277,7 +19510,7 @@
           <a:p>
             <a:fld id="{650AD656-6FF9-465D-B7B0-1CD0DD39CD23}" type="slidenum">
               <a:rPr lang="en-US" smtClean="0"/>
-              <a:t>26</a:t>
+              <a:t>27</a:t>
             </a:fld>
             <a:endParaRPr lang="en-US" dirty="0"/>
           </a:p>
@@ -20820,7 +21053,7 @@
 </p:sld>
 </file>
 
-<file path=ppt/slides/slide27.xml><?xml version="1.0" encoding="utf-8"?>
+<file path=ppt/slides/slide28.xml><?xml version="1.0" encoding="utf-8"?>
 <p:sld xmlns:a="http://schemas.openxmlformats.org/drawingml/2006/main" xmlns:r="http://schemas.openxmlformats.org/officeDocument/2006/relationships" xmlns:p="http://schemas.openxmlformats.org/presentationml/2006/main">
   <p:cSld>
     <p:spTree>
@@ -21231,7 +21464,7 @@
           <a:p>
             <a:fld id="{650AD656-6FF9-465D-B7B0-1CD0DD39CD23}" type="slidenum">
               <a:rPr lang="en-US" smtClean="0"/>
-              <a:t>27</a:t>
+              <a:t>28</a:t>
             </a:fld>
             <a:endParaRPr lang="en-US" dirty="0"/>
           </a:p>
@@ -22064,7 +22297,7 @@
 </p:sld>
 </file>
 
-<file path=ppt/slides/slide28.xml><?xml version="1.0" encoding="utf-8"?>
+<file path=ppt/slides/slide29.xml><?xml version="1.0" encoding="utf-8"?>
 <p:sld xmlns:a="http://schemas.openxmlformats.org/drawingml/2006/main" xmlns:r="http://schemas.openxmlformats.org/officeDocument/2006/relationships" xmlns:p="http://schemas.openxmlformats.org/presentationml/2006/main">
   <p:cSld>
     <p:spTree>
@@ -22139,7 +22372,7 @@
           <a:p>
             <a:fld id="{650AD656-6FF9-465D-B7B0-1CD0DD39CD23}" type="slidenum">
               <a:rPr lang="en-US" smtClean="0"/>
-              <a:t>28</a:t>
+              <a:t>29</a:t>
             </a:fld>
             <a:endParaRPr lang="en-US" dirty="0"/>
           </a:p>
@@ -22535,148 +22768,6 @@
 </p:sld>
 </file>
 
-<file path=ppt/slides/slide29.xml><?xml version="1.0" encoding="utf-8"?>
-<p:sld xmlns:a="http://schemas.openxmlformats.org/drawingml/2006/main" xmlns:r="http://schemas.openxmlformats.org/officeDocument/2006/relationships" xmlns:p="http://schemas.openxmlformats.org/presentationml/2006/main">
-  <p:cSld>
-    <p:spTree>
-      <p:nvGrpSpPr>
-        <p:cNvPr id="1" name="">
-          <a:extLst>
-            <a:ext uri="{FF2B5EF4-FFF2-40B4-BE49-F238E27FC236}">
-              <a16:creationId xmlns:a16="http://schemas.microsoft.com/office/drawing/2014/main" id="{14B73195-25D6-581B-02F0-E5B483A0B4D4}"/>
-            </a:ext>
-          </a:extLst>
-        </p:cNvPr>
-        <p:cNvGrpSpPr/>
-        <p:nvPr/>
-      </p:nvGrpSpPr>
-      <p:grpSpPr>
-        <a:xfrm>
-          <a:off x="0" y="0"/>
-          <a:ext cx="0" cy="0"/>
-          <a:chOff x="0" y="0"/>
-          <a:chExt cx="0" cy="0"/>
-        </a:xfrm>
-      </p:grpSpPr>
-      <p:sp>
-        <p:nvSpPr>
-          <p:cNvPr id="2" name="Title 1">
-            <a:extLst>
-              <a:ext uri="{FF2B5EF4-FFF2-40B4-BE49-F238E27FC236}">
-                <a16:creationId xmlns:a16="http://schemas.microsoft.com/office/drawing/2014/main" id="{E3AC9D3C-CF6A-B81C-2BD6-7E1EB3EBB1BC}"/>
-              </a:ext>
-            </a:extLst>
-          </p:cNvPr>
-          <p:cNvSpPr>
-            <a:spLocks noGrp="1"/>
-          </p:cNvSpPr>
-          <p:nvPr>
-            <p:ph type="title"/>
-          </p:nvPr>
-        </p:nvSpPr>
-        <p:spPr>
-          <a:xfrm>
-            <a:off x="628650" y="365126"/>
-            <a:ext cx="7886700" cy="1103455"/>
-          </a:xfrm>
-        </p:spPr>
-        <p:txBody>
-          <a:bodyPr>
-            <a:noAutofit/>
-          </a:bodyPr>
-          <a:lstStyle/>
-          <a:p>
-            <a:pPr algn="ctr"/>
-            <a:r>
-              <a:rPr lang="en-US" sz="3200" b="1" dirty="0">
-                <a:solidFill>
-                  <a:srgbClr val="7030A0"/>
-                </a:solidFill>
-                <a:latin typeface="+mn-lt"/>
-              </a:rPr>
-              <a:t>for</a:t>
-            </a:r>
-            <a:r>
-              <a:rPr lang="en-US" sz="3200" dirty="0">
-                <a:latin typeface="+mn-lt"/>
-              </a:rPr>
-              <a:t> loops</a:t>
-            </a:r>
-          </a:p>
-        </p:txBody>
-      </p:sp>
-      <p:sp>
-        <p:nvSpPr>
-          <p:cNvPr id="7" name="Slide Number Placeholder 6">
-            <a:extLst>
-              <a:ext uri="{FF2B5EF4-FFF2-40B4-BE49-F238E27FC236}">
-                <a16:creationId xmlns:a16="http://schemas.microsoft.com/office/drawing/2014/main" id="{F2CCBF58-9D0F-97F5-6A8B-C19376C82B54}"/>
-              </a:ext>
-            </a:extLst>
-          </p:cNvPr>
-          <p:cNvSpPr>
-            <a:spLocks noGrp="1"/>
-          </p:cNvSpPr>
-          <p:nvPr>
-            <p:ph type="sldNum" sz="quarter" idx="12"/>
-          </p:nvPr>
-        </p:nvSpPr>
-        <p:spPr/>
-        <p:txBody>
-          <a:bodyPr/>
-          <a:lstStyle/>
-          <a:p>
-            <a:fld id="{650AD656-6FF9-465D-B7B0-1CD0DD39CD23}" type="slidenum">
-              <a:rPr lang="en-US" smtClean="0"/>
-              <a:t>29</a:t>
-            </a:fld>
-            <a:endParaRPr lang="en-US" dirty="0"/>
-          </a:p>
-        </p:txBody>
-      </p:sp>
-      <p:pic>
-        <p:nvPicPr>
-          <p:cNvPr id="3" name="Picture 2">
-            <a:extLst>
-              <a:ext uri="{FF2B5EF4-FFF2-40B4-BE49-F238E27FC236}">
-                <a16:creationId xmlns:a16="http://schemas.microsoft.com/office/drawing/2014/main" id="{A29D8BC3-F02D-BB62-0367-AA78ED34F4B0}"/>
-              </a:ext>
-            </a:extLst>
-          </p:cNvPr>
-          <p:cNvPicPr>
-            <a:picLocks noChangeAspect="1"/>
-          </p:cNvPicPr>
-          <p:nvPr/>
-        </p:nvPicPr>
-        <p:blipFill>
-          <a:blip r:embed="rId2"/>
-          <a:stretch>
-            <a:fillRect/>
-          </a:stretch>
-        </p:blipFill>
-        <p:spPr>
-          <a:xfrm>
-            <a:off x="573505" y="1382373"/>
-            <a:ext cx="7996989" cy="4703746"/>
-          </a:xfrm>
-          <a:prstGeom prst="rect">
-            <a:avLst/>
-          </a:prstGeom>
-        </p:spPr>
-      </p:pic>
-    </p:spTree>
-    <p:extLst>
-      <p:ext uri="{BB962C8B-B14F-4D97-AF65-F5344CB8AC3E}">
-        <p14:creationId xmlns:p14="http://schemas.microsoft.com/office/powerpoint/2010/main" val="476521684"/>
-      </p:ext>
-    </p:extLst>
-  </p:cSld>
-  <p:clrMapOvr>
-    <a:masterClrMapping/>
-  </p:clrMapOvr>
-</p:sld>
-</file>
-
 <file path=ppt/slides/slide3.xml><?xml version="1.0" encoding="utf-8"?>
 <p:sld xmlns:a="http://schemas.openxmlformats.org/drawingml/2006/main" xmlns:r="http://schemas.openxmlformats.org/officeDocument/2006/relationships" xmlns:p="http://schemas.openxmlformats.org/presentationml/2006/main">
   <p:cSld>
@@ -22849,6 +22940,148 @@
   <p:cSld>
     <p:spTree>
       <p:nvGrpSpPr>
+        <p:cNvPr id="1" name="">
+          <a:extLst>
+            <a:ext uri="{FF2B5EF4-FFF2-40B4-BE49-F238E27FC236}">
+              <a16:creationId xmlns:a16="http://schemas.microsoft.com/office/drawing/2014/main" id="{14B73195-25D6-581B-02F0-E5B483A0B4D4}"/>
+            </a:ext>
+          </a:extLst>
+        </p:cNvPr>
+        <p:cNvGrpSpPr/>
+        <p:nvPr/>
+      </p:nvGrpSpPr>
+      <p:grpSpPr>
+        <a:xfrm>
+          <a:off x="0" y="0"/>
+          <a:ext cx="0" cy="0"/>
+          <a:chOff x="0" y="0"/>
+          <a:chExt cx="0" cy="0"/>
+        </a:xfrm>
+      </p:grpSpPr>
+      <p:sp>
+        <p:nvSpPr>
+          <p:cNvPr id="2" name="Title 1">
+            <a:extLst>
+              <a:ext uri="{FF2B5EF4-FFF2-40B4-BE49-F238E27FC236}">
+                <a16:creationId xmlns:a16="http://schemas.microsoft.com/office/drawing/2014/main" id="{E3AC9D3C-CF6A-B81C-2BD6-7E1EB3EBB1BC}"/>
+              </a:ext>
+            </a:extLst>
+          </p:cNvPr>
+          <p:cNvSpPr>
+            <a:spLocks noGrp="1"/>
+          </p:cNvSpPr>
+          <p:nvPr>
+            <p:ph type="title"/>
+          </p:nvPr>
+        </p:nvSpPr>
+        <p:spPr>
+          <a:xfrm>
+            <a:off x="628650" y="365126"/>
+            <a:ext cx="7886700" cy="1103455"/>
+          </a:xfrm>
+        </p:spPr>
+        <p:txBody>
+          <a:bodyPr>
+            <a:noAutofit/>
+          </a:bodyPr>
+          <a:lstStyle/>
+          <a:p>
+            <a:pPr algn="ctr"/>
+            <a:r>
+              <a:rPr lang="en-US" sz="3200" b="1" dirty="0">
+                <a:solidFill>
+                  <a:srgbClr val="7030A0"/>
+                </a:solidFill>
+                <a:latin typeface="+mn-lt"/>
+              </a:rPr>
+              <a:t>for</a:t>
+            </a:r>
+            <a:r>
+              <a:rPr lang="en-US" sz="3200" dirty="0">
+                <a:latin typeface="+mn-lt"/>
+              </a:rPr>
+              <a:t> loops</a:t>
+            </a:r>
+          </a:p>
+        </p:txBody>
+      </p:sp>
+      <p:sp>
+        <p:nvSpPr>
+          <p:cNvPr id="7" name="Slide Number Placeholder 6">
+            <a:extLst>
+              <a:ext uri="{FF2B5EF4-FFF2-40B4-BE49-F238E27FC236}">
+                <a16:creationId xmlns:a16="http://schemas.microsoft.com/office/drawing/2014/main" id="{F2CCBF58-9D0F-97F5-6A8B-C19376C82B54}"/>
+              </a:ext>
+            </a:extLst>
+          </p:cNvPr>
+          <p:cNvSpPr>
+            <a:spLocks noGrp="1"/>
+          </p:cNvSpPr>
+          <p:nvPr>
+            <p:ph type="sldNum" sz="quarter" idx="12"/>
+          </p:nvPr>
+        </p:nvSpPr>
+        <p:spPr/>
+        <p:txBody>
+          <a:bodyPr/>
+          <a:lstStyle/>
+          <a:p>
+            <a:fld id="{650AD656-6FF9-465D-B7B0-1CD0DD39CD23}" type="slidenum">
+              <a:rPr lang="en-US" smtClean="0"/>
+              <a:t>30</a:t>
+            </a:fld>
+            <a:endParaRPr lang="en-US" dirty="0"/>
+          </a:p>
+        </p:txBody>
+      </p:sp>
+      <p:pic>
+        <p:nvPicPr>
+          <p:cNvPr id="3" name="Picture 2">
+            <a:extLst>
+              <a:ext uri="{FF2B5EF4-FFF2-40B4-BE49-F238E27FC236}">
+                <a16:creationId xmlns:a16="http://schemas.microsoft.com/office/drawing/2014/main" id="{A29D8BC3-F02D-BB62-0367-AA78ED34F4B0}"/>
+              </a:ext>
+            </a:extLst>
+          </p:cNvPr>
+          <p:cNvPicPr>
+            <a:picLocks noChangeAspect="1"/>
+          </p:cNvPicPr>
+          <p:nvPr/>
+        </p:nvPicPr>
+        <p:blipFill>
+          <a:blip r:embed="rId2"/>
+          <a:stretch>
+            <a:fillRect/>
+          </a:stretch>
+        </p:blipFill>
+        <p:spPr>
+          <a:xfrm>
+            <a:off x="573505" y="1382373"/>
+            <a:ext cx="7996989" cy="4703746"/>
+          </a:xfrm>
+          <a:prstGeom prst="rect">
+            <a:avLst/>
+          </a:prstGeom>
+        </p:spPr>
+      </p:pic>
+    </p:spTree>
+    <p:extLst>
+      <p:ext uri="{BB962C8B-B14F-4D97-AF65-F5344CB8AC3E}">
+        <p14:creationId xmlns:p14="http://schemas.microsoft.com/office/powerpoint/2010/main" val="476521684"/>
+      </p:ext>
+    </p:extLst>
+  </p:cSld>
+  <p:clrMapOvr>
+    <a:masterClrMapping/>
+  </p:clrMapOvr>
+</p:sld>
+</file>
+
+<file path=ppt/slides/slide31.xml><?xml version="1.0" encoding="utf-8"?>
+<p:sld xmlns:a="http://schemas.openxmlformats.org/drawingml/2006/main" xmlns:r="http://schemas.openxmlformats.org/officeDocument/2006/relationships" xmlns:p="http://schemas.openxmlformats.org/presentationml/2006/main">
+  <p:cSld>
+    <p:spTree>
+      <p:nvGrpSpPr>
         <p:cNvPr id="1" name=""/>
         <p:cNvGrpSpPr/>
         <p:nvPr/>
@@ -22878,7 +23111,7 @@
           <a:p>
             <a:fld id="{650AD656-6FF9-465D-B7B0-1CD0DD39CD23}" type="slidenum">
               <a:rPr lang="en-US" smtClean="0"/>
-              <a:t>30</a:t>
+              <a:t>31</a:t>
             </a:fld>
             <a:endParaRPr lang="en-US" dirty="0"/>
           </a:p>
@@ -23112,7 +23345,7 @@
 </p:sld>
 </file>
 
-<file path=ppt/slides/slide31.xml><?xml version="1.0" encoding="utf-8"?>
+<file path=ppt/slides/slide32.xml><?xml version="1.0" encoding="utf-8"?>
 <p:sld xmlns:a="http://schemas.openxmlformats.org/drawingml/2006/main" xmlns:r="http://schemas.openxmlformats.org/officeDocument/2006/relationships" xmlns:p="http://schemas.openxmlformats.org/presentationml/2006/main">
   <p:cSld>
     <p:spTree>
@@ -23357,7 +23590,7 @@
           <a:p>
             <a:fld id="{650AD656-6FF9-465D-B7B0-1CD0DD39CD23}" type="slidenum">
               <a:rPr lang="en-US" smtClean="0"/>
-              <a:t>31</a:t>
+              <a:t>32</a:t>
             </a:fld>
             <a:endParaRPr lang="en-US" dirty="0"/>
           </a:p>
@@ -23782,7 +24015,7 @@
 </p:sld>
 </file>
 
-<file path=ppt/slides/slide32.xml><?xml version="1.0" encoding="utf-8"?>
+<file path=ppt/slides/slide33.xml><?xml version="1.0" encoding="utf-8"?>
 <p:sld xmlns:a="http://schemas.openxmlformats.org/drawingml/2006/main" xmlns:r="http://schemas.openxmlformats.org/officeDocument/2006/relationships" xmlns:p="http://schemas.openxmlformats.org/presentationml/2006/main">
   <p:cSld>
     <p:spTree>
@@ -23901,7 +24134,7 @@
             <a:fld id="{650AD656-6FF9-465D-B7B0-1CD0DD39CD23}" type="slidenum">
               <a:rPr lang="en-US" smtClean="0"/>
               <a:pPr/>
-              <a:t>32</a:t>
+              <a:t>33</a:t>
             </a:fld>
             <a:endParaRPr lang="en-US"/>
           </a:p>
@@ -24647,7 +24880,7 @@
 </p:sld>
 </file>
 
-<file path=ppt/slides/slide33.xml><?xml version="1.0" encoding="utf-8"?>
+<file path=ppt/slides/slide34.xml><?xml version="1.0" encoding="utf-8"?>
 <p:sld xmlns:a="http://schemas.openxmlformats.org/drawingml/2006/main" xmlns:r="http://schemas.openxmlformats.org/officeDocument/2006/relationships" xmlns:p="http://schemas.openxmlformats.org/presentationml/2006/main">
   <p:cSld>
     <p:spTree>
@@ -24717,7 +24950,7 @@
           <a:p>
             <a:fld id="{650AD656-6FF9-465D-B7B0-1CD0DD39CD23}" type="slidenum">
               <a:rPr lang="en-US" smtClean="0"/>
-              <a:t>33</a:t>
+              <a:t>34</a:t>
             </a:fld>
             <a:endParaRPr lang="en-US" dirty="0"/>
           </a:p>
@@ -24906,7 +25139,7 @@
 </p:sld>
 </file>
 
-<file path=ppt/slides/slide34.xml><?xml version="1.0" encoding="utf-8"?>
+<file path=ppt/slides/slide35.xml><?xml version="1.0" encoding="utf-8"?>
 <p:sld xmlns:a="http://schemas.openxmlformats.org/drawingml/2006/main" xmlns:r="http://schemas.openxmlformats.org/officeDocument/2006/relationships" xmlns:p="http://schemas.openxmlformats.org/presentationml/2006/main">
   <p:cSld>
     <p:spTree>
@@ -24990,7 +25223,7 @@
           <a:p>
             <a:fld id="{650AD656-6FF9-465D-B7B0-1CD0DD39CD23}" type="slidenum">
               <a:rPr lang="en-US" smtClean="0"/>
-              <a:t>34</a:t>
+              <a:t>35</a:t>
             </a:fld>
             <a:endParaRPr lang="en-US" dirty="0"/>
           </a:p>
@@ -26605,7 +26838,7 @@
 </p:sld>
 </file>
 
-<file path=ppt/slides/slide35.xml><?xml version="1.0" encoding="utf-8"?>
+<file path=ppt/slides/slide36.xml><?xml version="1.0" encoding="utf-8"?>
 <p:sld xmlns:a="http://schemas.openxmlformats.org/drawingml/2006/main" xmlns:r="http://schemas.openxmlformats.org/officeDocument/2006/relationships" xmlns:p="http://schemas.openxmlformats.org/presentationml/2006/main">
   <p:cSld>
     <p:spTree>
@@ -26702,19 +26935,7 @@
               <a:rPr lang="en-US" sz="3200" dirty="0">
                 <a:latin typeface="+mn-lt"/>
               </a:rPr>
-              <a:t>(PV = </a:t>
-            </a:r>
-            <a:r>
-              <a:rPr lang="en-US" sz="3200" dirty="0" err="1">
-                <a:latin typeface="+mn-lt"/>
-              </a:rPr>
-              <a:t>nRT</a:t>
-            </a:r>
-            <a:r>
-              <a:rPr lang="en-US" sz="3200" dirty="0">
-                <a:latin typeface="+mn-lt"/>
-              </a:rPr>
-              <a:t>)</a:t>
+              <a:t>(PV = nRT)</a:t>
             </a:r>
           </a:p>
         </p:txBody>
@@ -26736,7 +26957,7 @@
           <a:p>
             <a:fld id="{650AD656-6FF9-465D-B7B0-1CD0DD39CD23}" type="slidenum">
               <a:rPr lang="en-US" smtClean="0"/>
-              <a:t>35</a:t>
+              <a:t>36</a:t>
             </a:fld>
             <a:endParaRPr lang="en-US" dirty="0"/>
           </a:p>
@@ -26959,8 +27180,8 @@
         </p:nvSpPr>
         <p:spPr>
           <a:xfrm>
-            <a:off x="484108" y="1444223"/>
-            <a:ext cx="2021305" cy="307777"/>
+            <a:off x="411918" y="1098575"/>
+            <a:ext cx="2507745" cy="307777"/>
           </a:xfrm>
           <a:prstGeom prst="rect">
             <a:avLst/>
@@ -26980,13 +27201,14 @@
           </a:bodyPr>
           <a:lstStyle/>
           <a:p>
+            <a:pPr algn="ctr"/>
             <a:r>
               <a:rPr lang="en-US" sz="1400" dirty="0">
                 <a:solidFill>
                   <a:srgbClr val="7030A0"/>
                 </a:solidFill>
               </a:rPr>
-              <a:t>Johann Heinrich Lambert</a:t>
+              <a:t>Johann Heinrich Lambert (1779)</a:t>
             </a:r>
           </a:p>
         </p:txBody>
@@ -27035,6 +27257,102 @@
           </a:fontRef>
         </p:style>
       </p:cxnSp>
+      <p:sp>
+        <p:nvSpPr>
+          <p:cNvPr id="5" name="TextBox 4">
+            <a:extLst>
+              <a:ext uri="{FF2B5EF4-FFF2-40B4-BE49-F238E27FC236}">
+                <a16:creationId xmlns:a16="http://schemas.microsoft.com/office/drawing/2014/main" id="{F0E2D892-C8D4-47CF-E7B9-9537DF19F82E}"/>
+              </a:ext>
+            </a:extLst>
+          </p:cNvPr>
+          <p:cNvSpPr txBox="1"/>
+          <p:nvPr/>
+        </p:nvSpPr>
+        <p:spPr>
+          <a:xfrm>
+            <a:off x="6757988" y="1021631"/>
+            <a:ext cx="2131969" cy="461665"/>
+          </a:xfrm>
+          <a:prstGeom prst="rect">
+            <a:avLst/>
+          </a:prstGeom>
+          <a:noFill/>
+        </p:spPr>
+        <p:txBody>
+          <a:bodyPr wrap="square" rtlCol="0">
+            <a:spAutoFit/>
+          </a:bodyPr>
+          <a:lstStyle/>
+          <a:p>
+            <a:r>
+              <a:rPr lang="en-US" sz="1200" i="1" dirty="0">
+                <a:solidFill>
+                  <a:srgbClr val="FF0000"/>
+                </a:solidFill>
+              </a:rPr>
+              <a:t>Jacques Charles (1787)</a:t>
+            </a:r>
+          </a:p>
+          <a:p>
+            <a:r>
+              <a:rPr lang="en-US" sz="1200" i="1" dirty="0">
+                <a:solidFill>
+                  <a:srgbClr val="FF0000"/>
+                </a:solidFill>
+              </a:rPr>
+              <a:t>Joseph Louis Gay-Lussac (1802) </a:t>
+            </a:r>
+          </a:p>
+        </p:txBody>
+      </p:sp>
+      <p:sp>
+        <p:nvSpPr>
+          <p:cNvPr id="12" name="TextBox 11">
+            <a:extLst>
+              <a:ext uri="{FF2B5EF4-FFF2-40B4-BE49-F238E27FC236}">
+                <a16:creationId xmlns:a16="http://schemas.microsoft.com/office/drawing/2014/main" id="{8EE0937E-8AF1-D0CD-1CBB-817FA507D700}"/>
+              </a:ext>
+            </a:extLst>
+          </p:cNvPr>
+          <p:cNvSpPr txBox="1"/>
+          <p:nvPr/>
+        </p:nvSpPr>
+        <p:spPr>
+          <a:xfrm>
+            <a:off x="1784522" y="2293412"/>
+            <a:ext cx="1763921" cy="307777"/>
+          </a:xfrm>
+          <a:prstGeom prst="rect">
+            <a:avLst/>
+          </a:prstGeom>
+          <a:solidFill>
+            <a:schemeClr val="bg1"/>
+          </a:solidFill>
+          <a:ln w="19050">
+            <a:solidFill>
+              <a:srgbClr val="7030A0"/>
+            </a:solidFill>
+          </a:ln>
+        </p:spPr>
+        <p:txBody>
+          <a:bodyPr wrap="square" rtlCol="0">
+            <a:spAutoFit/>
+          </a:bodyPr>
+          <a:lstStyle/>
+          <a:p>
+            <a:pPr algn="ctr"/>
+            <a:r>
+              <a:rPr lang="en-US" sz="1400" dirty="0">
+                <a:solidFill>
+                  <a:srgbClr val="7030A0"/>
+                </a:solidFill>
+              </a:rPr>
+              <a:t>“Air Thermometer”</a:t>
+            </a:r>
+          </a:p>
+        </p:txBody>
+      </p:sp>
     </p:spTree>
     <p:extLst>
       <p:ext uri="{BB962C8B-B14F-4D97-AF65-F5344CB8AC3E}">
@@ -27144,30 +27462,194 @@
                             </p:childTnLst>
                           </p:cTn>
                         </p:par>
-                      </p:childTnLst>
-                    </p:cTn>
-                  </p:par>
-                  <p:par>
-                    <p:cTn id="9" fill="hold">
-                      <p:stCondLst>
-                        <p:cond delay="indefinite"/>
-                      </p:stCondLst>
-                      <p:childTnLst>
                         <p:par>
-                          <p:cTn id="10" fill="hold">
+                          <p:cTn id="9" fill="hold">
                             <p:stCondLst>
-                              <p:cond delay="0"/>
+                              <p:cond delay="500"/>
                             </p:stCondLst>
                             <p:childTnLst>
                               <p:par>
-                                <p:cTn id="11" presetID="1" presetClass="entr" presetSubtype="0" fill="hold" nodeType="clickEffect">
+                                <p:cTn id="10" presetID="2" presetClass="entr" presetSubtype="1" fill="hold" grpId="0" nodeType="afterEffect">
                                   <p:stCondLst>
                                     <p:cond delay="0"/>
                                   </p:stCondLst>
                                   <p:childTnLst>
                                     <p:set>
                                       <p:cBhvr>
-                                        <p:cTn id="12" dur="1" fill="hold">
+                                        <p:cTn id="11" dur="1" fill="hold">
+                                          <p:stCondLst>
+                                            <p:cond delay="0"/>
+                                          </p:stCondLst>
+                                        </p:cTn>
+                                        <p:tgtEl>
+                                          <p:spTgt spid="5"/>
+                                        </p:tgtEl>
+                                        <p:attrNameLst>
+                                          <p:attrName>style.visibility</p:attrName>
+                                        </p:attrNameLst>
+                                      </p:cBhvr>
+                                      <p:to>
+                                        <p:strVal val="visible"/>
+                                      </p:to>
+                                    </p:set>
+                                    <p:anim calcmode="lin" valueType="num">
+                                      <p:cBhvr additive="base">
+                                        <p:cTn id="12" dur="500" fill="hold"/>
+                                        <p:tgtEl>
+                                          <p:spTgt spid="5"/>
+                                        </p:tgtEl>
+                                        <p:attrNameLst>
+                                          <p:attrName>ppt_x</p:attrName>
+                                        </p:attrNameLst>
+                                      </p:cBhvr>
+                                      <p:tavLst>
+                                        <p:tav tm="0">
+                                          <p:val>
+                                            <p:strVal val="#ppt_x"/>
+                                          </p:val>
+                                        </p:tav>
+                                        <p:tav tm="100000">
+                                          <p:val>
+                                            <p:strVal val="#ppt_x"/>
+                                          </p:val>
+                                        </p:tav>
+                                      </p:tavLst>
+                                    </p:anim>
+                                    <p:anim calcmode="lin" valueType="num">
+                                      <p:cBhvr additive="base">
+                                        <p:cTn id="13" dur="500" fill="hold"/>
+                                        <p:tgtEl>
+                                          <p:spTgt spid="5"/>
+                                        </p:tgtEl>
+                                        <p:attrNameLst>
+                                          <p:attrName>ppt_y</p:attrName>
+                                        </p:attrNameLst>
+                                      </p:cBhvr>
+                                      <p:tavLst>
+                                        <p:tav tm="0">
+                                          <p:val>
+                                            <p:strVal val="0-#ppt_h/2"/>
+                                          </p:val>
+                                        </p:tav>
+                                        <p:tav tm="100000">
+                                          <p:val>
+                                            <p:strVal val="#ppt_y"/>
+                                          </p:val>
+                                        </p:tav>
+                                      </p:tavLst>
+                                    </p:anim>
+                                  </p:childTnLst>
+                                </p:cTn>
+                              </p:par>
+                            </p:childTnLst>
+                          </p:cTn>
+                        </p:par>
+                        <p:par>
+                          <p:cTn id="14" fill="hold">
+                            <p:stCondLst>
+                              <p:cond delay="1000"/>
+                            </p:stCondLst>
+                            <p:childTnLst>
+                              <p:par>
+                                <p:cTn id="15" presetID="2" presetClass="entr" presetSubtype="1" fill="hold" grpId="0" nodeType="afterEffect">
+                                  <p:stCondLst>
+                                    <p:cond delay="0"/>
+                                  </p:stCondLst>
+                                  <p:childTnLst>
+                                    <p:set>
+                                      <p:cBhvr>
+                                        <p:cTn id="16" dur="1" fill="hold">
+                                          <p:stCondLst>
+                                            <p:cond delay="0"/>
+                                          </p:stCondLst>
+                                        </p:cTn>
+                                        <p:tgtEl>
+                                          <p:spTgt spid="12"/>
+                                        </p:tgtEl>
+                                        <p:attrNameLst>
+                                          <p:attrName>style.visibility</p:attrName>
+                                        </p:attrNameLst>
+                                      </p:cBhvr>
+                                      <p:to>
+                                        <p:strVal val="visible"/>
+                                      </p:to>
+                                    </p:set>
+                                    <p:anim calcmode="lin" valueType="num">
+                                      <p:cBhvr additive="base">
+                                        <p:cTn id="17" dur="500" fill="hold"/>
+                                        <p:tgtEl>
+                                          <p:spTgt spid="12"/>
+                                        </p:tgtEl>
+                                        <p:attrNameLst>
+                                          <p:attrName>ppt_x</p:attrName>
+                                        </p:attrNameLst>
+                                      </p:cBhvr>
+                                      <p:tavLst>
+                                        <p:tav tm="0">
+                                          <p:val>
+                                            <p:strVal val="#ppt_x"/>
+                                          </p:val>
+                                        </p:tav>
+                                        <p:tav tm="100000">
+                                          <p:val>
+                                            <p:strVal val="#ppt_x"/>
+                                          </p:val>
+                                        </p:tav>
+                                      </p:tavLst>
+                                    </p:anim>
+                                    <p:anim calcmode="lin" valueType="num">
+                                      <p:cBhvr additive="base">
+                                        <p:cTn id="18" dur="500" fill="hold"/>
+                                        <p:tgtEl>
+                                          <p:spTgt spid="12"/>
+                                        </p:tgtEl>
+                                        <p:attrNameLst>
+                                          <p:attrName>ppt_y</p:attrName>
+                                        </p:attrNameLst>
+                                      </p:cBhvr>
+                                      <p:tavLst>
+                                        <p:tav tm="0">
+                                          <p:val>
+                                            <p:strVal val="0-#ppt_h/2"/>
+                                          </p:val>
+                                        </p:tav>
+                                        <p:tav tm="100000">
+                                          <p:val>
+                                            <p:strVal val="#ppt_y"/>
+                                          </p:val>
+                                        </p:tav>
+                                      </p:tavLst>
+                                    </p:anim>
+                                  </p:childTnLst>
+                                </p:cTn>
+                              </p:par>
+                            </p:childTnLst>
+                          </p:cTn>
+                        </p:par>
+                      </p:childTnLst>
+                    </p:cTn>
+                  </p:par>
+                  <p:par>
+                    <p:cTn id="19" fill="hold">
+                      <p:stCondLst>
+                        <p:cond delay="indefinite"/>
+                      </p:stCondLst>
+                      <p:childTnLst>
+                        <p:par>
+                          <p:cTn id="20" fill="hold">
+                            <p:stCondLst>
+                              <p:cond delay="0"/>
+                            </p:stCondLst>
+                            <p:childTnLst>
+                              <p:par>
+                                <p:cTn id="21" presetID="1" presetClass="entr" presetSubtype="0" fill="hold" nodeType="clickEffect">
+                                  <p:stCondLst>
+                                    <p:cond delay="0"/>
+                                  </p:stCondLst>
+                                  <p:childTnLst>
+                                    <p:set>
+                                      <p:cBhvr>
+                                        <p:cTn id="22" dur="1" fill="hold">
                                           <p:stCondLst>
                                             <p:cond delay="0"/>
                                           </p:stCondLst>
@@ -27193,26 +27675,26 @@
                     </p:cTn>
                   </p:par>
                   <p:par>
-                    <p:cTn id="13" fill="hold">
+                    <p:cTn id="23" fill="hold">
                       <p:stCondLst>
                         <p:cond delay="indefinite"/>
                       </p:stCondLst>
                       <p:childTnLst>
                         <p:par>
-                          <p:cTn id="14" fill="hold">
+                          <p:cTn id="24" fill="hold">
                             <p:stCondLst>
                               <p:cond delay="0"/>
                             </p:stCondLst>
                             <p:childTnLst>
                               <p:par>
-                                <p:cTn id="15" presetID="22" presetClass="entr" presetSubtype="4" fill="hold" nodeType="clickEffect">
+                                <p:cTn id="25" presetID="22" presetClass="entr" presetSubtype="4" fill="hold" nodeType="clickEffect">
                                   <p:stCondLst>
                                     <p:cond delay="0"/>
                                   </p:stCondLst>
                                   <p:childTnLst>
                                     <p:set>
                                       <p:cBhvr>
-                                        <p:cTn id="16" dur="1" fill="hold">
+                                        <p:cTn id="26" dur="1" fill="hold">
                                           <p:stCondLst>
                                             <p:cond delay="0"/>
                                           </p:stCondLst>
@@ -27230,7 +27712,7 @@
                                     </p:set>
                                     <p:animEffect transition="in" filter="wipe(down)">
                                       <p:cBhvr>
-                                        <p:cTn id="17" dur="500"/>
+                                        <p:cTn id="27" dur="500"/>
                                         <p:tgtEl>
                                           <p:spTgt spid="10"/>
                                         </p:tgtEl>
@@ -27240,14 +27722,14 @@
                                 </p:cTn>
                               </p:par>
                               <p:par>
-                                <p:cTn id="18" presetID="22" presetClass="entr" presetSubtype="4" fill="hold" nodeType="withEffect">
+                                <p:cTn id="28" presetID="22" presetClass="entr" presetSubtype="4" fill="hold" nodeType="withEffect">
                                   <p:stCondLst>
                                     <p:cond delay="0"/>
                                   </p:stCondLst>
                                   <p:childTnLst>
                                     <p:set>
                                       <p:cBhvr>
-                                        <p:cTn id="19" dur="1" fill="hold">
+                                        <p:cTn id="29" dur="1" fill="hold">
                                           <p:stCondLst>
                                             <p:cond delay="0"/>
                                           </p:stCondLst>
@@ -27265,7 +27747,7 @@
                                     </p:set>
                                     <p:animEffect transition="in" filter="wipe(down)">
                                       <p:cBhvr>
-                                        <p:cTn id="20" dur="500"/>
+                                        <p:cTn id="30" dur="500"/>
                                         <p:tgtEl>
                                           <p:spTgt spid="18"/>
                                         </p:tgtEl>
@@ -27275,14 +27757,14 @@
                                 </p:cTn>
                               </p:par>
                               <p:par>
-                                <p:cTn id="21" presetID="22" presetClass="entr" presetSubtype="4" fill="hold" nodeType="withEffect">
+                                <p:cTn id="31" presetID="22" presetClass="entr" presetSubtype="4" fill="hold" nodeType="withEffect">
                                   <p:stCondLst>
                                     <p:cond delay="0"/>
                                   </p:stCondLst>
                                   <p:childTnLst>
                                     <p:set>
                                       <p:cBhvr>
-                                        <p:cTn id="22" dur="1" fill="hold">
+                                        <p:cTn id="32" dur="1" fill="hold">
                                           <p:stCondLst>
                                             <p:cond delay="0"/>
                                           </p:stCondLst>
@@ -27300,7 +27782,7 @@
                                     </p:set>
                                     <p:animEffect transition="in" filter="wipe(down)">
                                       <p:cBhvr>
-                                        <p:cTn id="23" dur="500"/>
+                                        <p:cTn id="33" dur="500"/>
                                         <p:tgtEl>
                                           <p:spTgt spid="24"/>
                                         </p:tgtEl>
@@ -27316,26 +27798,26 @@
                     </p:cTn>
                   </p:par>
                   <p:par>
-                    <p:cTn id="24" fill="hold">
+                    <p:cTn id="34" fill="hold">
                       <p:stCondLst>
                         <p:cond delay="indefinite"/>
                       </p:stCondLst>
                       <p:childTnLst>
                         <p:par>
-                          <p:cTn id="25" fill="hold">
+                          <p:cTn id="35" fill="hold">
                             <p:stCondLst>
                               <p:cond delay="0"/>
                             </p:stCondLst>
                             <p:childTnLst>
                               <p:par>
-                                <p:cTn id="26" presetID="22" presetClass="entr" presetSubtype="2" fill="hold" nodeType="clickEffect">
+                                <p:cTn id="36" presetID="22" presetClass="entr" presetSubtype="2" fill="hold" nodeType="clickEffect">
                                   <p:stCondLst>
                                     <p:cond delay="0"/>
                                   </p:stCondLst>
                                   <p:childTnLst>
                                     <p:set>
                                       <p:cBhvr>
-                                        <p:cTn id="27" dur="1" fill="hold">
+                                        <p:cTn id="37" dur="1" fill="hold">
                                           <p:stCondLst>
                                             <p:cond delay="0"/>
                                           </p:stCondLst>
@@ -27353,7 +27835,7 @@
                                     </p:set>
                                     <p:animEffect transition="in" filter="wipe(right)">
                                       <p:cBhvr>
-                                        <p:cTn id="28" dur="500"/>
+                                        <p:cTn id="38" dur="500"/>
                                         <p:tgtEl>
                                           <p:spTgt spid="9"/>
                                         </p:tgtEl>
@@ -27369,26 +27851,26 @@
                     </p:cTn>
                   </p:par>
                   <p:par>
-                    <p:cTn id="29" fill="hold">
+                    <p:cTn id="39" fill="hold">
                       <p:stCondLst>
                         <p:cond delay="indefinite"/>
                       </p:stCondLst>
                       <p:childTnLst>
                         <p:par>
-                          <p:cTn id="30" fill="hold">
+                          <p:cTn id="40" fill="hold">
                             <p:stCondLst>
                               <p:cond delay="0"/>
                             </p:stCondLst>
                             <p:childTnLst>
                               <p:par>
-                                <p:cTn id="31" presetID="2" presetClass="entr" presetSubtype="2" fill="hold" nodeType="clickEffect">
+                                <p:cTn id="41" presetID="2" presetClass="entr" presetSubtype="2" fill="hold" nodeType="clickEffect">
                                   <p:stCondLst>
                                     <p:cond delay="0"/>
                                   </p:stCondLst>
                                   <p:childTnLst>
                                     <p:set>
                                       <p:cBhvr>
-                                        <p:cTn id="32" dur="1" fill="hold">
+                                        <p:cTn id="42" dur="1" fill="hold">
                                           <p:stCondLst>
                                             <p:cond delay="0"/>
                                           </p:stCondLst>
@@ -27406,7 +27888,7 @@
                                     </p:set>
                                     <p:anim calcmode="lin" valueType="num">
                                       <p:cBhvr additive="base">
-                                        <p:cTn id="33" dur="500" fill="hold"/>
+                                        <p:cTn id="43" dur="500" fill="hold"/>
                                         <p:tgtEl>
                                           <p:spTgt spid="8"/>
                                         </p:tgtEl>
@@ -27429,7 +27911,7 @@
                                     </p:anim>
                                     <p:anim calcmode="lin" valueType="num">
                                       <p:cBhvr additive="base">
-                                        <p:cTn id="34" dur="500" fill="hold"/>
+                                        <p:cTn id="44" dur="500" fill="hold"/>
                                         <p:tgtEl>
                                           <p:spTgt spid="8"/>
                                         </p:tgtEl>
@@ -27457,20 +27939,20 @@
                           </p:cTn>
                         </p:par>
                         <p:par>
-                          <p:cTn id="35" fill="hold">
+                          <p:cTn id="45" fill="hold">
                             <p:stCondLst>
                               <p:cond delay="500"/>
                             </p:stCondLst>
                             <p:childTnLst>
                               <p:par>
-                                <p:cTn id="36" presetID="22" presetClass="entr" presetSubtype="2" fill="hold" nodeType="afterEffect">
+                                <p:cTn id="46" presetID="22" presetClass="entr" presetSubtype="2" fill="hold" nodeType="afterEffect">
                                   <p:stCondLst>
                                     <p:cond delay="0"/>
                                   </p:stCondLst>
                                   <p:childTnLst>
                                     <p:set>
                                       <p:cBhvr>
-                                        <p:cTn id="37" dur="1" fill="hold">
+                                        <p:cTn id="47" dur="1" fill="hold">
                                           <p:stCondLst>
                                             <p:cond delay="0"/>
                                           </p:stCondLst>
@@ -27488,7 +27970,7 @@
                                     </p:set>
                                     <p:animEffect transition="in" filter="wipe(right)">
                                       <p:cBhvr>
-                                        <p:cTn id="38" dur="500"/>
+                                        <p:cTn id="48" dur="500"/>
                                         <p:tgtEl>
                                           <p:spTgt spid="11"/>
                                         </p:tgtEl>
@@ -27526,12 +28008,14 @@
     </p:tnLst>
     <p:bldLst>
       <p:bldP spid="3" grpId="0" animBg="1"/>
+      <p:bldP spid="5" grpId="0"/>
+      <p:bldP spid="12" grpId="0" animBg="1"/>
     </p:bldLst>
   </p:timing>
 </p:sld>
 </file>
 
-<file path=ppt/slides/slide36.xml><?xml version="1.0" encoding="utf-8"?>
+<file path=ppt/slides/slide37.xml><?xml version="1.0" encoding="utf-8"?>
 <p:sld xmlns:a="http://schemas.openxmlformats.org/drawingml/2006/main" xmlns:r="http://schemas.openxmlformats.org/officeDocument/2006/relationships" xmlns:p="http://schemas.openxmlformats.org/presentationml/2006/main">
   <p:cSld>
     <p:spTree>
@@ -27771,7 +28255,7 @@
           <a:p>
             <a:fld id="{650AD656-6FF9-465D-B7B0-1CD0DD39CD23}" type="slidenum">
               <a:rPr lang="en-US" smtClean="0"/>
-              <a:t>36</a:t>
+              <a:t>37</a:t>
             </a:fld>
             <a:endParaRPr lang="en-US" dirty="0"/>
           </a:p>
@@ -28016,7 +28500,7 @@
 </p:sld>
 </file>
 
-<file path=ppt/slides/slide37.xml><?xml version="1.0" encoding="utf-8"?>
+<file path=ppt/slides/slide38.xml><?xml version="1.0" encoding="utf-8"?>
 <p:sld xmlns:a="http://schemas.openxmlformats.org/drawingml/2006/main" xmlns:r="http://schemas.openxmlformats.org/officeDocument/2006/relationships" xmlns:p="http://schemas.openxmlformats.org/presentationml/2006/main">
   <p:cSld>
     <p:spTree>
@@ -28152,7 +28636,7 @@
             <a:fld id="{650AD656-6FF9-465D-B7B0-1CD0DD39CD23}" type="slidenum">
               <a:rPr lang="en-US" smtClean="0"/>
               <a:pPr/>
-              <a:t>37</a:t>
+              <a:t>38</a:t>
             </a:fld>
             <a:endParaRPr lang="en-US"/>
           </a:p>
